--- a/AdminInterface/UserGuide.pptx
+++ b/AdminInterface/UserGuide.pptx
@@ -634,6 +634,90 @@
 </file>
 
 <file path=ppt/notesSlides/notesSlide1.xml><?xml version="1.0" encoding="utf-8"?>
+<p:notes xmlns:a="http://schemas.openxmlformats.org/drawingml/2006/main" xmlns:r="http://schemas.openxmlformats.org/officeDocument/2006/relationships" xmlns:p="http://schemas.openxmlformats.org/presentationml/2006/main">
+  <p:cSld>
+    <p:spTree>
+      <p:nvGrpSpPr>
+        <p:cNvPr id="1" name=""/>
+        <p:cNvGrpSpPr/>
+        <p:nvPr/>
+      </p:nvGrpSpPr>
+      <p:grpSpPr>
+        <a:xfrm>
+          <a:off x="0" y="0"/>
+          <a:ext cx="0" cy="0"/>
+          <a:chOff x="0" y="0"/>
+          <a:chExt cx="0" cy="0"/>
+        </a:xfrm>
+      </p:grpSpPr>
+      <p:sp>
+        <p:nvSpPr>
+          <p:cNvPr id="2" name="Slide Image Placeholder 1"/>
+          <p:cNvSpPr>
+            <a:spLocks noGrp="1" noRot="1" noChangeAspect="1"/>
+          </p:cNvSpPr>
+          <p:nvPr>
+            <p:ph type="sldImg"/>
+          </p:nvPr>
+        </p:nvSpPr>
+        <p:spPr/>
+      </p:sp>
+      <p:sp>
+        <p:nvSpPr>
+          <p:cNvPr id="3" name="Notes Placeholder 2"/>
+          <p:cNvSpPr>
+            <a:spLocks noGrp="1"/>
+          </p:cNvSpPr>
+          <p:nvPr>
+            <p:ph type="body" idx="1"/>
+          </p:nvPr>
+        </p:nvSpPr>
+        <p:spPr/>
+        <p:txBody>
+          <a:bodyPr/>
+          <a:lstStyle/>
+          <a:p>
+            <a:endParaRPr lang="en-US" dirty="0"/>
+          </a:p>
+        </p:txBody>
+      </p:sp>
+      <p:sp>
+        <p:nvSpPr>
+          <p:cNvPr id="4" name="Slide Number Placeholder 3"/>
+          <p:cNvSpPr>
+            <a:spLocks noGrp="1"/>
+          </p:cNvSpPr>
+          <p:nvPr>
+            <p:ph type="sldNum" sz="quarter" idx="5"/>
+          </p:nvPr>
+        </p:nvSpPr>
+        <p:spPr/>
+        <p:txBody>
+          <a:bodyPr/>
+          <a:lstStyle/>
+          <a:p>
+            <a:fld id="{F91CF8D7-B076-43C3-BFB0-F1A9323A501F}" type="slidenum">
+              <a:rPr lang="en-US" smtClean="0"/>
+              <a:t>7</a:t>
+            </a:fld>
+            <a:endParaRPr lang="en-US"/>
+          </a:p>
+        </p:txBody>
+      </p:sp>
+    </p:spTree>
+    <p:extLst>
+      <p:ext uri="{BB962C8B-B14F-4D97-AF65-F5344CB8AC3E}">
+        <p14:creationId xmlns:p14="http://schemas.microsoft.com/office/powerpoint/2010/main" val="3767727823"/>
+      </p:ext>
+    </p:extLst>
+  </p:cSld>
+  <p:clrMapOvr>
+    <a:masterClrMapping/>
+  </p:clrMapOvr>
+</p:notes>
+</file>
+
+<file path=ppt/notesSlides/notesSlide2.xml><?xml version="1.0" encoding="utf-8"?>
 <p:notes xmlns:a="http://schemas.openxmlformats.org/drawingml/2006/main" xmlns:r="http://schemas.openxmlformats.org/officeDocument/2006/relationships" xmlns:p="http://schemas.openxmlformats.org/presentationml/2006/main">
   <p:cSld>
     <p:spTree>
@@ -6985,10 +7069,10 @@
       </p:grpSpPr>
       <p:pic>
         <p:nvPicPr>
-          <p:cNvPr id="9" name="Picture 8">
-            <a:extLst>
-              <a:ext uri="{FF2B5EF4-FFF2-40B4-BE49-F238E27FC236}">
-                <a16:creationId xmlns:a16="http://schemas.microsoft.com/office/drawing/2014/main" id="{F1782F16-F5F5-7B14-C132-7ECBCED1E2BE}"/>
+          <p:cNvPr id="11" name="Picture 10">
+            <a:extLst>
+              <a:ext uri="{FF2B5EF4-FFF2-40B4-BE49-F238E27FC236}">
+                <a16:creationId xmlns:a16="http://schemas.microsoft.com/office/drawing/2014/main" id="{B09800A6-6BA8-1E2C-E1DD-699C923D2DF4}"/>
               </a:ext>
             </a:extLst>
           </p:cNvPr>
@@ -6999,15 +7083,14 @@
         </p:nvPicPr>
         <p:blipFill>
           <a:blip r:embed="rId2"/>
-          <a:srcRect r="170"/>
           <a:stretch>
             <a:fillRect/>
           </a:stretch>
         </p:blipFill>
         <p:spPr>
           <a:xfrm>
-            <a:off x="308257" y="896378"/>
-            <a:ext cx="11426544" cy="5687180"/>
+            <a:off x="293204" y="896377"/>
+            <a:ext cx="11546862" cy="5731113"/>
           </a:xfrm>
           <a:prstGeom prst="rect">
             <a:avLst/>
@@ -7505,7 +7588,7 @@
         </p:nvSpPr>
         <p:spPr>
           <a:xfrm>
-            <a:off x="3826145" y="1307470"/>
+            <a:off x="3851062" y="1330060"/>
             <a:ext cx="1258829" cy="246221"/>
           </a:xfrm>
           <a:prstGeom prst="rect">
@@ -7529,6 +7612,61 @@
                 </a:solidFill>
               </a:rPr>
               <a:t>Locked vs released</a:t>
+            </a:r>
+          </a:p>
+        </p:txBody>
+      </p:sp>
+      <p:sp>
+        <p:nvSpPr>
+          <p:cNvPr id="12" name="TextBox 11">
+            <a:extLst>
+              <a:ext uri="{FF2B5EF4-FFF2-40B4-BE49-F238E27FC236}">
+                <a16:creationId xmlns:a16="http://schemas.microsoft.com/office/drawing/2014/main" id="{72D9A32D-2C6F-F504-272C-A9E0F5E489B7}"/>
+              </a:ext>
+            </a:extLst>
+          </p:cNvPr>
+          <p:cNvSpPr txBox="1"/>
+          <p:nvPr/>
+        </p:nvSpPr>
+        <p:spPr>
+          <a:xfrm>
+            <a:off x="11736073" y="1343024"/>
+            <a:ext cx="553998" cy="5179046"/>
+          </a:xfrm>
+          <a:prstGeom prst="rect">
+            <a:avLst/>
+          </a:prstGeom>
+          <a:noFill/>
+        </p:spPr>
+        <p:txBody>
+          <a:bodyPr vert="eaVert" wrap="none" rtlCol="0">
+            <a:spAutoFit/>
+          </a:bodyPr>
+          <a:lstStyle/>
+          <a:p>
+            <a:r>
+              <a:rPr lang="en-US" sz="1200" dirty="0">
+                <a:solidFill>
+                  <a:schemeClr val="accent5">
+                    <a:lumMod val="60000"/>
+                    <a:lumOff val="40000"/>
+                  </a:schemeClr>
+                </a:solidFill>
+              </a:rPr>
+              <a:t>When there are more results than fit on the screen,</a:t>
+            </a:r>
+          </a:p>
+          <a:p>
+            <a:r>
+              <a:rPr lang="en-US" sz="1200" dirty="0">
+                <a:solidFill>
+                  <a:schemeClr val="accent5">
+                    <a:lumMod val="60000"/>
+                    <a:lumOff val="40000"/>
+                  </a:schemeClr>
+                </a:solidFill>
+              </a:rPr>
+              <a:t>use the outer one to navigate the page and the inner one to navigate the table</a:t>
             </a:r>
           </a:p>
         </p:txBody>
@@ -7571,10 +7709,10 @@
       </p:grpSpPr>
       <p:pic>
         <p:nvPicPr>
-          <p:cNvPr id="4" name="Picture 3">
-            <a:extLst>
-              <a:ext uri="{FF2B5EF4-FFF2-40B4-BE49-F238E27FC236}">
-                <a16:creationId xmlns:a16="http://schemas.microsoft.com/office/drawing/2014/main" id="{20727CC1-9167-6CD7-9D0A-49E428767A36}"/>
+          <p:cNvPr id="5" name="Picture 4">
+            <a:extLst>
+              <a:ext uri="{FF2B5EF4-FFF2-40B4-BE49-F238E27FC236}">
+                <a16:creationId xmlns:a16="http://schemas.microsoft.com/office/drawing/2014/main" id="{97DFF277-3D7C-8B60-B6AC-9A6246A62CB6}"/>
               </a:ext>
             </a:extLst>
           </p:cNvPr>
@@ -7592,7 +7730,7 @@
         <p:spPr>
           <a:xfrm>
             <a:off x="301657" y="932859"/>
-            <a:ext cx="11585543" cy="5845014"/>
+            <a:ext cx="11585543" cy="5795807"/>
           </a:xfrm>
           <a:prstGeom prst="rect">
             <a:avLst/>
@@ -7835,10 +7973,10 @@
       </p:grpSpPr>
       <p:pic>
         <p:nvPicPr>
-          <p:cNvPr id="5" name="Picture 4">
-            <a:extLst>
-              <a:ext uri="{FF2B5EF4-FFF2-40B4-BE49-F238E27FC236}">
-                <a16:creationId xmlns:a16="http://schemas.microsoft.com/office/drawing/2014/main" id="{FC481DE7-9980-B5F1-0956-05D16251491E}"/>
+          <p:cNvPr id="6" name="Picture 5">
+            <a:extLst>
+              <a:ext uri="{FF2B5EF4-FFF2-40B4-BE49-F238E27FC236}">
+                <a16:creationId xmlns:a16="http://schemas.microsoft.com/office/drawing/2014/main" id="{43D24C7C-13B5-1A56-121B-9EDEDD100422}"/>
               </a:ext>
             </a:extLst>
           </p:cNvPr>
@@ -7855,8 +7993,8 @@
         </p:blipFill>
         <p:spPr>
           <a:xfrm>
-            <a:off x="292231" y="921581"/>
-            <a:ext cx="11729583" cy="5711263"/>
+            <a:off x="278342" y="907749"/>
+            <a:ext cx="11486310" cy="5725095"/>
           </a:xfrm>
           <a:prstGeom prst="rect">
             <a:avLst/>
@@ -7907,7 +8045,7 @@
         </p:nvSpPr>
         <p:spPr>
           <a:xfrm>
-            <a:off x="1729361" y="2905779"/>
+            <a:off x="1729361" y="2845355"/>
             <a:ext cx="1904682" cy="246221"/>
           </a:xfrm>
           <a:prstGeom prst="rect">
@@ -7949,7 +8087,7 @@
         </p:nvSpPr>
         <p:spPr>
           <a:xfrm>
-            <a:off x="3634043" y="2968466"/>
+            <a:off x="3634043" y="2968465"/>
             <a:ext cx="762442" cy="400110"/>
           </a:xfrm>
           <a:prstGeom prst="rect">
@@ -7991,7 +8129,7 @@
         </p:nvSpPr>
         <p:spPr>
           <a:xfrm>
-            <a:off x="9452168" y="2845355"/>
+            <a:off x="9452168" y="2845354"/>
             <a:ext cx="1470274" cy="246221"/>
           </a:xfrm>
           <a:prstGeom prst="rect">
@@ -8097,6 +8235,36 @@
           <a:chExt cx="0" cy="0"/>
         </a:xfrm>
       </p:grpSpPr>
+      <p:pic>
+        <p:nvPicPr>
+          <p:cNvPr id="8" name="Picture 7">
+            <a:extLst>
+              <a:ext uri="{FF2B5EF4-FFF2-40B4-BE49-F238E27FC236}">
+                <a16:creationId xmlns:a16="http://schemas.microsoft.com/office/drawing/2014/main" id="{C462799C-5083-1D2B-1656-A30074633406}"/>
+              </a:ext>
+            </a:extLst>
+          </p:cNvPr>
+          <p:cNvPicPr>
+            <a:picLocks noChangeAspect="1"/>
+          </p:cNvPicPr>
+          <p:nvPr/>
+        </p:nvPicPr>
+        <p:blipFill>
+          <a:blip r:embed="rId3"/>
+          <a:stretch>
+            <a:fillRect/>
+          </a:stretch>
+        </p:blipFill>
+        <p:spPr>
+          <a:xfrm>
+            <a:off x="295274" y="902009"/>
+            <a:ext cx="11591925" cy="5777718"/>
+          </a:xfrm>
+          <a:prstGeom prst="rect">
+            <a:avLst/>
+          </a:prstGeom>
+        </p:spPr>
+      </p:pic>
       <p:sp>
         <p:nvSpPr>
           <p:cNvPr id="2" name="Title 1">
@@ -8122,7 +8290,133 @@
           <a:p>
             <a:r>
               <a:rPr lang="en-US" dirty="0"/>
-              <a:t>Historical: the ‘more’ button</a:t>
+              <a:t>Historical: the ‘expand’ button</a:t>
+            </a:r>
+          </a:p>
+        </p:txBody>
+      </p:sp>
+      <p:sp>
+        <p:nvSpPr>
+          <p:cNvPr id="5" name="TextBox 4">
+            <a:extLst>
+              <a:ext uri="{FF2B5EF4-FFF2-40B4-BE49-F238E27FC236}">
+                <a16:creationId xmlns:a16="http://schemas.microsoft.com/office/drawing/2014/main" id="{4A281846-F328-178E-9A2C-71311D73239A}"/>
+              </a:ext>
+            </a:extLst>
+          </p:cNvPr>
+          <p:cNvSpPr txBox="1"/>
+          <p:nvPr/>
+        </p:nvSpPr>
+        <p:spPr>
+          <a:xfrm>
+            <a:off x="4152900" y="905060"/>
+            <a:ext cx="3886200" cy="400110"/>
+          </a:xfrm>
+          <a:prstGeom prst="rect">
+            <a:avLst/>
+          </a:prstGeom>
+          <a:noFill/>
+        </p:spPr>
+        <p:txBody>
+          <a:bodyPr wrap="square" rtlCol="0">
+            <a:spAutoFit/>
+          </a:bodyPr>
+          <a:lstStyle/>
+          <a:p>
+            <a:r>
+              <a:rPr lang="en-US" sz="1000" dirty="0">
+                <a:solidFill>
+                  <a:schemeClr val="accent5">
+                    <a:lumMod val="60000"/>
+                    <a:lumOff val="40000"/>
+                  </a:schemeClr>
+                </a:solidFill>
+              </a:rPr>
+              <a:t>Clicking the three lines next to an entry will highlight the row in blue and open a split screen of all attempted resets for that lockout.</a:t>
+            </a:r>
+          </a:p>
+        </p:txBody>
+      </p:sp>
+      <p:sp>
+        <p:nvSpPr>
+          <p:cNvPr id="6" name="TextBox 5">
+            <a:extLst>
+              <a:ext uri="{FF2B5EF4-FFF2-40B4-BE49-F238E27FC236}">
+                <a16:creationId xmlns:a16="http://schemas.microsoft.com/office/drawing/2014/main" id="{E1D613EC-5703-4E8E-A21C-ADCC9671805D}"/>
+              </a:ext>
+            </a:extLst>
+          </p:cNvPr>
+          <p:cNvSpPr txBox="1"/>
+          <p:nvPr/>
+        </p:nvSpPr>
+        <p:spPr>
+          <a:xfrm>
+            <a:off x="8150368" y="3028890"/>
+            <a:ext cx="3659854" cy="400110"/>
+          </a:xfrm>
+          <a:prstGeom prst="rect">
+            <a:avLst/>
+          </a:prstGeom>
+          <a:noFill/>
+        </p:spPr>
+        <p:txBody>
+          <a:bodyPr wrap="square" rtlCol="0">
+            <a:spAutoFit/>
+          </a:bodyPr>
+          <a:lstStyle/>
+          <a:p>
+            <a:r>
+              <a:rPr lang="en-US" sz="1000" dirty="0">
+                <a:solidFill>
+                  <a:schemeClr val="accent5">
+                    <a:lumMod val="60000"/>
+                    <a:lumOff val="40000"/>
+                  </a:schemeClr>
+                </a:solidFill>
+              </a:rPr>
+              <a:t>If the lockout has a paired reset, it’s highlighted in green and at the top (default sort is by auth state)</a:t>
+            </a:r>
+          </a:p>
+        </p:txBody>
+      </p:sp>
+      <p:sp>
+        <p:nvSpPr>
+          <p:cNvPr id="11" name="TextBox 10">
+            <a:extLst>
+              <a:ext uri="{FF2B5EF4-FFF2-40B4-BE49-F238E27FC236}">
+                <a16:creationId xmlns:a16="http://schemas.microsoft.com/office/drawing/2014/main" id="{88518FBE-206F-5E50-C6FF-0E23CCC9773E}"/>
+              </a:ext>
+            </a:extLst>
+          </p:cNvPr>
+          <p:cNvSpPr txBox="1"/>
+          <p:nvPr/>
+        </p:nvSpPr>
+        <p:spPr>
+          <a:xfrm>
+            <a:off x="9248140" y="3429000"/>
+            <a:ext cx="2562082" cy="400110"/>
+          </a:xfrm>
+          <a:prstGeom prst="rect">
+            <a:avLst/>
+          </a:prstGeom>
+          <a:noFill/>
+        </p:spPr>
+        <p:txBody>
+          <a:bodyPr wrap="square" rtlCol="0">
+            <a:spAutoFit/>
+          </a:bodyPr>
+          <a:lstStyle/>
+          <a:p>
+            <a:r>
+              <a:rPr lang="en-US" sz="1000" dirty="0">
+                <a:solidFill>
+                  <a:schemeClr val="accent5">
+                    <a:lumMod val="60000"/>
+                    <a:lumOff val="40000"/>
+                  </a:schemeClr>
+                </a:solidFill>
+              </a:rPr>
+              <a:t>Can filter denied requests by insufficient auth level or no privileges on target line</a:t>
             </a:r>
           </a:p>
         </p:txBody>

--- a/AdminInterface/UserGuide.pptx
+++ b/AdminInterface/UserGuide.pptx
@@ -366,7 +366,7 @@
           <a:p>
             <a:fld id="{FA90DC49-5E56-4663-BD73-6254BEC8D958}" type="datetimeFigureOut">
               <a:rPr lang="en-US" smtClean="0"/>
-              <a:t>3/24/2026</a:t>
+              <a:t>3/25/2026</a:t>
             </a:fld>
             <a:endParaRPr lang="en-US"/>
           </a:p>
@@ -948,7 +948,7 @@
           <a:p>
             <a:fld id="{059A6F5A-3024-43F4-A20E-288FCAB0A2E6}" type="datetimeFigureOut">
               <a:rPr lang="en-US" smtClean="0"/>
-              <a:t>3/24/2026</a:t>
+              <a:t>3/25/2026</a:t>
             </a:fld>
             <a:endParaRPr lang="en-US"/>
           </a:p>
@@ -1146,7 +1146,7 @@
           <a:p>
             <a:fld id="{059A6F5A-3024-43F4-A20E-288FCAB0A2E6}" type="datetimeFigureOut">
               <a:rPr lang="en-US" smtClean="0"/>
-              <a:t>3/24/2026</a:t>
+              <a:t>3/25/2026</a:t>
             </a:fld>
             <a:endParaRPr lang="en-US"/>
           </a:p>
@@ -1421,7 +1421,7 @@
           <a:p>
             <a:fld id="{059A6F5A-3024-43F4-A20E-288FCAB0A2E6}" type="datetimeFigureOut">
               <a:rPr lang="en-US" smtClean="0"/>
-              <a:t>3/24/2026</a:t>
+              <a:t>3/25/2026</a:t>
             </a:fld>
             <a:endParaRPr lang="en-US"/>
           </a:p>
@@ -1692,7 +1692,7 @@
           <a:p>
             <a:fld id="{059A6F5A-3024-43F4-A20E-288FCAB0A2E6}" type="datetimeFigureOut">
               <a:rPr lang="en-US" smtClean="0"/>
-              <a:t>3/24/2026</a:t>
+              <a:t>3/25/2026</a:t>
             </a:fld>
             <a:endParaRPr lang="en-US"/>
           </a:p>
@@ -2105,7 +2105,7 @@
           <a:p>
             <a:fld id="{059A6F5A-3024-43F4-A20E-288FCAB0A2E6}" type="datetimeFigureOut">
               <a:rPr lang="en-US" smtClean="0"/>
-              <a:t>3/24/2026</a:t>
+              <a:t>3/25/2026</a:t>
             </a:fld>
             <a:endParaRPr lang="en-US"/>
           </a:p>
@@ -2246,7 +2246,7 @@
           <a:p>
             <a:fld id="{059A6F5A-3024-43F4-A20E-288FCAB0A2E6}" type="datetimeFigureOut">
               <a:rPr lang="en-US" smtClean="0"/>
-              <a:t>3/24/2026</a:t>
+              <a:t>3/25/2026</a:t>
             </a:fld>
             <a:endParaRPr lang="en-US"/>
           </a:p>
@@ -2911,7 +2911,7 @@
           <a:p>
             <a:fld id="{059A6F5A-3024-43F4-A20E-288FCAB0A2E6}" type="datetimeFigureOut">
               <a:rPr lang="en-US" smtClean="0"/>
-              <a:t>3/24/2026</a:t>
+              <a:t>3/25/2026</a:t>
             </a:fld>
             <a:endParaRPr lang="en-US"/>
           </a:p>
@@ -3152,7 +3152,7 @@
           <a:p>
             <a:fld id="{059A6F5A-3024-43F4-A20E-288FCAB0A2E6}" type="datetimeFigureOut">
               <a:rPr lang="en-US" smtClean="0"/>
-              <a:t>3/24/2026</a:t>
+              <a:t>3/25/2026</a:t>
             </a:fld>
             <a:endParaRPr lang="en-US"/>
           </a:p>
@@ -8195,6 +8195,48 @@
                 </a:solidFill>
               </a:rPr>
               <a:t>Click any column header to cycle through sort directions for that attribute. You can only sort by one column at once, and the default sort is by most recent lockout time.</a:t>
+            </a:r>
+          </a:p>
+        </p:txBody>
+      </p:sp>
+      <p:sp>
+        <p:nvSpPr>
+          <p:cNvPr id="4" name="TextBox 3">
+            <a:extLst>
+              <a:ext uri="{FF2B5EF4-FFF2-40B4-BE49-F238E27FC236}">
+                <a16:creationId xmlns:a16="http://schemas.microsoft.com/office/drawing/2014/main" id="{F33FD550-8542-DEDD-FCED-49A50F2F22E6}"/>
+              </a:ext>
+            </a:extLst>
+          </p:cNvPr>
+          <p:cNvSpPr txBox="1"/>
+          <p:nvPr/>
+        </p:nvSpPr>
+        <p:spPr>
+          <a:xfrm>
+            <a:off x="4015264" y="905060"/>
+            <a:ext cx="5316983" cy="400110"/>
+          </a:xfrm>
+          <a:prstGeom prst="rect">
+            <a:avLst/>
+          </a:prstGeom>
+          <a:noFill/>
+        </p:spPr>
+        <p:txBody>
+          <a:bodyPr wrap="square" rtlCol="0">
+            <a:spAutoFit/>
+          </a:bodyPr>
+          <a:lstStyle/>
+          <a:p>
+            <a:r>
+              <a:rPr lang="en-US" sz="1000" dirty="0">
+                <a:solidFill>
+                  <a:schemeClr val="accent5">
+                    <a:lumMod val="60000"/>
+                    <a:lumOff val="40000"/>
+                  </a:schemeClr>
+                </a:solidFill>
+              </a:rPr>
+              <a:t>Sorting assumes you only want to see entries where that value exists. For example, sorting by reset time here would hide all entries except the ones reset by ‘b’ and ‘eh’, then apply the sort</a:t>
             </a:r>
           </a:p>
         </p:txBody>

--- a/AdminInterface/UserGuide.pptx
+++ b/AdminInterface/UserGuide.pptx
@@ -7069,10 +7069,10 @@
       </p:grpSpPr>
       <p:pic>
         <p:nvPicPr>
-          <p:cNvPr id="11" name="Picture 10">
-            <a:extLst>
-              <a:ext uri="{FF2B5EF4-FFF2-40B4-BE49-F238E27FC236}">
-                <a16:creationId xmlns:a16="http://schemas.microsoft.com/office/drawing/2014/main" id="{B09800A6-6BA8-1E2C-E1DD-699C923D2DF4}"/>
+          <p:cNvPr id="4" name="Picture 3">
+            <a:extLst>
+              <a:ext uri="{FF2B5EF4-FFF2-40B4-BE49-F238E27FC236}">
+                <a16:creationId xmlns:a16="http://schemas.microsoft.com/office/drawing/2014/main" id="{E2737D05-7133-2C5D-6738-52E3A415A52B}"/>
               </a:ext>
             </a:extLst>
           </p:cNvPr>
@@ -7089,8 +7089,8 @@
         </p:blipFill>
         <p:spPr>
           <a:xfrm>
-            <a:off x="293204" y="896377"/>
-            <a:ext cx="11546862" cy="5731113"/>
+            <a:off x="293204" y="896378"/>
+            <a:ext cx="11546862" cy="5788568"/>
           </a:xfrm>
           <a:prstGeom prst="rect">
             <a:avLst/>
@@ -7287,7 +7287,7 @@
         </p:nvSpPr>
         <p:spPr>
           <a:xfrm>
-            <a:off x="7337718" y="985112"/>
+            <a:off x="6815901" y="1263945"/>
             <a:ext cx="3902044" cy="246221"/>
           </a:xfrm>
           <a:prstGeom prst="rect">
@@ -7351,7 +7351,7 @@
         </p:nvSpPr>
         <p:spPr>
           <a:xfrm>
-            <a:off x="7598879" y="2401699"/>
+            <a:off x="7671844" y="2737749"/>
             <a:ext cx="2821733" cy="400110"/>
           </a:xfrm>
           <a:prstGeom prst="rect">
@@ -7415,7 +7415,7 @@
         </p:nvSpPr>
         <p:spPr>
           <a:xfrm>
-            <a:off x="1912022" y="1224709"/>
+            <a:off x="2046977" y="1542999"/>
             <a:ext cx="1800421" cy="246221"/>
           </a:xfrm>
           <a:prstGeom prst="rect">
@@ -7457,7 +7457,7 @@
         </p:nvSpPr>
         <p:spPr>
           <a:xfrm rot="5400000">
-            <a:off x="8966296" y="-991327"/>
+            <a:off x="8981348" y="-655277"/>
             <a:ext cx="246222" cy="4577116"/>
           </a:xfrm>
           <a:prstGeom prst="leftBrace">
@@ -7504,7 +7504,7 @@
         </p:nvSpPr>
         <p:spPr>
           <a:xfrm>
-            <a:off x="2637808" y="2401699"/>
+            <a:off x="3442142" y="2758024"/>
             <a:ext cx="3910628" cy="400110"/>
           </a:xfrm>
           <a:prstGeom prst="rect">
@@ -7546,7 +7546,7 @@
         </p:nvSpPr>
         <p:spPr>
           <a:xfrm>
-            <a:off x="5109891" y="1219914"/>
+            <a:off x="5124943" y="1555964"/>
             <a:ext cx="1591869" cy="246221"/>
           </a:xfrm>
           <a:prstGeom prst="rect">
@@ -7588,7 +7588,7 @@
         </p:nvSpPr>
         <p:spPr>
           <a:xfrm>
-            <a:off x="3851062" y="1330060"/>
+            <a:off x="3866114" y="1666110"/>
             <a:ext cx="1258829" cy="246221"/>
           </a:xfrm>
           <a:prstGeom prst="rect">
@@ -7671,6 +7671,90 @@
           </a:p>
         </p:txBody>
       </p:sp>
+      <p:sp>
+        <p:nvSpPr>
+          <p:cNvPr id="5" name="TextBox 4">
+            <a:extLst>
+              <a:ext uri="{FF2B5EF4-FFF2-40B4-BE49-F238E27FC236}">
+                <a16:creationId xmlns:a16="http://schemas.microsoft.com/office/drawing/2014/main" id="{A2D898AF-51DE-2DB6-B8CC-44027DA797CB}"/>
+              </a:ext>
+            </a:extLst>
+          </p:cNvPr>
+          <p:cNvSpPr txBox="1"/>
+          <p:nvPr/>
+        </p:nvSpPr>
+        <p:spPr>
+          <a:xfrm>
+            <a:off x="9258835" y="896377"/>
+            <a:ext cx="2308325" cy="246221"/>
+          </a:xfrm>
+          <a:prstGeom prst="rect">
+            <a:avLst/>
+          </a:prstGeom>
+          <a:noFill/>
+        </p:spPr>
+        <p:txBody>
+          <a:bodyPr wrap="square" rtlCol="0">
+            <a:spAutoFit/>
+          </a:bodyPr>
+          <a:lstStyle/>
+          <a:p>
+            <a:r>
+              <a:rPr lang="en-US" sz="1000" dirty="0">
+                <a:solidFill>
+                  <a:schemeClr val="accent5">
+                    <a:lumMod val="60000"/>
+                    <a:lumOff val="40000"/>
+                  </a:schemeClr>
+                </a:solidFill>
+              </a:rPr>
+              <a:t>Hide the filters to free up screen space</a:t>
+            </a:r>
+          </a:p>
+        </p:txBody>
+      </p:sp>
+      <p:cxnSp>
+        <p:nvCxnSpPr>
+          <p:cNvPr id="9" name="Straight Arrow Connector 8">
+            <a:extLst>
+              <a:ext uri="{FF2B5EF4-FFF2-40B4-BE49-F238E27FC236}">
+                <a16:creationId xmlns:a16="http://schemas.microsoft.com/office/drawing/2014/main" id="{D367C251-3F5D-01AE-FD8C-7F4913BAAD76}"/>
+              </a:ext>
+            </a:extLst>
+          </p:cNvPr>
+          <p:cNvCxnSpPr>
+            <a:cxnSpLocks/>
+            <a:stCxn id="5" idx="2"/>
+          </p:cNvCxnSpPr>
+          <p:nvPr/>
+        </p:nvCxnSpPr>
+        <p:spPr>
+          <a:xfrm>
+            <a:off x="10412998" y="1142598"/>
+            <a:ext cx="610602" cy="244457"/>
+          </a:xfrm>
+          <a:prstGeom prst="straightConnector1">
+            <a:avLst/>
+          </a:prstGeom>
+          <a:ln>
+            <a:tailEnd type="triangle"/>
+          </a:ln>
+        </p:spPr>
+        <p:style>
+          <a:lnRef idx="2">
+            <a:schemeClr val="accent1"/>
+          </a:lnRef>
+          <a:fillRef idx="0">
+            <a:schemeClr val="accent1"/>
+          </a:fillRef>
+          <a:effectRef idx="1">
+            <a:schemeClr val="accent1"/>
+          </a:effectRef>
+          <a:fontRef idx="minor">
+            <a:schemeClr val="tx1"/>
+          </a:fontRef>
+        </p:style>
+      </p:cxnSp>
     </p:spTree>
     <p:extLst>
       <p:ext uri="{BB962C8B-B14F-4D97-AF65-F5344CB8AC3E}">

--- a/AdminInterface/UserGuide.pptx
+++ b/AdminInterface/UserGuide.pptx
@@ -366,7 +366,7 @@
           <a:p>
             <a:fld id="{FA90DC49-5E56-4663-BD73-6254BEC8D958}" type="datetimeFigureOut">
               <a:rPr lang="en-US" smtClean="0"/>
-              <a:t>3/25/2026</a:t>
+              <a:t>3/26/2026</a:t>
             </a:fld>
             <a:endParaRPr lang="en-US"/>
           </a:p>
@@ -948,7 +948,7 @@
           <a:p>
             <a:fld id="{059A6F5A-3024-43F4-A20E-288FCAB0A2E6}" type="datetimeFigureOut">
               <a:rPr lang="en-US" smtClean="0"/>
-              <a:t>3/25/2026</a:t>
+              <a:t>3/26/2026</a:t>
             </a:fld>
             <a:endParaRPr lang="en-US"/>
           </a:p>
@@ -1146,7 +1146,7 @@
           <a:p>
             <a:fld id="{059A6F5A-3024-43F4-A20E-288FCAB0A2E6}" type="datetimeFigureOut">
               <a:rPr lang="en-US" smtClean="0"/>
-              <a:t>3/25/2026</a:t>
+              <a:t>3/26/2026</a:t>
             </a:fld>
             <a:endParaRPr lang="en-US"/>
           </a:p>
@@ -1421,7 +1421,7 @@
           <a:p>
             <a:fld id="{059A6F5A-3024-43F4-A20E-288FCAB0A2E6}" type="datetimeFigureOut">
               <a:rPr lang="en-US" smtClean="0"/>
-              <a:t>3/25/2026</a:t>
+              <a:t>3/26/2026</a:t>
             </a:fld>
             <a:endParaRPr lang="en-US"/>
           </a:p>
@@ -1692,7 +1692,7 @@
           <a:p>
             <a:fld id="{059A6F5A-3024-43F4-A20E-288FCAB0A2E6}" type="datetimeFigureOut">
               <a:rPr lang="en-US" smtClean="0"/>
-              <a:t>3/25/2026</a:t>
+              <a:t>3/26/2026</a:t>
             </a:fld>
             <a:endParaRPr lang="en-US"/>
           </a:p>
@@ -2105,7 +2105,7 @@
           <a:p>
             <a:fld id="{059A6F5A-3024-43F4-A20E-288FCAB0A2E6}" type="datetimeFigureOut">
               <a:rPr lang="en-US" smtClean="0"/>
-              <a:t>3/25/2026</a:t>
+              <a:t>3/26/2026</a:t>
             </a:fld>
             <a:endParaRPr lang="en-US"/>
           </a:p>
@@ -2246,7 +2246,7 @@
           <a:p>
             <a:fld id="{059A6F5A-3024-43F4-A20E-288FCAB0A2E6}" type="datetimeFigureOut">
               <a:rPr lang="en-US" smtClean="0"/>
-              <a:t>3/25/2026</a:t>
+              <a:t>3/26/2026</a:t>
             </a:fld>
             <a:endParaRPr lang="en-US"/>
           </a:p>
@@ -2911,7 +2911,7 @@
           <a:p>
             <a:fld id="{059A6F5A-3024-43F4-A20E-288FCAB0A2E6}" type="datetimeFigureOut">
               <a:rPr lang="en-US" smtClean="0"/>
-              <a:t>3/25/2026</a:t>
+              <a:t>3/26/2026</a:t>
             </a:fld>
             <a:endParaRPr lang="en-US"/>
           </a:p>
@@ -3152,7 +3152,7 @@
           <a:p>
             <a:fld id="{059A6F5A-3024-43F4-A20E-288FCAB0A2E6}" type="datetimeFigureOut">
               <a:rPr lang="en-US" smtClean="0"/>
-              <a:t>3/25/2026</a:t>
+              <a:t>3/26/2026</a:t>
             </a:fld>
             <a:endParaRPr lang="en-US"/>
           </a:p>
@@ -7037,6 +7037,132 @@
           </p:pic>
         </mc:Fallback>
       </mc:AlternateContent>
+      <p:sp>
+        <p:nvSpPr>
+          <p:cNvPr id="4" name="TextBox 3">
+            <a:extLst>
+              <a:ext uri="{FF2B5EF4-FFF2-40B4-BE49-F238E27FC236}">
+                <a16:creationId xmlns:a16="http://schemas.microsoft.com/office/drawing/2014/main" id="{F2135BF5-884E-A408-3B5F-CC1EFB9860FC}"/>
+              </a:ext>
+            </a:extLst>
+          </p:cNvPr>
+          <p:cNvSpPr txBox="1"/>
+          <p:nvPr/>
+        </p:nvSpPr>
+        <p:spPr>
+          <a:xfrm>
+            <a:off x="0" y="1734709"/>
+            <a:ext cx="1800421" cy="246221"/>
+          </a:xfrm>
+          <a:prstGeom prst="rect">
+            <a:avLst/>
+          </a:prstGeom>
+          <a:noFill/>
+        </p:spPr>
+        <p:txBody>
+          <a:bodyPr wrap="square" rtlCol="0">
+            <a:spAutoFit/>
+          </a:bodyPr>
+          <a:lstStyle/>
+          <a:p>
+            <a:r>
+              <a:rPr lang="en-US" sz="1000" dirty="0">
+                <a:solidFill>
+                  <a:schemeClr val="accent5">
+                    <a:lumMod val="60000"/>
+                    <a:lumOff val="40000"/>
+                  </a:schemeClr>
+                </a:solidFill>
+              </a:rPr>
+              <a:t>My authorized lines</a:t>
+            </a:r>
+          </a:p>
+        </p:txBody>
+      </p:sp>
+      <p:sp>
+        <p:nvSpPr>
+          <p:cNvPr id="5" name="TextBox 4">
+            <a:extLst>
+              <a:ext uri="{FF2B5EF4-FFF2-40B4-BE49-F238E27FC236}">
+                <a16:creationId xmlns:a16="http://schemas.microsoft.com/office/drawing/2014/main" id="{0A899819-A9DD-50A5-8C00-3DD5F86DB1E2}"/>
+              </a:ext>
+            </a:extLst>
+          </p:cNvPr>
+          <p:cNvSpPr txBox="1"/>
+          <p:nvPr/>
+        </p:nvSpPr>
+        <p:spPr>
+          <a:xfrm>
+            <a:off x="4759214" y="900356"/>
+            <a:ext cx="1800421" cy="246221"/>
+          </a:xfrm>
+          <a:prstGeom prst="rect">
+            <a:avLst/>
+          </a:prstGeom>
+          <a:noFill/>
+        </p:spPr>
+        <p:txBody>
+          <a:bodyPr wrap="square" rtlCol="0">
+            <a:spAutoFit/>
+          </a:bodyPr>
+          <a:lstStyle/>
+          <a:p>
+            <a:r>
+              <a:rPr lang="en-US" sz="1000" dirty="0">
+                <a:solidFill>
+                  <a:schemeClr val="accent5">
+                    <a:lumMod val="60000"/>
+                    <a:lumOff val="40000"/>
+                  </a:schemeClr>
+                </a:solidFill>
+              </a:rPr>
+              <a:t>The list of current lockouts</a:t>
+            </a:r>
+          </a:p>
+        </p:txBody>
+      </p:sp>
+      <p:sp>
+        <p:nvSpPr>
+          <p:cNvPr id="6" name="TextBox 5">
+            <a:extLst>
+              <a:ext uri="{FF2B5EF4-FFF2-40B4-BE49-F238E27FC236}">
+                <a16:creationId xmlns:a16="http://schemas.microsoft.com/office/drawing/2014/main" id="{0D0510F0-4AB6-839D-5408-8A58F707CA83}"/>
+              </a:ext>
+            </a:extLst>
+          </p:cNvPr>
+          <p:cNvSpPr txBox="1"/>
+          <p:nvPr/>
+        </p:nvSpPr>
+        <p:spPr>
+          <a:xfrm>
+            <a:off x="8540934" y="1047274"/>
+            <a:ext cx="2648683" cy="246221"/>
+          </a:xfrm>
+          <a:prstGeom prst="rect">
+            <a:avLst/>
+          </a:prstGeom>
+          <a:noFill/>
+        </p:spPr>
+        <p:txBody>
+          <a:bodyPr wrap="square" rtlCol="0">
+            <a:spAutoFit/>
+          </a:bodyPr>
+          <a:lstStyle/>
+          <a:p>
+            <a:r>
+              <a:rPr lang="en-US" sz="1000" dirty="0">
+                <a:solidFill>
+                  <a:schemeClr val="accent5">
+                    <a:lumMod val="60000"/>
+                    <a:lumOff val="40000"/>
+                  </a:schemeClr>
+                </a:solidFill>
+              </a:rPr>
+              <a:t>The list of attempted resets for this lockout</a:t>
+            </a:r>
+          </a:p>
+        </p:txBody>
+      </p:sp>
     </p:spTree>
     <p:extLst>
       <p:ext uri="{BB962C8B-B14F-4D97-AF65-F5344CB8AC3E}">
@@ -7069,10 +7195,10 @@
       </p:grpSpPr>
       <p:pic>
         <p:nvPicPr>
-          <p:cNvPr id="4" name="Picture 3">
-            <a:extLst>
-              <a:ext uri="{FF2B5EF4-FFF2-40B4-BE49-F238E27FC236}">
-                <a16:creationId xmlns:a16="http://schemas.microsoft.com/office/drawing/2014/main" id="{E2737D05-7133-2C5D-6738-52E3A415A52B}"/>
+          <p:cNvPr id="11" name="Picture 10">
+            <a:extLst>
+              <a:ext uri="{FF2B5EF4-FFF2-40B4-BE49-F238E27FC236}">
+                <a16:creationId xmlns:a16="http://schemas.microsoft.com/office/drawing/2014/main" id="{18978977-CA23-796D-83F1-1984F00BB595}"/>
               </a:ext>
             </a:extLst>
           </p:cNvPr>
@@ -7083,14 +7209,15 @@
         </p:nvPicPr>
         <p:blipFill>
           <a:blip r:embed="rId2"/>
+          <a:srcRect r="170"/>
           <a:stretch>
             <a:fillRect/>
           </a:stretch>
         </p:blipFill>
         <p:spPr>
           <a:xfrm>
-            <a:off x="293204" y="896378"/>
-            <a:ext cx="11546862" cy="5788568"/>
+            <a:off x="293204" y="895723"/>
+            <a:ext cx="11527321" cy="5752261"/>
           </a:xfrm>
           <a:prstGeom prst="rect">
             <a:avLst/>
@@ -7631,7 +7758,7 @@
         <p:spPr>
           <a:xfrm>
             <a:off x="11736073" y="1343024"/>
-            <a:ext cx="553998" cy="5179046"/>
+            <a:ext cx="553998" cy="5235151"/>
           </a:xfrm>
           <a:prstGeom prst="rect">
             <a:avLst/>
@@ -7653,7 +7780,7 @@
                   </a:schemeClr>
                 </a:solidFill>
               </a:rPr>
-              <a:t>When there are more results than fit on the screen,</a:t>
+              <a:t>When there are more results than fit on the screen, two scroll bars appear.</a:t>
             </a:r>
           </a:p>
           <a:p>
@@ -7666,7 +7793,7 @@
                   </a:schemeClr>
                 </a:solidFill>
               </a:rPr>
-              <a:t>use the outer one to navigate the page and the inner one to navigate the table</a:t>
+              <a:t>Use the outer one to navigate the page, and the inner one to navigate the table</a:t>
             </a:r>
           </a:p>
         </p:txBody>
@@ -7732,6 +7859,89 @@
           <a:xfrm>
             <a:off x="10412998" y="1142598"/>
             <a:ext cx="610602" cy="244457"/>
+          </a:xfrm>
+          <a:prstGeom prst="straightConnector1">
+            <a:avLst/>
+          </a:prstGeom>
+          <a:ln>
+            <a:tailEnd type="triangle"/>
+          </a:ln>
+        </p:spPr>
+        <p:style>
+          <a:lnRef idx="2">
+            <a:schemeClr val="accent1"/>
+          </a:lnRef>
+          <a:fillRef idx="0">
+            <a:schemeClr val="accent1"/>
+          </a:fillRef>
+          <a:effectRef idx="1">
+            <a:schemeClr val="accent1"/>
+          </a:effectRef>
+          <a:fontRef idx="minor">
+            <a:schemeClr val="tx1"/>
+          </a:fontRef>
+        </p:style>
+      </p:cxnSp>
+      <p:sp>
+        <p:nvSpPr>
+          <p:cNvPr id="13" name="TextBox 12">
+            <a:extLst>
+              <a:ext uri="{FF2B5EF4-FFF2-40B4-BE49-F238E27FC236}">
+                <a16:creationId xmlns:a16="http://schemas.microsoft.com/office/drawing/2014/main" id="{FF123253-2E94-9C58-7E87-EDBF51196088}"/>
+              </a:ext>
+            </a:extLst>
+          </p:cNvPr>
+          <p:cNvSpPr txBox="1"/>
+          <p:nvPr/>
+        </p:nvSpPr>
+        <p:spPr>
+          <a:xfrm>
+            <a:off x="9239858" y="2123955"/>
+            <a:ext cx="2490400" cy="246221"/>
+          </a:xfrm>
+          <a:prstGeom prst="rect">
+            <a:avLst/>
+          </a:prstGeom>
+          <a:noFill/>
+        </p:spPr>
+        <p:txBody>
+          <a:bodyPr wrap="square" rtlCol="0">
+            <a:spAutoFit/>
+          </a:bodyPr>
+          <a:lstStyle/>
+          <a:p>
+            <a:r>
+              <a:rPr lang="en-US" sz="1000" dirty="0">
+                <a:solidFill>
+                  <a:schemeClr val="accent5">
+                    <a:lumMod val="60000"/>
+                    <a:lumOff val="40000"/>
+                  </a:schemeClr>
+                </a:solidFill>
+              </a:rPr>
+              <a:t>Gray when clicking it wouldn’t do anything</a:t>
+            </a:r>
+          </a:p>
+        </p:txBody>
+      </p:sp>
+      <p:cxnSp>
+        <p:nvCxnSpPr>
+          <p:cNvPr id="19" name="Straight Arrow Connector 18">
+            <a:extLst>
+              <a:ext uri="{FF2B5EF4-FFF2-40B4-BE49-F238E27FC236}">
+                <a16:creationId xmlns:a16="http://schemas.microsoft.com/office/drawing/2014/main" id="{DA11F7E4-92B8-491F-A966-A970F77716A5}"/>
+              </a:ext>
+            </a:extLst>
+          </p:cNvPr>
+          <p:cNvCxnSpPr>
+            <a:stCxn id="13" idx="2"/>
+          </p:cNvCxnSpPr>
+          <p:nvPr/>
+        </p:nvCxnSpPr>
+        <p:spPr>
+          <a:xfrm>
+            <a:off x="10485058" y="2370176"/>
+            <a:ext cx="709992" cy="433984"/>
           </a:xfrm>
           <a:prstGeom prst="straightConnector1">
             <a:avLst/>
@@ -7793,10 +8003,10 @@
       </p:grpSpPr>
       <p:pic>
         <p:nvPicPr>
-          <p:cNvPr id="5" name="Picture 4">
-            <a:extLst>
-              <a:ext uri="{FF2B5EF4-FFF2-40B4-BE49-F238E27FC236}">
-                <a16:creationId xmlns:a16="http://schemas.microsoft.com/office/drawing/2014/main" id="{97DFF277-3D7C-8B60-B6AC-9A6246A62CB6}"/>
+          <p:cNvPr id="4" name="Picture 3">
+            <a:extLst>
+              <a:ext uri="{FF2B5EF4-FFF2-40B4-BE49-F238E27FC236}">
+                <a16:creationId xmlns:a16="http://schemas.microsoft.com/office/drawing/2014/main" id="{F3D1F6DA-24FA-8E5E-C59F-4298021AF012}"/>
               </a:ext>
             </a:extLst>
           </p:cNvPr>
@@ -7814,7 +8024,7 @@
         <p:spPr>
           <a:xfrm>
             <a:off x="301657" y="932859"/>
-            <a:ext cx="11585543" cy="5795807"/>
+            <a:ext cx="11615966" cy="5795807"/>
           </a:xfrm>
           <a:prstGeom prst="rect">
             <a:avLst/>
@@ -7865,7 +8075,7 @@
         </p:nvSpPr>
         <p:spPr>
           <a:xfrm>
-            <a:off x="5032528" y="2966192"/>
+            <a:off x="5032528" y="3228945"/>
             <a:ext cx="4559341" cy="400110"/>
           </a:xfrm>
           <a:prstGeom prst="rect">
@@ -7907,7 +8117,7 @@
         </p:nvSpPr>
         <p:spPr>
           <a:xfrm>
-            <a:off x="7594754" y="2426185"/>
+            <a:off x="7462779" y="2796914"/>
             <a:ext cx="3187546" cy="400110"/>
           </a:xfrm>
           <a:prstGeom prst="rect">
@@ -7949,7 +8159,7 @@
         </p:nvSpPr>
         <p:spPr>
           <a:xfrm>
-            <a:off x="1995135" y="2398582"/>
+            <a:off x="2050345" y="2735359"/>
             <a:ext cx="2465740" cy="461665"/>
           </a:xfrm>
           <a:prstGeom prst="rect">
@@ -7991,7 +8201,7 @@
         </p:nvSpPr>
         <p:spPr>
           <a:xfrm>
-            <a:off x="4516085" y="2398582"/>
+            <a:off x="4516085" y="2753380"/>
             <a:ext cx="2465740" cy="461665"/>
           </a:xfrm>
           <a:prstGeom prst="rect">
@@ -8015,6 +8225,129 @@
                 </a:solidFill>
               </a:rPr>
               <a:t>11:59 PM to include day, 12 AM to exclude (same as reset before)</a:t>
+            </a:r>
+          </a:p>
+        </p:txBody>
+      </p:sp>
+      <p:sp>
+        <p:nvSpPr>
+          <p:cNvPr id="11" name="TextBox 10">
+            <a:extLst>
+              <a:ext uri="{FF2B5EF4-FFF2-40B4-BE49-F238E27FC236}">
+                <a16:creationId xmlns:a16="http://schemas.microsoft.com/office/drawing/2014/main" id="{2159A429-2F1C-78A6-20C5-FB8B65EBE026}"/>
+              </a:ext>
+            </a:extLst>
+          </p:cNvPr>
+          <p:cNvSpPr txBox="1"/>
+          <p:nvPr/>
+        </p:nvSpPr>
+        <p:spPr>
+          <a:xfrm>
+            <a:off x="9894829" y="2192107"/>
+            <a:ext cx="1897121" cy="246221"/>
+          </a:xfrm>
+          <a:prstGeom prst="rect">
+            <a:avLst/>
+          </a:prstGeom>
+          <a:noFill/>
+        </p:spPr>
+        <p:txBody>
+          <a:bodyPr wrap="square" rtlCol="0">
+            <a:spAutoFit/>
+          </a:bodyPr>
+          <a:lstStyle/>
+          <a:p>
+            <a:r>
+              <a:rPr lang="en-US" sz="1000" dirty="0">
+                <a:solidFill>
+                  <a:schemeClr val="accent5">
+                    <a:lumMod val="60000"/>
+                    <a:lumOff val="40000"/>
+                  </a:schemeClr>
+                </a:solidFill>
+              </a:rPr>
+              <a:t>Blue when ready to be pressed</a:t>
+            </a:r>
+          </a:p>
+        </p:txBody>
+      </p:sp>
+      <p:cxnSp>
+        <p:nvCxnSpPr>
+          <p:cNvPr id="13" name="Straight Arrow Connector 12">
+            <a:extLst>
+              <a:ext uri="{FF2B5EF4-FFF2-40B4-BE49-F238E27FC236}">
+                <a16:creationId xmlns:a16="http://schemas.microsoft.com/office/drawing/2014/main" id="{BF974435-DF8A-2A54-C8FC-3B31B3623C7D}"/>
+              </a:ext>
+            </a:extLst>
+          </p:cNvPr>
+          <p:cNvCxnSpPr/>
+          <p:nvPr/>
+        </p:nvCxnSpPr>
+        <p:spPr>
+          <a:xfrm>
+            <a:off x="10845800" y="2444750"/>
+            <a:ext cx="387350" cy="419100"/>
+          </a:xfrm>
+          <a:prstGeom prst="straightConnector1">
+            <a:avLst/>
+          </a:prstGeom>
+          <a:ln>
+            <a:tailEnd type="triangle"/>
+          </a:ln>
+        </p:spPr>
+        <p:style>
+          <a:lnRef idx="2">
+            <a:schemeClr val="accent1"/>
+          </a:lnRef>
+          <a:fillRef idx="0">
+            <a:schemeClr val="accent1"/>
+          </a:fillRef>
+          <a:effectRef idx="1">
+            <a:schemeClr val="accent1"/>
+          </a:effectRef>
+          <a:fontRef idx="minor">
+            <a:schemeClr val="tx1"/>
+          </a:fontRef>
+        </p:style>
+      </p:cxnSp>
+      <p:sp>
+        <p:nvSpPr>
+          <p:cNvPr id="14" name="TextBox 13">
+            <a:extLst>
+              <a:ext uri="{FF2B5EF4-FFF2-40B4-BE49-F238E27FC236}">
+                <a16:creationId xmlns:a16="http://schemas.microsoft.com/office/drawing/2014/main" id="{7DC3F017-64CA-EE8E-8C22-82FB3595FEB4}"/>
+              </a:ext>
+            </a:extLst>
+          </p:cNvPr>
+          <p:cNvSpPr txBox="1"/>
+          <p:nvPr/>
+        </p:nvSpPr>
+        <p:spPr>
+          <a:xfrm>
+            <a:off x="3015545" y="1292993"/>
+            <a:ext cx="1500540" cy="246221"/>
+          </a:xfrm>
+          <a:prstGeom prst="rect">
+            <a:avLst/>
+          </a:prstGeom>
+          <a:noFill/>
+        </p:spPr>
+        <p:txBody>
+          <a:bodyPr wrap="square" rtlCol="0">
+            <a:spAutoFit/>
+          </a:bodyPr>
+          <a:lstStyle/>
+          <a:p>
+            <a:r>
+              <a:rPr lang="en-US" sz="1000" dirty="0">
+                <a:solidFill>
+                  <a:schemeClr val="accent5">
+                    <a:lumMod val="60000"/>
+                    <a:lumOff val="40000"/>
+                  </a:schemeClr>
+                </a:solidFill>
+              </a:rPr>
+              <a:t>To remind you to search</a:t>
             </a:r>
           </a:p>
         </p:txBody>
@@ -8057,10 +8390,10 @@
       </p:grpSpPr>
       <p:pic>
         <p:nvPicPr>
-          <p:cNvPr id="6" name="Picture 5">
-            <a:extLst>
-              <a:ext uri="{FF2B5EF4-FFF2-40B4-BE49-F238E27FC236}">
-                <a16:creationId xmlns:a16="http://schemas.microsoft.com/office/drawing/2014/main" id="{43D24C7C-13B5-1A56-121B-9EDEDD100422}"/>
+          <p:cNvPr id="7" name="Picture 6">
+            <a:extLst>
+              <a:ext uri="{FF2B5EF4-FFF2-40B4-BE49-F238E27FC236}">
+                <a16:creationId xmlns:a16="http://schemas.microsoft.com/office/drawing/2014/main" id="{6D6F8B15-E5E0-29A0-C036-A403B0BF4814}"/>
               </a:ext>
             </a:extLst>
           </p:cNvPr>
@@ -8077,8 +8410,8 @@
         </p:blipFill>
         <p:spPr>
           <a:xfrm>
-            <a:off x="278342" y="907749"/>
-            <a:ext cx="11486310" cy="5725095"/>
+            <a:off x="278342" y="905060"/>
+            <a:ext cx="11432187" cy="5725095"/>
           </a:xfrm>
           <a:prstGeom prst="rect">
             <a:avLst/>
@@ -8129,7 +8462,7 @@
         </p:nvSpPr>
         <p:spPr>
           <a:xfrm>
-            <a:off x="1729361" y="2845355"/>
+            <a:off x="1756950" y="1665715"/>
             <a:ext cx="1904682" cy="246221"/>
           </a:xfrm>
           <a:prstGeom prst="rect">
@@ -8171,7 +8504,7 @@
         </p:nvSpPr>
         <p:spPr>
           <a:xfrm>
-            <a:off x="3634043" y="2968465"/>
+            <a:off x="3661632" y="1772874"/>
             <a:ext cx="762442" cy="400110"/>
           </a:xfrm>
           <a:prstGeom prst="rect">
@@ -8213,7 +8546,7 @@
         </p:nvSpPr>
         <p:spPr>
           <a:xfrm>
-            <a:off x="9452168" y="2845354"/>
+            <a:off x="9332247" y="1649764"/>
             <a:ext cx="1470274" cy="246221"/>
           </a:xfrm>
           <a:prstGeom prst="rect">
@@ -8255,7 +8588,7 @@
         </p:nvSpPr>
         <p:spPr>
           <a:xfrm>
-            <a:off x="4516406" y="2968466"/>
+            <a:off x="4516406" y="1711881"/>
             <a:ext cx="4815841" cy="400110"/>
           </a:xfrm>
           <a:prstGeom prst="rect">
@@ -8321,6 +8654,90 @@
                 </a:solidFill>
               </a:rPr>
               <a:t>Sorting assumes you only want to see entries where that value exists. For example, sorting by reset time here would hide all entries except the ones reset by ‘b’ and ‘eh’, then apply the sort</a:t>
+            </a:r>
+          </a:p>
+        </p:txBody>
+      </p:sp>
+      <p:sp>
+        <p:nvSpPr>
+          <p:cNvPr id="8" name="TextBox 7">
+            <a:extLst>
+              <a:ext uri="{FF2B5EF4-FFF2-40B4-BE49-F238E27FC236}">
+                <a16:creationId xmlns:a16="http://schemas.microsoft.com/office/drawing/2014/main" id="{38C0F6C5-CFB1-6CC7-120C-A60C2E6998E2}"/>
+              </a:ext>
+            </a:extLst>
+          </p:cNvPr>
+          <p:cNvSpPr txBox="1"/>
+          <p:nvPr/>
+        </p:nvSpPr>
+        <p:spPr>
+          <a:xfrm>
+            <a:off x="2839624" y="1242804"/>
+            <a:ext cx="2164175" cy="246221"/>
+          </a:xfrm>
+          <a:prstGeom prst="rect">
+            <a:avLst/>
+          </a:prstGeom>
+          <a:noFill/>
+        </p:spPr>
+        <p:txBody>
+          <a:bodyPr wrap="square" rtlCol="0">
+            <a:spAutoFit/>
+          </a:bodyPr>
+          <a:lstStyle/>
+          <a:p>
+            <a:r>
+              <a:rPr lang="en-US" sz="1000" dirty="0">
+                <a:solidFill>
+                  <a:schemeClr val="accent5">
+                    <a:lumMod val="60000"/>
+                    <a:lumOff val="40000"/>
+                  </a:schemeClr>
+                </a:solidFill>
+              </a:rPr>
+              <a:t>To remind you this is a filtered table</a:t>
+            </a:r>
+          </a:p>
+        </p:txBody>
+      </p:sp>
+      <p:sp>
+        <p:nvSpPr>
+          <p:cNvPr id="9" name="TextBox 8">
+            <a:extLst>
+              <a:ext uri="{FF2B5EF4-FFF2-40B4-BE49-F238E27FC236}">
+                <a16:creationId xmlns:a16="http://schemas.microsoft.com/office/drawing/2014/main" id="{957F113F-74A2-D03A-CE83-2E6DEE75383A}"/>
+              </a:ext>
+            </a:extLst>
+          </p:cNvPr>
+          <p:cNvSpPr txBox="1"/>
+          <p:nvPr/>
+        </p:nvSpPr>
+        <p:spPr>
+          <a:xfrm>
+            <a:off x="9884099" y="1053754"/>
+            <a:ext cx="1598515" cy="246221"/>
+          </a:xfrm>
+          <a:prstGeom prst="rect">
+            <a:avLst/>
+          </a:prstGeom>
+          <a:noFill/>
+        </p:spPr>
+        <p:txBody>
+          <a:bodyPr wrap="none" rtlCol="0">
+            <a:spAutoFit/>
+          </a:bodyPr>
+          <a:lstStyle/>
+          <a:p>
+            <a:r>
+              <a:rPr lang="en-US" sz="1000" dirty="0">
+                <a:solidFill>
+                  <a:schemeClr val="accent5">
+                    <a:lumMod val="60000"/>
+                    <a:lumOff val="40000"/>
+                  </a:schemeClr>
+                </a:solidFill>
+              </a:rPr>
+              <a:t>Auto-collapses on search</a:t>
             </a:r>
           </a:p>
         </p:txBody>
@@ -8363,10 +8780,10 @@
       </p:grpSpPr>
       <p:pic>
         <p:nvPicPr>
-          <p:cNvPr id="8" name="Picture 7">
-            <a:extLst>
-              <a:ext uri="{FF2B5EF4-FFF2-40B4-BE49-F238E27FC236}">
-                <a16:creationId xmlns:a16="http://schemas.microsoft.com/office/drawing/2014/main" id="{C462799C-5083-1D2B-1656-A30074633406}"/>
+          <p:cNvPr id="4" name="Picture 3">
+            <a:extLst>
+              <a:ext uri="{FF2B5EF4-FFF2-40B4-BE49-F238E27FC236}">
+                <a16:creationId xmlns:a16="http://schemas.microsoft.com/office/drawing/2014/main" id="{74511EC7-A405-0579-A8E2-20E6591ECBAA}"/>
               </a:ext>
             </a:extLst>
           </p:cNvPr>
@@ -8384,7 +8801,7 @@
         <p:spPr>
           <a:xfrm>
             <a:off x="295274" y="902009"/>
-            <a:ext cx="11591925" cy="5777718"/>
+            <a:ext cx="11591925" cy="5820341"/>
           </a:xfrm>
           <a:prstGeom prst="rect">
             <a:avLst/>
@@ -8477,7 +8894,7 @@
         </p:nvSpPr>
         <p:spPr>
           <a:xfrm>
-            <a:off x="8150368" y="3028890"/>
+            <a:off x="8150368" y="902009"/>
             <a:ext cx="3659854" cy="400110"/>
           </a:xfrm>
           <a:prstGeom prst="rect">
@@ -8519,7 +8936,7 @@
         </p:nvSpPr>
         <p:spPr>
           <a:xfrm>
-            <a:off x="9248140" y="3429000"/>
+            <a:off x="8699254" y="1874520"/>
             <a:ext cx="2562082" cy="400110"/>
           </a:xfrm>
           <a:prstGeom prst="rect">
@@ -8585,10 +9002,10 @@
       </p:grpSpPr>
       <p:pic>
         <p:nvPicPr>
-          <p:cNvPr id="4" name="Picture 3">
-            <a:extLst>
-              <a:ext uri="{FF2B5EF4-FFF2-40B4-BE49-F238E27FC236}">
-                <a16:creationId xmlns:a16="http://schemas.microsoft.com/office/drawing/2014/main" id="{36EB9BAC-B30D-BF7B-9220-CC72F601E613}"/>
+          <p:cNvPr id="6" name="Picture 5">
+            <a:extLst>
+              <a:ext uri="{FF2B5EF4-FFF2-40B4-BE49-F238E27FC236}">
+                <a16:creationId xmlns:a16="http://schemas.microsoft.com/office/drawing/2014/main" id="{603CEC4F-063E-A6A5-DB9A-4633ABDFF880}"/>
               </a:ext>
             </a:extLst>
           </p:cNvPr>
@@ -8605,8 +9022,8 @@
         </p:blipFill>
         <p:spPr>
           <a:xfrm>
-            <a:off x="301658" y="905061"/>
-            <a:ext cx="11640690" cy="5774612"/>
+            <a:off x="301658" y="902703"/>
+            <a:ext cx="11640690" cy="5841687"/>
           </a:xfrm>
           <a:prstGeom prst="rect">
             <a:avLst/>
@@ -8657,7 +9074,7 @@
         </p:nvSpPr>
         <p:spPr>
           <a:xfrm>
-            <a:off x="4438650" y="2406650"/>
+            <a:off x="4438650" y="2759073"/>
             <a:ext cx="4495654" cy="276999"/>
           </a:xfrm>
           <a:prstGeom prst="rect">
@@ -8699,7 +9116,7 @@
         </p:nvSpPr>
         <p:spPr>
           <a:xfrm>
-            <a:off x="2584580" y="1835150"/>
+            <a:off x="2584580" y="1696648"/>
             <a:ext cx="1911421" cy="276999"/>
           </a:xfrm>
           <a:prstGeom prst="rect">
@@ -8741,7 +9158,7 @@
         </p:nvSpPr>
         <p:spPr>
           <a:xfrm>
-            <a:off x="5320607" y="1835149"/>
+            <a:off x="5615058" y="1693568"/>
             <a:ext cx="2736134" cy="276999"/>
           </a:xfrm>
           <a:prstGeom prst="rect">
@@ -8783,7 +9200,7 @@
         </p:nvSpPr>
         <p:spPr>
           <a:xfrm>
-            <a:off x="8502089" y="1835148"/>
+            <a:off x="8934304" y="1693567"/>
             <a:ext cx="1921295" cy="276999"/>
           </a:xfrm>
           <a:prstGeom prst="rect">
@@ -8825,7 +9242,7 @@
         </p:nvSpPr>
         <p:spPr>
           <a:xfrm>
-            <a:off x="7432643" y="3050323"/>
+            <a:off x="7357229" y="3409226"/>
             <a:ext cx="2665281" cy="276999"/>
           </a:xfrm>
           <a:prstGeom prst="rect">

--- a/AdminInterface/UserGuide.pptx
+++ b/AdminInterface/UserGuide.pptx
@@ -5,28 +5,37 @@
     <p:sldMasterId id="2147483648" r:id="rId1"/>
   </p:sldMasterIdLst>
   <p:notesMasterIdLst>
-    <p:notesMasterId r:id="rId21"/>
+    <p:notesMasterId r:id="rId27"/>
   </p:notesMasterIdLst>
+  <p:handoutMasterIdLst>
+    <p:handoutMasterId r:id="rId28"/>
+  </p:handoutMasterIdLst>
   <p:sldIdLst>
     <p:sldId id="256" r:id="rId2"/>
     <p:sldId id="2819" r:id="rId3"/>
     <p:sldId id="2822" r:id="rId4"/>
-    <p:sldId id="2807" r:id="rId5"/>
-    <p:sldId id="2808" r:id="rId6"/>
-    <p:sldId id="2809" r:id="rId7"/>
-    <p:sldId id="2813" r:id="rId8"/>
-    <p:sldId id="2815" r:id="rId9"/>
-    <p:sldId id="2816" r:id="rId10"/>
-    <p:sldId id="2825" r:id="rId11"/>
-    <p:sldId id="2823" r:id="rId12"/>
-    <p:sldId id="2824" r:id="rId13"/>
-    <p:sldId id="2826" r:id="rId14"/>
-    <p:sldId id="2827" r:id="rId15"/>
-    <p:sldId id="2829" r:id="rId16"/>
-    <p:sldId id="2828" r:id="rId17"/>
-    <p:sldId id="2817" r:id="rId18"/>
-    <p:sldId id="2830" r:id="rId19"/>
-    <p:sldId id="2831" r:id="rId20"/>
+    <p:sldId id="2837" r:id="rId5"/>
+    <p:sldId id="2807" r:id="rId6"/>
+    <p:sldId id="2808" r:id="rId7"/>
+    <p:sldId id="2809" r:id="rId8"/>
+    <p:sldId id="2813" r:id="rId9"/>
+    <p:sldId id="2815" r:id="rId10"/>
+    <p:sldId id="2816" r:id="rId11"/>
+    <p:sldId id="2825" r:id="rId12"/>
+    <p:sldId id="2832" r:id="rId13"/>
+    <p:sldId id="2823" r:id="rId14"/>
+    <p:sldId id="2833" r:id="rId15"/>
+    <p:sldId id="2824" r:id="rId16"/>
+    <p:sldId id="2826" r:id="rId17"/>
+    <p:sldId id="2827" r:id="rId18"/>
+    <p:sldId id="2835" r:id="rId19"/>
+    <p:sldId id="2829" r:id="rId20"/>
+    <p:sldId id="2836" r:id="rId21"/>
+    <p:sldId id="2828" r:id="rId22"/>
+    <p:sldId id="2834" r:id="rId23"/>
+    <p:sldId id="2817" r:id="rId24"/>
+    <p:sldId id="2830" r:id="rId25"/>
+    <p:sldId id="2831" r:id="rId26"/>
   </p:sldIdLst>
   <p:sldSz cx="12192000" cy="6858000"/>
   <p:notesSz cx="6858000" cy="9144000"/>
@@ -137,6 +146,7 @@
           <p14:sldIdLst>
             <p14:sldId id="2819"/>
             <p14:sldId id="2822"/>
+            <p14:sldId id="2837"/>
           </p14:sldIdLst>
         </p14:section>
         <p14:section name="Historical records page" id="{7953E210-EE80-43B6-973A-E207864F8870}">
@@ -156,7 +166,9 @@
           <p14:sldIdLst>
             <p14:sldId id="2816"/>
             <p14:sldId id="2825"/>
+            <p14:sldId id="2832"/>
             <p14:sldId id="2823"/>
+            <p14:sldId id="2833"/>
             <p14:sldId id="2824"/>
           </p14:sldIdLst>
         </p14:section>
@@ -164,8 +176,11 @@
           <p14:sldIdLst>
             <p14:sldId id="2826"/>
             <p14:sldId id="2827"/>
+            <p14:sldId id="2835"/>
             <p14:sldId id="2829"/>
+            <p14:sldId id="2836"/>
             <p14:sldId id="2828"/>
+            <p14:sldId id="2834"/>
           </p14:sldIdLst>
         </p14:section>
         <p14:section name="Update CMMS page" id="{B3499BAD-9CFD-4299-BDA4-8843225530E5}">
@@ -193,6 +208,195 @@
     </p:ext>
   </p:extLst>
 </p:presentation>
+</file>
+
+<file path=ppt/handoutMasters/handoutMaster1.xml><?xml version="1.0" encoding="utf-8"?>
+<p:handoutMaster xmlns:a="http://schemas.openxmlformats.org/drawingml/2006/main" xmlns:r="http://schemas.openxmlformats.org/officeDocument/2006/relationships" xmlns:p="http://schemas.openxmlformats.org/presentationml/2006/main">
+  <p:cSld>
+    <p:bg>
+      <p:bgRef idx="1001">
+        <a:schemeClr val="bg1"/>
+      </p:bgRef>
+    </p:bg>
+    <p:spTree>
+      <p:nvGrpSpPr>
+        <p:cNvPr id="1" name=""/>
+        <p:cNvGrpSpPr/>
+        <p:nvPr/>
+      </p:nvGrpSpPr>
+      <p:grpSpPr>
+        <a:xfrm>
+          <a:off x="0" y="0"/>
+          <a:ext cx="0" cy="0"/>
+          <a:chOff x="0" y="0"/>
+          <a:chExt cx="0" cy="0"/>
+        </a:xfrm>
+      </p:grpSpPr>
+      <p:sp>
+        <p:nvSpPr>
+          <p:cNvPr id="2" name="Header Placeholder 1">
+            <a:extLst>
+              <a:ext uri="{FF2B5EF4-FFF2-40B4-BE49-F238E27FC236}">
+                <a16:creationId xmlns:a16="http://schemas.microsoft.com/office/drawing/2014/main" id="{C997AE69-42FD-B3B2-8FFF-7E3FC9E711E7}"/>
+              </a:ext>
+            </a:extLst>
+          </p:cNvPr>
+          <p:cNvSpPr>
+            <a:spLocks noGrp="1"/>
+          </p:cNvSpPr>
+          <p:nvPr>
+            <p:ph type="hdr" sz="quarter"/>
+          </p:nvPr>
+        </p:nvSpPr>
+        <p:spPr>
+          <a:xfrm>
+            <a:off x="0" y="0"/>
+            <a:ext cx="2971800" cy="458788"/>
+          </a:xfrm>
+          <a:prstGeom prst="rect">
+            <a:avLst/>
+          </a:prstGeom>
+        </p:spPr>
+        <p:txBody>
+          <a:bodyPr vert="horz" lIns="91440" tIns="45720" rIns="91440" bIns="45720" rtlCol="0"/>
+          <a:lstStyle>
+            <a:lvl1pPr algn="l">
+              <a:defRPr sz="1200"/>
+            </a:lvl1pPr>
+          </a:lstStyle>
+          <a:p>
+            <a:endParaRPr lang="en-US"/>
+          </a:p>
+        </p:txBody>
+      </p:sp>
+      <p:sp>
+        <p:nvSpPr>
+          <p:cNvPr id="3" name="Date Placeholder 2">
+            <a:extLst>
+              <a:ext uri="{FF2B5EF4-FFF2-40B4-BE49-F238E27FC236}">
+                <a16:creationId xmlns:a16="http://schemas.microsoft.com/office/drawing/2014/main" id="{36177531-5751-3BAD-99D6-105B38BA452E}"/>
+              </a:ext>
+            </a:extLst>
+          </p:cNvPr>
+          <p:cNvSpPr>
+            <a:spLocks noGrp="1"/>
+          </p:cNvSpPr>
+          <p:nvPr>
+            <p:ph type="dt" sz="quarter" idx="1"/>
+          </p:nvPr>
+        </p:nvSpPr>
+        <p:spPr>
+          <a:xfrm>
+            <a:off x="3884613" y="0"/>
+            <a:ext cx="2971800" cy="458788"/>
+          </a:xfrm>
+          <a:prstGeom prst="rect">
+            <a:avLst/>
+          </a:prstGeom>
+        </p:spPr>
+        <p:txBody>
+          <a:bodyPr vert="horz" lIns="91440" tIns="45720" rIns="91440" bIns="45720" rtlCol="0"/>
+          <a:lstStyle>
+            <a:lvl1pPr algn="r">
+              <a:defRPr sz="1200"/>
+            </a:lvl1pPr>
+          </a:lstStyle>
+          <a:p>
+            <a:fld id="{49713A4B-B321-4E6A-8CBC-68B66D45B9D5}" type="datetimeFigureOut">
+              <a:rPr lang="en-US" smtClean="0"/>
+              <a:t>3/31/2026</a:t>
+            </a:fld>
+            <a:endParaRPr lang="en-US"/>
+          </a:p>
+        </p:txBody>
+      </p:sp>
+      <p:sp>
+        <p:nvSpPr>
+          <p:cNvPr id="4" name="Footer Placeholder 3">
+            <a:extLst>
+              <a:ext uri="{FF2B5EF4-FFF2-40B4-BE49-F238E27FC236}">
+                <a16:creationId xmlns:a16="http://schemas.microsoft.com/office/drawing/2014/main" id="{55344172-C44D-55EB-DA19-602C82F58C8B}"/>
+              </a:ext>
+            </a:extLst>
+          </p:cNvPr>
+          <p:cNvSpPr>
+            <a:spLocks noGrp="1"/>
+          </p:cNvSpPr>
+          <p:nvPr>
+            <p:ph type="ftr" sz="quarter" idx="2"/>
+          </p:nvPr>
+        </p:nvSpPr>
+        <p:spPr>
+          <a:xfrm>
+            <a:off x="0" y="8685213"/>
+            <a:ext cx="2971800" cy="458787"/>
+          </a:xfrm>
+          <a:prstGeom prst="rect">
+            <a:avLst/>
+          </a:prstGeom>
+        </p:spPr>
+        <p:txBody>
+          <a:bodyPr vert="horz" lIns="91440" tIns="45720" rIns="91440" bIns="45720" rtlCol="0" anchor="b"/>
+          <a:lstStyle>
+            <a:lvl1pPr algn="l">
+              <a:defRPr sz="1200"/>
+            </a:lvl1pPr>
+          </a:lstStyle>
+          <a:p>
+            <a:endParaRPr lang="en-US"/>
+          </a:p>
+        </p:txBody>
+      </p:sp>
+      <p:sp>
+        <p:nvSpPr>
+          <p:cNvPr id="5" name="Slide Number Placeholder 4">
+            <a:extLst>
+              <a:ext uri="{FF2B5EF4-FFF2-40B4-BE49-F238E27FC236}">
+                <a16:creationId xmlns:a16="http://schemas.microsoft.com/office/drawing/2014/main" id="{D7D24FDD-B29E-F55F-EB33-CD6E476111AE}"/>
+              </a:ext>
+            </a:extLst>
+          </p:cNvPr>
+          <p:cNvSpPr>
+            <a:spLocks noGrp="1"/>
+          </p:cNvSpPr>
+          <p:nvPr>
+            <p:ph type="sldNum" sz="quarter" idx="3"/>
+          </p:nvPr>
+        </p:nvSpPr>
+        <p:spPr>
+          <a:xfrm>
+            <a:off x="3884613" y="8685213"/>
+            <a:ext cx="2971800" cy="458787"/>
+          </a:xfrm>
+          <a:prstGeom prst="rect">
+            <a:avLst/>
+          </a:prstGeom>
+        </p:spPr>
+        <p:txBody>
+          <a:bodyPr vert="horz" lIns="91440" tIns="45720" rIns="91440" bIns="45720" rtlCol="0" anchor="b"/>
+          <a:lstStyle>
+            <a:lvl1pPr algn="r">
+              <a:defRPr sz="1200"/>
+            </a:lvl1pPr>
+          </a:lstStyle>
+          <a:p>
+            <a:fld id="{FCF4A47F-2EAE-40D6-A76D-7F39FE6A5023}" type="slidenum">
+              <a:rPr lang="en-US" smtClean="0"/>
+              <a:t>‹#›</a:t>
+            </a:fld>
+            <a:endParaRPr lang="en-US"/>
+          </a:p>
+        </p:txBody>
+      </p:sp>
+    </p:spTree>
+    <p:extLst>
+      <p:ext uri="{BB962C8B-B14F-4D97-AF65-F5344CB8AC3E}">
+        <p14:creationId xmlns:p14="http://schemas.microsoft.com/office/powerpoint/2010/main" val="535947890"/>
+      </p:ext>
+    </p:extLst>
+  </p:cSld>
+  <p:clrMap bg1="lt1" tx1="dk1" bg2="lt2" tx2="dk2" accent1="accent1" accent2="accent2" accent3="accent3" accent4="accent4" accent5="accent5" accent6="accent6" hlink="hlink" folHlink="folHlink"/>
+</p:handoutMaster>
 </file>
 
 <file path=ppt/ink/ink1.xml><?xml version="1.0" encoding="utf-8"?>
@@ -366,7 +570,7 @@
           <a:p>
             <a:fld id="{FA90DC49-5E56-4663-BD73-6254BEC8D958}" type="datetimeFigureOut">
               <a:rPr lang="en-US" smtClean="0"/>
-              <a:t>3/26/2026</a:t>
+              <a:t>3/31/2026</a:t>
             </a:fld>
             <a:endParaRPr lang="en-US"/>
           </a:p>
@@ -698,7 +902,7 @@
           <a:p>
             <a:fld id="{F91CF8D7-B076-43C3-BFB0-F1A9323A501F}" type="slidenum">
               <a:rPr lang="en-US" smtClean="0"/>
-              <a:t>7</a:t>
+              <a:t>8</a:t>
             </a:fld>
             <a:endParaRPr lang="en-US"/>
           </a:p>
@@ -782,7 +986,7 @@
           <a:p>
             <a:fld id="{F91CF8D7-B076-43C3-BFB0-F1A9323A501F}" type="slidenum">
               <a:rPr lang="en-US" smtClean="0"/>
-              <a:t>13</a:t>
+              <a:t>16</a:t>
             </a:fld>
             <a:endParaRPr lang="en-US"/>
           </a:p>
@@ -792,6 +996,90 @@
     <p:extLst>
       <p:ext uri="{BB962C8B-B14F-4D97-AF65-F5344CB8AC3E}">
         <p14:creationId xmlns:p14="http://schemas.microsoft.com/office/powerpoint/2010/main" val="3905212767"/>
+      </p:ext>
+    </p:extLst>
+  </p:cSld>
+  <p:clrMapOvr>
+    <a:masterClrMapping/>
+  </p:clrMapOvr>
+</p:notes>
+</file>
+
+<file path=ppt/notesSlides/notesSlide3.xml><?xml version="1.0" encoding="utf-8"?>
+<p:notes xmlns:a="http://schemas.openxmlformats.org/drawingml/2006/main" xmlns:r="http://schemas.openxmlformats.org/officeDocument/2006/relationships" xmlns:p="http://schemas.openxmlformats.org/presentationml/2006/main">
+  <p:cSld>
+    <p:spTree>
+      <p:nvGrpSpPr>
+        <p:cNvPr id="1" name=""/>
+        <p:cNvGrpSpPr/>
+        <p:nvPr/>
+      </p:nvGrpSpPr>
+      <p:grpSpPr>
+        <a:xfrm>
+          <a:off x="0" y="0"/>
+          <a:ext cx="0" cy="0"/>
+          <a:chOff x="0" y="0"/>
+          <a:chExt cx="0" cy="0"/>
+        </a:xfrm>
+      </p:grpSpPr>
+      <p:sp>
+        <p:nvSpPr>
+          <p:cNvPr id="2" name="Slide Image Placeholder 1"/>
+          <p:cNvSpPr>
+            <a:spLocks noGrp="1" noRot="1" noChangeAspect="1"/>
+          </p:cNvSpPr>
+          <p:nvPr>
+            <p:ph type="sldImg"/>
+          </p:nvPr>
+        </p:nvSpPr>
+        <p:spPr/>
+      </p:sp>
+      <p:sp>
+        <p:nvSpPr>
+          <p:cNvPr id="3" name="Notes Placeholder 2"/>
+          <p:cNvSpPr>
+            <a:spLocks noGrp="1"/>
+          </p:cNvSpPr>
+          <p:nvPr>
+            <p:ph type="body" idx="1"/>
+          </p:nvPr>
+        </p:nvSpPr>
+        <p:spPr/>
+        <p:txBody>
+          <a:bodyPr/>
+          <a:lstStyle/>
+          <a:p>
+            <a:endParaRPr lang="en-US" dirty="0"/>
+          </a:p>
+        </p:txBody>
+      </p:sp>
+      <p:sp>
+        <p:nvSpPr>
+          <p:cNvPr id="4" name="Slide Number Placeholder 3"/>
+          <p:cNvSpPr>
+            <a:spLocks noGrp="1"/>
+          </p:cNvSpPr>
+          <p:nvPr>
+            <p:ph type="sldNum" sz="quarter" idx="5"/>
+          </p:nvPr>
+        </p:nvSpPr>
+        <p:spPr/>
+        <p:txBody>
+          <a:bodyPr/>
+          <a:lstStyle/>
+          <a:p>
+            <a:fld id="{F91CF8D7-B076-43C3-BFB0-F1A9323A501F}" type="slidenum">
+              <a:rPr lang="en-US" smtClean="0"/>
+              <a:t>18</a:t>
+            </a:fld>
+            <a:endParaRPr lang="en-US"/>
+          </a:p>
+        </p:txBody>
+      </p:sp>
+    </p:spTree>
+    <p:extLst>
+      <p:ext uri="{BB962C8B-B14F-4D97-AF65-F5344CB8AC3E}">
+        <p14:creationId xmlns:p14="http://schemas.microsoft.com/office/powerpoint/2010/main" val="368602053"/>
       </p:ext>
     </p:extLst>
   </p:cSld>
@@ -948,7 +1236,7 @@
           <a:p>
             <a:fld id="{059A6F5A-3024-43F4-A20E-288FCAB0A2E6}" type="datetimeFigureOut">
               <a:rPr lang="en-US" smtClean="0"/>
-              <a:t>3/26/2026</a:t>
+              <a:t>3/31/2026</a:t>
             </a:fld>
             <a:endParaRPr lang="en-US"/>
           </a:p>
@@ -1146,7 +1434,7 @@
           <a:p>
             <a:fld id="{059A6F5A-3024-43F4-A20E-288FCAB0A2E6}" type="datetimeFigureOut">
               <a:rPr lang="en-US" smtClean="0"/>
-              <a:t>3/26/2026</a:t>
+              <a:t>3/31/2026</a:t>
             </a:fld>
             <a:endParaRPr lang="en-US"/>
           </a:p>
@@ -1421,7 +1709,7 @@
           <a:p>
             <a:fld id="{059A6F5A-3024-43F4-A20E-288FCAB0A2E6}" type="datetimeFigureOut">
               <a:rPr lang="en-US" smtClean="0"/>
-              <a:t>3/26/2026</a:t>
+              <a:t>3/31/2026</a:t>
             </a:fld>
             <a:endParaRPr lang="en-US"/>
           </a:p>
@@ -1692,7 +1980,7 @@
           <a:p>
             <a:fld id="{059A6F5A-3024-43F4-A20E-288FCAB0A2E6}" type="datetimeFigureOut">
               <a:rPr lang="en-US" smtClean="0"/>
-              <a:t>3/26/2026</a:t>
+              <a:t>3/31/2026</a:t>
             </a:fld>
             <a:endParaRPr lang="en-US"/>
           </a:p>
@@ -2105,7 +2393,7 @@
           <a:p>
             <a:fld id="{059A6F5A-3024-43F4-A20E-288FCAB0A2E6}" type="datetimeFigureOut">
               <a:rPr lang="en-US" smtClean="0"/>
-              <a:t>3/26/2026</a:t>
+              <a:t>3/31/2026</a:t>
             </a:fld>
             <a:endParaRPr lang="en-US"/>
           </a:p>
@@ -2246,7 +2534,7 @@
           <a:p>
             <a:fld id="{059A6F5A-3024-43F4-A20E-288FCAB0A2E6}" type="datetimeFigureOut">
               <a:rPr lang="en-US" smtClean="0"/>
-              <a:t>3/26/2026</a:t>
+              <a:t>3/31/2026</a:t>
             </a:fld>
             <a:endParaRPr lang="en-US"/>
           </a:p>
@@ -2911,7 +3199,7 @@
           <a:p>
             <a:fld id="{059A6F5A-3024-43F4-A20E-288FCAB0A2E6}" type="datetimeFigureOut">
               <a:rPr lang="en-US" smtClean="0"/>
-              <a:t>3/26/2026</a:t>
+              <a:t>3/31/2026</a:t>
             </a:fld>
             <a:endParaRPr lang="en-US"/>
           </a:p>
@@ -3152,7 +3440,7 @@
           <a:p>
             <a:fld id="{059A6F5A-3024-43F4-A20E-288FCAB0A2E6}" type="datetimeFigureOut">
               <a:rPr lang="en-US" smtClean="0"/>
-              <a:t>3/26/2026</a:t>
+              <a:t>3/31/2026</a:t>
             </a:fld>
             <a:endParaRPr lang="en-US"/>
           </a:p>
@@ -3733,7 +4021,13 @@
   <p:cSld>
     <p:spTree>
       <p:nvGrpSpPr>
-        <p:cNvPr id="1" name=""/>
+        <p:cNvPr id="1" name="">
+          <a:extLst>
+            <a:ext uri="{FF2B5EF4-FFF2-40B4-BE49-F238E27FC236}">
+              <a16:creationId xmlns:a16="http://schemas.microsoft.com/office/drawing/2014/main" id="{890B73AD-B8EA-D737-3E9F-D93B02C78AB9}"/>
+            </a:ext>
+          </a:extLst>
+        </p:cNvPr>
         <p:cNvGrpSpPr/>
         <p:nvPr/>
       </p:nvGrpSpPr>
@@ -3747,10 +4041,10 @@
       </p:grpSpPr>
       <p:pic>
         <p:nvPicPr>
-          <p:cNvPr id="5" name="Picture 4">
-            <a:extLst>
-              <a:ext uri="{FF2B5EF4-FFF2-40B4-BE49-F238E27FC236}">
-                <a16:creationId xmlns:a16="http://schemas.microsoft.com/office/drawing/2014/main" id="{9EA6BE39-D0DD-A86A-E992-E1AF3777E11C}"/>
+          <p:cNvPr id="4" name="Picture 3">
+            <a:extLst>
+              <a:ext uri="{FF2B5EF4-FFF2-40B4-BE49-F238E27FC236}">
+                <a16:creationId xmlns:a16="http://schemas.microsoft.com/office/drawing/2014/main" id="{A16A029B-7DB0-9C10-C880-BE258DC5F68F}"/>
               </a:ext>
             </a:extLst>
           </p:cNvPr>
@@ -3761,15 +4055,15 @@
         </p:nvPicPr>
         <p:blipFill>
           <a:blip r:embed="rId2"/>
-          <a:srcRect r="235"/>
+          <a:srcRect t="7822" r="416" b="736"/>
           <a:stretch>
             <a:fillRect/>
           </a:stretch>
         </p:blipFill>
         <p:spPr>
           <a:xfrm>
-            <a:off x="318825" y="905060"/>
-            <a:ext cx="11554350" cy="5754537"/>
+            <a:off x="320704" y="921894"/>
+            <a:ext cx="11481829" cy="5710828"/>
           </a:xfrm>
           <a:prstGeom prst="rect">
             <a:avLst/>
@@ -3781,7 +4075,7 @@
           <p:cNvPr id="2" name="Title 1">
             <a:extLst>
               <a:ext uri="{FF2B5EF4-FFF2-40B4-BE49-F238E27FC236}">
-                <a16:creationId xmlns:a16="http://schemas.microsoft.com/office/drawing/2014/main" id="{9182EB8F-72DD-0E47-AF5C-098BEE44AAAC}"/>
+                <a16:creationId xmlns:a16="http://schemas.microsoft.com/office/drawing/2014/main" id="{6390E3F7-5CF7-0641-C92A-780A10592985}"/>
               </a:ext>
             </a:extLst>
           </p:cNvPr>
@@ -3792,7 +4086,12 @@
             <p:ph type="title"/>
           </p:nvPr>
         </p:nvSpPr>
-        <p:spPr/>
+        <p:spPr>
+          <a:xfrm>
+            <a:off x="2438474" y="225279"/>
+            <a:ext cx="7351272" cy="679904"/>
+          </a:xfrm>
+        </p:spPr>
         <p:txBody>
           <a:bodyPr>
             <a:normAutofit fontScale="90000"/>
@@ -3801,17 +4100,17 @@
           <a:p>
             <a:r>
               <a:rPr lang="en-US" dirty="0"/>
-              <a:t>Associate addition</a:t>
-            </a:r>
-          </a:p>
-        </p:txBody>
-      </p:sp>
-      <p:sp>
-        <p:nvSpPr>
-          <p:cNvPr id="6" name="TextBox 5">
-            <a:extLst>
-              <a:ext uri="{FF2B5EF4-FFF2-40B4-BE49-F238E27FC236}">
-                <a16:creationId xmlns:a16="http://schemas.microsoft.com/office/drawing/2014/main" id="{5556ED65-25EB-71B6-51E5-9876DB80FBE9}"/>
+              <a:t>Associate/line management page</a:t>
+            </a:r>
+          </a:p>
+        </p:txBody>
+      </p:sp>
+      <p:sp>
+        <p:nvSpPr>
+          <p:cNvPr id="11" name="TextBox 10">
+            <a:extLst>
+              <a:ext uri="{FF2B5EF4-FFF2-40B4-BE49-F238E27FC236}">
+                <a16:creationId xmlns:a16="http://schemas.microsoft.com/office/drawing/2014/main" id="{FF7A9728-3103-237E-0EC1-A6518507D228}"/>
               </a:ext>
             </a:extLst>
           </p:cNvPr>
@@ -3820,8 +4119,8 @@
         </p:nvSpPr>
         <p:spPr>
           <a:xfrm>
-            <a:off x="5574064" y="2986574"/>
-            <a:ext cx="1071127" cy="276999"/>
+            <a:off x="11835237" y="1084083"/>
+            <a:ext cx="369332" cy="5007525"/>
           </a:xfrm>
           <a:prstGeom prst="rect">
             <a:avLst/>
@@ -3829,7 +4128,7 @@
           <a:noFill/>
         </p:spPr>
         <p:txBody>
-          <a:bodyPr wrap="none" rtlCol="0">
+          <a:bodyPr vert="eaVert" wrap="none" rtlCol="0">
             <a:spAutoFit/>
           </a:bodyPr>
           <a:lstStyle/>
@@ -3843,17 +4142,17 @@
                   </a:schemeClr>
                 </a:solidFill>
               </a:rPr>
-              <a:t>Clear &amp; close</a:t>
-            </a:r>
-          </a:p>
-        </p:txBody>
-      </p:sp>
-      <p:sp>
-        <p:nvSpPr>
-          <p:cNvPr id="7" name="TextBox 6">
-            <a:extLst>
-              <a:ext uri="{FF2B5EF4-FFF2-40B4-BE49-F238E27FC236}">
-                <a16:creationId xmlns:a16="http://schemas.microsoft.com/office/drawing/2014/main" id="{DE19BCEF-B206-D49D-EE63-1599458FE230}"/>
+              <a:t>The outer scrollbar controls the page, the inner scrollbar controls the table</a:t>
+            </a:r>
+          </a:p>
+        </p:txBody>
+      </p:sp>
+      <p:sp>
+        <p:nvSpPr>
+          <p:cNvPr id="12" name="TextBox 11">
+            <a:extLst>
+              <a:ext uri="{FF2B5EF4-FFF2-40B4-BE49-F238E27FC236}">
+                <a16:creationId xmlns:a16="http://schemas.microsoft.com/office/drawing/2014/main" id="{1B8ADE77-ECD6-65CD-3324-7F1F2E56A187}"/>
               </a:ext>
             </a:extLst>
           </p:cNvPr>
@@ -3862,8 +4161,8 @@
         </p:nvSpPr>
         <p:spPr>
           <a:xfrm>
-            <a:off x="6741903" y="2986574"/>
-            <a:ext cx="1027845" cy="276999"/>
+            <a:off x="6914442" y="1434278"/>
+            <a:ext cx="2112154" cy="461665"/>
           </a:xfrm>
           <a:prstGeom prst="rect">
             <a:avLst/>
@@ -3871,7 +4170,7 @@
           <a:noFill/>
         </p:spPr>
         <p:txBody>
-          <a:bodyPr wrap="none" rtlCol="0">
+          <a:bodyPr wrap="square" rtlCol="0">
             <a:spAutoFit/>
           </a:bodyPr>
           <a:lstStyle/>
@@ -3885,17 +4184,60 @@
                   </a:schemeClr>
                 </a:solidFill>
               </a:rPr>
-              <a:t>Save &amp; close</a:t>
-            </a:r>
-          </a:p>
-        </p:txBody>
-      </p:sp>
-      <p:sp>
-        <p:nvSpPr>
-          <p:cNvPr id="8" name="TextBox 7">
-            <a:extLst>
-              <a:ext uri="{FF2B5EF4-FFF2-40B4-BE49-F238E27FC236}">
-                <a16:creationId xmlns:a16="http://schemas.microsoft.com/office/drawing/2014/main" id="{0510BBD0-CCB6-D89E-7AB6-66DF2C6387C0}"/>
+              <a:t>Opens a form to add a new associate to the database</a:t>
+            </a:r>
+          </a:p>
+        </p:txBody>
+      </p:sp>
+      <p:cxnSp>
+        <p:nvCxnSpPr>
+          <p:cNvPr id="16" name="Connector: Elbow 15">
+            <a:extLst>
+              <a:ext uri="{FF2B5EF4-FFF2-40B4-BE49-F238E27FC236}">
+                <a16:creationId xmlns:a16="http://schemas.microsoft.com/office/drawing/2014/main" id="{4F7C1CF2-6E7C-2A7B-90E5-19D9D2028133}"/>
+              </a:ext>
+            </a:extLst>
+          </p:cNvPr>
+          <p:cNvCxnSpPr>
+            <a:stCxn id="12" idx="1"/>
+          </p:cNvCxnSpPr>
+          <p:nvPr/>
+        </p:nvCxnSpPr>
+        <p:spPr>
+          <a:xfrm rot="10800000" flipV="1">
+            <a:off x="6397696" y="1665110"/>
+            <a:ext cx="516747" cy="193295"/>
+          </a:xfrm>
+          <a:prstGeom prst="bentConnector3">
+            <a:avLst>
+              <a:gd name="adj1" fmla="val 99860"/>
+            </a:avLst>
+          </a:prstGeom>
+          <a:ln>
+            <a:tailEnd type="triangle"/>
+          </a:ln>
+        </p:spPr>
+        <p:style>
+          <a:lnRef idx="2">
+            <a:schemeClr val="accent1"/>
+          </a:lnRef>
+          <a:fillRef idx="0">
+            <a:schemeClr val="accent1"/>
+          </a:fillRef>
+          <a:effectRef idx="1">
+            <a:schemeClr val="accent1"/>
+          </a:effectRef>
+          <a:fontRef idx="minor">
+            <a:schemeClr val="tx1"/>
+          </a:fontRef>
+        </p:style>
+      </p:cxnSp>
+      <p:sp>
+        <p:nvSpPr>
+          <p:cNvPr id="19" name="TextBox 18">
+            <a:extLst>
+              <a:ext uri="{FF2B5EF4-FFF2-40B4-BE49-F238E27FC236}">
+                <a16:creationId xmlns:a16="http://schemas.microsoft.com/office/drawing/2014/main" id="{83DB18DC-B1FA-8B04-740C-697C2C5701C5}"/>
               </a:ext>
             </a:extLst>
           </p:cNvPr>
@@ -3904,8 +4246,8 @@
         </p:nvSpPr>
         <p:spPr>
           <a:xfrm>
-            <a:off x="3406500" y="1549399"/>
-            <a:ext cx="7588960" cy="461665"/>
+            <a:off x="4402946" y="2272469"/>
+            <a:ext cx="3567573" cy="461665"/>
           </a:xfrm>
           <a:prstGeom prst="rect">
             <a:avLst/>
@@ -3927,17 +4269,17 @@
                   </a:schemeClr>
                 </a:solidFill>
               </a:rPr>
-              <a:t>Associates can share names but not associate/badge numbers. If you want to reuse an associate/badge number not currently in circulation, remove the old associate from the database first and you won’t have problems.</a:t>
-            </a:r>
-          </a:p>
-        </p:txBody>
-      </p:sp>
-      <p:sp>
-        <p:nvSpPr>
-          <p:cNvPr id="12" name="TextBox 11">
-            <a:extLst>
-              <a:ext uri="{FF2B5EF4-FFF2-40B4-BE49-F238E27FC236}">
-                <a16:creationId xmlns:a16="http://schemas.microsoft.com/office/drawing/2014/main" id="{6917BA2A-8D36-36B9-807E-8B66B3A3D19A}"/>
+              <a:t>Column headers can still be clicked to toggle sorts (default by associate number ascending)</a:t>
+            </a:r>
+          </a:p>
+        </p:txBody>
+      </p:sp>
+      <p:sp>
+        <p:nvSpPr>
+          <p:cNvPr id="20" name="TextBox 19">
+            <a:extLst>
+              <a:ext uri="{FF2B5EF4-FFF2-40B4-BE49-F238E27FC236}">
+                <a16:creationId xmlns:a16="http://schemas.microsoft.com/office/drawing/2014/main" id="{3C72975A-6542-D518-3842-185B9C0DD359}"/>
               </a:ext>
             </a:extLst>
           </p:cNvPr>
@@ -3946,8 +4288,8 @@
         </p:nvSpPr>
         <p:spPr>
           <a:xfrm>
-            <a:off x="2335373" y="2514729"/>
-            <a:ext cx="3299620" cy="646331"/>
+            <a:off x="8632133" y="3015003"/>
+            <a:ext cx="1642822" cy="276999"/>
           </a:xfrm>
           <a:prstGeom prst="rect">
             <a:avLst/>
@@ -3955,7 +4297,7 @@
           <a:noFill/>
         </p:spPr>
         <p:txBody>
-          <a:bodyPr wrap="square" rtlCol="0">
+          <a:bodyPr wrap="none" rtlCol="0">
             <a:spAutoFit/>
           </a:bodyPr>
           <a:lstStyle/>
@@ -3969,17 +4311,58 @@
                   </a:schemeClr>
                 </a:solidFill>
               </a:rPr>
-              <a:t>These validators trigger immediately when you click away or try to submit. To remove them, fix their problem, then click away/submit again.</a:t>
-            </a:r>
-          </a:p>
-        </p:txBody>
-      </p:sp>
-      <p:sp>
-        <p:nvSpPr>
-          <p:cNvPr id="13" name="TextBox 12">
-            <a:extLst>
-              <a:ext uri="{FF2B5EF4-FFF2-40B4-BE49-F238E27FC236}">
-                <a16:creationId xmlns:a16="http://schemas.microsoft.com/office/drawing/2014/main" id="{8945131A-97A9-4359-FDB1-431A8108035A}"/>
+              <a:t>Show authorized lines</a:t>
+            </a:r>
+          </a:p>
+        </p:txBody>
+      </p:sp>
+      <p:cxnSp>
+        <p:nvCxnSpPr>
+          <p:cNvPr id="22" name="Straight Arrow Connector 21">
+            <a:extLst>
+              <a:ext uri="{FF2B5EF4-FFF2-40B4-BE49-F238E27FC236}">
+                <a16:creationId xmlns:a16="http://schemas.microsoft.com/office/drawing/2014/main" id="{3BD0BC8D-DB71-815D-5289-455C1BEECE2E}"/>
+              </a:ext>
+            </a:extLst>
+          </p:cNvPr>
+          <p:cNvCxnSpPr>
+            <a:stCxn id="20" idx="3"/>
+          </p:cNvCxnSpPr>
+          <p:nvPr/>
+        </p:nvCxnSpPr>
+        <p:spPr>
+          <a:xfrm flipV="1">
+            <a:off x="10274955" y="3152001"/>
+            <a:ext cx="139393" cy="1502"/>
+          </a:xfrm>
+          <a:prstGeom prst="straightConnector1">
+            <a:avLst/>
+          </a:prstGeom>
+          <a:ln>
+            <a:tailEnd type="triangle"/>
+          </a:ln>
+        </p:spPr>
+        <p:style>
+          <a:lnRef idx="2">
+            <a:schemeClr val="accent1"/>
+          </a:lnRef>
+          <a:fillRef idx="0">
+            <a:schemeClr val="accent1"/>
+          </a:fillRef>
+          <a:effectRef idx="1">
+            <a:schemeClr val="accent1"/>
+          </a:effectRef>
+          <a:fontRef idx="minor">
+            <a:schemeClr val="tx1"/>
+          </a:fontRef>
+        </p:style>
+      </p:cxnSp>
+      <p:sp>
+        <p:nvSpPr>
+          <p:cNvPr id="23" name="TextBox 22">
+            <a:extLst>
+              <a:ext uri="{FF2B5EF4-FFF2-40B4-BE49-F238E27FC236}">
+                <a16:creationId xmlns:a16="http://schemas.microsoft.com/office/drawing/2014/main" id="{4B718289-575D-5AB9-637C-843162FB7DB0}"/>
               </a:ext>
             </a:extLst>
           </p:cNvPr>
@@ -3988,8 +4371,8 @@
         </p:nvSpPr>
         <p:spPr>
           <a:xfrm>
-            <a:off x="7866460" y="2709575"/>
-            <a:ext cx="3596534" cy="461665"/>
+            <a:off x="8609280" y="3429000"/>
+            <a:ext cx="1426615" cy="461665"/>
           </a:xfrm>
           <a:prstGeom prst="rect">
             <a:avLst/>
@@ -4011,15 +4394,59 @@
                   </a:schemeClr>
                 </a:solidFill>
               </a:rPr>
-              <a:t>If the ‘Save Associate’ button closes the form without complaint, the save was successful</a:t>
-            </a:r>
-          </a:p>
-        </p:txBody>
-      </p:sp>
+              <a:t>Remove associate from database</a:t>
+            </a:r>
+          </a:p>
+        </p:txBody>
+      </p:sp>
+      <p:cxnSp>
+        <p:nvCxnSpPr>
+          <p:cNvPr id="25" name="Connector: Elbow 24">
+            <a:extLst>
+              <a:ext uri="{FF2B5EF4-FFF2-40B4-BE49-F238E27FC236}">
+                <a16:creationId xmlns:a16="http://schemas.microsoft.com/office/drawing/2014/main" id="{42F98A8D-3C62-763E-1DE5-067FC9D045CD}"/>
+              </a:ext>
+            </a:extLst>
+          </p:cNvPr>
+          <p:cNvCxnSpPr>
+            <a:cxnSpLocks/>
+            <a:stCxn id="23" idx="3"/>
+          </p:cNvCxnSpPr>
+          <p:nvPr/>
+        </p:nvCxnSpPr>
+        <p:spPr>
+          <a:xfrm>
+            <a:off x="10035895" y="3659833"/>
+            <a:ext cx="707066" cy="93831"/>
+          </a:xfrm>
+          <a:prstGeom prst="bentConnector3">
+            <a:avLst>
+              <a:gd name="adj1" fmla="val 99843"/>
+            </a:avLst>
+          </a:prstGeom>
+          <a:ln>
+            <a:tailEnd type="triangle"/>
+          </a:ln>
+        </p:spPr>
+        <p:style>
+          <a:lnRef idx="2">
+            <a:schemeClr val="accent1"/>
+          </a:lnRef>
+          <a:fillRef idx="0">
+            <a:schemeClr val="accent1"/>
+          </a:fillRef>
+          <a:effectRef idx="1">
+            <a:schemeClr val="accent1"/>
+          </a:effectRef>
+          <a:fontRef idx="minor">
+            <a:schemeClr val="tx1"/>
+          </a:fontRef>
+        </p:style>
+      </p:cxnSp>
     </p:spTree>
     <p:extLst>
       <p:ext uri="{BB962C8B-B14F-4D97-AF65-F5344CB8AC3E}">
-        <p14:creationId xmlns:p14="http://schemas.microsoft.com/office/powerpoint/2010/main" val="3541067779"/>
+        <p14:creationId xmlns:p14="http://schemas.microsoft.com/office/powerpoint/2010/main" val="56508089"/>
       </p:ext>
     </p:extLst>
   </p:cSld>
@@ -4046,42 +4473,12 @@
           <a:chExt cx="0" cy="0"/>
         </a:xfrm>
       </p:grpSpPr>
-      <p:sp>
-        <p:nvSpPr>
-          <p:cNvPr id="2" name="Title 1">
-            <a:extLst>
-              <a:ext uri="{FF2B5EF4-FFF2-40B4-BE49-F238E27FC236}">
-                <a16:creationId xmlns:a16="http://schemas.microsoft.com/office/drawing/2014/main" id="{A63A7C61-1230-B8AB-E571-77D57ECCDCB4}"/>
-              </a:ext>
-            </a:extLst>
-          </p:cNvPr>
-          <p:cNvSpPr>
-            <a:spLocks noGrp="1"/>
-          </p:cNvSpPr>
-          <p:nvPr>
-            <p:ph type="title"/>
-          </p:nvPr>
-        </p:nvSpPr>
-        <p:spPr/>
-        <p:txBody>
-          <a:bodyPr>
-            <a:normAutofit fontScale="90000"/>
-          </a:bodyPr>
-          <a:lstStyle/>
-          <a:p>
-            <a:r>
-              <a:rPr lang="en-US" dirty="0"/>
-              <a:t>Associate removal</a:t>
-            </a:r>
-          </a:p>
-        </p:txBody>
-      </p:sp>
       <p:pic>
         <p:nvPicPr>
-          <p:cNvPr id="5" name="Picture 4">
-            <a:extLst>
-              <a:ext uri="{FF2B5EF4-FFF2-40B4-BE49-F238E27FC236}">
-                <a16:creationId xmlns:a16="http://schemas.microsoft.com/office/drawing/2014/main" id="{CFAEF014-7925-8A23-F5A1-D4BA750B0829}"/>
+          <p:cNvPr id="4" name="Picture 3">
+            <a:extLst>
+              <a:ext uri="{FF2B5EF4-FFF2-40B4-BE49-F238E27FC236}">
+                <a16:creationId xmlns:a16="http://schemas.microsoft.com/office/drawing/2014/main" id="{5F8CC8BC-82A4-B663-ED6E-E8B7C2CE038D}"/>
               </a:ext>
             </a:extLst>
           </p:cNvPr>
@@ -4098,8 +4495,8 @@
         </p:blipFill>
         <p:spPr>
           <a:xfrm>
-            <a:off x="205073" y="982502"/>
-            <a:ext cx="11781854" cy="5875498"/>
+            <a:off x="318825" y="905060"/>
+            <a:ext cx="11554350" cy="5762059"/>
           </a:xfrm>
           <a:prstGeom prst="rect">
             <a:avLst/>
@@ -4108,10 +4505,40 @@
       </p:pic>
       <p:sp>
         <p:nvSpPr>
+          <p:cNvPr id="2" name="Title 1">
+            <a:extLst>
+              <a:ext uri="{FF2B5EF4-FFF2-40B4-BE49-F238E27FC236}">
+                <a16:creationId xmlns:a16="http://schemas.microsoft.com/office/drawing/2014/main" id="{9182EB8F-72DD-0E47-AF5C-098BEE44AAAC}"/>
+              </a:ext>
+            </a:extLst>
+          </p:cNvPr>
+          <p:cNvSpPr>
+            <a:spLocks noGrp="1"/>
+          </p:cNvSpPr>
+          <p:nvPr>
+            <p:ph type="title"/>
+          </p:nvPr>
+        </p:nvSpPr>
+        <p:spPr/>
+        <p:txBody>
+          <a:bodyPr>
+            <a:normAutofit fontScale="90000"/>
+          </a:bodyPr>
+          <a:lstStyle/>
+          <a:p>
+            <a:r>
+              <a:rPr lang="en-US" dirty="0"/>
+              <a:t>Associate addition</a:t>
+            </a:r>
+          </a:p>
+        </p:txBody>
+      </p:sp>
+      <p:sp>
+        <p:nvSpPr>
           <p:cNvPr id="6" name="TextBox 5">
             <a:extLst>
               <a:ext uri="{FF2B5EF4-FFF2-40B4-BE49-F238E27FC236}">
-                <a16:creationId xmlns:a16="http://schemas.microsoft.com/office/drawing/2014/main" id="{5B355B17-5827-137C-FC0C-D6D3C1F492CE}"/>
+                <a16:creationId xmlns:a16="http://schemas.microsoft.com/office/drawing/2014/main" id="{5556ED65-25EB-71B6-51E5-9876DB80FBE9}"/>
               </a:ext>
             </a:extLst>
           </p:cNvPr>
@@ -4120,8 +4547,8 @@
         </p:nvSpPr>
         <p:spPr>
           <a:xfrm>
-            <a:off x="6280150" y="1781175"/>
-            <a:ext cx="1476430" cy="276999"/>
+            <a:off x="5024873" y="2848074"/>
+            <a:ext cx="1071127" cy="276999"/>
           </a:xfrm>
           <a:prstGeom prst="rect">
             <a:avLst/>
@@ -4143,56 +4570,17 @@
                   </a:schemeClr>
                 </a:solidFill>
               </a:rPr>
-              <a:t>Removes associate</a:t>
-            </a:r>
-          </a:p>
-        </p:txBody>
-      </p:sp>
-      <p:cxnSp>
-        <p:nvCxnSpPr>
-          <p:cNvPr id="8" name="Straight Arrow Connector 7">
-            <a:extLst>
-              <a:ext uri="{FF2B5EF4-FFF2-40B4-BE49-F238E27FC236}">
-                <a16:creationId xmlns:a16="http://schemas.microsoft.com/office/drawing/2014/main" id="{FD0DF0E5-2CA6-9590-DC9A-466484D34516}"/>
-              </a:ext>
-            </a:extLst>
-          </p:cNvPr>
-          <p:cNvCxnSpPr/>
-          <p:nvPr/>
-        </p:nvCxnSpPr>
-        <p:spPr>
-          <a:xfrm>
-            <a:off x="7023100" y="2066925"/>
-            <a:ext cx="212725" cy="174625"/>
-          </a:xfrm>
-          <a:prstGeom prst="straightConnector1">
-            <a:avLst/>
-          </a:prstGeom>
-          <a:ln>
-            <a:tailEnd type="triangle"/>
-          </a:ln>
-        </p:spPr>
-        <p:style>
-          <a:lnRef idx="2">
-            <a:schemeClr val="accent1"/>
-          </a:lnRef>
-          <a:fillRef idx="0">
-            <a:schemeClr val="accent1"/>
-          </a:fillRef>
-          <a:effectRef idx="1">
-            <a:schemeClr val="accent1"/>
-          </a:effectRef>
-          <a:fontRef idx="minor">
-            <a:schemeClr val="tx1"/>
-          </a:fontRef>
-        </p:style>
-      </p:cxnSp>
-      <p:sp>
-        <p:nvSpPr>
-          <p:cNvPr id="10" name="TextBox 9">
-            <a:extLst>
-              <a:ext uri="{FF2B5EF4-FFF2-40B4-BE49-F238E27FC236}">
-                <a16:creationId xmlns:a16="http://schemas.microsoft.com/office/drawing/2014/main" id="{105ABAF5-9FF0-6FD9-0180-124F59775D74}"/>
+              <a:t>Clear &amp; close</a:t>
+            </a:r>
+          </a:p>
+        </p:txBody>
+      </p:sp>
+      <p:sp>
+        <p:nvSpPr>
+          <p:cNvPr id="7" name="TextBox 6">
+            <a:extLst>
+              <a:ext uri="{FF2B5EF4-FFF2-40B4-BE49-F238E27FC236}">
+                <a16:creationId xmlns:a16="http://schemas.microsoft.com/office/drawing/2014/main" id="{DE19BCEF-B206-D49D-EE63-1599458FE230}"/>
               </a:ext>
             </a:extLst>
           </p:cNvPr>
@@ -4201,8 +4589,8 @@
         </p:nvSpPr>
         <p:spPr>
           <a:xfrm>
-            <a:off x="6540157" y="1209675"/>
-            <a:ext cx="956416" cy="276999"/>
+            <a:off x="6096000" y="2852605"/>
+            <a:ext cx="1616148" cy="276999"/>
           </a:xfrm>
           <a:prstGeom prst="rect">
             <a:avLst/>
@@ -4224,17 +4612,17 @@
                   </a:schemeClr>
                 </a:solidFill>
               </a:rPr>
-              <a:t>Also cancel</a:t>
-            </a:r>
-          </a:p>
-        </p:txBody>
-      </p:sp>
-      <p:sp>
-        <p:nvSpPr>
-          <p:cNvPr id="11" name="TextBox 10">
-            <a:extLst>
-              <a:ext uri="{FF2B5EF4-FFF2-40B4-BE49-F238E27FC236}">
-                <a16:creationId xmlns:a16="http://schemas.microsoft.com/office/drawing/2014/main" id="{6FB2B785-C61A-7AE6-6A29-978411FFDC4D}"/>
+              <a:t>Save (&amp; clear) &amp; close</a:t>
+            </a:r>
+          </a:p>
+        </p:txBody>
+      </p:sp>
+      <p:sp>
+        <p:nvSpPr>
+          <p:cNvPr id="8" name="TextBox 7">
+            <a:extLst>
+              <a:ext uri="{FF2B5EF4-FFF2-40B4-BE49-F238E27FC236}">
+                <a16:creationId xmlns:a16="http://schemas.microsoft.com/office/drawing/2014/main" id="{0510BBD0-CCB6-D89E-7AB6-66DF2C6387C0}"/>
               </a:ext>
             </a:extLst>
           </p:cNvPr>
@@ -4243,8 +4631,8 @@
         </p:nvSpPr>
         <p:spPr>
           <a:xfrm>
-            <a:off x="5095715" y="2214175"/>
-            <a:ext cx="1237839" cy="276999"/>
+            <a:off x="2301520" y="1274137"/>
+            <a:ext cx="7588960" cy="461665"/>
           </a:xfrm>
           <a:prstGeom prst="rect">
             <a:avLst/>
@@ -4252,7 +4640,7 @@
           <a:noFill/>
         </p:spPr>
         <p:txBody>
-          <a:bodyPr wrap="none" rtlCol="0">
+          <a:bodyPr wrap="square" rtlCol="0">
             <a:spAutoFit/>
           </a:bodyPr>
           <a:lstStyle/>
@@ -4266,7 +4654,7 @@
                   </a:schemeClr>
                 </a:solidFill>
               </a:rPr>
-              <a:t>Cancel deletion</a:t>
+              <a:t>Associates can share names, but not associate/badge numbers. If you want to reuse an associate/badge number not currently in circulation, remove the old associate from the database first and you won’t have problems.</a:t>
             </a:r>
           </a:p>
         </p:txBody>
@@ -4276,7 +4664,7 @@
           <p:cNvPr id="12" name="TextBox 11">
             <a:extLst>
               <a:ext uri="{FF2B5EF4-FFF2-40B4-BE49-F238E27FC236}">
-                <a16:creationId xmlns:a16="http://schemas.microsoft.com/office/drawing/2014/main" id="{AA6EF203-5F9A-E697-28BD-A26ED62CEAE8}"/>
+                <a16:creationId xmlns:a16="http://schemas.microsoft.com/office/drawing/2014/main" id="{6917BA2A-8D36-36B9-807E-8B66B3A3D19A}"/>
               </a:ext>
             </a:extLst>
           </p:cNvPr>
@@ -4285,8 +4673,8 @@
         </p:nvSpPr>
         <p:spPr>
           <a:xfrm>
-            <a:off x="4697217" y="4616451"/>
-            <a:ext cx="3685880" cy="646331"/>
+            <a:off x="934769" y="2478742"/>
+            <a:ext cx="4229113" cy="646331"/>
           </a:xfrm>
           <a:prstGeom prst="rect">
             <a:avLst/>
@@ -4300,8 +4688,57 @@
           <a:lstStyle/>
           <a:p>
             <a:r>
-              <a:rPr lang="en-US" dirty="0"/>
-              <a:t>This is what you see when you press the trash can for an associate</a:t>
+              <a:rPr lang="en-US" sz="1200" dirty="0">
+                <a:solidFill>
+                  <a:schemeClr val="accent5">
+                    <a:lumMod val="60000"/>
+                    <a:lumOff val="40000"/>
+                  </a:schemeClr>
+                </a:solidFill>
+              </a:rPr>
+              <a:t>These validators trigger immediately when you click away or try to submit. To remove them, fix their problem, then click away/submit again.</a:t>
+            </a:r>
+          </a:p>
+        </p:txBody>
+      </p:sp>
+      <p:sp>
+        <p:nvSpPr>
+          <p:cNvPr id="13" name="TextBox 12">
+            <a:extLst>
+              <a:ext uri="{FF2B5EF4-FFF2-40B4-BE49-F238E27FC236}">
+                <a16:creationId xmlns:a16="http://schemas.microsoft.com/office/drawing/2014/main" id="{8945131A-97A9-4359-FDB1-431A8108035A}"/>
+              </a:ext>
+            </a:extLst>
+          </p:cNvPr>
+          <p:cNvSpPr txBox="1"/>
+          <p:nvPr/>
+        </p:nvSpPr>
+        <p:spPr>
+          <a:xfrm>
+            <a:off x="8675816" y="2478742"/>
+            <a:ext cx="2319644" cy="461665"/>
+          </a:xfrm>
+          <a:prstGeom prst="rect">
+            <a:avLst/>
+          </a:prstGeom>
+          <a:noFill/>
+        </p:spPr>
+        <p:txBody>
+          <a:bodyPr wrap="square" rtlCol="0">
+            <a:spAutoFit/>
+          </a:bodyPr>
+          <a:lstStyle/>
+          <a:p>
+            <a:r>
+              <a:rPr lang="en-US" sz="1200" dirty="0">
+                <a:solidFill>
+                  <a:schemeClr val="accent5">
+                    <a:lumMod val="60000"/>
+                    <a:lumOff val="40000"/>
+                  </a:schemeClr>
+                </a:solidFill>
+              </a:rPr>
+              <a:t>See the next page for what a successful addition looks like.</a:t>
             </a:r>
           </a:p>
         </p:txBody>
@@ -4309,7 +4746,7 @@
     </p:spTree>
     <p:extLst>
       <p:ext uri="{BB962C8B-B14F-4D97-AF65-F5344CB8AC3E}">
-        <p14:creationId xmlns:p14="http://schemas.microsoft.com/office/powerpoint/2010/main" val="1577836970"/>
+        <p14:creationId xmlns:p14="http://schemas.microsoft.com/office/powerpoint/2010/main" val="3541067779"/>
       </p:ext>
     </p:extLst>
   </p:cSld>
@@ -4336,12 +4773,43 @@
           <a:chExt cx="0" cy="0"/>
         </a:xfrm>
       </p:grpSpPr>
+      <p:pic>
+        <p:nvPicPr>
+          <p:cNvPr id="4" name="Picture 3">
+            <a:extLst>
+              <a:ext uri="{FF2B5EF4-FFF2-40B4-BE49-F238E27FC236}">
+                <a16:creationId xmlns:a16="http://schemas.microsoft.com/office/drawing/2014/main" id="{7ADC421D-5E02-6EA1-2A70-828E2AFDCDD1}"/>
+              </a:ext>
+            </a:extLst>
+          </p:cNvPr>
+          <p:cNvPicPr>
+            <a:picLocks noChangeAspect="1"/>
+          </p:cNvPicPr>
+          <p:nvPr/>
+        </p:nvPicPr>
+        <p:blipFill>
+          <a:blip r:embed="rId2"/>
+          <a:srcRect l="-1" t="8750" r="261" b="673"/>
+          <a:stretch>
+            <a:fillRect/>
+          </a:stretch>
+        </p:blipFill>
+        <p:spPr>
+          <a:xfrm>
+            <a:off x="297873" y="905060"/>
+            <a:ext cx="11702659" cy="5756608"/>
+          </a:xfrm>
+          <a:prstGeom prst="rect">
+            <a:avLst/>
+          </a:prstGeom>
+        </p:spPr>
+      </p:pic>
       <p:sp>
         <p:nvSpPr>
           <p:cNvPr id="2" name="Title 1">
             <a:extLst>
               <a:ext uri="{FF2B5EF4-FFF2-40B4-BE49-F238E27FC236}">
-                <a16:creationId xmlns:a16="http://schemas.microsoft.com/office/drawing/2014/main" id="{3AA51164-EDB6-8F53-E615-921A11EA9D98}"/>
+                <a16:creationId xmlns:a16="http://schemas.microsoft.com/office/drawing/2014/main" id="{3D902F91-27AD-A88E-E82C-E7AEE3658EF3}"/>
               </a:ext>
             </a:extLst>
           </p:cNvPr>
@@ -4361,49 +4829,17 @@
           <a:p>
             <a:r>
               <a:rPr lang="en-US" dirty="0"/>
-              <a:t>Empty search</a:t>
-            </a:r>
-          </a:p>
-        </p:txBody>
-      </p:sp>
-      <p:pic>
-        <p:nvPicPr>
-          <p:cNvPr id="5" name="Content Placeholder 4">
-            <a:extLst>
-              <a:ext uri="{FF2B5EF4-FFF2-40B4-BE49-F238E27FC236}">
-                <a16:creationId xmlns:a16="http://schemas.microsoft.com/office/drawing/2014/main" id="{FB8CBB77-EC6C-817A-7972-ECD3443EDEF6}"/>
-              </a:ext>
-            </a:extLst>
-          </p:cNvPr>
-          <p:cNvPicPr>
-            <a:picLocks noGrp="1" noChangeAspect="1"/>
-          </p:cNvPicPr>
-          <p:nvPr>
-            <p:ph idx="1"/>
-          </p:nvPr>
-        </p:nvPicPr>
-        <p:blipFill>
-          <a:blip r:embed="rId2"/>
-          <a:stretch>
-            <a:fillRect/>
-          </a:stretch>
-        </p:blipFill>
-        <p:spPr>
-          <a:xfrm>
-            <a:off x="291790" y="905060"/>
-            <a:ext cx="11557703" cy="5658082"/>
-          </a:xfrm>
-          <a:prstGeom prst="rect">
-            <a:avLst/>
-          </a:prstGeom>
-        </p:spPr>
-      </p:pic>
+              <a:t>Successful associate addition</a:t>
+            </a:r>
+          </a:p>
+        </p:txBody>
+      </p:sp>
       <p:sp>
         <p:nvSpPr>
           <p:cNvPr id="6" name="TextBox 5">
             <a:extLst>
               <a:ext uri="{FF2B5EF4-FFF2-40B4-BE49-F238E27FC236}">
-                <a16:creationId xmlns:a16="http://schemas.microsoft.com/office/drawing/2014/main" id="{65A6567E-7C20-8A36-8CDF-2CC60C1D1648}"/>
+                <a16:creationId xmlns:a16="http://schemas.microsoft.com/office/drawing/2014/main" id="{E126F708-8B49-6C0A-10B1-D81B06091C5C}"/>
               </a:ext>
             </a:extLst>
           </p:cNvPr>
@@ -4412,8 +4848,8 @@
         </p:nvSpPr>
         <p:spPr>
           <a:xfrm>
-            <a:off x="2584579" y="3059668"/>
-            <a:ext cx="7766052" cy="646331"/>
+            <a:off x="8493550" y="905060"/>
+            <a:ext cx="3176833" cy="461665"/>
           </a:xfrm>
           <a:prstGeom prst="rect">
             <a:avLst/>
@@ -4427,16 +4863,15 @@
           <a:lstStyle/>
           <a:p>
             <a:r>
-              <a:rPr lang="en-US" dirty="0"/>
-              <a:t>If you made it here, try a different search, or hit the X button in the search bar to clear it and show the full table. The back button will </a:t>
-            </a:r>
-            <a:r>
-              <a:rPr lang="en-US" b="1" dirty="0"/>
-              <a:t>not</a:t>
-            </a:r>
-            <a:r>
-              <a:rPr lang="en-US" dirty="0"/>
-              <a:t> do the same thing.</a:t>
+              <a:rPr lang="en-US" sz="1200" dirty="0">
+                <a:solidFill>
+                  <a:schemeClr val="accent5">
+                    <a:lumMod val="60000"/>
+                    <a:lumOff val="40000"/>
+                  </a:schemeClr>
+                </a:solidFill>
+              </a:rPr>
+              <a:t>Fun fact: the message that briefly appears on success is called a toast</a:t>
             </a:r>
           </a:p>
         </p:txBody>
@@ -4446,7 +4881,7 @@
           <p:cNvPr id="7" name="TextBox 6">
             <a:extLst>
               <a:ext uri="{FF2B5EF4-FFF2-40B4-BE49-F238E27FC236}">
-                <a16:creationId xmlns:a16="http://schemas.microsoft.com/office/drawing/2014/main" id="{E8EEF93A-E27D-917F-0EC6-E9445DBCE143}"/>
+                <a16:creationId xmlns:a16="http://schemas.microsoft.com/office/drawing/2014/main" id="{97137BB4-B7D6-B553-5130-9D37B0202013}"/>
               </a:ext>
             </a:extLst>
           </p:cNvPr>
@@ -4455,13 +4890,17 @@
         </p:nvSpPr>
         <p:spPr>
           <a:xfrm>
-            <a:off x="2584579" y="3970404"/>
-            <a:ext cx="8581067" cy="1200329"/>
-          </a:xfrm>
-          <a:prstGeom prst="rect">
-            <a:avLst/>
-          </a:prstGeom>
-          <a:noFill/>
+            <a:off x="6014301" y="5882325"/>
+            <a:ext cx="5524009" cy="461665"/>
+          </a:xfrm>
+          <a:prstGeom prst="rect">
+            <a:avLst/>
+          </a:prstGeom>
+          <a:solidFill>
+            <a:schemeClr val="bg1">
+              <a:lumMod val="95000"/>
+            </a:schemeClr>
+          </a:solidFill>
         </p:spPr>
         <p:txBody>
           <a:bodyPr wrap="square" rtlCol="0">
@@ -4470,8 +4909,15 @@
           <a:lstStyle/>
           <a:p>
             <a:r>
-              <a:rPr lang="en-US" dirty="0"/>
-              <a:t>The most likely reason you come here is that you’re searching for a badge number, which this tool does not support (placeholder tells you it works for name &amp; associate number). If you really need to search by badge number, you’ll have to sort by it and navigate through pages until you find the one you’re looking for.</a:t>
+              <a:rPr lang="en-US" sz="1200" dirty="0">
+                <a:solidFill>
+                  <a:schemeClr val="accent5">
+                    <a:lumMod val="60000"/>
+                    <a:lumOff val="40000"/>
+                  </a:schemeClr>
+                </a:solidFill>
+              </a:rPr>
+              <a:t>As a rule of thumb, if the app doesn’t yell at you and the form closes, it worked. But in case you’re not convinced, you’ll see a little message telling you it worked.</a:t>
             </a:r>
           </a:p>
         </p:txBody>
@@ -4479,7 +4925,7 @@
     </p:spTree>
     <p:extLst>
       <p:ext uri="{BB962C8B-B14F-4D97-AF65-F5344CB8AC3E}">
-        <p14:creationId xmlns:p14="http://schemas.microsoft.com/office/powerpoint/2010/main" val="4137292513"/>
+        <p14:creationId xmlns:p14="http://schemas.microsoft.com/office/powerpoint/2010/main" val="3514542878"/>
       </p:ext>
     </p:extLst>
   </p:cSld>
@@ -4508,10 +4954,10 @@
       </p:grpSpPr>
       <p:pic>
         <p:nvPicPr>
-          <p:cNvPr id="30" name="Picture 29">
-            <a:extLst>
-              <a:ext uri="{FF2B5EF4-FFF2-40B4-BE49-F238E27FC236}">
-                <a16:creationId xmlns:a16="http://schemas.microsoft.com/office/drawing/2014/main" id="{93C08894-F122-E6BE-01D1-9190D61F1254}"/>
+          <p:cNvPr id="5" name="Picture 4">
+            <a:extLst>
+              <a:ext uri="{FF2B5EF4-FFF2-40B4-BE49-F238E27FC236}">
+                <a16:creationId xmlns:a16="http://schemas.microsoft.com/office/drawing/2014/main" id="{336AB0DF-C780-29C1-C23B-5B00178AB574}"/>
               </a:ext>
             </a:extLst>
           </p:cNvPr>
@@ -4521,15 +4967,16 @@
           <p:nvPr/>
         </p:nvPicPr>
         <p:blipFill>
-          <a:blip r:embed="rId3"/>
+          <a:blip r:embed="rId2"/>
+          <a:srcRect t="7885" r="365" b="889"/>
           <a:stretch>
             <a:fillRect/>
           </a:stretch>
         </p:blipFill>
         <p:spPr>
           <a:xfrm>
-            <a:off x="312738" y="905060"/>
-            <a:ext cx="11555411" cy="5744483"/>
+            <a:off x="237554" y="982503"/>
+            <a:ext cx="11749373" cy="5827088"/>
           </a:xfrm>
           <a:prstGeom prst="rect">
             <a:avLst/>
@@ -4541,7 +4988,7 @@
           <p:cNvPr id="2" name="Title 1">
             <a:extLst>
               <a:ext uri="{FF2B5EF4-FFF2-40B4-BE49-F238E27FC236}">
-                <a16:creationId xmlns:a16="http://schemas.microsoft.com/office/drawing/2014/main" id="{2539BB20-DEF8-1F66-7EA7-0F3F67627279}"/>
+                <a16:creationId xmlns:a16="http://schemas.microsoft.com/office/drawing/2014/main" id="{A63A7C61-1230-B8AB-E571-77D57ECCDCB4}"/>
               </a:ext>
             </a:extLst>
           </p:cNvPr>
@@ -4561,7 +5008,7 @@
           <a:p>
             <a:r>
               <a:rPr lang="en-US" dirty="0"/>
-              <a:t>Line management</a:t>
+              <a:t>Associate removal</a:t>
             </a:r>
           </a:p>
         </p:txBody>
@@ -4571,7 +5018,7 @@
           <p:cNvPr id="6" name="TextBox 5">
             <a:extLst>
               <a:ext uri="{FF2B5EF4-FFF2-40B4-BE49-F238E27FC236}">
-                <a16:creationId xmlns:a16="http://schemas.microsoft.com/office/drawing/2014/main" id="{DACDD0D9-E40D-3C98-1F95-3AD21540207D}"/>
+                <a16:creationId xmlns:a16="http://schemas.microsoft.com/office/drawing/2014/main" id="{5B355B17-5827-137C-FC0C-D6D3C1F492CE}"/>
               </a:ext>
             </a:extLst>
           </p:cNvPr>
@@ -4580,8 +5027,8 @@
         </p:nvSpPr>
         <p:spPr>
           <a:xfrm>
-            <a:off x="4667250" y="905060"/>
-            <a:ext cx="3028950" cy="646331"/>
+            <a:off x="6280150" y="1937176"/>
+            <a:ext cx="1476430" cy="276999"/>
           </a:xfrm>
           <a:prstGeom prst="rect">
             <a:avLst/>
@@ -4589,7 +5036,7 @@
           <a:noFill/>
         </p:spPr>
         <p:txBody>
-          <a:bodyPr wrap="square" rtlCol="0">
+          <a:bodyPr wrap="none" rtlCol="0">
             <a:spAutoFit/>
           </a:bodyPr>
           <a:lstStyle/>
@@ -4603,160 +5050,30 @@
                   </a:schemeClr>
                 </a:solidFill>
               </a:rPr>
-              <a:t>Pressing the three lines next to an associate opens a split screen view showing their authorized lines on the right </a:t>
-            </a:r>
-          </a:p>
-        </p:txBody>
-      </p:sp>
-      <p:sp>
-        <p:nvSpPr>
-          <p:cNvPr id="7" name="TextBox 6">
-            <a:extLst>
-              <a:ext uri="{FF2B5EF4-FFF2-40B4-BE49-F238E27FC236}">
-                <a16:creationId xmlns:a16="http://schemas.microsoft.com/office/drawing/2014/main" id="{1F583A37-9B56-E192-8578-0BAFB6FB86A3}"/>
-              </a:ext>
-            </a:extLst>
-          </p:cNvPr>
-          <p:cNvSpPr txBox="1"/>
-          <p:nvPr/>
-        </p:nvSpPr>
-        <p:spPr>
-          <a:xfrm>
-            <a:off x="4143375" y="2629375"/>
-            <a:ext cx="1619250" cy="646331"/>
-          </a:xfrm>
-          <a:prstGeom prst="rect">
-            <a:avLst/>
-          </a:prstGeom>
-          <a:noFill/>
-        </p:spPr>
-        <p:txBody>
-          <a:bodyPr wrap="square" rtlCol="0">
-            <a:spAutoFit/>
-          </a:bodyPr>
-          <a:lstStyle/>
-          <a:p>
-            <a:r>
-              <a:rPr lang="en-US" sz="1200" dirty="0">
-                <a:solidFill>
-                  <a:schemeClr val="accent5">
-                    <a:lumMod val="60000"/>
-                    <a:lumOff val="40000"/>
-                  </a:schemeClr>
-                </a:solidFill>
-              </a:rPr>
-              <a:t>Pressing the expand button highlights the target associate’s row</a:t>
-            </a:r>
-          </a:p>
-        </p:txBody>
-      </p:sp>
-      <p:sp>
-        <p:nvSpPr>
-          <p:cNvPr id="8" name="TextBox 7">
-            <a:extLst>
-              <a:ext uri="{FF2B5EF4-FFF2-40B4-BE49-F238E27FC236}">
-                <a16:creationId xmlns:a16="http://schemas.microsoft.com/office/drawing/2014/main" id="{FDE01C86-68FA-E765-74F0-9D9772AE07EC}"/>
-              </a:ext>
-            </a:extLst>
-          </p:cNvPr>
-          <p:cNvSpPr txBox="1"/>
-          <p:nvPr/>
-        </p:nvSpPr>
-        <p:spPr>
-          <a:xfrm>
-            <a:off x="10383836" y="1628717"/>
-            <a:ext cx="1495426" cy="461665"/>
-          </a:xfrm>
-          <a:prstGeom prst="rect">
-            <a:avLst/>
-          </a:prstGeom>
-          <a:noFill/>
-        </p:spPr>
-        <p:txBody>
-          <a:bodyPr wrap="square" rtlCol="0">
-            <a:spAutoFit/>
-          </a:bodyPr>
-          <a:lstStyle/>
-          <a:p>
-            <a:r>
-              <a:rPr lang="en-US" sz="1200" dirty="0">
-                <a:solidFill>
-                  <a:schemeClr val="accent5">
-                    <a:lumMod val="60000"/>
-                    <a:lumOff val="40000"/>
-                  </a:schemeClr>
-                </a:solidFill>
-              </a:rPr>
-              <a:t>Open the form to authorize a new line</a:t>
-            </a:r>
-          </a:p>
-        </p:txBody>
-      </p:sp>
-      <p:sp>
-        <p:nvSpPr>
-          <p:cNvPr id="9" name="TextBox 8">
-            <a:extLst>
-              <a:ext uri="{FF2B5EF4-FFF2-40B4-BE49-F238E27FC236}">
-                <a16:creationId xmlns:a16="http://schemas.microsoft.com/office/drawing/2014/main" id="{D6954DFD-320B-C6A2-BEC0-E28CC16156E6}"/>
-              </a:ext>
-            </a:extLst>
-          </p:cNvPr>
-          <p:cNvSpPr txBox="1"/>
-          <p:nvPr/>
-        </p:nvSpPr>
-        <p:spPr>
-          <a:xfrm>
-            <a:off x="8306095" y="4582952"/>
-            <a:ext cx="1495426" cy="646331"/>
-          </a:xfrm>
-          <a:prstGeom prst="rect">
-            <a:avLst/>
-          </a:prstGeom>
-          <a:noFill/>
-        </p:spPr>
-        <p:txBody>
-          <a:bodyPr wrap="square" rtlCol="0">
-            <a:spAutoFit/>
-          </a:bodyPr>
-          <a:lstStyle/>
-          <a:p>
-            <a:r>
-              <a:rPr lang="en-US" sz="1200" dirty="0">
-                <a:solidFill>
-                  <a:schemeClr val="accent5">
-                    <a:lumMod val="60000"/>
-                    <a:lumOff val="40000"/>
-                  </a:schemeClr>
-                </a:solidFill>
-              </a:rPr>
-              <a:t>Open the form to modify privileges for an existing line</a:t>
+              <a:t>Removes associate</a:t>
             </a:r>
           </a:p>
         </p:txBody>
       </p:sp>
       <p:cxnSp>
         <p:nvCxnSpPr>
-          <p:cNvPr id="11" name="Connector: Elbow 10">
-            <a:extLst>
-              <a:ext uri="{FF2B5EF4-FFF2-40B4-BE49-F238E27FC236}">
-                <a16:creationId xmlns:a16="http://schemas.microsoft.com/office/drawing/2014/main" id="{E72AC951-3A33-DC32-6B0A-76EC88CD9964}"/>
-              </a:ext>
-            </a:extLst>
-          </p:cNvPr>
-          <p:cNvCxnSpPr>
-            <a:cxnSpLocks/>
-          </p:cNvCxnSpPr>
+          <p:cNvPr id="8" name="Straight Arrow Connector 7">
+            <a:extLst>
+              <a:ext uri="{FF2B5EF4-FFF2-40B4-BE49-F238E27FC236}">
+                <a16:creationId xmlns:a16="http://schemas.microsoft.com/office/drawing/2014/main" id="{FD0DF0E5-2CA6-9590-DC9A-466484D34516}"/>
+              </a:ext>
+            </a:extLst>
+          </p:cNvPr>
+          <p:cNvCxnSpPr/>
           <p:nvPr/>
         </p:nvCxnSpPr>
         <p:spPr>
-          <a:xfrm flipV="1">
-            <a:off x="9053810" y="3674507"/>
-            <a:ext cx="2045195" cy="908445"/>
-          </a:xfrm>
-          <a:prstGeom prst="bentConnector3">
-            <a:avLst>
-              <a:gd name="adj1" fmla="val 82368"/>
-            </a:avLst>
+          <a:xfrm>
+            <a:off x="7032527" y="2198034"/>
+            <a:ext cx="212725" cy="174625"/>
+          </a:xfrm>
+          <a:prstGeom prst="straightConnector1">
+            <a:avLst/>
           </a:prstGeom>
           <a:ln>
             <a:tailEnd type="triangle"/>
@@ -4779,10 +5096,10 @@
       </p:cxnSp>
       <p:sp>
         <p:nvSpPr>
-          <p:cNvPr id="13" name="TextBox 12">
-            <a:extLst>
-              <a:ext uri="{FF2B5EF4-FFF2-40B4-BE49-F238E27FC236}">
-                <a16:creationId xmlns:a16="http://schemas.microsoft.com/office/drawing/2014/main" id="{AC92C180-92BD-A8EF-2AA6-E0325B7A7277}"/>
+          <p:cNvPr id="10" name="TextBox 9">
+            <a:extLst>
+              <a:ext uri="{FF2B5EF4-FFF2-40B4-BE49-F238E27FC236}">
+                <a16:creationId xmlns:a16="http://schemas.microsoft.com/office/drawing/2014/main" id="{105ABAF5-9FF0-6FD9-0180-124F59775D74}"/>
               </a:ext>
             </a:extLst>
           </p:cNvPr>
@@ -4791,8 +5108,8 @@
         </p:nvSpPr>
         <p:spPr>
           <a:xfrm>
-            <a:off x="10192840" y="4615014"/>
-            <a:ext cx="1752600" cy="461665"/>
+            <a:off x="6540157" y="1209675"/>
+            <a:ext cx="956416" cy="276999"/>
           </a:xfrm>
           <a:prstGeom prst="rect">
             <a:avLst/>
@@ -4800,7 +5117,7 @@
           <a:noFill/>
         </p:spPr>
         <p:txBody>
-          <a:bodyPr wrap="square" rtlCol="0">
+          <a:bodyPr wrap="none" rtlCol="0">
             <a:spAutoFit/>
           </a:bodyPr>
           <a:lstStyle/>
@@ -4814,31 +5131,634 @@
                   </a:schemeClr>
                 </a:solidFill>
               </a:rPr>
-              <a:t>Revoke privileges for this line (delete dialog)</a:t>
+              <a:t>Also cancel</a:t>
+            </a:r>
+          </a:p>
+        </p:txBody>
+      </p:sp>
+      <p:sp>
+        <p:nvSpPr>
+          <p:cNvPr id="11" name="TextBox 10">
+            <a:extLst>
+              <a:ext uri="{FF2B5EF4-FFF2-40B4-BE49-F238E27FC236}">
+                <a16:creationId xmlns:a16="http://schemas.microsoft.com/office/drawing/2014/main" id="{6FB2B785-C61A-7AE6-6A29-978411FFDC4D}"/>
+              </a:ext>
+            </a:extLst>
+          </p:cNvPr>
+          <p:cNvSpPr txBox="1"/>
+          <p:nvPr/>
+        </p:nvSpPr>
+        <p:spPr>
+          <a:xfrm>
+            <a:off x="5042311" y="2285346"/>
+            <a:ext cx="1237839" cy="276999"/>
+          </a:xfrm>
+          <a:prstGeom prst="rect">
+            <a:avLst/>
+          </a:prstGeom>
+          <a:noFill/>
+        </p:spPr>
+        <p:txBody>
+          <a:bodyPr wrap="none" rtlCol="0">
+            <a:spAutoFit/>
+          </a:bodyPr>
+          <a:lstStyle/>
+          <a:p>
+            <a:r>
+              <a:rPr lang="en-US" sz="1200" dirty="0">
+                <a:solidFill>
+                  <a:schemeClr val="accent5">
+                    <a:lumMod val="60000"/>
+                    <a:lumOff val="40000"/>
+                  </a:schemeClr>
+                </a:solidFill>
+              </a:rPr>
+              <a:t>Cancel deletion</a:t>
+            </a:r>
+          </a:p>
+        </p:txBody>
+      </p:sp>
+      <p:sp>
+        <p:nvSpPr>
+          <p:cNvPr id="12" name="TextBox 11">
+            <a:extLst>
+              <a:ext uri="{FF2B5EF4-FFF2-40B4-BE49-F238E27FC236}">
+                <a16:creationId xmlns:a16="http://schemas.microsoft.com/office/drawing/2014/main" id="{AA6EF203-5F9A-E697-28BD-A26ED62CEAE8}"/>
+              </a:ext>
+            </a:extLst>
+          </p:cNvPr>
+          <p:cNvSpPr txBox="1"/>
+          <p:nvPr/>
+        </p:nvSpPr>
+        <p:spPr>
+          <a:xfrm>
+            <a:off x="4697217" y="4616451"/>
+            <a:ext cx="3685880" cy="646331"/>
+          </a:xfrm>
+          <a:prstGeom prst="rect">
+            <a:avLst/>
+          </a:prstGeom>
+          <a:noFill/>
+        </p:spPr>
+        <p:txBody>
+          <a:bodyPr wrap="square" rtlCol="0">
+            <a:spAutoFit/>
+          </a:bodyPr>
+          <a:lstStyle/>
+          <a:p>
+            <a:r>
+              <a:rPr lang="en-US" dirty="0"/>
+              <a:t>This is what you see when you press the trash can for an associate</a:t>
+            </a:r>
+          </a:p>
+        </p:txBody>
+      </p:sp>
+    </p:spTree>
+    <p:extLst>
+      <p:ext uri="{BB962C8B-B14F-4D97-AF65-F5344CB8AC3E}">
+        <p14:creationId xmlns:p14="http://schemas.microsoft.com/office/powerpoint/2010/main" val="1577836970"/>
+      </p:ext>
+    </p:extLst>
+  </p:cSld>
+  <p:clrMapOvr>
+    <a:masterClrMapping/>
+  </p:clrMapOvr>
+</p:sld>
+</file>
+
+<file path=ppt/slides/slide14.xml><?xml version="1.0" encoding="utf-8"?>
+<p:sld xmlns:a="http://schemas.openxmlformats.org/drawingml/2006/main" xmlns:r="http://schemas.openxmlformats.org/officeDocument/2006/relationships" xmlns:p="http://schemas.openxmlformats.org/presentationml/2006/main">
+  <p:cSld>
+    <p:spTree>
+      <p:nvGrpSpPr>
+        <p:cNvPr id="1" name=""/>
+        <p:cNvGrpSpPr/>
+        <p:nvPr/>
+      </p:nvGrpSpPr>
+      <p:grpSpPr>
+        <a:xfrm>
+          <a:off x="0" y="0"/>
+          <a:ext cx="0" cy="0"/>
+          <a:chOff x="0" y="0"/>
+          <a:chExt cx="0" cy="0"/>
+        </a:xfrm>
+      </p:grpSpPr>
+      <p:pic>
+        <p:nvPicPr>
+          <p:cNvPr id="8" name="Picture 7">
+            <a:extLst>
+              <a:ext uri="{FF2B5EF4-FFF2-40B4-BE49-F238E27FC236}">
+                <a16:creationId xmlns:a16="http://schemas.microsoft.com/office/drawing/2014/main" id="{F7CD359B-1B88-745F-0902-F9C31D5C8588}"/>
+              </a:ext>
+            </a:extLst>
+          </p:cNvPr>
+          <p:cNvPicPr>
+            <a:picLocks noChangeAspect="1"/>
+          </p:cNvPicPr>
+          <p:nvPr/>
+        </p:nvPicPr>
+        <p:blipFill>
+          <a:blip r:embed="rId2"/>
+          <a:srcRect t="8114" r="287" b="769"/>
+          <a:stretch>
+            <a:fillRect/>
+          </a:stretch>
+        </p:blipFill>
+        <p:spPr>
+          <a:xfrm>
+            <a:off x="312656" y="999328"/>
+            <a:ext cx="11586802" cy="5734999"/>
+          </a:xfrm>
+          <a:prstGeom prst="rect">
+            <a:avLst/>
+          </a:prstGeom>
+        </p:spPr>
+      </p:pic>
+      <p:sp>
+        <p:nvSpPr>
+          <p:cNvPr id="2" name="Title 1">
+            <a:extLst>
+              <a:ext uri="{FF2B5EF4-FFF2-40B4-BE49-F238E27FC236}">
+                <a16:creationId xmlns:a16="http://schemas.microsoft.com/office/drawing/2014/main" id="{F031888A-8945-68C8-0520-9448F8A394EB}"/>
+              </a:ext>
+            </a:extLst>
+          </p:cNvPr>
+          <p:cNvSpPr>
+            <a:spLocks noGrp="1"/>
+          </p:cNvSpPr>
+          <p:nvPr>
+            <p:ph type="title"/>
+          </p:nvPr>
+        </p:nvSpPr>
+        <p:spPr/>
+        <p:txBody>
+          <a:bodyPr>
+            <a:normAutofit fontScale="90000"/>
+          </a:bodyPr>
+          <a:lstStyle/>
+          <a:p>
+            <a:r>
+              <a:rPr lang="en-US" dirty="0"/>
+              <a:t>Successful associate removal</a:t>
+            </a:r>
+          </a:p>
+        </p:txBody>
+      </p:sp>
+      <p:sp>
+        <p:nvSpPr>
+          <p:cNvPr id="6" name="TextBox 5">
+            <a:extLst>
+              <a:ext uri="{FF2B5EF4-FFF2-40B4-BE49-F238E27FC236}">
+                <a16:creationId xmlns:a16="http://schemas.microsoft.com/office/drawing/2014/main" id="{6E11AE5D-04A7-B0B9-FE4F-E94713C10232}"/>
+              </a:ext>
+            </a:extLst>
+          </p:cNvPr>
+          <p:cNvSpPr txBox="1"/>
+          <p:nvPr/>
+        </p:nvSpPr>
+        <p:spPr>
+          <a:xfrm>
+            <a:off x="8776356" y="5858672"/>
+            <a:ext cx="1781665" cy="646331"/>
+          </a:xfrm>
+          <a:prstGeom prst="rect">
+            <a:avLst/>
+          </a:prstGeom>
+          <a:noFill/>
+        </p:spPr>
+        <p:txBody>
+          <a:bodyPr wrap="square" rtlCol="0">
+            <a:spAutoFit/>
+          </a:bodyPr>
+          <a:lstStyle/>
+          <a:p>
+            <a:r>
+              <a:rPr lang="en-US" sz="1200" dirty="0">
+                <a:solidFill>
+                  <a:schemeClr val="accent5">
+                    <a:lumMod val="60000"/>
+                    <a:lumOff val="40000"/>
+                  </a:schemeClr>
+                </a:solidFill>
+              </a:rPr>
+              <a:t>You can be sure the deletion worked if you see this toast</a:t>
+            </a:r>
+          </a:p>
+        </p:txBody>
+      </p:sp>
+    </p:spTree>
+    <p:extLst>
+      <p:ext uri="{BB962C8B-B14F-4D97-AF65-F5344CB8AC3E}">
+        <p14:creationId xmlns:p14="http://schemas.microsoft.com/office/powerpoint/2010/main" val="233815460"/>
+      </p:ext>
+    </p:extLst>
+  </p:cSld>
+  <p:clrMapOvr>
+    <a:masterClrMapping/>
+  </p:clrMapOvr>
+</p:sld>
+</file>
+
+<file path=ppt/slides/slide15.xml><?xml version="1.0" encoding="utf-8"?>
+<p:sld xmlns:a="http://schemas.openxmlformats.org/drawingml/2006/main" xmlns:r="http://schemas.openxmlformats.org/officeDocument/2006/relationships" xmlns:p="http://schemas.openxmlformats.org/presentationml/2006/main">
+  <p:cSld>
+    <p:spTree>
+      <p:nvGrpSpPr>
+        <p:cNvPr id="1" name=""/>
+        <p:cNvGrpSpPr/>
+        <p:nvPr/>
+      </p:nvGrpSpPr>
+      <p:grpSpPr>
+        <a:xfrm>
+          <a:off x="0" y="0"/>
+          <a:ext cx="0" cy="0"/>
+          <a:chOff x="0" y="0"/>
+          <a:chExt cx="0" cy="0"/>
+        </a:xfrm>
+      </p:grpSpPr>
+      <p:pic>
+        <p:nvPicPr>
+          <p:cNvPr id="4" name="Picture 3">
+            <a:extLst>
+              <a:ext uri="{FF2B5EF4-FFF2-40B4-BE49-F238E27FC236}">
+                <a16:creationId xmlns:a16="http://schemas.microsoft.com/office/drawing/2014/main" id="{FD3B316D-1466-4724-6FCA-B7B5E88A01CD}"/>
+              </a:ext>
+            </a:extLst>
+          </p:cNvPr>
+          <p:cNvPicPr>
+            <a:picLocks noChangeAspect="1"/>
+          </p:cNvPicPr>
+          <p:nvPr/>
+        </p:nvPicPr>
+        <p:blipFill>
+          <a:blip r:embed="rId2"/>
+          <a:stretch>
+            <a:fillRect/>
+          </a:stretch>
+        </p:blipFill>
+        <p:spPr>
+          <a:xfrm>
+            <a:off x="291790" y="905061"/>
+            <a:ext cx="11608420" cy="5728278"/>
+          </a:xfrm>
+          <a:prstGeom prst="rect">
+            <a:avLst/>
+          </a:prstGeom>
+        </p:spPr>
+      </p:pic>
+      <p:sp>
+        <p:nvSpPr>
+          <p:cNvPr id="2" name="Title 1">
+            <a:extLst>
+              <a:ext uri="{FF2B5EF4-FFF2-40B4-BE49-F238E27FC236}">
+                <a16:creationId xmlns:a16="http://schemas.microsoft.com/office/drawing/2014/main" id="{3AA51164-EDB6-8F53-E615-921A11EA9D98}"/>
+              </a:ext>
+            </a:extLst>
+          </p:cNvPr>
+          <p:cNvSpPr>
+            <a:spLocks noGrp="1"/>
+          </p:cNvSpPr>
+          <p:nvPr>
+            <p:ph type="title"/>
+          </p:nvPr>
+        </p:nvSpPr>
+        <p:spPr/>
+        <p:txBody>
+          <a:bodyPr>
+            <a:normAutofit fontScale="90000"/>
+          </a:bodyPr>
+          <a:lstStyle/>
+          <a:p>
+            <a:r>
+              <a:rPr lang="en-US" dirty="0"/>
+              <a:t>Empty search</a:t>
+            </a:r>
+          </a:p>
+        </p:txBody>
+      </p:sp>
+      <p:sp>
+        <p:nvSpPr>
+          <p:cNvPr id="6" name="TextBox 5">
+            <a:extLst>
+              <a:ext uri="{FF2B5EF4-FFF2-40B4-BE49-F238E27FC236}">
+                <a16:creationId xmlns:a16="http://schemas.microsoft.com/office/drawing/2014/main" id="{65A6567E-7C20-8A36-8CDF-2CC60C1D1648}"/>
+              </a:ext>
+            </a:extLst>
+          </p:cNvPr>
+          <p:cNvSpPr txBox="1"/>
+          <p:nvPr/>
+        </p:nvSpPr>
+        <p:spPr>
+          <a:xfrm>
+            <a:off x="2584579" y="3059668"/>
+            <a:ext cx="7766052" cy="646331"/>
+          </a:xfrm>
+          <a:prstGeom prst="rect">
+            <a:avLst/>
+          </a:prstGeom>
+          <a:noFill/>
+        </p:spPr>
+        <p:txBody>
+          <a:bodyPr wrap="square" rtlCol="0">
+            <a:spAutoFit/>
+          </a:bodyPr>
+          <a:lstStyle/>
+          <a:p>
+            <a:r>
+              <a:rPr lang="en-US" dirty="0"/>
+              <a:t>If you made it here, try a different search, or hit the X button in the search bar to clear it and show the full table. The back button will </a:t>
+            </a:r>
+            <a:r>
+              <a:rPr lang="en-US" b="1" dirty="0"/>
+              <a:t>not</a:t>
+            </a:r>
+            <a:r>
+              <a:rPr lang="en-US" dirty="0"/>
+              <a:t> do the same thing.</a:t>
+            </a:r>
+          </a:p>
+        </p:txBody>
+      </p:sp>
+    </p:spTree>
+    <p:extLst>
+      <p:ext uri="{BB962C8B-B14F-4D97-AF65-F5344CB8AC3E}">
+        <p14:creationId xmlns:p14="http://schemas.microsoft.com/office/powerpoint/2010/main" val="4137292513"/>
+      </p:ext>
+    </p:extLst>
+  </p:cSld>
+  <p:clrMapOvr>
+    <a:masterClrMapping/>
+  </p:clrMapOvr>
+</p:sld>
+</file>
+
+<file path=ppt/slides/slide16.xml><?xml version="1.0" encoding="utf-8"?>
+<p:sld xmlns:a="http://schemas.openxmlformats.org/drawingml/2006/main" xmlns:r="http://schemas.openxmlformats.org/officeDocument/2006/relationships" xmlns:p="http://schemas.openxmlformats.org/presentationml/2006/main">
+  <p:cSld>
+    <p:spTree>
+      <p:nvGrpSpPr>
+        <p:cNvPr id="1" name=""/>
+        <p:cNvGrpSpPr/>
+        <p:nvPr/>
+      </p:nvGrpSpPr>
+      <p:grpSpPr>
+        <a:xfrm>
+          <a:off x="0" y="0"/>
+          <a:ext cx="0" cy="0"/>
+          <a:chOff x="0" y="0"/>
+          <a:chExt cx="0" cy="0"/>
+        </a:xfrm>
+      </p:grpSpPr>
+      <p:pic>
+        <p:nvPicPr>
+          <p:cNvPr id="4" name="Picture 3">
+            <a:extLst>
+              <a:ext uri="{FF2B5EF4-FFF2-40B4-BE49-F238E27FC236}">
+                <a16:creationId xmlns:a16="http://schemas.microsoft.com/office/drawing/2014/main" id="{96770BA6-AF8D-A4C3-A867-09D86A448E52}"/>
+              </a:ext>
+            </a:extLst>
+          </p:cNvPr>
+          <p:cNvPicPr>
+            <a:picLocks noChangeAspect="1"/>
+          </p:cNvPicPr>
+          <p:nvPr/>
+        </p:nvPicPr>
+        <p:blipFill>
+          <a:blip r:embed="rId3"/>
+          <a:stretch>
+            <a:fillRect/>
+          </a:stretch>
+        </p:blipFill>
+        <p:spPr>
+          <a:xfrm>
+            <a:off x="323851" y="905060"/>
+            <a:ext cx="11555411" cy="5750495"/>
+          </a:xfrm>
+          <a:prstGeom prst="rect">
+            <a:avLst/>
+          </a:prstGeom>
+        </p:spPr>
+      </p:pic>
+      <p:sp>
+        <p:nvSpPr>
+          <p:cNvPr id="2" name="Title 1">
+            <a:extLst>
+              <a:ext uri="{FF2B5EF4-FFF2-40B4-BE49-F238E27FC236}">
+                <a16:creationId xmlns:a16="http://schemas.microsoft.com/office/drawing/2014/main" id="{2539BB20-DEF8-1F66-7EA7-0F3F67627279}"/>
+              </a:ext>
+            </a:extLst>
+          </p:cNvPr>
+          <p:cNvSpPr>
+            <a:spLocks noGrp="1"/>
+          </p:cNvSpPr>
+          <p:nvPr>
+            <p:ph type="title"/>
+          </p:nvPr>
+        </p:nvSpPr>
+        <p:spPr/>
+        <p:txBody>
+          <a:bodyPr>
+            <a:normAutofit fontScale="90000"/>
+          </a:bodyPr>
+          <a:lstStyle/>
+          <a:p>
+            <a:r>
+              <a:rPr lang="en-US" dirty="0"/>
+              <a:t>Line management</a:t>
+            </a:r>
+          </a:p>
+        </p:txBody>
+      </p:sp>
+      <p:sp>
+        <p:nvSpPr>
+          <p:cNvPr id="6" name="TextBox 5">
+            <a:extLst>
+              <a:ext uri="{FF2B5EF4-FFF2-40B4-BE49-F238E27FC236}">
+                <a16:creationId xmlns:a16="http://schemas.microsoft.com/office/drawing/2014/main" id="{DACDD0D9-E40D-3C98-1F95-3AD21540207D}"/>
+              </a:ext>
+            </a:extLst>
+          </p:cNvPr>
+          <p:cNvSpPr txBox="1"/>
+          <p:nvPr/>
+        </p:nvSpPr>
+        <p:spPr>
+          <a:xfrm>
+            <a:off x="4123976" y="982386"/>
+            <a:ext cx="3028950" cy="646331"/>
+          </a:xfrm>
+          <a:prstGeom prst="rect">
+            <a:avLst/>
+          </a:prstGeom>
+          <a:noFill/>
+        </p:spPr>
+        <p:txBody>
+          <a:bodyPr wrap="square" rtlCol="0">
+            <a:spAutoFit/>
+          </a:bodyPr>
+          <a:lstStyle/>
+          <a:p>
+            <a:r>
+              <a:rPr lang="en-US" sz="1200" dirty="0">
+                <a:solidFill>
+                  <a:schemeClr val="accent5">
+                    <a:lumMod val="60000"/>
+                    <a:lumOff val="40000"/>
+                  </a:schemeClr>
+                </a:solidFill>
+              </a:rPr>
+              <a:t>Pressing the three lines next to an associate opens a split screen view showing their authorized lines on the right </a:t>
+            </a:r>
+          </a:p>
+        </p:txBody>
+      </p:sp>
+      <p:sp>
+        <p:nvSpPr>
+          <p:cNvPr id="7" name="TextBox 6">
+            <a:extLst>
+              <a:ext uri="{FF2B5EF4-FFF2-40B4-BE49-F238E27FC236}">
+                <a16:creationId xmlns:a16="http://schemas.microsoft.com/office/drawing/2014/main" id="{1F583A37-9B56-E192-8578-0BAFB6FB86A3}"/>
+              </a:ext>
+            </a:extLst>
+          </p:cNvPr>
+          <p:cNvSpPr txBox="1"/>
+          <p:nvPr/>
+        </p:nvSpPr>
+        <p:spPr>
+          <a:xfrm>
+            <a:off x="3314351" y="2736850"/>
+            <a:ext cx="1619250" cy="646331"/>
+          </a:xfrm>
+          <a:prstGeom prst="rect">
+            <a:avLst/>
+          </a:prstGeom>
+          <a:noFill/>
+        </p:spPr>
+        <p:txBody>
+          <a:bodyPr wrap="square" rtlCol="0">
+            <a:spAutoFit/>
+          </a:bodyPr>
+          <a:lstStyle/>
+          <a:p>
+            <a:r>
+              <a:rPr lang="en-US" sz="1200" dirty="0">
+                <a:solidFill>
+                  <a:schemeClr val="accent5">
+                    <a:lumMod val="60000"/>
+                    <a:lumOff val="40000"/>
+                  </a:schemeClr>
+                </a:solidFill>
+              </a:rPr>
+              <a:t>Pressing the expand button highlights the target associate’s row</a:t>
+            </a:r>
+          </a:p>
+        </p:txBody>
+      </p:sp>
+      <p:sp>
+        <p:nvSpPr>
+          <p:cNvPr id="8" name="TextBox 7">
+            <a:extLst>
+              <a:ext uri="{FF2B5EF4-FFF2-40B4-BE49-F238E27FC236}">
+                <a16:creationId xmlns:a16="http://schemas.microsoft.com/office/drawing/2014/main" id="{FDE01C86-68FA-E765-74F0-9D9772AE07EC}"/>
+              </a:ext>
+            </a:extLst>
+          </p:cNvPr>
+          <p:cNvSpPr txBox="1"/>
+          <p:nvPr/>
+        </p:nvSpPr>
+        <p:spPr>
+          <a:xfrm>
+            <a:off x="10383836" y="1628717"/>
+            <a:ext cx="1495426" cy="461665"/>
+          </a:xfrm>
+          <a:prstGeom prst="rect">
+            <a:avLst/>
+          </a:prstGeom>
+          <a:noFill/>
+        </p:spPr>
+        <p:txBody>
+          <a:bodyPr wrap="square" rtlCol="0">
+            <a:spAutoFit/>
+          </a:bodyPr>
+          <a:lstStyle/>
+          <a:p>
+            <a:r>
+              <a:rPr lang="en-US" sz="1200" dirty="0">
+                <a:solidFill>
+                  <a:schemeClr val="accent5">
+                    <a:lumMod val="60000"/>
+                    <a:lumOff val="40000"/>
+                  </a:schemeClr>
+                </a:solidFill>
+              </a:rPr>
+              <a:t>Open the form to authorize a new line</a:t>
+            </a:r>
+          </a:p>
+        </p:txBody>
+      </p:sp>
+      <p:sp>
+        <p:nvSpPr>
+          <p:cNvPr id="9" name="TextBox 8">
+            <a:extLst>
+              <a:ext uri="{FF2B5EF4-FFF2-40B4-BE49-F238E27FC236}">
+                <a16:creationId xmlns:a16="http://schemas.microsoft.com/office/drawing/2014/main" id="{D6954DFD-320B-C6A2-BEC0-E28CC16156E6}"/>
+              </a:ext>
+            </a:extLst>
+          </p:cNvPr>
+          <p:cNvSpPr txBox="1"/>
+          <p:nvPr/>
+        </p:nvSpPr>
+        <p:spPr>
+          <a:xfrm>
+            <a:off x="8239917" y="5306609"/>
+            <a:ext cx="1495426" cy="646331"/>
+          </a:xfrm>
+          <a:prstGeom prst="rect">
+            <a:avLst/>
+          </a:prstGeom>
+          <a:noFill/>
+        </p:spPr>
+        <p:txBody>
+          <a:bodyPr wrap="square" rtlCol="0">
+            <a:spAutoFit/>
+          </a:bodyPr>
+          <a:lstStyle/>
+          <a:p>
+            <a:r>
+              <a:rPr lang="en-US" sz="1200" dirty="0">
+                <a:solidFill>
+                  <a:schemeClr val="accent5">
+                    <a:lumMod val="60000"/>
+                    <a:lumOff val="40000"/>
+                  </a:schemeClr>
+                </a:solidFill>
+              </a:rPr>
+              <a:t>Open the form to modify privileges for an existing line</a:t>
             </a:r>
           </a:p>
         </p:txBody>
       </p:sp>
       <p:cxnSp>
         <p:nvCxnSpPr>
-          <p:cNvPr id="19" name="Connector: Elbow 18">
-            <a:extLst>
-              <a:ext uri="{FF2B5EF4-FFF2-40B4-BE49-F238E27FC236}">
-                <a16:creationId xmlns:a16="http://schemas.microsoft.com/office/drawing/2014/main" id="{BA0ADF18-B87F-96DD-A9D0-3C444AC5F973}"/>
-              </a:ext>
-            </a:extLst>
-          </p:cNvPr>
-          <p:cNvCxnSpPr/>
+          <p:cNvPr id="11" name="Connector: Elbow 10">
+            <a:extLst>
+              <a:ext uri="{FF2B5EF4-FFF2-40B4-BE49-F238E27FC236}">
+                <a16:creationId xmlns:a16="http://schemas.microsoft.com/office/drawing/2014/main" id="{E72AC951-3A33-DC32-6B0A-76EC88CD9964}"/>
+              </a:ext>
+            </a:extLst>
+          </p:cNvPr>
+          <p:cNvCxnSpPr>
+            <a:cxnSpLocks/>
+          </p:cNvCxnSpPr>
           <p:nvPr/>
         </p:nvCxnSpPr>
         <p:spPr>
           <a:xfrm flipV="1">
-            <a:off x="11069140" y="4444546"/>
-            <a:ext cx="363536" cy="170468"/>
+            <a:off x="8987632" y="4398164"/>
+            <a:ext cx="2045195" cy="908445"/>
           </a:xfrm>
           <a:prstGeom prst="bentConnector3">
             <a:avLst>
-              <a:gd name="adj1" fmla="val 100437"/>
+              <a:gd name="adj1" fmla="val 82368"/>
             </a:avLst>
           </a:prstGeom>
           <a:ln>
@@ -4862,6 +5782,89 @@
       </p:cxnSp>
       <p:sp>
         <p:nvSpPr>
+          <p:cNvPr id="13" name="TextBox 12">
+            <a:extLst>
+              <a:ext uri="{FF2B5EF4-FFF2-40B4-BE49-F238E27FC236}">
+                <a16:creationId xmlns:a16="http://schemas.microsoft.com/office/drawing/2014/main" id="{AC92C180-92BD-A8EF-2AA6-E0325B7A7277}"/>
+              </a:ext>
+            </a:extLst>
+          </p:cNvPr>
+          <p:cNvSpPr txBox="1"/>
+          <p:nvPr/>
+        </p:nvSpPr>
+        <p:spPr>
+          <a:xfrm>
+            <a:off x="10126662" y="5338671"/>
+            <a:ext cx="1752600" cy="461665"/>
+          </a:xfrm>
+          <a:prstGeom prst="rect">
+            <a:avLst/>
+          </a:prstGeom>
+          <a:noFill/>
+        </p:spPr>
+        <p:txBody>
+          <a:bodyPr wrap="square" rtlCol="0">
+            <a:spAutoFit/>
+          </a:bodyPr>
+          <a:lstStyle/>
+          <a:p>
+            <a:r>
+              <a:rPr lang="en-US" sz="1200" dirty="0">
+                <a:solidFill>
+                  <a:schemeClr val="accent5">
+                    <a:lumMod val="60000"/>
+                    <a:lumOff val="40000"/>
+                  </a:schemeClr>
+                </a:solidFill>
+              </a:rPr>
+              <a:t>Revoke privileges for this line (delete dialog)</a:t>
+            </a:r>
+          </a:p>
+        </p:txBody>
+      </p:sp>
+      <p:cxnSp>
+        <p:nvCxnSpPr>
+          <p:cNvPr id="19" name="Connector: Elbow 18">
+            <a:extLst>
+              <a:ext uri="{FF2B5EF4-FFF2-40B4-BE49-F238E27FC236}">
+                <a16:creationId xmlns:a16="http://schemas.microsoft.com/office/drawing/2014/main" id="{BA0ADF18-B87F-96DD-A9D0-3C444AC5F973}"/>
+              </a:ext>
+            </a:extLst>
+          </p:cNvPr>
+          <p:cNvCxnSpPr/>
+          <p:nvPr/>
+        </p:nvCxnSpPr>
+        <p:spPr>
+          <a:xfrm flipV="1">
+            <a:off x="11002962" y="5168203"/>
+            <a:ext cx="363536" cy="170468"/>
+          </a:xfrm>
+          <a:prstGeom prst="bentConnector3">
+            <a:avLst>
+              <a:gd name="adj1" fmla="val 100437"/>
+            </a:avLst>
+          </a:prstGeom>
+          <a:ln>
+            <a:tailEnd type="triangle"/>
+          </a:ln>
+        </p:spPr>
+        <p:style>
+          <a:lnRef idx="2">
+            <a:schemeClr val="accent1"/>
+          </a:lnRef>
+          <a:fillRef idx="0">
+            <a:schemeClr val="accent1"/>
+          </a:fillRef>
+          <a:effectRef idx="1">
+            <a:schemeClr val="accent1"/>
+          </a:effectRef>
+          <a:fontRef idx="minor">
+            <a:schemeClr val="tx1"/>
+          </a:fontRef>
+        </p:style>
+      </p:cxnSp>
+      <p:sp>
+        <p:nvSpPr>
           <p:cNvPr id="27" name="TextBox 26">
             <a:extLst>
               <a:ext uri="{FF2B5EF4-FFF2-40B4-BE49-F238E27FC236}">
@@ -4916,7 +5919,7 @@
         </p:nvSpPr>
         <p:spPr>
           <a:xfrm>
-            <a:off x="5949951" y="2736850"/>
+            <a:off x="5356063" y="2736850"/>
             <a:ext cx="917574" cy="461665"/>
           </a:xfrm>
           <a:prstGeom prst="rect">
@@ -4957,7 +5960,7 @@
 </p:sld>
 </file>
 
-<file path=ppt/slides/slide14.xml><?xml version="1.0" encoding="utf-8"?>
+<file path=ppt/slides/slide17.xml><?xml version="1.0" encoding="utf-8"?>
 <p:sld xmlns:a="http://schemas.openxmlformats.org/drawingml/2006/main" xmlns:r="http://schemas.openxmlformats.org/officeDocument/2006/relationships" xmlns:p="http://schemas.openxmlformats.org/presentationml/2006/main">
   <p:cSld>
     <p:spTree>
@@ -4980,42 +5983,12 @@
           <a:chExt cx="0" cy="0"/>
         </a:xfrm>
       </p:grpSpPr>
-      <p:sp>
-        <p:nvSpPr>
-          <p:cNvPr id="2" name="Title 1">
-            <a:extLst>
-              <a:ext uri="{FF2B5EF4-FFF2-40B4-BE49-F238E27FC236}">
-                <a16:creationId xmlns:a16="http://schemas.microsoft.com/office/drawing/2014/main" id="{FFEC0ADC-2F0C-B55A-2B8D-1E1E01ECA83E}"/>
-              </a:ext>
-            </a:extLst>
-          </p:cNvPr>
-          <p:cNvSpPr>
-            <a:spLocks noGrp="1"/>
-          </p:cNvSpPr>
-          <p:nvPr>
-            <p:ph type="title"/>
-          </p:nvPr>
-        </p:nvSpPr>
-        <p:spPr/>
-        <p:txBody>
-          <a:bodyPr>
-            <a:normAutofit fontScale="90000"/>
-          </a:bodyPr>
-          <a:lstStyle/>
-          <a:p>
-            <a:r>
-              <a:rPr lang="en-US" dirty="0"/>
-              <a:t>Line addition</a:t>
-            </a:r>
-          </a:p>
-        </p:txBody>
-      </p:sp>
       <p:pic>
         <p:nvPicPr>
-          <p:cNvPr id="4" name="Picture 3">
-            <a:extLst>
-              <a:ext uri="{FF2B5EF4-FFF2-40B4-BE49-F238E27FC236}">
-                <a16:creationId xmlns:a16="http://schemas.microsoft.com/office/drawing/2014/main" id="{4CCCA4CC-0D6A-376A-75C1-506E420406F5}"/>
+          <p:cNvPr id="5" name="Picture 4">
+            <a:extLst>
+              <a:ext uri="{FF2B5EF4-FFF2-40B4-BE49-F238E27FC236}">
+                <a16:creationId xmlns:a16="http://schemas.microsoft.com/office/drawing/2014/main" id="{833364D5-57FC-3F16-6E4D-CA2F64FA6C4E}"/>
               </a:ext>
             </a:extLst>
           </p:cNvPr>
@@ -5033,7 +6006,7 @@
         <p:spPr>
           <a:xfrm>
             <a:off x="301658" y="1016996"/>
-            <a:ext cx="11582596" cy="5755027"/>
+            <a:ext cx="11564460" cy="5755027"/>
           </a:xfrm>
           <a:prstGeom prst="rect">
             <a:avLst/>
@@ -5042,6 +6015,36 @@
       </p:pic>
       <p:sp>
         <p:nvSpPr>
+          <p:cNvPr id="2" name="Title 1">
+            <a:extLst>
+              <a:ext uri="{FF2B5EF4-FFF2-40B4-BE49-F238E27FC236}">
+                <a16:creationId xmlns:a16="http://schemas.microsoft.com/office/drawing/2014/main" id="{FFEC0ADC-2F0C-B55A-2B8D-1E1E01ECA83E}"/>
+              </a:ext>
+            </a:extLst>
+          </p:cNvPr>
+          <p:cNvSpPr>
+            <a:spLocks noGrp="1"/>
+          </p:cNvSpPr>
+          <p:nvPr>
+            <p:ph type="title"/>
+          </p:nvPr>
+        </p:nvSpPr>
+        <p:spPr/>
+        <p:txBody>
+          <a:bodyPr>
+            <a:normAutofit fontScale="90000"/>
+          </a:bodyPr>
+          <a:lstStyle/>
+          <a:p>
+            <a:r>
+              <a:rPr lang="en-US" dirty="0"/>
+              <a:t>Line addition</a:t>
+            </a:r>
+          </a:p>
+        </p:txBody>
+      </p:sp>
+      <p:sp>
+        <p:nvSpPr>
           <p:cNvPr id="9" name="TextBox 8">
             <a:extLst>
               <a:ext uri="{FF2B5EF4-FFF2-40B4-BE49-F238E27FC236}">
@@ -5054,7 +6057,7 @@
         </p:nvSpPr>
         <p:spPr>
           <a:xfrm>
-            <a:off x="9901467" y="1738313"/>
+            <a:off x="9591869" y="1761373"/>
             <a:ext cx="2052637" cy="461665"/>
           </a:xfrm>
           <a:prstGeom prst="rect">
@@ -5096,7 +6099,7 @@
         </p:nvSpPr>
         <p:spPr>
           <a:xfrm>
-            <a:off x="7848830" y="2798763"/>
+            <a:off x="7434050" y="2855323"/>
             <a:ext cx="2052637" cy="646331"/>
           </a:xfrm>
           <a:prstGeom prst="rect">
@@ -5151,7 +6154,7 @@
         </p:nvSpPr>
         <p:spPr>
           <a:xfrm>
-            <a:off x="10501314" y="2509838"/>
+            <a:off x="10237364" y="2624490"/>
             <a:ext cx="1033462" cy="461665"/>
           </a:xfrm>
           <a:prstGeom prst="rect">
@@ -5183,631 +6186,6 @@
     <p:extLst>
       <p:ext uri="{BB962C8B-B14F-4D97-AF65-F5344CB8AC3E}">
         <p14:creationId xmlns:p14="http://schemas.microsoft.com/office/powerpoint/2010/main" val="2208816415"/>
-      </p:ext>
-    </p:extLst>
-  </p:cSld>
-  <p:clrMapOvr>
-    <a:masterClrMapping/>
-  </p:clrMapOvr>
-</p:sld>
-</file>
-
-<file path=ppt/slides/slide15.xml><?xml version="1.0" encoding="utf-8"?>
-<p:sld xmlns:a="http://schemas.openxmlformats.org/drawingml/2006/main" xmlns:r="http://schemas.openxmlformats.org/officeDocument/2006/relationships" xmlns:p="http://schemas.openxmlformats.org/presentationml/2006/main">
-  <p:cSld>
-    <p:spTree>
-      <p:nvGrpSpPr>
-        <p:cNvPr id="1" name="">
-          <a:extLst>
-            <a:ext uri="{FF2B5EF4-FFF2-40B4-BE49-F238E27FC236}">
-              <a16:creationId xmlns:a16="http://schemas.microsoft.com/office/drawing/2014/main" id="{ACEBB3FC-6D58-955F-1C01-F5459B6E876B}"/>
-            </a:ext>
-          </a:extLst>
-        </p:cNvPr>
-        <p:cNvGrpSpPr/>
-        <p:nvPr/>
-      </p:nvGrpSpPr>
-      <p:grpSpPr>
-        <a:xfrm>
-          <a:off x="0" y="0"/>
-          <a:ext cx="0" cy="0"/>
-          <a:chOff x="0" y="0"/>
-          <a:chExt cx="0" cy="0"/>
-        </a:xfrm>
-      </p:grpSpPr>
-      <p:sp>
-        <p:nvSpPr>
-          <p:cNvPr id="2" name="Title 1">
-            <a:extLst>
-              <a:ext uri="{FF2B5EF4-FFF2-40B4-BE49-F238E27FC236}">
-                <a16:creationId xmlns:a16="http://schemas.microsoft.com/office/drawing/2014/main" id="{CC06B3DD-E1E0-9F46-FE96-8C2337C637FC}"/>
-              </a:ext>
-            </a:extLst>
-          </p:cNvPr>
-          <p:cNvSpPr>
-            <a:spLocks noGrp="1"/>
-          </p:cNvSpPr>
-          <p:nvPr>
-            <p:ph type="title"/>
-          </p:nvPr>
-        </p:nvSpPr>
-        <p:spPr/>
-        <p:txBody>
-          <a:bodyPr>
-            <a:normAutofit fontScale="90000"/>
-          </a:bodyPr>
-          <a:lstStyle/>
-          <a:p>
-            <a:r>
-              <a:rPr lang="en-US" dirty="0"/>
-              <a:t>Line update</a:t>
-            </a:r>
-          </a:p>
-        </p:txBody>
-      </p:sp>
-      <p:pic>
-        <p:nvPicPr>
-          <p:cNvPr id="9" name="Content Placeholder 8">
-            <a:extLst>
-              <a:ext uri="{FF2B5EF4-FFF2-40B4-BE49-F238E27FC236}">
-                <a16:creationId xmlns:a16="http://schemas.microsoft.com/office/drawing/2014/main" id="{EA21D2E1-76D3-22B2-B51B-E64A748EE0FD}"/>
-              </a:ext>
-            </a:extLst>
-          </p:cNvPr>
-          <p:cNvPicPr>
-            <a:picLocks noGrp="1" noChangeAspect="1"/>
-          </p:cNvPicPr>
-          <p:nvPr>
-            <p:ph idx="1"/>
-          </p:nvPr>
-        </p:nvPicPr>
-        <p:blipFill>
-          <a:blip r:embed="rId2"/>
-          <a:stretch>
-            <a:fillRect/>
-          </a:stretch>
-        </p:blipFill>
-        <p:spPr>
-          <a:xfrm>
-            <a:off x="308968" y="905060"/>
-            <a:ext cx="11578232" cy="5767977"/>
-          </a:xfrm>
-          <a:prstGeom prst="rect">
-            <a:avLst/>
-          </a:prstGeom>
-        </p:spPr>
-      </p:pic>
-      <p:sp>
-        <p:nvSpPr>
-          <p:cNvPr id="10" name="TextBox 9">
-            <a:extLst>
-              <a:ext uri="{FF2B5EF4-FFF2-40B4-BE49-F238E27FC236}">
-                <a16:creationId xmlns:a16="http://schemas.microsoft.com/office/drawing/2014/main" id="{95330153-FD92-D840-CDA1-3B352953601D}"/>
-              </a:ext>
-            </a:extLst>
-          </p:cNvPr>
-          <p:cNvSpPr txBox="1"/>
-          <p:nvPr/>
-        </p:nvSpPr>
-        <p:spPr>
-          <a:xfrm>
-            <a:off x="7972425" y="6038850"/>
-            <a:ext cx="3607847" cy="276999"/>
-          </a:xfrm>
-          <a:prstGeom prst="rect">
-            <a:avLst/>
-          </a:prstGeom>
-          <a:noFill/>
-        </p:spPr>
-        <p:txBody>
-          <a:bodyPr wrap="none" rtlCol="0">
-            <a:spAutoFit/>
-          </a:bodyPr>
-          <a:lstStyle/>
-          <a:p>
-            <a:r>
-              <a:rPr lang="en-US" sz="1200" dirty="0">
-                <a:solidFill>
-                  <a:schemeClr val="accent5">
-                    <a:lumMod val="60000"/>
-                    <a:lumOff val="40000"/>
-                  </a:schemeClr>
-                </a:solidFill>
-              </a:rPr>
-              <a:t>Pressing the expand button highlights the target row</a:t>
-            </a:r>
-          </a:p>
-        </p:txBody>
-      </p:sp>
-      <p:sp>
-        <p:nvSpPr>
-          <p:cNvPr id="11" name="TextBox 10">
-            <a:extLst>
-              <a:ext uri="{FF2B5EF4-FFF2-40B4-BE49-F238E27FC236}">
-                <a16:creationId xmlns:a16="http://schemas.microsoft.com/office/drawing/2014/main" id="{48606123-8CE9-6A62-4325-8003ED674D33}"/>
-              </a:ext>
-            </a:extLst>
-          </p:cNvPr>
-          <p:cNvSpPr txBox="1"/>
-          <p:nvPr/>
-        </p:nvSpPr>
-        <p:spPr>
-          <a:xfrm>
-            <a:off x="7972425" y="1802311"/>
-            <a:ext cx="3288208" cy="276999"/>
-          </a:xfrm>
-          <a:prstGeom prst="rect">
-            <a:avLst/>
-          </a:prstGeom>
-          <a:noFill/>
-        </p:spPr>
-        <p:txBody>
-          <a:bodyPr wrap="none" rtlCol="0">
-            <a:spAutoFit/>
-          </a:bodyPr>
-          <a:lstStyle/>
-          <a:p>
-            <a:r>
-              <a:rPr lang="en-US" sz="1200" dirty="0">
-                <a:solidFill>
-                  <a:schemeClr val="accent5">
-                    <a:lumMod val="60000"/>
-                    <a:lumOff val="40000"/>
-                  </a:schemeClr>
-                </a:solidFill>
-              </a:rPr>
-              <a:t>Can’t change line name, but can edit auth level</a:t>
-            </a:r>
-          </a:p>
-        </p:txBody>
-      </p:sp>
-    </p:spTree>
-    <p:extLst>
-      <p:ext uri="{BB962C8B-B14F-4D97-AF65-F5344CB8AC3E}">
-        <p14:creationId xmlns:p14="http://schemas.microsoft.com/office/powerpoint/2010/main" val="3653232833"/>
-      </p:ext>
-    </p:extLst>
-  </p:cSld>
-  <p:clrMapOvr>
-    <a:masterClrMapping/>
-  </p:clrMapOvr>
-</p:sld>
-</file>
-
-<file path=ppt/slides/slide16.xml><?xml version="1.0" encoding="utf-8"?>
-<p:sld xmlns:a="http://schemas.openxmlformats.org/drawingml/2006/main" xmlns:r="http://schemas.openxmlformats.org/officeDocument/2006/relationships" xmlns:p="http://schemas.openxmlformats.org/presentationml/2006/main">
-  <p:cSld>
-    <p:spTree>
-      <p:nvGrpSpPr>
-        <p:cNvPr id="1" name="">
-          <a:extLst>
-            <a:ext uri="{FF2B5EF4-FFF2-40B4-BE49-F238E27FC236}">
-              <a16:creationId xmlns:a16="http://schemas.microsoft.com/office/drawing/2014/main" id="{7955D05A-C958-EADA-99D9-E49968776270}"/>
-            </a:ext>
-          </a:extLst>
-        </p:cNvPr>
-        <p:cNvGrpSpPr/>
-        <p:nvPr/>
-      </p:nvGrpSpPr>
-      <p:grpSpPr>
-        <a:xfrm>
-          <a:off x="0" y="0"/>
-          <a:ext cx="0" cy="0"/>
-          <a:chOff x="0" y="0"/>
-          <a:chExt cx="0" cy="0"/>
-        </a:xfrm>
-      </p:grpSpPr>
-      <p:pic>
-        <p:nvPicPr>
-          <p:cNvPr id="4" name="Picture 3">
-            <a:extLst>
-              <a:ext uri="{FF2B5EF4-FFF2-40B4-BE49-F238E27FC236}">
-                <a16:creationId xmlns:a16="http://schemas.microsoft.com/office/drawing/2014/main" id="{D09536C5-D849-FF70-9822-4EF4CA75BE60}"/>
-              </a:ext>
-            </a:extLst>
-          </p:cNvPr>
-          <p:cNvPicPr>
-            <a:picLocks noChangeAspect="1"/>
-          </p:cNvPicPr>
-          <p:nvPr/>
-        </p:nvPicPr>
-        <p:blipFill>
-          <a:blip r:embed="rId2"/>
-          <a:stretch>
-            <a:fillRect/>
-          </a:stretch>
-        </p:blipFill>
-        <p:spPr>
-          <a:xfrm>
-            <a:off x="311085" y="905060"/>
-            <a:ext cx="11585542" cy="5738237"/>
-          </a:xfrm>
-          <a:prstGeom prst="rect">
-            <a:avLst/>
-          </a:prstGeom>
-        </p:spPr>
-      </p:pic>
-      <p:sp>
-        <p:nvSpPr>
-          <p:cNvPr id="2" name="Title 1">
-            <a:extLst>
-              <a:ext uri="{FF2B5EF4-FFF2-40B4-BE49-F238E27FC236}">
-                <a16:creationId xmlns:a16="http://schemas.microsoft.com/office/drawing/2014/main" id="{EA7C9B24-FA12-59EB-6D2D-8FFE5FCD2495}"/>
-              </a:ext>
-            </a:extLst>
-          </p:cNvPr>
-          <p:cNvSpPr>
-            <a:spLocks noGrp="1"/>
-          </p:cNvSpPr>
-          <p:nvPr>
-            <p:ph type="title"/>
-          </p:nvPr>
-        </p:nvSpPr>
-        <p:spPr/>
-        <p:txBody>
-          <a:bodyPr>
-            <a:normAutofit fontScale="90000"/>
-          </a:bodyPr>
-          <a:lstStyle/>
-          <a:p>
-            <a:r>
-              <a:rPr lang="en-US" dirty="0"/>
-              <a:t>Line removal</a:t>
-            </a:r>
-          </a:p>
-        </p:txBody>
-      </p:sp>
-      <p:sp>
-        <p:nvSpPr>
-          <p:cNvPr id="6" name="TextBox 5">
-            <a:extLst>
-              <a:ext uri="{FF2B5EF4-FFF2-40B4-BE49-F238E27FC236}">
-                <a16:creationId xmlns:a16="http://schemas.microsoft.com/office/drawing/2014/main" id="{F0E759CB-89D7-2B1F-569E-5DD58979ECDC}"/>
-              </a:ext>
-            </a:extLst>
-          </p:cNvPr>
-          <p:cNvSpPr txBox="1"/>
-          <p:nvPr/>
-        </p:nvSpPr>
-        <p:spPr>
-          <a:xfrm>
-            <a:off x="6280150" y="1643391"/>
-            <a:ext cx="1323997" cy="461665"/>
-          </a:xfrm>
-          <a:prstGeom prst="rect">
-            <a:avLst/>
-          </a:prstGeom>
-          <a:noFill/>
-        </p:spPr>
-        <p:txBody>
-          <a:bodyPr wrap="square" rtlCol="0">
-            <a:spAutoFit/>
-          </a:bodyPr>
-          <a:lstStyle/>
-          <a:p>
-            <a:r>
-              <a:rPr lang="en-US" sz="1200" dirty="0">
-                <a:solidFill>
-                  <a:schemeClr val="accent5">
-                    <a:lumMod val="60000"/>
-                    <a:lumOff val="40000"/>
-                  </a:schemeClr>
-                </a:solidFill>
-              </a:rPr>
-              <a:t>Removes line from associate</a:t>
-            </a:r>
-          </a:p>
-        </p:txBody>
-      </p:sp>
-      <p:cxnSp>
-        <p:nvCxnSpPr>
-          <p:cNvPr id="8" name="Straight Arrow Connector 7">
-            <a:extLst>
-              <a:ext uri="{FF2B5EF4-FFF2-40B4-BE49-F238E27FC236}">
-                <a16:creationId xmlns:a16="http://schemas.microsoft.com/office/drawing/2014/main" id="{86F9D3DF-A617-F3A2-2757-72D1A80208B8}"/>
-              </a:ext>
-            </a:extLst>
-          </p:cNvPr>
-          <p:cNvCxnSpPr/>
-          <p:nvPr/>
-        </p:nvCxnSpPr>
-        <p:spPr>
-          <a:xfrm>
-            <a:off x="7023100" y="2066925"/>
-            <a:ext cx="212725" cy="174625"/>
-          </a:xfrm>
-          <a:prstGeom prst="straightConnector1">
-            <a:avLst/>
-          </a:prstGeom>
-          <a:ln>
-            <a:tailEnd type="triangle"/>
-          </a:ln>
-        </p:spPr>
-        <p:style>
-          <a:lnRef idx="2">
-            <a:schemeClr val="accent1"/>
-          </a:lnRef>
-          <a:fillRef idx="0">
-            <a:schemeClr val="accent1"/>
-          </a:fillRef>
-          <a:effectRef idx="1">
-            <a:schemeClr val="accent1"/>
-          </a:effectRef>
-          <a:fontRef idx="minor">
-            <a:schemeClr val="tx1"/>
-          </a:fontRef>
-        </p:style>
-      </p:cxnSp>
-      <p:sp>
-        <p:nvSpPr>
-          <p:cNvPr id="10" name="TextBox 9">
-            <a:extLst>
-              <a:ext uri="{FF2B5EF4-FFF2-40B4-BE49-F238E27FC236}">
-                <a16:creationId xmlns:a16="http://schemas.microsoft.com/office/drawing/2014/main" id="{70F1E900-9919-AA6F-A9B4-33B8155E5256}"/>
-              </a:ext>
-            </a:extLst>
-          </p:cNvPr>
-          <p:cNvSpPr txBox="1"/>
-          <p:nvPr/>
-        </p:nvSpPr>
-        <p:spPr>
-          <a:xfrm>
-            <a:off x="6540157" y="1209675"/>
-            <a:ext cx="956416" cy="276999"/>
-          </a:xfrm>
-          <a:prstGeom prst="rect">
-            <a:avLst/>
-          </a:prstGeom>
-          <a:noFill/>
-        </p:spPr>
-        <p:txBody>
-          <a:bodyPr wrap="none" rtlCol="0">
-            <a:spAutoFit/>
-          </a:bodyPr>
-          <a:lstStyle/>
-          <a:p>
-            <a:r>
-              <a:rPr lang="en-US" sz="1200" dirty="0">
-                <a:solidFill>
-                  <a:schemeClr val="accent5">
-                    <a:lumMod val="60000"/>
-                    <a:lumOff val="40000"/>
-                  </a:schemeClr>
-                </a:solidFill>
-              </a:rPr>
-              <a:t>Also cancel</a:t>
-            </a:r>
-          </a:p>
-        </p:txBody>
-      </p:sp>
-      <p:sp>
-        <p:nvSpPr>
-          <p:cNvPr id="11" name="TextBox 10">
-            <a:extLst>
-              <a:ext uri="{FF2B5EF4-FFF2-40B4-BE49-F238E27FC236}">
-                <a16:creationId xmlns:a16="http://schemas.microsoft.com/office/drawing/2014/main" id="{0E09CC09-8774-BE0B-2FA7-EFE29EE8C089}"/>
-              </a:ext>
-            </a:extLst>
-          </p:cNvPr>
-          <p:cNvSpPr txBox="1"/>
-          <p:nvPr/>
-        </p:nvSpPr>
-        <p:spPr>
-          <a:xfrm>
-            <a:off x="5095715" y="2214175"/>
-            <a:ext cx="1237839" cy="276999"/>
-          </a:xfrm>
-          <a:prstGeom prst="rect">
-            <a:avLst/>
-          </a:prstGeom>
-          <a:noFill/>
-        </p:spPr>
-        <p:txBody>
-          <a:bodyPr wrap="none" rtlCol="0">
-            <a:spAutoFit/>
-          </a:bodyPr>
-          <a:lstStyle/>
-          <a:p>
-            <a:r>
-              <a:rPr lang="en-US" sz="1200" dirty="0">
-                <a:solidFill>
-                  <a:schemeClr val="accent5">
-                    <a:lumMod val="60000"/>
-                    <a:lumOff val="40000"/>
-                  </a:schemeClr>
-                </a:solidFill>
-              </a:rPr>
-              <a:t>Cancel deletion</a:t>
-            </a:r>
-          </a:p>
-        </p:txBody>
-      </p:sp>
-      <p:sp>
-        <p:nvSpPr>
-          <p:cNvPr id="12" name="TextBox 11">
-            <a:extLst>
-              <a:ext uri="{FF2B5EF4-FFF2-40B4-BE49-F238E27FC236}">
-                <a16:creationId xmlns:a16="http://schemas.microsoft.com/office/drawing/2014/main" id="{CE6DEEEB-BB97-10BA-01B7-CC03331EF4B7}"/>
-              </a:ext>
-            </a:extLst>
-          </p:cNvPr>
-          <p:cNvSpPr txBox="1"/>
-          <p:nvPr/>
-        </p:nvSpPr>
-        <p:spPr>
-          <a:xfrm>
-            <a:off x="7604147" y="4654158"/>
-            <a:ext cx="4198212" cy="1754326"/>
-          </a:xfrm>
-          <a:prstGeom prst="rect">
-            <a:avLst/>
-          </a:prstGeom>
-          <a:noFill/>
-        </p:spPr>
-        <p:txBody>
-          <a:bodyPr wrap="square" rtlCol="0">
-            <a:spAutoFit/>
-          </a:bodyPr>
-          <a:lstStyle/>
-          <a:p>
-            <a:r>
-              <a:rPr lang="en-US" dirty="0"/>
-              <a:t>This is what you see when you press the trash can for an associate’s line</a:t>
-            </a:r>
-          </a:p>
-          <a:p>
-            <a:endParaRPr lang="en-US" dirty="0"/>
-          </a:p>
-          <a:p>
-            <a:r>
-              <a:rPr lang="en-US" dirty="0"/>
-              <a:t>Notably, this only revokes this associate’s reset privileges for this line. It does not delete the line.</a:t>
-            </a:r>
-          </a:p>
-        </p:txBody>
-      </p:sp>
-    </p:spTree>
-    <p:extLst>
-      <p:ext uri="{BB962C8B-B14F-4D97-AF65-F5344CB8AC3E}">
-        <p14:creationId xmlns:p14="http://schemas.microsoft.com/office/powerpoint/2010/main" val="513862380"/>
-      </p:ext>
-    </p:extLst>
-  </p:cSld>
-  <p:clrMapOvr>
-    <a:masterClrMapping/>
-  </p:clrMapOvr>
-</p:sld>
-</file>
-
-<file path=ppt/slides/slide17.xml><?xml version="1.0" encoding="utf-8"?>
-<p:sld xmlns:a="http://schemas.openxmlformats.org/drawingml/2006/main" xmlns:r="http://schemas.openxmlformats.org/officeDocument/2006/relationships" xmlns:p="http://schemas.openxmlformats.org/presentationml/2006/main">
-  <p:cSld>
-    <p:spTree>
-      <p:nvGrpSpPr>
-        <p:cNvPr id="1" name="">
-          <a:extLst>
-            <a:ext uri="{FF2B5EF4-FFF2-40B4-BE49-F238E27FC236}">
-              <a16:creationId xmlns:a16="http://schemas.microsoft.com/office/drawing/2014/main" id="{6E4E0CD0-C9DB-7EA0-FDC1-3183B397AD6D}"/>
-            </a:ext>
-          </a:extLst>
-        </p:cNvPr>
-        <p:cNvGrpSpPr/>
-        <p:nvPr/>
-      </p:nvGrpSpPr>
-      <p:grpSpPr>
-        <a:xfrm>
-          <a:off x="0" y="0"/>
-          <a:ext cx="0" cy="0"/>
-          <a:chOff x="0" y="0"/>
-          <a:chExt cx="0" cy="0"/>
-        </a:xfrm>
-      </p:grpSpPr>
-      <p:sp>
-        <p:nvSpPr>
-          <p:cNvPr id="2" name="Title 1">
-            <a:extLst>
-              <a:ext uri="{FF2B5EF4-FFF2-40B4-BE49-F238E27FC236}">
-                <a16:creationId xmlns:a16="http://schemas.microsoft.com/office/drawing/2014/main" id="{E3575280-0382-B9E5-13A6-B12057E94063}"/>
-              </a:ext>
-            </a:extLst>
-          </p:cNvPr>
-          <p:cNvSpPr>
-            <a:spLocks noGrp="1"/>
-          </p:cNvSpPr>
-          <p:nvPr>
-            <p:ph type="title"/>
-          </p:nvPr>
-        </p:nvSpPr>
-        <p:spPr/>
-        <p:txBody>
-          <a:bodyPr>
-            <a:normAutofit fontScale="90000"/>
-          </a:bodyPr>
-          <a:lstStyle/>
-          <a:p>
-            <a:r>
-              <a:rPr lang="en-US" dirty="0"/>
-              <a:t>Update CMMS mappings page</a:t>
-            </a:r>
-          </a:p>
-        </p:txBody>
-      </p:sp>
-      <p:pic>
-        <p:nvPicPr>
-          <p:cNvPr id="9" name="Picture 8">
-            <a:extLst>
-              <a:ext uri="{FF2B5EF4-FFF2-40B4-BE49-F238E27FC236}">
-                <a16:creationId xmlns:a16="http://schemas.microsoft.com/office/drawing/2014/main" id="{7F930656-997A-8607-CF0E-2E9AE5A66111}"/>
-              </a:ext>
-            </a:extLst>
-          </p:cNvPr>
-          <p:cNvPicPr>
-            <a:picLocks noChangeAspect="1"/>
-          </p:cNvPicPr>
-          <p:nvPr/>
-        </p:nvPicPr>
-        <p:blipFill>
-          <a:blip r:embed="rId2"/>
-          <a:stretch>
-            <a:fillRect/>
-          </a:stretch>
-        </p:blipFill>
-        <p:spPr>
-          <a:xfrm>
-            <a:off x="304800" y="905060"/>
-            <a:ext cx="11553825" cy="5704475"/>
-          </a:xfrm>
-          <a:prstGeom prst="rect">
-            <a:avLst/>
-          </a:prstGeom>
-        </p:spPr>
-      </p:pic>
-      <p:sp>
-        <p:nvSpPr>
-          <p:cNvPr id="10" name="TextBox 9">
-            <a:extLst>
-              <a:ext uri="{FF2B5EF4-FFF2-40B4-BE49-F238E27FC236}">
-                <a16:creationId xmlns:a16="http://schemas.microsoft.com/office/drawing/2014/main" id="{40F9E787-298F-4E8C-0E11-EE0F768E08C6}"/>
-              </a:ext>
-            </a:extLst>
-          </p:cNvPr>
-          <p:cNvSpPr txBox="1"/>
-          <p:nvPr/>
-        </p:nvSpPr>
-        <p:spPr>
-          <a:xfrm>
-            <a:off x="4933950" y="2295525"/>
-            <a:ext cx="3701270" cy="276999"/>
-          </a:xfrm>
-          <a:prstGeom prst="rect">
-            <a:avLst/>
-          </a:prstGeom>
-          <a:noFill/>
-        </p:spPr>
-        <p:txBody>
-          <a:bodyPr wrap="none" rtlCol="0">
-            <a:spAutoFit/>
-          </a:bodyPr>
-          <a:lstStyle/>
-          <a:p>
-            <a:r>
-              <a:rPr lang="en-US" sz="1200" dirty="0">
-                <a:solidFill>
-                  <a:schemeClr val="accent5">
-                    <a:lumMod val="60000"/>
-                    <a:lumOff val="40000"/>
-                  </a:schemeClr>
-                </a:solidFill>
-              </a:rPr>
-              <a:t>Click button or drag/drop to this area to upload a CSV</a:t>
-            </a:r>
-          </a:p>
-        </p:txBody>
-      </p:sp>
-    </p:spTree>
-    <p:extLst>
-      <p:ext uri="{BB962C8B-B14F-4D97-AF65-F5344CB8AC3E}">
-        <p14:creationId xmlns:p14="http://schemas.microsoft.com/office/powerpoint/2010/main" val="3239207398"/>
       </p:ext>
     </p:extLst>
   </p:cSld>
@@ -5839,7 +6217,7 @@
           <p:cNvPr id="2" name="Title 1">
             <a:extLst>
               <a:ext uri="{FF2B5EF4-FFF2-40B4-BE49-F238E27FC236}">
-                <a16:creationId xmlns:a16="http://schemas.microsoft.com/office/drawing/2014/main" id="{EF1A11BC-959E-17EE-3924-576C94C09A55}"/>
+                <a16:creationId xmlns:a16="http://schemas.microsoft.com/office/drawing/2014/main" id="{7C9E53AB-1941-13D1-C21E-AB6BE1454795}"/>
               </a:ext>
             </a:extLst>
           </p:cNvPr>
@@ -5859,7 +6237,7 @@
           <a:p>
             <a:r>
               <a:rPr lang="en-US" dirty="0"/>
-              <a:t>CSV upload confirmation</a:t>
+              <a:t>Successful line addition</a:t>
             </a:r>
           </a:p>
         </p:txBody>
@@ -5869,7 +6247,7 @@
           <p:cNvPr id="5" name="Content Placeholder 4">
             <a:extLst>
               <a:ext uri="{FF2B5EF4-FFF2-40B4-BE49-F238E27FC236}">
-                <a16:creationId xmlns:a16="http://schemas.microsoft.com/office/drawing/2014/main" id="{F2CA6E80-D678-8CD7-31C7-FC1C4879C259}"/>
+                <a16:creationId xmlns:a16="http://schemas.microsoft.com/office/drawing/2014/main" id="{A75DAD4F-6AC3-5875-1D49-B9B43AB59E51}"/>
               </a:ext>
             </a:extLst>
           </p:cNvPr>
@@ -5881,15 +6259,16 @@
           </p:nvPr>
         </p:nvPicPr>
         <p:blipFill>
-          <a:blip r:embed="rId2"/>
+          <a:blip r:embed="rId3"/>
+          <a:srcRect b="1221"/>
           <a:stretch>
             <a:fillRect/>
           </a:stretch>
         </p:blipFill>
         <p:spPr>
           <a:xfrm>
-            <a:off x="317351" y="905060"/>
-            <a:ext cx="11560324" cy="5752969"/>
+            <a:off x="289228" y="905061"/>
+            <a:ext cx="11579118" cy="5727784"/>
           </a:xfrm>
           <a:prstGeom prst="rect">
             <a:avLst/>
@@ -5901,7 +6280,7 @@
           <p:cNvPr id="6" name="TextBox 5">
             <a:extLst>
               <a:ext uri="{FF2B5EF4-FFF2-40B4-BE49-F238E27FC236}">
-                <a16:creationId xmlns:a16="http://schemas.microsoft.com/office/drawing/2014/main" id="{2721500B-280D-67E6-1422-DE1D9A7E1E32}"/>
+                <a16:creationId xmlns:a16="http://schemas.microsoft.com/office/drawing/2014/main" id="{E97E0DC5-2407-061E-C8B4-65DD5E67CA14}"/>
               </a:ext>
             </a:extLst>
           </p:cNvPr>
@@ -5910,8 +6289,8 @@
         </p:nvSpPr>
         <p:spPr>
           <a:xfrm>
-            <a:off x="5095875" y="3152001"/>
-            <a:ext cx="3665299" cy="276999"/>
+            <a:off x="8677470" y="5755226"/>
+            <a:ext cx="2728964" cy="646331"/>
           </a:xfrm>
           <a:prstGeom prst="rect">
             <a:avLst/>
@@ -5919,7 +6298,7 @@
           <a:noFill/>
         </p:spPr>
         <p:txBody>
-          <a:bodyPr wrap="none" rtlCol="0">
+          <a:bodyPr wrap="square" rtlCol="0">
             <a:spAutoFit/>
           </a:bodyPr>
           <a:lstStyle/>
@@ -5933,7 +6312,7 @@
                   </a:schemeClr>
                 </a:solidFill>
               </a:rPr>
-              <a:t>Either file upload method gives you this confirmation</a:t>
+              <a:t>This toast lets you know the new line authorization was successful, even if it’s off screen</a:t>
             </a:r>
           </a:p>
         </p:txBody>
@@ -5941,7 +6320,7 @@
     </p:spTree>
     <p:extLst>
       <p:ext uri="{BB962C8B-B14F-4D97-AF65-F5344CB8AC3E}">
-        <p14:creationId xmlns:p14="http://schemas.microsoft.com/office/powerpoint/2010/main" val="3116791411"/>
+        <p14:creationId xmlns:p14="http://schemas.microsoft.com/office/powerpoint/2010/main" val="367804710"/>
       </p:ext>
     </p:extLst>
   </p:cSld>
@@ -5956,7 +6335,13 @@
   <p:cSld>
     <p:spTree>
       <p:nvGrpSpPr>
-        <p:cNvPr id="1" name=""/>
+        <p:cNvPr id="1" name="">
+          <a:extLst>
+            <a:ext uri="{FF2B5EF4-FFF2-40B4-BE49-F238E27FC236}">
+              <a16:creationId xmlns:a16="http://schemas.microsoft.com/office/drawing/2014/main" id="{ACEBB3FC-6D58-955F-1C01-F5459B6E876B}"/>
+            </a:ext>
+          </a:extLst>
+        </p:cNvPr>
         <p:cNvGrpSpPr/>
         <p:nvPr/>
       </p:nvGrpSpPr>
@@ -5968,51 +6353,19 @@
           <a:chExt cx="0" cy="0"/>
         </a:xfrm>
       </p:grpSpPr>
-      <p:sp>
-        <p:nvSpPr>
-          <p:cNvPr id="2" name="Title 1">
-            <a:extLst>
-              <a:ext uri="{FF2B5EF4-FFF2-40B4-BE49-F238E27FC236}">
-                <a16:creationId xmlns:a16="http://schemas.microsoft.com/office/drawing/2014/main" id="{45D93199-8250-6C00-D549-B9B41252C91A}"/>
-              </a:ext>
-            </a:extLst>
-          </p:cNvPr>
-          <p:cNvSpPr>
-            <a:spLocks noGrp="1"/>
-          </p:cNvSpPr>
-          <p:nvPr>
-            <p:ph type="title"/>
-          </p:nvPr>
-        </p:nvSpPr>
-        <p:spPr/>
-        <p:txBody>
-          <a:bodyPr>
-            <a:normAutofit fontScale="90000"/>
-          </a:bodyPr>
-          <a:lstStyle/>
-          <a:p>
-            <a:r>
-              <a:rPr lang="en-US" dirty="0"/>
-              <a:t>CSV upload progress updates</a:t>
-            </a:r>
-          </a:p>
-        </p:txBody>
-      </p:sp>
       <p:pic>
         <p:nvPicPr>
-          <p:cNvPr id="7" name="Content Placeholder 6">
-            <a:extLst>
-              <a:ext uri="{FF2B5EF4-FFF2-40B4-BE49-F238E27FC236}">
-                <a16:creationId xmlns:a16="http://schemas.microsoft.com/office/drawing/2014/main" id="{86AE2C3A-DAD7-E721-3108-1921C9108002}"/>
+          <p:cNvPr id="4" name="Picture 3">
+            <a:extLst>
+              <a:ext uri="{FF2B5EF4-FFF2-40B4-BE49-F238E27FC236}">
+                <a16:creationId xmlns:a16="http://schemas.microsoft.com/office/drawing/2014/main" id="{DB96343F-BDC6-3273-1BB9-8C46D43EACCC}"/>
               </a:ext>
             </a:extLst>
           </p:cNvPr>
           <p:cNvPicPr>
-            <a:picLocks noGrp="1" noChangeAspect="1"/>
+            <a:picLocks noChangeAspect="1"/>
           </p:cNvPicPr>
-          <p:nvPr>
-            <p:ph idx="1"/>
-          </p:nvPr>
+          <p:nvPr/>
         </p:nvPicPr>
         <p:blipFill>
           <a:blip r:embed="rId2"/>
@@ -6022,8 +6375,8 @@
         </p:blipFill>
         <p:spPr>
           <a:xfrm>
-            <a:off x="308083" y="905060"/>
-            <a:ext cx="11550541" cy="5696818"/>
+            <a:off x="304800" y="905060"/>
+            <a:ext cx="11578232" cy="5783067"/>
           </a:xfrm>
           <a:prstGeom prst="rect">
             <a:avLst/>
@@ -6032,10 +6385,40 @@
       </p:pic>
       <p:sp>
         <p:nvSpPr>
-          <p:cNvPr id="8" name="TextBox 7">
-            <a:extLst>
-              <a:ext uri="{FF2B5EF4-FFF2-40B4-BE49-F238E27FC236}">
-                <a16:creationId xmlns:a16="http://schemas.microsoft.com/office/drawing/2014/main" id="{09B2CCE3-29F4-360F-B114-BC1AB268E8F3}"/>
+          <p:cNvPr id="2" name="Title 1">
+            <a:extLst>
+              <a:ext uri="{FF2B5EF4-FFF2-40B4-BE49-F238E27FC236}">
+                <a16:creationId xmlns:a16="http://schemas.microsoft.com/office/drawing/2014/main" id="{CC06B3DD-E1E0-9F46-FE96-8C2337C637FC}"/>
+              </a:ext>
+            </a:extLst>
+          </p:cNvPr>
+          <p:cNvSpPr>
+            <a:spLocks noGrp="1"/>
+          </p:cNvSpPr>
+          <p:nvPr>
+            <p:ph type="title"/>
+          </p:nvPr>
+        </p:nvSpPr>
+        <p:spPr/>
+        <p:txBody>
+          <a:bodyPr>
+            <a:normAutofit fontScale="90000"/>
+          </a:bodyPr>
+          <a:lstStyle/>
+          <a:p>
+            <a:r>
+              <a:rPr lang="en-US" dirty="0"/>
+              <a:t>Line update</a:t>
+            </a:r>
+          </a:p>
+        </p:txBody>
+      </p:sp>
+      <p:sp>
+        <p:nvSpPr>
+          <p:cNvPr id="10" name="TextBox 9">
+            <a:extLst>
+              <a:ext uri="{FF2B5EF4-FFF2-40B4-BE49-F238E27FC236}">
+                <a16:creationId xmlns:a16="http://schemas.microsoft.com/office/drawing/2014/main" id="{95330153-FD92-D840-CDA1-3B352953601D}"/>
               </a:ext>
             </a:extLst>
           </p:cNvPr>
@@ -6044,8 +6427,8 @@
         </p:nvSpPr>
         <p:spPr>
           <a:xfrm>
-            <a:off x="7321550" y="2228850"/>
-            <a:ext cx="3536289" cy="276999"/>
+            <a:off x="7652785" y="5402017"/>
+            <a:ext cx="3607847" cy="276999"/>
           </a:xfrm>
           <a:prstGeom prst="rect">
             <a:avLst/>
@@ -6067,17 +6450,17 @@
                   </a:schemeClr>
                 </a:solidFill>
               </a:rPr>
-              <a:t>After a successful upload, you’ll see this message.</a:t>
-            </a:r>
-          </a:p>
-        </p:txBody>
-      </p:sp>
-      <p:sp>
-        <p:nvSpPr>
-          <p:cNvPr id="9" name="TextBox 8">
-            <a:extLst>
-              <a:ext uri="{FF2B5EF4-FFF2-40B4-BE49-F238E27FC236}">
-                <a16:creationId xmlns:a16="http://schemas.microsoft.com/office/drawing/2014/main" id="{9D603A14-5931-1B17-8F2D-E22B46433E73}"/>
+              <a:t>Pressing the expand button highlights the target row</a:t>
+            </a:r>
+          </a:p>
+        </p:txBody>
+      </p:sp>
+      <p:sp>
+        <p:nvSpPr>
+          <p:cNvPr id="11" name="TextBox 10">
+            <a:extLst>
+              <a:ext uri="{FF2B5EF4-FFF2-40B4-BE49-F238E27FC236}">
+                <a16:creationId xmlns:a16="http://schemas.microsoft.com/office/drawing/2014/main" id="{48606123-8CE9-6A62-4325-8003ED674D33}"/>
               </a:ext>
             </a:extLst>
           </p:cNvPr>
@@ -6086,8 +6469,8 @@
         </p:nvSpPr>
         <p:spPr>
           <a:xfrm>
-            <a:off x="1979629" y="4369197"/>
-            <a:ext cx="9728462" cy="646331"/>
+            <a:off x="7812605" y="1835649"/>
+            <a:ext cx="3288208" cy="276999"/>
           </a:xfrm>
           <a:prstGeom prst="rect">
             <a:avLst/>
@@ -6095,42 +6478,7 @@
           <a:noFill/>
         </p:spPr>
         <p:txBody>
-          <a:bodyPr wrap="square" rtlCol="0">
-            <a:spAutoFit/>
-          </a:bodyPr>
-          <a:lstStyle/>
-          <a:p>
-            <a:r>
-              <a:rPr lang="en-US" dirty="0"/>
-              <a:t>If you upload a non-CSV or a CSV where the columns aren’t what the reader expects, you haven’t affected the database, but the little gray update box will be…troubled </a:t>
-            </a:r>
-          </a:p>
-        </p:txBody>
-      </p:sp>
-      <p:sp>
-        <p:nvSpPr>
-          <p:cNvPr id="10" name="TextBox 9">
-            <a:extLst>
-              <a:ext uri="{FF2B5EF4-FFF2-40B4-BE49-F238E27FC236}">
-                <a16:creationId xmlns:a16="http://schemas.microsoft.com/office/drawing/2014/main" id="{65F1E29E-7630-6390-7AE4-67F2597D73DF}"/>
-              </a:ext>
-            </a:extLst>
-          </p:cNvPr>
-          <p:cNvSpPr txBox="1"/>
-          <p:nvPr/>
-        </p:nvSpPr>
-        <p:spPr>
-          <a:xfrm>
-            <a:off x="7456601" y="1467402"/>
-            <a:ext cx="3401238" cy="461665"/>
-          </a:xfrm>
-          <a:prstGeom prst="rect">
-            <a:avLst/>
-          </a:prstGeom>
-          <a:noFill/>
-        </p:spPr>
-        <p:txBody>
-          <a:bodyPr wrap="square" rtlCol="0">
+          <a:bodyPr wrap="none" rtlCol="0">
             <a:spAutoFit/>
           </a:bodyPr>
           <a:lstStyle/>
@@ -6144,7 +6492,7 @@
                   </a:schemeClr>
                 </a:solidFill>
               </a:rPr>
-              <a:t>As long as the CSV you upload is in the Maximo format, you shouldn’t have any problems</a:t>
+              <a:t>Can’t change line name, but can edit auth level</a:t>
             </a:r>
           </a:p>
         </p:txBody>
@@ -6152,7 +6500,7 @@
     </p:spTree>
     <p:extLst>
       <p:ext uri="{BB962C8B-B14F-4D97-AF65-F5344CB8AC3E}">
-        <p14:creationId xmlns:p14="http://schemas.microsoft.com/office/powerpoint/2010/main" val="4058351882"/>
+        <p14:creationId xmlns:p14="http://schemas.microsoft.com/office/powerpoint/2010/main" val="3653232833"/>
       </p:ext>
     </p:extLst>
   </p:cSld>
@@ -6668,6 +7016,1092 @@
 </p:sld>
 </file>
 
+<file path=ppt/slides/slide20.xml><?xml version="1.0" encoding="utf-8"?>
+<p:sld xmlns:a="http://schemas.openxmlformats.org/drawingml/2006/main" xmlns:r="http://schemas.openxmlformats.org/officeDocument/2006/relationships" xmlns:p="http://schemas.openxmlformats.org/presentationml/2006/main">
+  <p:cSld>
+    <p:spTree>
+      <p:nvGrpSpPr>
+        <p:cNvPr id="1" name=""/>
+        <p:cNvGrpSpPr/>
+        <p:nvPr/>
+      </p:nvGrpSpPr>
+      <p:grpSpPr>
+        <a:xfrm>
+          <a:off x="0" y="0"/>
+          <a:ext cx="0" cy="0"/>
+          <a:chOff x="0" y="0"/>
+          <a:chExt cx="0" cy="0"/>
+        </a:xfrm>
+      </p:grpSpPr>
+      <p:sp>
+        <p:nvSpPr>
+          <p:cNvPr id="2" name="Title 1">
+            <a:extLst>
+              <a:ext uri="{FF2B5EF4-FFF2-40B4-BE49-F238E27FC236}">
+                <a16:creationId xmlns:a16="http://schemas.microsoft.com/office/drawing/2014/main" id="{53CABD7A-A739-D1BC-CE4D-49BD26998456}"/>
+              </a:ext>
+            </a:extLst>
+          </p:cNvPr>
+          <p:cNvSpPr>
+            <a:spLocks noGrp="1"/>
+          </p:cNvSpPr>
+          <p:nvPr>
+            <p:ph type="title"/>
+          </p:nvPr>
+        </p:nvSpPr>
+        <p:spPr/>
+        <p:txBody>
+          <a:bodyPr>
+            <a:normAutofit fontScale="90000"/>
+          </a:bodyPr>
+          <a:lstStyle/>
+          <a:p>
+            <a:r>
+              <a:rPr lang="en-US" dirty="0"/>
+              <a:t>Successful line update</a:t>
+            </a:r>
+          </a:p>
+        </p:txBody>
+      </p:sp>
+      <p:pic>
+        <p:nvPicPr>
+          <p:cNvPr id="5" name="Content Placeholder 4">
+            <a:extLst>
+              <a:ext uri="{FF2B5EF4-FFF2-40B4-BE49-F238E27FC236}">
+                <a16:creationId xmlns:a16="http://schemas.microsoft.com/office/drawing/2014/main" id="{7370A13E-7DC2-FD68-68C5-16F158D76ECA}"/>
+              </a:ext>
+            </a:extLst>
+          </p:cNvPr>
+          <p:cNvPicPr>
+            <a:picLocks noGrp="1" noChangeAspect="1"/>
+          </p:cNvPicPr>
+          <p:nvPr>
+            <p:ph idx="1"/>
+          </p:nvPr>
+        </p:nvPicPr>
+        <p:blipFill>
+          <a:blip r:embed="rId2"/>
+          <a:stretch>
+            <a:fillRect/>
+          </a:stretch>
+        </p:blipFill>
+        <p:spPr>
+          <a:xfrm>
+            <a:off x="313251" y="940411"/>
+            <a:ext cx="11564522" cy="5776213"/>
+          </a:xfrm>
+          <a:prstGeom prst="rect">
+            <a:avLst/>
+          </a:prstGeom>
+        </p:spPr>
+      </p:pic>
+      <p:sp>
+        <p:nvSpPr>
+          <p:cNvPr id="6" name="TextBox 5">
+            <a:extLst>
+              <a:ext uri="{FF2B5EF4-FFF2-40B4-BE49-F238E27FC236}">
+                <a16:creationId xmlns:a16="http://schemas.microsoft.com/office/drawing/2014/main" id="{BB9860F3-6546-A5FA-942C-EC2D01BD01C0}"/>
+              </a:ext>
+            </a:extLst>
+          </p:cNvPr>
+          <p:cNvSpPr txBox="1"/>
+          <p:nvPr/>
+        </p:nvSpPr>
+        <p:spPr>
+          <a:xfrm>
+            <a:off x="8536068" y="5792934"/>
+            <a:ext cx="2728964" cy="646331"/>
+          </a:xfrm>
+          <a:prstGeom prst="rect">
+            <a:avLst/>
+          </a:prstGeom>
+          <a:noFill/>
+        </p:spPr>
+        <p:txBody>
+          <a:bodyPr wrap="square" rtlCol="0">
+            <a:spAutoFit/>
+          </a:bodyPr>
+          <a:lstStyle/>
+          <a:p>
+            <a:r>
+              <a:rPr lang="en-US" sz="1200" dirty="0">
+                <a:solidFill>
+                  <a:schemeClr val="accent5">
+                    <a:lumMod val="60000"/>
+                    <a:lumOff val="40000"/>
+                  </a:schemeClr>
+                </a:solidFill>
+              </a:rPr>
+              <a:t>This toast lets you know the auth level change was successful, even if the line is off screen</a:t>
+            </a:r>
+          </a:p>
+        </p:txBody>
+      </p:sp>
+    </p:spTree>
+    <p:extLst>
+      <p:ext uri="{BB962C8B-B14F-4D97-AF65-F5344CB8AC3E}">
+        <p14:creationId xmlns:p14="http://schemas.microsoft.com/office/powerpoint/2010/main" val="402155355"/>
+      </p:ext>
+    </p:extLst>
+  </p:cSld>
+  <p:clrMapOvr>
+    <a:masterClrMapping/>
+  </p:clrMapOvr>
+</p:sld>
+</file>
+
+<file path=ppt/slides/slide21.xml><?xml version="1.0" encoding="utf-8"?>
+<p:sld xmlns:a="http://schemas.openxmlformats.org/drawingml/2006/main" xmlns:r="http://schemas.openxmlformats.org/officeDocument/2006/relationships" xmlns:p="http://schemas.openxmlformats.org/presentationml/2006/main">
+  <p:cSld>
+    <p:spTree>
+      <p:nvGrpSpPr>
+        <p:cNvPr id="1" name="">
+          <a:extLst>
+            <a:ext uri="{FF2B5EF4-FFF2-40B4-BE49-F238E27FC236}">
+              <a16:creationId xmlns:a16="http://schemas.microsoft.com/office/drawing/2014/main" id="{7955D05A-C958-EADA-99D9-E49968776270}"/>
+            </a:ext>
+          </a:extLst>
+        </p:cNvPr>
+        <p:cNvGrpSpPr/>
+        <p:nvPr/>
+      </p:nvGrpSpPr>
+      <p:grpSpPr>
+        <a:xfrm>
+          <a:off x="0" y="0"/>
+          <a:ext cx="0" cy="0"/>
+          <a:chOff x="0" y="0"/>
+          <a:chExt cx="0" cy="0"/>
+        </a:xfrm>
+      </p:grpSpPr>
+      <p:pic>
+        <p:nvPicPr>
+          <p:cNvPr id="5" name="Picture 4">
+            <a:extLst>
+              <a:ext uri="{FF2B5EF4-FFF2-40B4-BE49-F238E27FC236}">
+                <a16:creationId xmlns:a16="http://schemas.microsoft.com/office/drawing/2014/main" id="{7A14427B-AF35-A3E6-4305-2618619E7148}"/>
+              </a:ext>
+            </a:extLst>
+          </p:cNvPr>
+          <p:cNvPicPr>
+            <a:picLocks noChangeAspect="1"/>
+          </p:cNvPicPr>
+          <p:nvPr/>
+        </p:nvPicPr>
+        <p:blipFill>
+          <a:blip r:embed="rId2"/>
+          <a:stretch>
+            <a:fillRect/>
+          </a:stretch>
+        </p:blipFill>
+        <p:spPr>
+          <a:xfrm>
+            <a:off x="311085" y="905060"/>
+            <a:ext cx="11603721" cy="5738237"/>
+          </a:xfrm>
+          <a:prstGeom prst="rect">
+            <a:avLst/>
+          </a:prstGeom>
+        </p:spPr>
+      </p:pic>
+      <p:sp>
+        <p:nvSpPr>
+          <p:cNvPr id="2" name="Title 1">
+            <a:extLst>
+              <a:ext uri="{FF2B5EF4-FFF2-40B4-BE49-F238E27FC236}">
+                <a16:creationId xmlns:a16="http://schemas.microsoft.com/office/drawing/2014/main" id="{EA7C9B24-FA12-59EB-6D2D-8FFE5FCD2495}"/>
+              </a:ext>
+            </a:extLst>
+          </p:cNvPr>
+          <p:cNvSpPr>
+            <a:spLocks noGrp="1"/>
+          </p:cNvSpPr>
+          <p:nvPr>
+            <p:ph type="title"/>
+          </p:nvPr>
+        </p:nvSpPr>
+        <p:spPr/>
+        <p:txBody>
+          <a:bodyPr>
+            <a:normAutofit fontScale="90000"/>
+          </a:bodyPr>
+          <a:lstStyle/>
+          <a:p>
+            <a:r>
+              <a:rPr lang="en-US" dirty="0"/>
+              <a:t>Line removal</a:t>
+            </a:r>
+          </a:p>
+        </p:txBody>
+      </p:sp>
+      <p:sp>
+        <p:nvSpPr>
+          <p:cNvPr id="6" name="TextBox 5">
+            <a:extLst>
+              <a:ext uri="{FF2B5EF4-FFF2-40B4-BE49-F238E27FC236}">
+                <a16:creationId xmlns:a16="http://schemas.microsoft.com/office/drawing/2014/main" id="{F0E759CB-89D7-2B1F-569E-5DD58979ECDC}"/>
+              </a:ext>
+            </a:extLst>
+          </p:cNvPr>
+          <p:cNvSpPr txBox="1"/>
+          <p:nvPr/>
+        </p:nvSpPr>
+        <p:spPr>
+          <a:xfrm>
+            <a:off x="6280150" y="1643391"/>
+            <a:ext cx="1323997" cy="461665"/>
+          </a:xfrm>
+          <a:prstGeom prst="rect">
+            <a:avLst/>
+          </a:prstGeom>
+          <a:noFill/>
+        </p:spPr>
+        <p:txBody>
+          <a:bodyPr wrap="square" rtlCol="0">
+            <a:spAutoFit/>
+          </a:bodyPr>
+          <a:lstStyle/>
+          <a:p>
+            <a:r>
+              <a:rPr lang="en-US" sz="1200" dirty="0">
+                <a:solidFill>
+                  <a:schemeClr val="accent5">
+                    <a:lumMod val="60000"/>
+                    <a:lumOff val="40000"/>
+                  </a:schemeClr>
+                </a:solidFill>
+              </a:rPr>
+              <a:t>Removes line from associate</a:t>
+            </a:r>
+          </a:p>
+        </p:txBody>
+      </p:sp>
+      <p:cxnSp>
+        <p:nvCxnSpPr>
+          <p:cNvPr id="8" name="Straight Arrow Connector 7">
+            <a:extLst>
+              <a:ext uri="{FF2B5EF4-FFF2-40B4-BE49-F238E27FC236}">
+                <a16:creationId xmlns:a16="http://schemas.microsoft.com/office/drawing/2014/main" id="{86F9D3DF-A617-F3A2-2757-72D1A80208B8}"/>
+              </a:ext>
+            </a:extLst>
+          </p:cNvPr>
+          <p:cNvCxnSpPr/>
+          <p:nvPr/>
+        </p:nvCxnSpPr>
+        <p:spPr>
+          <a:xfrm>
+            <a:off x="7023100" y="2066925"/>
+            <a:ext cx="212725" cy="174625"/>
+          </a:xfrm>
+          <a:prstGeom prst="straightConnector1">
+            <a:avLst/>
+          </a:prstGeom>
+          <a:ln>
+            <a:tailEnd type="triangle"/>
+          </a:ln>
+        </p:spPr>
+        <p:style>
+          <a:lnRef idx="2">
+            <a:schemeClr val="accent1"/>
+          </a:lnRef>
+          <a:fillRef idx="0">
+            <a:schemeClr val="accent1"/>
+          </a:fillRef>
+          <a:effectRef idx="1">
+            <a:schemeClr val="accent1"/>
+          </a:effectRef>
+          <a:fontRef idx="minor">
+            <a:schemeClr val="tx1"/>
+          </a:fontRef>
+        </p:style>
+      </p:cxnSp>
+      <p:sp>
+        <p:nvSpPr>
+          <p:cNvPr id="10" name="TextBox 9">
+            <a:extLst>
+              <a:ext uri="{FF2B5EF4-FFF2-40B4-BE49-F238E27FC236}">
+                <a16:creationId xmlns:a16="http://schemas.microsoft.com/office/drawing/2014/main" id="{70F1E900-9919-AA6F-A9B4-33B8155E5256}"/>
+              </a:ext>
+            </a:extLst>
+          </p:cNvPr>
+          <p:cNvSpPr txBox="1"/>
+          <p:nvPr/>
+        </p:nvSpPr>
+        <p:spPr>
+          <a:xfrm>
+            <a:off x="6540157" y="1209675"/>
+            <a:ext cx="956416" cy="276999"/>
+          </a:xfrm>
+          <a:prstGeom prst="rect">
+            <a:avLst/>
+          </a:prstGeom>
+          <a:noFill/>
+        </p:spPr>
+        <p:txBody>
+          <a:bodyPr wrap="none" rtlCol="0">
+            <a:spAutoFit/>
+          </a:bodyPr>
+          <a:lstStyle/>
+          <a:p>
+            <a:r>
+              <a:rPr lang="en-US" sz="1200" dirty="0">
+                <a:solidFill>
+                  <a:schemeClr val="accent5">
+                    <a:lumMod val="60000"/>
+                    <a:lumOff val="40000"/>
+                  </a:schemeClr>
+                </a:solidFill>
+              </a:rPr>
+              <a:t>Also cancel</a:t>
+            </a:r>
+          </a:p>
+        </p:txBody>
+      </p:sp>
+      <p:sp>
+        <p:nvSpPr>
+          <p:cNvPr id="11" name="TextBox 10">
+            <a:extLst>
+              <a:ext uri="{FF2B5EF4-FFF2-40B4-BE49-F238E27FC236}">
+                <a16:creationId xmlns:a16="http://schemas.microsoft.com/office/drawing/2014/main" id="{0E09CC09-8774-BE0B-2FA7-EFE29EE8C089}"/>
+              </a:ext>
+            </a:extLst>
+          </p:cNvPr>
+          <p:cNvSpPr txBox="1"/>
+          <p:nvPr/>
+        </p:nvSpPr>
+        <p:spPr>
+          <a:xfrm>
+            <a:off x="5095715" y="2214175"/>
+            <a:ext cx="1237839" cy="276999"/>
+          </a:xfrm>
+          <a:prstGeom prst="rect">
+            <a:avLst/>
+          </a:prstGeom>
+          <a:noFill/>
+        </p:spPr>
+        <p:txBody>
+          <a:bodyPr wrap="none" rtlCol="0">
+            <a:spAutoFit/>
+          </a:bodyPr>
+          <a:lstStyle/>
+          <a:p>
+            <a:r>
+              <a:rPr lang="en-US" sz="1200" dirty="0">
+                <a:solidFill>
+                  <a:schemeClr val="accent5">
+                    <a:lumMod val="60000"/>
+                    <a:lumOff val="40000"/>
+                  </a:schemeClr>
+                </a:solidFill>
+              </a:rPr>
+              <a:t>Cancel deletion</a:t>
+            </a:r>
+          </a:p>
+        </p:txBody>
+      </p:sp>
+      <p:sp>
+        <p:nvSpPr>
+          <p:cNvPr id="12" name="TextBox 11">
+            <a:extLst>
+              <a:ext uri="{FF2B5EF4-FFF2-40B4-BE49-F238E27FC236}">
+                <a16:creationId xmlns:a16="http://schemas.microsoft.com/office/drawing/2014/main" id="{CE6DEEEB-BB97-10BA-01B7-CC03331EF4B7}"/>
+              </a:ext>
+            </a:extLst>
+          </p:cNvPr>
+          <p:cNvSpPr txBox="1"/>
+          <p:nvPr/>
+        </p:nvSpPr>
+        <p:spPr>
+          <a:xfrm>
+            <a:off x="7101656" y="5648325"/>
+            <a:ext cx="4779259" cy="584775"/>
+          </a:xfrm>
+          <a:prstGeom prst="rect">
+            <a:avLst/>
+          </a:prstGeom>
+          <a:noFill/>
+        </p:spPr>
+        <p:txBody>
+          <a:bodyPr wrap="square" rtlCol="0">
+            <a:spAutoFit/>
+          </a:bodyPr>
+          <a:lstStyle/>
+          <a:p>
+            <a:r>
+              <a:rPr lang="en-US" sz="1600" dirty="0"/>
+              <a:t>This is what you see when you press the trash can for an associate’s line</a:t>
+            </a:r>
+          </a:p>
+        </p:txBody>
+      </p:sp>
+    </p:spTree>
+    <p:extLst>
+      <p:ext uri="{BB962C8B-B14F-4D97-AF65-F5344CB8AC3E}">
+        <p14:creationId xmlns:p14="http://schemas.microsoft.com/office/powerpoint/2010/main" val="513862380"/>
+      </p:ext>
+    </p:extLst>
+  </p:cSld>
+  <p:clrMapOvr>
+    <a:masterClrMapping/>
+  </p:clrMapOvr>
+</p:sld>
+</file>
+
+<file path=ppt/slides/slide22.xml><?xml version="1.0" encoding="utf-8"?>
+<p:sld xmlns:a="http://schemas.openxmlformats.org/drawingml/2006/main" xmlns:r="http://schemas.openxmlformats.org/officeDocument/2006/relationships" xmlns:p="http://schemas.openxmlformats.org/presentationml/2006/main">
+  <p:cSld>
+    <p:spTree>
+      <p:nvGrpSpPr>
+        <p:cNvPr id="1" name=""/>
+        <p:cNvGrpSpPr/>
+        <p:nvPr/>
+      </p:nvGrpSpPr>
+      <p:grpSpPr>
+        <a:xfrm>
+          <a:off x="0" y="0"/>
+          <a:ext cx="0" cy="0"/>
+          <a:chOff x="0" y="0"/>
+          <a:chExt cx="0" cy="0"/>
+        </a:xfrm>
+      </p:grpSpPr>
+      <p:sp>
+        <p:nvSpPr>
+          <p:cNvPr id="2" name="Title 1">
+            <a:extLst>
+              <a:ext uri="{FF2B5EF4-FFF2-40B4-BE49-F238E27FC236}">
+                <a16:creationId xmlns:a16="http://schemas.microsoft.com/office/drawing/2014/main" id="{30A0EF82-9048-D9C8-FD62-CFD3615CE3D0}"/>
+              </a:ext>
+            </a:extLst>
+          </p:cNvPr>
+          <p:cNvSpPr>
+            <a:spLocks noGrp="1"/>
+          </p:cNvSpPr>
+          <p:nvPr>
+            <p:ph type="title"/>
+          </p:nvPr>
+        </p:nvSpPr>
+        <p:spPr/>
+        <p:txBody>
+          <a:bodyPr>
+            <a:normAutofit fontScale="90000"/>
+          </a:bodyPr>
+          <a:lstStyle/>
+          <a:p>
+            <a:r>
+              <a:rPr lang="en-US" dirty="0"/>
+              <a:t>Successful line removal</a:t>
+            </a:r>
+          </a:p>
+        </p:txBody>
+      </p:sp>
+      <p:pic>
+        <p:nvPicPr>
+          <p:cNvPr id="5" name="Content Placeholder 4">
+            <a:extLst>
+              <a:ext uri="{FF2B5EF4-FFF2-40B4-BE49-F238E27FC236}">
+                <a16:creationId xmlns:a16="http://schemas.microsoft.com/office/drawing/2014/main" id="{27C5272A-7070-1B32-6C90-14A129A29419}"/>
+              </a:ext>
+            </a:extLst>
+          </p:cNvPr>
+          <p:cNvPicPr>
+            <a:picLocks noGrp="1" noChangeAspect="1"/>
+          </p:cNvPicPr>
+          <p:nvPr>
+            <p:ph idx="1"/>
+          </p:nvPr>
+        </p:nvPicPr>
+        <p:blipFill>
+          <a:blip r:embed="rId2"/>
+          <a:stretch>
+            <a:fillRect/>
+          </a:stretch>
+        </p:blipFill>
+        <p:spPr>
+          <a:xfrm>
+            <a:off x="287038" y="905060"/>
+            <a:ext cx="11600161" cy="5772794"/>
+          </a:xfrm>
+          <a:prstGeom prst="rect">
+            <a:avLst/>
+          </a:prstGeom>
+        </p:spPr>
+      </p:pic>
+      <p:sp>
+        <p:nvSpPr>
+          <p:cNvPr id="6" name="TextBox 5">
+            <a:extLst>
+              <a:ext uri="{FF2B5EF4-FFF2-40B4-BE49-F238E27FC236}">
+                <a16:creationId xmlns:a16="http://schemas.microsoft.com/office/drawing/2014/main" id="{9B358EE2-CCFC-730B-F954-2694FB08DA87}"/>
+              </a:ext>
+            </a:extLst>
+          </p:cNvPr>
+          <p:cNvSpPr txBox="1"/>
+          <p:nvPr/>
+        </p:nvSpPr>
+        <p:spPr>
+          <a:xfrm>
+            <a:off x="8999457" y="5758421"/>
+            <a:ext cx="2007909" cy="646331"/>
+          </a:xfrm>
+          <a:prstGeom prst="rect">
+            <a:avLst/>
+          </a:prstGeom>
+          <a:noFill/>
+        </p:spPr>
+        <p:txBody>
+          <a:bodyPr wrap="square" rtlCol="0">
+            <a:spAutoFit/>
+          </a:bodyPr>
+          <a:lstStyle/>
+          <a:p>
+            <a:r>
+              <a:rPr lang="en-US" sz="1200" dirty="0">
+                <a:solidFill>
+                  <a:schemeClr val="accent5">
+                    <a:lumMod val="60000"/>
+                    <a:lumOff val="40000"/>
+                  </a:schemeClr>
+                </a:solidFill>
+              </a:rPr>
+              <a:t>You can be sure the deletion worked if you see this toast</a:t>
+            </a:r>
+          </a:p>
+        </p:txBody>
+      </p:sp>
+      <p:sp>
+        <p:nvSpPr>
+          <p:cNvPr id="8" name="TextBox 7">
+            <a:extLst>
+              <a:ext uri="{FF2B5EF4-FFF2-40B4-BE49-F238E27FC236}">
+                <a16:creationId xmlns:a16="http://schemas.microsoft.com/office/drawing/2014/main" id="{20C4C6A3-B71C-3D12-DBC4-2C0A581608C5}"/>
+              </a:ext>
+            </a:extLst>
+          </p:cNvPr>
+          <p:cNvSpPr txBox="1"/>
+          <p:nvPr/>
+        </p:nvSpPr>
+        <p:spPr>
+          <a:xfrm>
+            <a:off x="3820212" y="1076252"/>
+            <a:ext cx="3589256" cy="461665"/>
+          </a:xfrm>
+          <a:prstGeom prst="rect">
+            <a:avLst/>
+          </a:prstGeom>
+          <a:noFill/>
+        </p:spPr>
+        <p:txBody>
+          <a:bodyPr wrap="square">
+            <a:spAutoFit/>
+          </a:bodyPr>
+          <a:lstStyle/>
+          <a:p>
+            <a:r>
+              <a:rPr lang="en-US" sz="1200" dirty="0">
+                <a:solidFill>
+                  <a:schemeClr val="accent5">
+                    <a:lumMod val="60000"/>
+                    <a:lumOff val="40000"/>
+                  </a:schemeClr>
+                </a:solidFill>
+              </a:rPr>
+              <a:t>Notably, this only revokes this associate’s reset privileges for this line. It does not delete the line.</a:t>
+            </a:r>
+          </a:p>
+        </p:txBody>
+      </p:sp>
+    </p:spTree>
+    <p:extLst>
+      <p:ext uri="{BB962C8B-B14F-4D97-AF65-F5344CB8AC3E}">
+        <p14:creationId xmlns:p14="http://schemas.microsoft.com/office/powerpoint/2010/main" val="1088793323"/>
+      </p:ext>
+    </p:extLst>
+  </p:cSld>
+  <p:clrMapOvr>
+    <a:masterClrMapping/>
+  </p:clrMapOvr>
+</p:sld>
+</file>
+
+<file path=ppt/slides/slide23.xml><?xml version="1.0" encoding="utf-8"?>
+<p:sld xmlns:a="http://schemas.openxmlformats.org/drawingml/2006/main" xmlns:r="http://schemas.openxmlformats.org/officeDocument/2006/relationships" xmlns:p="http://schemas.openxmlformats.org/presentationml/2006/main">
+  <p:cSld>
+    <p:spTree>
+      <p:nvGrpSpPr>
+        <p:cNvPr id="1" name="">
+          <a:extLst>
+            <a:ext uri="{FF2B5EF4-FFF2-40B4-BE49-F238E27FC236}">
+              <a16:creationId xmlns:a16="http://schemas.microsoft.com/office/drawing/2014/main" id="{6E4E0CD0-C9DB-7EA0-FDC1-3183B397AD6D}"/>
+            </a:ext>
+          </a:extLst>
+        </p:cNvPr>
+        <p:cNvGrpSpPr/>
+        <p:nvPr/>
+      </p:nvGrpSpPr>
+      <p:grpSpPr>
+        <a:xfrm>
+          <a:off x="0" y="0"/>
+          <a:ext cx="0" cy="0"/>
+          <a:chOff x="0" y="0"/>
+          <a:chExt cx="0" cy="0"/>
+        </a:xfrm>
+      </p:grpSpPr>
+      <p:pic>
+        <p:nvPicPr>
+          <p:cNvPr id="4" name="Picture 3">
+            <a:extLst>
+              <a:ext uri="{FF2B5EF4-FFF2-40B4-BE49-F238E27FC236}">
+                <a16:creationId xmlns:a16="http://schemas.microsoft.com/office/drawing/2014/main" id="{E8D9E11E-3231-F932-675B-E27C640CBA77}"/>
+              </a:ext>
+            </a:extLst>
+          </p:cNvPr>
+          <p:cNvPicPr>
+            <a:picLocks noChangeAspect="1"/>
+          </p:cNvPicPr>
+          <p:nvPr/>
+        </p:nvPicPr>
+        <p:blipFill>
+          <a:blip r:embed="rId2"/>
+          <a:stretch>
+            <a:fillRect/>
+          </a:stretch>
+        </p:blipFill>
+        <p:spPr>
+          <a:xfrm>
+            <a:off x="304800" y="905060"/>
+            <a:ext cx="11553825" cy="5761830"/>
+          </a:xfrm>
+          <a:prstGeom prst="rect">
+            <a:avLst/>
+          </a:prstGeom>
+        </p:spPr>
+      </p:pic>
+      <p:sp>
+        <p:nvSpPr>
+          <p:cNvPr id="2" name="Title 1">
+            <a:extLst>
+              <a:ext uri="{FF2B5EF4-FFF2-40B4-BE49-F238E27FC236}">
+                <a16:creationId xmlns:a16="http://schemas.microsoft.com/office/drawing/2014/main" id="{E3575280-0382-B9E5-13A6-B12057E94063}"/>
+              </a:ext>
+            </a:extLst>
+          </p:cNvPr>
+          <p:cNvSpPr>
+            <a:spLocks noGrp="1"/>
+          </p:cNvSpPr>
+          <p:nvPr>
+            <p:ph type="title"/>
+          </p:nvPr>
+        </p:nvSpPr>
+        <p:spPr/>
+        <p:txBody>
+          <a:bodyPr>
+            <a:normAutofit fontScale="90000"/>
+          </a:bodyPr>
+          <a:lstStyle/>
+          <a:p>
+            <a:r>
+              <a:rPr lang="en-US" dirty="0"/>
+              <a:t>Update CMMS mappings page</a:t>
+            </a:r>
+          </a:p>
+        </p:txBody>
+      </p:sp>
+      <p:sp>
+        <p:nvSpPr>
+          <p:cNvPr id="10" name="TextBox 9">
+            <a:extLst>
+              <a:ext uri="{FF2B5EF4-FFF2-40B4-BE49-F238E27FC236}">
+                <a16:creationId xmlns:a16="http://schemas.microsoft.com/office/drawing/2014/main" id="{40F9E787-298F-4E8C-0E11-EE0F768E08C6}"/>
+              </a:ext>
+            </a:extLst>
+          </p:cNvPr>
+          <p:cNvSpPr txBox="1"/>
+          <p:nvPr/>
+        </p:nvSpPr>
+        <p:spPr>
+          <a:xfrm>
+            <a:off x="4933950" y="2295525"/>
+            <a:ext cx="3701270" cy="276999"/>
+          </a:xfrm>
+          <a:prstGeom prst="rect">
+            <a:avLst/>
+          </a:prstGeom>
+          <a:noFill/>
+        </p:spPr>
+        <p:txBody>
+          <a:bodyPr wrap="none" rtlCol="0">
+            <a:spAutoFit/>
+          </a:bodyPr>
+          <a:lstStyle/>
+          <a:p>
+            <a:r>
+              <a:rPr lang="en-US" sz="1200" dirty="0">
+                <a:solidFill>
+                  <a:schemeClr val="accent5">
+                    <a:lumMod val="60000"/>
+                    <a:lumOff val="40000"/>
+                  </a:schemeClr>
+                </a:solidFill>
+              </a:rPr>
+              <a:t>Click button or drag/drop to this area to upload a CSV</a:t>
+            </a:r>
+          </a:p>
+        </p:txBody>
+      </p:sp>
+    </p:spTree>
+    <p:extLst>
+      <p:ext uri="{BB962C8B-B14F-4D97-AF65-F5344CB8AC3E}">
+        <p14:creationId xmlns:p14="http://schemas.microsoft.com/office/powerpoint/2010/main" val="3239207398"/>
+      </p:ext>
+    </p:extLst>
+  </p:cSld>
+  <p:clrMapOvr>
+    <a:masterClrMapping/>
+  </p:clrMapOvr>
+</p:sld>
+</file>
+
+<file path=ppt/slides/slide24.xml><?xml version="1.0" encoding="utf-8"?>
+<p:sld xmlns:a="http://schemas.openxmlformats.org/drawingml/2006/main" xmlns:r="http://schemas.openxmlformats.org/officeDocument/2006/relationships" xmlns:p="http://schemas.openxmlformats.org/presentationml/2006/main">
+  <p:cSld>
+    <p:spTree>
+      <p:nvGrpSpPr>
+        <p:cNvPr id="1" name=""/>
+        <p:cNvGrpSpPr/>
+        <p:nvPr/>
+      </p:nvGrpSpPr>
+      <p:grpSpPr>
+        <a:xfrm>
+          <a:off x="0" y="0"/>
+          <a:ext cx="0" cy="0"/>
+          <a:chOff x="0" y="0"/>
+          <a:chExt cx="0" cy="0"/>
+        </a:xfrm>
+      </p:grpSpPr>
+      <p:pic>
+        <p:nvPicPr>
+          <p:cNvPr id="4" name="Picture 3">
+            <a:extLst>
+              <a:ext uri="{FF2B5EF4-FFF2-40B4-BE49-F238E27FC236}">
+                <a16:creationId xmlns:a16="http://schemas.microsoft.com/office/drawing/2014/main" id="{7AFB2AB3-A02C-6870-7615-E5A691B69E81}"/>
+              </a:ext>
+            </a:extLst>
+          </p:cNvPr>
+          <p:cNvPicPr>
+            <a:picLocks noChangeAspect="1"/>
+          </p:cNvPicPr>
+          <p:nvPr/>
+        </p:nvPicPr>
+        <p:blipFill>
+          <a:blip r:embed="rId2"/>
+          <a:stretch>
+            <a:fillRect/>
+          </a:stretch>
+        </p:blipFill>
+        <p:spPr>
+          <a:xfrm>
+            <a:off x="314325" y="905060"/>
+            <a:ext cx="11560324" cy="5765071"/>
+          </a:xfrm>
+          <a:prstGeom prst="rect">
+            <a:avLst/>
+          </a:prstGeom>
+        </p:spPr>
+      </p:pic>
+      <p:sp>
+        <p:nvSpPr>
+          <p:cNvPr id="2" name="Title 1">
+            <a:extLst>
+              <a:ext uri="{FF2B5EF4-FFF2-40B4-BE49-F238E27FC236}">
+                <a16:creationId xmlns:a16="http://schemas.microsoft.com/office/drawing/2014/main" id="{EF1A11BC-959E-17EE-3924-576C94C09A55}"/>
+              </a:ext>
+            </a:extLst>
+          </p:cNvPr>
+          <p:cNvSpPr>
+            <a:spLocks noGrp="1"/>
+          </p:cNvSpPr>
+          <p:nvPr>
+            <p:ph type="title"/>
+          </p:nvPr>
+        </p:nvSpPr>
+        <p:spPr/>
+        <p:txBody>
+          <a:bodyPr>
+            <a:normAutofit fontScale="90000"/>
+          </a:bodyPr>
+          <a:lstStyle/>
+          <a:p>
+            <a:r>
+              <a:rPr lang="en-US" dirty="0"/>
+              <a:t>CSV upload confirmation</a:t>
+            </a:r>
+          </a:p>
+        </p:txBody>
+      </p:sp>
+      <p:sp>
+        <p:nvSpPr>
+          <p:cNvPr id="6" name="TextBox 5">
+            <a:extLst>
+              <a:ext uri="{FF2B5EF4-FFF2-40B4-BE49-F238E27FC236}">
+                <a16:creationId xmlns:a16="http://schemas.microsoft.com/office/drawing/2014/main" id="{2721500B-280D-67E6-1422-DE1D9A7E1E32}"/>
+              </a:ext>
+            </a:extLst>
+          </p:cNvPr>
+          <p:cNvSpPr txBox="1"/>
+          <p:nvPr/>
+        </p:nvSpPr>
+        <p:spPr>
+          <a:xfrm>
+            <a:off x="4332304" y="3359391"/>
+            <a:ext cx="3665299" cy="276999"/>
+          </a:xfrm>
+          <a:prstGeom prst="rect">
+            <a:avLst/>
+          </a:prstGeom>
+          <a:noFill/>
+        </p:spPr>
+        <p:txBody>
+          <a:bodyPr wrap="none" rtlCol="0">
+            <a:spAutoFit/>
+          </a:bodyPr>
+          <a:lstStyle/>
+          <a:p>
+            <a:r>
+              <a:rPr lang="en-US" sz="1200" dirty="0">
+                <a:solidFill>
+                  <a:schemeClr val="accent5">
+                    <a:lumMod val="60000"/>
+                    <a:lumOff val="40000"/>
+                  </a:schemeClr>
+                </a:solidFill>
+              </a:rPr>
+              <a:t>Either file upload method gives you this confirmation</a:t>
+            </a:r>
+          </a:p>
+        </p:txBody>
+      </p:sp>
+    </p:spTree>
+    <p:extLst>
+      <p:ext uri="{BB962C8B-B14F-4D97-AF65-F5344CB8AC3E}">
+        <p14:creationId xmlns:p14="http://schemas.microsoft.com/office/powerpoint/2010/main" val="3116791411"/>
+      </p:ext>
+    </p:extLst>
+  </p:cSld>
+  <p:clrMapOvr>
+    <a:masterClrMapping/>
+  </p:clrMapOvr>
+</p:sld>
+</file>
+
+<file path=ppt/slides/slide25.xml><?xml version="1.0" encoding="utf-8"?>
+<p:sld xmlns:a="http://schemas.openxmlformats.org/drawingml/2006/main" xmlns:r="http://schemas.openxmlformats.org/officeDocument/2006/relationships" xmlns:p="http://schemas.openxmlformats.org/presentationml/2006/main">
+  <p:cSld>
+    <p:spTree>
+      <p:nvGrpSpPr>
+        <p:cNvPr id="1" name=""/>
+        <p:cNvGrpSpPr/>
+        <p:nvPr/>
+      </p:nvGrpSpPr>
+      <p:grpSpPr>
+        <a:xfrm>
+          <a:off x="0" y="0"/>
+          <a:ext cx="0" cy="0"/>
+          <a:chOff x="0" y="0"/>
+          <a:chExt cx="0" cy="0"/>
+        </a:xfrm>
+      </p:grpSpPr>
+      <p:pic>
+        <p:nvPicPr>
+          <p:cNvPr id="5" name="Picture 4">
+            <a:extLst>
+              <a:ext uri="{FF2B5EF4-FFF2-40B4-BE49-F238E27FC236}">
+                <a16:creationId xmlns:a16="http://schemas.microsoft.com/office/drawing/2014/main" id="{C2C073DC-6385-E030-6CDD-68CBC9F6519A}"/>
+              </a:ext>
+            </a:extLst>
+          </p:cNvPr>
+          <p:cNvPicPr>
+            <a:picLocks noChangeAspect="1"/>
+          </p:cNvPicPr>
+          <p:nvPr/>
+        </p:nvPicPr>
+        <p:blipFill>
+          <a:blip r:embed="rId2"/>
+          <a:srcRect t="7788" r="430" b="553"/>
+          <a:stretch>
+            <a:fillRect/>
+          </a:stretch>
+        </p:blipFill>
+        <p:spPr>
+          <a:xfrm>
+            <a:off x="308083" y="905060"/>
+            <a:ext cx="11487113" cy="5727784"/>
+          </a:xfrm>
+          <a:prstGeom prst="rect">
+            <a:avLst/>
+          </a:prstGeom>
+        </p:spPr>
+      </p:pic>
+      <p:sp>
+        <p:nvSpPr>
+          <p:cNvPr id="2" name="Title 1">
+            <a:extLst>
+              <a:ext uri="{FF2B5EF4-FFF2-40B4-BE49-F238E27FC236}">
+                <a16:creationId xmlns:a16="http://schemas.microsoft.com/office/drawing/2014/main" id="{45D93199-8250-6C00-D549-B9B41252C91A}"/>
+              </a:ext>
+            </a:extLst>
+          </p:cNvPr>
+          <p:cNvSpPr>
+            <a:spLocks noGrp="1"/>
+          </p:cNvSpPr>
+          <p:nvPr>
+            <p:ph type="title"/>
+          </p:nvPr>
+        </p:nvSpPr>
+        <p:spPr/>
+        <p:txBody>
+          <a:bodyPr>
+            <a:normAutofit fontScale="90000"/>
+          </a:bodyPr>
+          <a:lstStyle/>
+          <a:p>
+            <a:r>
+              <a:rPr lang="en-US" dirty="0"/>
+              <a:t>CSV upload progress updates</a:t>
+            </a:r>
+          </a:p>
+        </p:txBody>
+      </p:sp>
+      <p:sp>
+        <p:nvSpPr>
+          <p:cNvPr id="8" name="TextBox 7">
+            <a:extLst>
+              <a:ext uri="{FF2B5EF4-FFF2-40B4-BE49-F238E27FC236}">
+                <a16:creationId xmlns:a16="http://schemas.microsoft.com/office/drawing/2014/main" id="{09B2CCE3-29F4-360F-B114-BC1AB268E8F3}"/>
+              </a:ext>
+            </a:extLst>
+          </p:cNvPr>
+          <p:cNvSpPr txBox="1"/>
+          <p:nvPr/>
+        </p:nvSpPr>
+        <p:spPr>
+          <a:xfrm>
+            <a:off x="6812503" y="2211804"/>
+            <a:ext cx="3536289" cy="276999"/>
+          </a:xfrm>
+          <a:prstGeom prst="rect">
+            <a:avLst/>
+          </a:prstGeom>
+          <a:noFill/>
+        </p:spPr>
+        <p:txBody>
+          <a:bodyPr wrap="none" rtlCol="0">
+            <a:spAutoFit/>
+          </a:bodyPr>
+          <a:lstStyle/>
+          <a:p>
+            <a:r>
+              <a:rPr lang="en-US" sz="1200" dirty="0">
+                <a:solidFill>
+                  <a:schemeClr val="accent5">
+                    <a:lumMod val="60000"/>
+                    <a:lumOff val="40000"/>
+                  </a:schemeClr>
+                </a:solidFill>
+              </a:rPr>
+              <a:t>After a successful upload, you’ll see this message.</a:t>
+            </a:r>
+          </a:p>
+        </p:txBody>
+      </p:sp>
+      <p:sp>
+        <p:nvSpPr>
+          <p:cNvPr id="9" name="TextBox 8">
+            <a:extLst>
+              <a:ext uri="{FF2B5EF4-FFF2-40B4-BE49-F238E27FC236}">
+                <a16:creationId xmlns:a16="http://schemas.microsoft.com/office/drawing/2014/main" id="{9D603A14-5931-1B17-8F2D-E22B46433E73}"/>
+              </a:ext>
+            </a:extLst>
+          </p:cNvPr>
+          <p:cNvSpPr txBox="1"/>
+          <p:nvPr/>
+        </p:nvSpPr>
+        <p:spPr>
+          <a:xfrm>
+            <a:off x="838200" y="4369197"/>
+            <a:ext cx="10869891" cy="646331"/>
+          </a:xfrm>
+          <a:prstGeom prst="rect">
+            <a:avLst/>
+          </a:prstGeom>
+          <a:noFill/>
+        </p:spPr>
+        <p:txBody>
+          <a:bodyPr wrap="square" rtlCol="0">
+            <a:spAutoFit/>
+          </a:bodyPr>
+          <a:lstStyle/>
+          <a:p>
+            <a:r>
+              <a:rPr lang="en-US" dirty="0"/>
+              <a:t>If you upload a non-CSV or a CSV where the columns aren’t what the reader expects, you haven’t affected the database, but the little gray update box will be…troubled. Just refresh &amp; try another file and all will be well.</a:t>
+            </a:r>
+          </a:p>
+        </p:txBody>
+      </p:sp>
+      <p:sp>
+        <p:nvSpPr>
+          <p:cNvPr id="10" name="TextBox 9">
+            <a:extLst>
+              <a:ext uri="{FF2B5EF4-FFF2-40B4-BE49-F238E27FC236}">
+                <a16:creationId xmlns:a16="http://schemas.microsoft.com/office/drawing/2014/main" id="{65F1E29E-7630-6390-7AE4-67F2597D73DF}"/>
+              </a:ext>
+            </a:extLst>
+          </p:cNvPr>
+          <p:cNvSpPr txBox="1"/>
+          <p:nvPr/>
+        </p:nvSpPr>
+        <p:spPr>
+          <a:xfrm>
+            <a:off x="7456601" y="1467402"/>
+            <a:ext cx="3401238" cy="461665"/>
+          </a:xfrm>
+          <a:prstGeom prst="rect">
+            <a:avLst/>
+          </a:prstGeom>
+          <a:noFill/>
+        </p:spPr>
+        <p:txBody>
+          <a:bodyPr wrap="square" rtlCol="0">
+            <a:spAutoFit/>
+          </a:bodyPr>
+          <a:lstStyle/>
+          <a:p>
+            <a:r>
+              <a:rPr lang="en-US" sz="1200" dirty="0">
+                <a:solidFill>
+                  <a:schemeClr val="accent5">
+                    <a:lumMod val="60000"/>
+                    <a:lumOff val="40000"/>
+                  </a:schemeClr>
+                </a:solidFill>
+              </a:rPr>
+              <a:t>As long as the CSV you upload is in the Maximo format, you shouldn’t have any problems</a:t>
+            </a:r>
+          </a:p>
+        </p:txBody>
+      </p:sp>
+    </p:spTree>
+    <p:extLst>
+      <p:ext uri="{BB962C8B-B14F-4D97-AF65-F5344CB8AC3E}">
+        <p14:creationId xmlns:p14="http://schemas.microsoft.com/office/powerpoint/2010/main" val="4058351882"/>
+      </p:ext>
+    </p:extLst>
+  </p:cSld>
+  <p:clrMapOvr>
+    <a:masterClrMapping/>
+  </p:clrMapOvr>
+</p:sld>
+</file>
+
 <file path=ppt/slides/slide3.xml><?xml version="1.0" encoding="utf-8"?>
 <p:sld xmlns:a="http://schemas.openxmlformats.org/drawingml/2006/main" xmlns:r="http://schemas.openxmlformats.org/officeDocument/2006/relationships" xmlns:p="http://schemas.openxmlformats.org/presentationml/2006/main">
   <p:cSld>
@@ -6807,7 +8241,7 @@
             </a:pPr>
             <a:r>
               <a:rPr lang="en-US" sz="2000" b="0" dirty="0"/>
-              <a:t>To release a lockout, the associate performing the reset must have an auth level greater than or equal to the lockout level. Insufficient auth level is identical to not being authorized on the line at all.</a:t>
+              <a:t>To release a lockout, the associate performing the reset must have an auth level greater than or equal to the lockout level. Insufficient auth level is treated the same as not being authorized on the line at all.</a:t>
             </a:r>
           </a:p>
         </p:txBody>
@@ -7193,43 +8627,12 @@
           <a:chExt cx="0" cy="0"/>
         </a:xfrm>
       </p:grpSpPr>
-      <p:pic>
-        <p:nvPicPr>
-          <p:cNvPr id="11" name="Picture 10">
-            <a:extLst>
-              <a:ext uri="{FF2B5EF4-FFF2-40B4-BE49-F238E27FC236}">
-                <a16:creationId xmlns:a16="http://schemas.microsoft.com/office/drawing/2014/main" id="{18978977-CA23-796D-83F1-1984F00BB595}"/>
-              </a:ext>
-            </a:extLst>
-          </p:cNvPr>
-          <p:cNvPicPr>
-            <a:picLocks noChangeAspect="1"/>
-          </p:cNvPicPr>
-          <p:nvPr/>
-        </p:nvPicPr>
-        <p:blipFill>
-          <a:blip r:embed="rId2"/>
-          <a:srcRect r="170"/>
-          <a:stretch>
-            <a:fillRect/>
-          </a:stretch>
-        </p:blipFill>
-        <p:spPr>
-          <a:xfrm>
-            <a:off x="293204" y="895723"/>
-            <a:ext cx="11527321" cy="5752261"/>
-          </a:xfrm>
-          <a:prstGeom prst="rect">
-            <a:avLst/>
-          </a:prstGeom>
-        </p:spPr>
-      </p:pic>
       <p:sp>
         <p:nvSpPr>
           <p:cNvPr id="2" name="Title 1">
             <a:extLst>
               <a:ext uri="{FF2B5EF4-FFF2-40B4-BE49-F238E27FC236}">
-                <a16:creationId xmlns:a16="http://schemas.microsoft.com/office/drawing/2014/main" id="{E6508E0A-92CC-03AA-E9FC-0AE175DD53D4}"/>
+                <a16:creationId xmlns:a16="http://schemas.microsoft.com/office/drawing/2014/main" id="{0BE6C62B-E12D-A500-00D1-E6C3D6AAD4DD}"/>
               </a:ext>
             </a:extLst>
           </p:cNvPr>
@@ -7240,6 +8643,265 @@
             <p:ph type="title"/>
           </p:nvPr>
         </p:nvSpPr>
+        <p:spPr/>
+        <p:txBody>
+          <a:bodyPr>
+            <a:normAutofit fontScale="90000"/>
+          </a:bodyPr>
+          <a:lstStyle/>
+          <a:p>
+            <a:r>
+              <a:rPr lang="en-US" dirty="0"/>
+              <a:t>Navigation bar</a:t>
+            </a:r>
+          </a:p>
+        </p:txBody>
+      </p:sp>
+      <p:pic>
+        <p:nvPicPr>
+          <p:cNvPr id="5" name="Content Placeholder 4">
+            <a:extLst>
+              <a:ext uri="{FF2B5EF4-FFF2-40B4-BE49-F238E27FC236}">
+                <a16:creationId xmlns:a16="http://schemas.microsoft.com/office/drawing/2014/main" id="{CB3B7FA6-F138-DFAB-D585-60FB7C9D4C8B}"/>
+              </a:ext>
+            </a:extLst>
+          </p:cNvPr>
+          <p:cNvPicPr>
+            <a:picLocks noGrp="1" noChangeAspect="1"/>
+          </p:cNvPicPr>
+          <p:nvPr>
+            <p:ph idx="1"/>
+          </p:nvPr>
+        </p:nvPicPr>
+        <p:blipFill>
+          <a:blip r:embed="rId2"/>
+          <a:stretch>
+            <a:fillRect/>
+          </a:stretch>
+        </p:blipFill>
+        <p:spPr>
+          <a:xfrm>
+            <a:off x="312834" y="905060"/>
+            <a:ext cx="11509716" cy="5727784"/>
+          </a:xfrm>
+          <a:prstGeom prst="rect">
+            <a:avLst/>
+          </a:prstGeom>
+        </p:spPr>
+      </p:pic>
+      <p:sp>
+        <p:nvSpPr>
+          <p:cNvPr id="6" name="TextBox 5">
+            <a:extLst>
+              <a:ext uri="{FF2B5EF4-FFF2-40B4-BE49-F238E27FC236}">
+                <a16:creationId xmlns:a16="http://schemas.microsoft.com/office/drawing/2014/main" id="{D4C9E05E-1FCE-1994-B712-360E98CE0DA4}"/>
+              </a:ext>
+            </a:extLst>
+          </p:cNvPr>
+          <p:cNvSpPr txBox="1"/>
+          <p:nvPr/>
+        </p:nvSpPr>
+        <p:spPr>
+          <a:xfrm>
+            <a:off x="3770918" y="3048947"/>
+            <a:ext cx="5639782" cy="584775"/>
+          </a:xfrm>
+          <a:prstGeom prst="rect">
+            <a:avLst/>
+          </a:prstGeom>
+          <a:noFill/>
+        </p:spPr>
+        <p:txBody>
+          <a:bodyPr wrap="square" rtlCol="0">
+            <a:spAutoFit/>
+          </a:bodyPr>
+          <a:lstStyle/>
+          <a:p>
+            <a:r>
+              <a:rPr lang="en-US" sz="1600" dirty="0">
+                <a:solidFill>
+                  <a:schemeClr val="accent5">
+                    <a:lumMod val="60000"/>
+                    <a:lumOff val="40000"/>
+                  </a:schemeClr>
+                </a:solidFill>
+              </a:rPr>
+              <a:t>When hovering over the left side of the screen, the content dims and blurs to draw attention to the navbar overlay</a:t>
+            </a:r>
+          </a:p>
+        </p:txBody>
+      </p:sp>
+      <p:sp>
+        <p:nvSpPr>
+          <p:cNvPr id="7" name="Rectangle 6">
+            <a:extLst>
+              <a:ext uri="{FF2B5EF4-FFF2-40B4-BE49-F238E27FC236}">
+                <a16:creationId xmlns:a16="http://schemas.microsoft.com/office/drawing/2014/main" id="{CD7D74B4-3D16-8CCF-CCC0-CA9CF1B7013D}"/>
+              </a:ext>
+            </a:extLst>
+          </p:cNvPr>
+          <p:cNvSpPr/>
+          <p:nvPr/>
+        </p:nvSpPr>
+        <p:spPr>
+          <a:xfrm>
+            <a:off x="312834" y="905060"/>
+            <a:ext cx="318762" cy="5727784"/>
+          </a:xfrm>
+          <a:prstGeom prst="rect">
+            <a:avLst/>
+          </a:prstGeom>
+          <a:solidFill>
+            <a:schemeClr val="accent2">
+              <a:alpha val="50000"/>
+            </a:schemeClr>
+          </a:solidFill>
+          <a:ln>
+            <a:solidFill>
+              <a:schemeClr val="accent1"/>
+            </a:solidFill>
+          </a:ln>
+        </p:spPr>
+        <p:style>
+          <a:lnRef idx="2">
+            <a:schemeClr val="accent2">
+              <a:shade val="15000"/>
+            </a:schemeClr>
+          </a:lnRef>
+          <a:fillRef idx="1">
+            <a:schemeClr val="accent2"/>
+          </a:fillRef>
+          <a:effectRef idx="0">
+            <a:schemeClr val="accent2"/>
+          </a:effectRef>
+          <a:fontRef idx="minor">
+            <a:schemeClr val="lt1"/>
+          </a:fontRef>
+        </p:style>
+        <p:txBody>
+          <a:bodyPr rtlCol="0" anchor="ctr"/>
+          <a:lstStyle/>
+          <a:p>
+            <a:pPr algn="ctr"/>
+            <a:endParaRPr lang="en-US"/>
+          </a:p>
+        </p:txBody>
+      </p:sp>
+      <p:sp>
+        <p:nvSpPr>
+          <p:cNvPr id="9" name="TextBox 8">
+            <a:extLst>
+              <a:ext uri="{FF2B5EF4-FFF2-40B4-BE49-F238E27FC236}">
+                <a16:creationId xmlns:a16="http://schemas.microsoft.com/office/drawing/2014/main" id="{ACC90D9B-42A9-0993-282B-B3B9044A95C9}"/>
+              </a:ext>
+            </a:extLst>
+          </p:cNvPr>
+          <p:cNvSpPr txBox="1"/>
+          <p:nvPr/>
+        </p:nvSpPr>
+        <p:spPr>
+          <a:xfrm>
+            <a:off x="591782" y="2895600"/>
+            <a:ext cx="461665" cy="1889107"/>
+          </a:xfrm>
+          <a:prstGeom prst="rect">
+            <a:avLst/>
+          </a:prstGeom>
+          <a:noFill/>
+        </p:spPr>
+        <p:txBody>
+          <a:bodyPr vert="eaVert" wrap="none" rtlCol="0">
+            <a:spAutoFit/>
+          </a:bodyPr>
+          <a:lstStyle/>
+          <a:p>
+            <a:r>
+              <a:rPr lang="en-US" dirty="0">
+                <a:solidFill>
+                  <a:schemeClr val="accent2"/>
+                </a:solidFill>
+              </a:rPr>
+              <a:t>Detection window</a:t>
+            </a:r>
+          </a:p>
+        </p:txBody>
+      </p:sp>
+    </p:spTree>
+    <p:extLst>
+      <p:ext uri="{BB962C8B-B14F-4D97-AF65-F5344CB8AC3E}">
+        <p14:creationId xmlns:p14="http://schemas.microsoft.com/office/powerpoint/2010/main" val="1154217573"/>
+      </p:ext>
+    </p:extLst>
+  </p:cSld>
+  <p:clrMapOvr>
+    <a:masterClrMapping/>
+  </p:clrMapOvr>
+</p:sld>
+</file>
+
+<file path=ppt/slides/slide5.xml><?xml version="1.0" encoding="utf-8"?>
+<p:sld xmlns:a="http://schemas.openxmlformats.org/drawingml/2006/main" xmlns:r="http://schemas.openxmlformats.org/officeDocument/2006/relationships" xmlns:p="http://schemas.openxmlformats.org/presentationml/2006/main">
+  <p:cSld>
+    <p:spTree>
+      <p:nvGrpSpPr>
+        <p:cNvPr id="1" name=""/>
+        <p:cNvGrpSpPr/>
+        <p:nvPr/>
+      </p:nvGrpSpPr>
+      <p:grpSpPr>
+        <a:xfrm>
+          <a:off x="0" y="0"/>
+          <a:ext cx="0" cy="0"/>
+          <a:chOff x="0" y="0"/>
+          <a:chExt cx="0" cy="0"/>
+        </a:xfrm>
+      </p:grpSpPr>
+      <p:pic>
+        <p:nvPicPr>
+          <p:cNvPr id="4" name="Picture 3">
+            <a:extLst>
+              <a:ext uri="{FF2B5EF4-FFF2-40B4-BE49-F238E27FC236}">
+                <a16:creationId xmlns:a16="http://schemas.microsoft.com/office/drawing/2014/main" id="{1A1E83C2-E3C5-ED4B-1642-BE47A891E672}"/>
+              </a:ext>
+            </a:extLst>
+          </p:cNvPr>
+          <p:cNvPicPr>
+            <a:picLocks noChangeAspect="1"/>
+          </p:cNvPicPr>
+          <p:nvPr/>
+        </p:nvPicPr>
+        <p:blipFill>
+          <a:blip r:embed="rId2"/>
+          <a:stretch>
+            <a:fillRect/>
+          </a:stretch>
+        </p:blipFill>
+        <p:spPr>
+          <a:xfrm>
+            <a:off x="293204" y="895723"/>
+            <a:ext cx="11534702" cy="5752261"/>
+          </a:xfrm>
+          <a:prstGeom prst="rect">
+            <a:avLst/>
+          </a:prstGeom>
+        </p:spPr>
+      </p:pic>
+      <p:sp>
+        <p:nvSpPr>
+          <p:cNvPr id="2" name="Title 1">
+            <a:extLst>
+              <a:ext uri="{FF2B5EF4-FFF2-40B4-BE49-F238E27FC236}">
+                <a16:creationId xmlns:a16="http://schemas.microsoft.com/office/drawing/2014/main" id="{E6508E0A-92CC-03AA-E9FC-0AE175DD53D4}"/>
+              </a:ext>
+            </a:extLst>
+          </p:cNvPr>
+          <p:cNvSpPr>
+            <a:spLocks noGrp="1"/>
+          </p:cNvSpPr>
+          <p:nvPr>
+            <p:ph type="title"/>
+          </p:nvPr>
+        </p:nvSpPr>
         <p:spPr>
           <a:xfrm>
             <a:off x="2474834" y="216473"/>
@@ -7273,8 +8935,8 @@
         </p:nvSpPr>
         <p:spPr>
           <a:xfrm>
-            <a:off x="421958" y="1343025"/>
-            <a:ext cx="1376362" cy="1461135"/>
+            <a:off x="293204" y="1276614"/>
+            <a:ext cx="359259" cy="1461135"/>
           </a:xfrm>
           <a:prstGeom prst="rect">
             <a:avLst/>
@@ -7327,8 +8989,8 @@
         </p:nvSpPr>
         <p:spPr>
           <a:xfrm>
-            <a:off x="760545" y="3228945"/>
-            <a:ext cx="1294500" cy="400110"/>
+            <a:off x="810828" y="2856702"/>
+            <a:ext cx="2169149" cy="400110"/>
           </a:xfrm>
           <a:prstGeom prst="rect">
             <a:avLst/>
@@ -7350,7 +9012,7 @@
                   </a:schemeClr>
                 </a:solidFill>
               </a:rPr>
-              <a:t>Click to navigate between pages</a:t>
+              <a:t>Hover to expand, click to navigate between pages</a:t>
             </a:r>
           </a:p>
         </p:txBody>
@@ -7366,20 +9028,18 @@
           </p:cNvPr>
           <p:cNvCxnSpPr>
             <a:cxnSpLocks/>
-            <a:stCxn id="32" idx="0"/>
+            <a:stCxn id="32" idx="1"/>
             <a:endCxn id="31" idx="2"/>
           </p:cNvCxnSpPr>
           <p:nvPr/>
         </p:nvCxnSpPr>
         <p:spPr>
-          <a:xfrm rot="16200000" flipV="1">
-            <a:off x="1046575" y="2867725"/>
-            <a:ext cx="424785" cy="297656"/>
-          </a:xfrm>
-          <a:prstGeom prst="bentConnector3">
-            <a:avLst>
-              <a:gd name="adj1" fmla="val 50000"/>
-            </a:avLst>
+          <a:xfrm rot="10800000">
+            <a:off x="472834" y="2737749"/>
+            <a:ext cx="337994" cy="319008"/>
+          </a:xfrm>
+          <a:prstGeom prst="bentConnector2">
+            <a:avLst/>
           </a:prstGeom>
           <a:ln>
             <a:tailEnd type="triangle"/>
@@ -7542,7 +9202,7 @@
         </p:nvSpPr>
         <p:spPr>
           <a:xfrm>
-            <a:off x="2046977" y="1542999"/>
+            <a:off x="963384" y="1542999"/>
             <a:ext cx="1800421" cy="246221"/>
           </a:xfrm>
           <a:prstGeom prst="rect">
@@ -7584,8 +9244,8 @@
         </p:nvSpPr>
         <p:spPr>
           <a:xfrm rot="5400000">
-            <a:off x="8981348" y="-655277"/>
-            <a:ext cx="246222" cy="4577116"/>
+            <a:off x="8697598" y="-939028"/>
+            <a:ext cx="246222" cy="5144617"/>
           </a:xfrm>
           <a:prstGeom prst="leftBrace">
             <a:avLst>
@@ -7673,7 +9333,7 @@
         </p:nvSpPr>
         <p:spPr>
           <a:xfrm>
-            <a:off x="5124943" y="1555964"/>
+            <a:off x="4467025" y="1538151"/>
             <a:ext cx="1591869" cy="246221"/>
           </a:xfrm>
           <a:prstGeom prst="rect">
@@ -7715,7 +9375,7 @@
         </p:nvSpPr>
         <p:spPr>
           <a:xfrm>
-            <a:off x="3866114" y="1666110"/>
+            <a:off x="3057917" y="1651788"/>
             <a:ext cx="1258829" cy="246221"/>
           </a:xfrm>
           <a:prstGeom prst="rect">
@@ -7978,7 +9638,7 @@
 </p:sld>
 </file>
 
-<file path=ppt/slides/slide5.xml><?xml version="1.0" encoding="utf-8"?>
+<file path=ppt/slides/slide6.xml><?xml version="1.0" encoding="utf-8"?>
 <p:sld xmlns:a="http://schemas.openxmlformats.org/drawingml/2006/main" xmlns:r="http://schemas.openxmlformats.org/officeDocument/2006/relationships" xmlns:p="http://schemas.openxmlformats.org/presentationml/2006/main">
   <p:cSld>
     <p:spTree>
@@ -8003,10 +9663,10 @@
       </p:grpSpPr>
       <p:pic>
         <p:nvPicPr>
-          <p:cNvPr id="4" name="Picture 3">
-            <a:extLst>
-              <a:ext uri="{FF2B5EF4-FFF2-40B4-BE49-F238E27FC236}">
-                <a16:creationId xmlns:a16="http://schemas.microsoft.com/office/drawing/2014/main" id="{F3D1F6DA-24FA-8E5E-C59F-4298021AF012}"/>
+          <p:cNvPr id="5" name="Picture 4">
+            <a:extLst>
+              <a:ext uri="{FF2B5EF4-FFF2-40B4-BE49-F238E27FC236}">
+                <a16:creationId xmlns:a16="http://schemas.microsoft.com/office/drawing/2014/main" id="{15467D07-4F9A-2DB7-8195-0D0408310ADF}"/>
               </a:ext>
             </a:extLst>
           </p:cNvPr>
@@ -8017,14 +9677,15 @@
         </p:nvPicPr>
         <p:blipFill>
           <a:blip r:embed="rId2"/>
+          <a:srcRect t="7797" r="234" b="670"/>
           <a:stretch>
             <a:fillRect/>
           </a:stretch>
         </p:blipFill>
         <p:spPr>
           <a:xfrm>
-            <a:off x="301657" y="932859"/>
-            <a:ext cx="11615966" cy="5795807"/>
+            <a:off x="274377" y="932860"/>
+            <a:ext cx="11615966" cy="5772740"/>
           </a:xfrm>
           <a:prstGeom prst="rect">
             <a:avLst/>
@@ -8075,7 +9736,7 @@
         </p:nvSpPr>
         <p:spPr>
           <a:xfrm>
-            <a:off x="5032528" y="3228945"/>
+            <a:off x="3943090" y="3293997"/>
             <a:ext cx="4559341" cy="400110"/>
           </a:xfrm>
           <a:prstGeom prst="rect">
@@ -8098,7 +9759,7 @@
                   </a:schemeClr>
                 </a:solidFill>
               </a:rPr>
-              <a:t>The table becomes faded if you haven’t pressed enter yet to remind you that it’s waiting for you to search. You can’t interact when it’s like this.</a:t>
+              <a:t>The table becomes faded if you haven’t executed the search yet to remind you that it’s waiting for you to do so. You can’t interact when it’s like this.</a:t>
             </a:r>
           </a:p>
         </p:txBody>
@@ -8117,7 +9778,7 @@
         </p:nvSpPr>
         <p:spPr>
           <a:xfrm>
-            <a:off x="7462779" y="2796914"/>
+            <a:off x="7312198" y="2766135"/>
             <a:ext cx="3187546" cy="400110"/>
           </a:xfrm>
           <a:prstGeom prst="rect">
@@ -8159,7 +9820,7 @@
         </p:nvSpPr>
         <p:spPr>
           <a:xfrm>
-            <a:off x="2050345" y="2735359"/>
+            <a:off x="1002595" y="2735359"/>
             <a:ext cx="2465740" cy="461665"/>
           </a:xfrm>
           <a:prstGeom prst="rect">
@@ -8201,7 +9862,7 @@
         </p:nvSpPr>
         <p:spPr>
           <a:xfrm>
-            <a:off x="4516085" y="2753380"/>
+            <a:off x="3757021" y="2735358"/>
             <a:ext cx="2465740" cy="461665"/>
           </a:xfrm>
           <a:prstGeom prst="rect">
@@ -8324,7 +9985,7 @@
         </p:nvSpPr>
         <p:spPr>
           <a:xfrm>
-            <a:off x="3015545" y="1292993"/>
+            <a:off x="1967795" y="1359668"/>
             <a:ext cx="1500540" cy="246221"/>
           </a:xfrm>
           <a:prstGeom prst="rect">
@@ -8365,7 +10026,7 @@
 </p:sld>
 </file>
 
-<file path=ppt/slides/slide6.xml><?xml version="1.0" encoding="utf-8"?>
+<file path=ppt/slides/slide7.xml><?xml version="1.0" encoding="utf-8"?>
 <p:sld xmlns:a="http://schemas.openxmlformats.org/drawingml/2006/main" xmlns:r="http://schemas.openxmlformats.org/officeDocument/2006/relationships" xmlns:p="http://schemas.openxmlformats.org/presentationml/2006/main">
   <p:cSld>
     <p:spTree>
@@ -8390,10 +10051,10 @@
       </p:grpSpPr>
       <p:pic>
         <p:nvPicPr>
-          <p:cNvPr id="7" name="Picture 6">
-            <a:extLst>
-              <a:ext uri="{FF2B5EF4-FFF2-40B4-BE49-F238E27FC236}">
-                <a16:creationId xmlns:a16="http://schemas.microsoft.com/office/drawing/2014/main" id="{6D6F8B15-E5E0-29A0-C036-A403B0BF4814}"/>
+          <p:cNvPr id="6" name="Picture 5">
+            <a:extLst>
+              <a:ext uri="{FF2B5EF4-FFF2-40B4-BE49-F238E27FC236}">
+                <a16:creationId xmlns:a16="http://schemas.microsoft.com/office/drawing/2014/main" id="{1762C331-CF49-0F33-1A51-08AD2F741220}"/>
               </a:ext>
             </a:extLst>
           </p:cNvPr>
@@ -8404,6 +10065,7 @@
         </p:nvPicPr>
         <p:blipFill>
           <a:blip r:embed="rId2"/>
+          <a:srcRect t="7683" r="339" b="441"/>
           <a:stretch>
             <a:fillRect/>
           </a:stretch>
@@ -8411,7 +10073,7 @@
         <p:spPr>
           <a:xfrm>
             <a:off x="278342" y="905060"/>
-            <a:ext cx="11432187" cy="5725095"/>
+            <a:ext cx="11465169" cy="5725095"/>
           </a:xfrm>
           <a:prstGeom prst="rect">
             <a:avLst/>
@@ -8462,7 +10124,7 @@
         </p:nvSpPr>
         <p:spPr>
           <a:xfrm>
-            <a:off x="1756950" y="1665715"/>
+            <a:off x="757333" y="1700640"/>
             <a:ext cx="1904682" cy="246221"/>
           </a:xfrm>
           <a:prstGeom prst="rect">
@@ -8504,7 +10166,7 @@
         </p:nvSpPr>
         <p:spPr>
           <a:xfrm>
-            <a:off x="3661632" y="1772874"/>
+            <a:off x="2579544" y="1772874"/>
             <a:ext cx="762442" cy="400110"/>
           </a:xfrm>
           <a:prstGeom prst="rect">
@@ -8588,7 +10250,7 @@
         </p:nvSpPr>
         <p:spPr>
           <a:xfrm>
-            <a:off x="4516406" y="1711881"/>
+            <a:off x="3603005" y="1772874"/>
             <a:ext cx="4815841" cy="400110"/>
           </a:xfrm>
           <a:prstGeom prst="rect">
@@ -8630,7 +10292,7 @@
         </p:nvSpPr>
         <p:spPr>
           <a:xfrm>
-            <a:off x="4015264" y="905060"/>
+            <a:off x="3437508" y="889108"/>
             <a:ext cx="5316983" cy="400110"/>
           </a:xfrm>
           <a:prstGeom prst="rect">
@@ -8672,7 +10334,7 @@
         </p:nvSpPr>
         <p:spPr>
           <a:xfrm>
-            <a:off x="2839624" y="1242804"/>
+            <a:off x="1878678" y="1354356"/>
             <a:ext cx="2164175" cy="246221"/>
           </a:xfrm>
           <a:prstGeom prst="rect">
@@ -8714,7 +10376,7 @@
         </p:nvSpPr>
         <p:spPr>
           <a:xfrm>
-            <a:off x="9884099" y="1053754"/>
+            <a:off x="10003263" y="1058949"/>
             <a:ext cx="1598515" cy="246221"/>
           </a:xfrm>
           <a:prstGeom prst="rect">
@@ -8755,7 +10417,7 @@
 </p:sld>
 </file>
 
-<file path=ppt/slides/slide7.xml><?xml version="1.0" encoding="utf-8"?>
+<file path=ppt/slides/slide8.xml><?xml version="1.0" encoding="utf-8"?>
 <p:sld xmlns:a="http://schemas.openxmlformats.org/drawingml/2006/main" xmlns:r="http://schemas.openxmlformats.org/officeDocument/2006/relationships" xmlns:p="http://schemas.openxmlformats.org/presentationml/2006/main">
   <p:cSld>
     <p:spTree>
@@ -8780,10 +10442,10 @@
       </p:grpSpPr>
       <p:pic>
         <p:nvPicPr>
-          <p:cNvPr id="4" name="Picture 3">
-            <a:extLst>
-              <a:ext uri="{FF2B5EF4-FFF2-40B4-BE49-F238E27FC236}">
-                <a16:creationId xmlns:a16="http://schemas.microsoft.com/office/drawing/2014/main" id="{74511EC7-A405-0579-A8E2-20E6591ECBAA}"/>
+          <p:cNvPr id="7" name="Picture 6">
+            <a:extLst>
+              <a:ext uri="{FF2B5EF4-FFF2-40B4-BE49-F238E27FC236}">
+                <a16:creationId xmlns:a16="http://schemas.microsoft.com/office/drawing/2014/main" id="{812BAB45-23A4-77DF-00DA-276D6A70109C}"/>
               </a:ext>
             </a:extLst>
           </p:cNvPr>
@@ -8794,14 +10456,15 @@
         </p:nvPicPr>
         <p:blipFill>
           <a:blip r:embed="rId3"/>
+          <a:srcRect t="7851" r="275" b="481"/>
           <a:stretch>
             <a:fillRect/>
           </a:stretch>
         </p:blipFill>
         <p:spPr>
           <a:xfrm>
-            <a:off x="295274" y="902009"/>
-            <a:ext cx="11591925" cy="5820341"/>
+            <a:off x="304801" y="902009"/>
+            <a:ext cx="11505421" cy="5728604"/>
           </a:xfrm>
           <a:prstGeom prst="rect">
             <a:avLst/>
@@ -8852,7 +10515,7 @@
         </p:nvSpPr>
         <p:spPr>
           <a:xfrm>
-            <a:off x="4152900" y="905060"/>
+            <a:off x="4152900" y="902009"/>
             <a:ext cx="3886200" cy="400110"/>
           </a:xfrm>
           <a:prstGeom prst="rect">
@@ -8960,6 +10623,52 @@
                 </a:solidFill>
               </a:rPr>
               <a:t>Can filter denied requests by insufficient auth level or no privileges on target line</a:t>
+            </a:r>
+          </a:p>
+        </p:txBody>
+      </p:sp>
+      <p:sp>
+        <p:nvSpPr>
+          <p:cNvPr id="8" name="TextBox 7">
+            <a:extLst>
+              <a:ext uri="{FF2B5EF4-FFF2-40B4-BE49-F238E27FC236}">
+                <a16:creationId xmlns:a16="http://schemas.microsoft.com/office/drawing/2014/main" id="{2C9BF23D-E7AC-970F-3F0A-6009722FFA02}"/>
+              </a:ext>
+            </a:extLst>
+          </p:cNvPr>
+          <p:cNvSpPr txBox="1"/>
+          <p:nvPr/>
+        </p:nvSpPr>
+        <p:spPr>
+          <a:xfrm>
+            <a:off x="9012698" y="3338474"/>
+            <a:ext cx="2562082" cy="461665"/>
+          </a:xfrm>
+          <a:prstGeom prst="rect">
+            <a:avLst/>
+          </a:prstGeom>
+          <a:solidFill>
+            <a:schemeClr val="bg1">
+              <a:lumMod val="95000"/>
+            </a:schemeClr>
+          </a:solidFill>
+        </p:spPr>
+        <p:txBody>
+          <a:bodyPr wrap="square" rtlCol="0">
+            <a:spAutoFit/>
+          </a:bodyPr>
+          <a:lstStyle/>
+          <a:p>
+            <a:r>
+              <a:rPr lang="en-US" sz="1200" dirty="0">
+                <a:solidFill>
+                  <a:schemeClr val="accent5">
+                    <a:lumMod val="60000"/>
+                    <a:lumOff val="40000"/>
+                  </a:schemeClr>
+                </a:solidFill>
+              </a:rPr>
+              <a:t>If a lockout has been released, the successful reset is always at the top</a:t>
             </a:r>
           </a:p>
         </p:txBody>
@@ -8977,7 +10686,7 @@
 </p:sld>
 </file>
 
-<file path=ppt/slides/slide8.xml><?xml version="1.0" encoding="utf-8"?>
+<file path=ppt/slides/slide9.xml><?xml version="1.0" encoding="utf-8"?>
 <p:sld xmlns:a="http://schemas.openxmlformats.org/drawingml/2006/main" xmlns:r="http://schemas.openxmlformats.org/officeDocument/2006/relationships" xmlns:p="http://schemas.openxmlformats.org/presentationml/2006/main">
   <p:cSld>
     <p:spTree>
@@ -9002,10 +10711,10 @@
       </p:grpSpPr>
       <p:pic>
         <p:nvPicPr>
-          <p:cNvPr id="6" name="Picture 5">
-            <a:extLst>
-              <a:ext uri="{FF2B5EF4-FFF2-40B4-BE49-F238E27FC236}">
-                <a16:creationId xmlns:a16="http://schemas.microsoft.com/office/drawing/2014/main" id="{603CEC4F-063E-A6A5-DB9A-4633ABDFF880}"/>
+          <p:cNvPr id="8" name="Picture 7">
+            <a:extLst>
+              <a:ext uri="{FF2B5EF4-FFF2-40B4-BE49-F238E27FC236}">
+                <a16:creationId xmlns:a16="http://schemas.microsoft.com/office/drawing/2014/main" id="{C1BEEB97-51B2-9C03-FD94-E1B2E2EA2B34}"/>
               </a:ext>
             </a:extLst>
           </p:cNvPr>
@@ -9016,6 +10725,7 @@
         </p:nvPicPr>
         <p:blipFill>
           <a:blip r:embed="rId2"/>
+          <a:srcRect r="-94"/>
           <a:stretch>
             <a:fillRect/>
           </a:stretch>
@@ -9023,7 +10733,7 @@
         <p:spPr>
           <a:xfrm>
             <a:off x="301658" y="902703"/>
-            <a:ext cx="11640690" cy="5841687"/>
+            <a:ext cx="11651530" cy="5774755"/>
           </a:xfrm>
           <a:prstGeom prst="rect">
             <a:avLst/>
@@ -9116,7 +10826,7 @@
         </p:nvSpPr>
         <p:spPr>
           <a:xfrm>
-            <a:off x="2584580" y="1696648"/>
+            <a:off x="1750850" y="1598203"/>
             <a:ext cx="1911421" cy="276999"/>
           </a:xfrm>
           <a:prstGeom prst="rect">
@@ -9158,7 +10868,7 @@
         </p:nvSpPr>
         <p:spPr>
           <a:xfrm>
-            <a:off x="5615058" y="1693568"/>
+            <a:off x="4930220" y="1624245"/>
             <a:ext cx="2736134" cy="276999"/>
           </a:xfrm>
           <a:prstGeom prst="rect">
@@ -9200,7 +10910,7 @@
         </p:nvSpPr>
         <p:spPr>
           <a:xfrm>
-            <a:off x="8934304" y="1693567"/>
+            <a:off x="8843703" y="1628653"/>
             <a:ext cx="1921295" cy="276999"/>
           </a:xfrm>
           <a:prstGeom prst="rect">
@@ -9242,7 +10952,7 @@
         </p:nvSpPr>
         <p:spPr>
           <a:xfrm>
-            <a:off x="7357229" y="3409226"/>
+            <a:off x="7139069" y="3375760"/>
             <a:ext cx="2665281" cy="276999"/>
           </a:xfrm>
           <a:prstGeom prst="rect">
@@ -9274,487 +10984,6 @@
     <p:extLst>
       <p:ext uri="{BB962C8B-B14F-4D97-AF65-F5344CB8AC3E}">
         <p14:creationId xmlns:p14="http://schemas.microsoft.com/office/powerpoint/2010/main" val="3505136651"/>
-      </p:ext>
-    </p:extLst>
-  </p:cSld>
-  <p:clrMapOvr>
-    <a:masterClrMapping/>
-  </p:clrMapOvr>
-</p:sld>
-</file>
-
-<file path=ppt/slides/slide9.xml><?xml version="1.0" encoding="utf-8"?>
-<p:sld xmlns:a="http://schemas.openxmlformats.org/drawingml/2006/main" xmlns:r="http://schemas.openxmlformats.org/officeDocument/2006/relationships" xmlns:p="http://schemas.openxmlformats.org/presentationml/2006/main">
-  <p:cSld>
-    <p:spTree>
-      <p:nvGrpSpPr>
-        <p:cNvPr id="1" name="">
-          <a:extLst>
-            <a:ext uri="{FF2B5EF4-FFF2-40B4-BE49-F238E27FC236}">
-              <a16:creationId xmlns:a16="http://schemas.microsoft.com/office/drawing/2014/main" id="{890B73AD-B8EA-D737-3E9F-D93B02C78AB9}"/>
-            </a:ext>
-          </a:extLst>
-        </p:cNvPr>
-        <p:cNvGrpSpPr/>
-        <p:nvPr/>
-      </p:nvGrpSpPr>
-      <p:grpSpPr>
-        <a:xfrm>
-          <a:off x="0" y="0"/>
-          <a:ext cx="0" cy="0"/>
-          <a:chOff x="0" y="0"/>
-          <a:chExt cx="0" cy="0"/>
-        </a:xfrm>
-      </p:grpSpPr>
-      <p:pic>
-        <p:nvPicPr>
-          <p:cNvPr id="14" name="Picture 13">
-            <a:extLst>
-              <a:ext uri="{FF2B5EF4-FFF2-40B4-BE49-F238E27FC236}">
-                <a16:creationId xmlns:a16="http://schemas.microsoft.com/office/drawing/2014/main" id="{AB61B813-86B6-4540-AAAF-727327F47FE4}"/>
-              </a:ext>
-            </a:extLst>
-          </p:cNvPr>
-          <p:cNvPicPr>
-            <a:picLocks noChangeAspect="1"/>
-          </p:cNvPicPr>
-          <p:nvPr/>
-        </p:nvPicPr>
-        <p:blipFill>
-          <a:blip r:embed="rId2"/>
-          <a:stretch>
-            <a:fillRect/>
-          </a:stretch>
-        </p:blipFill>
-        <p:spPr>
-          <a:xfrm>
-            <a:off x="320704" y="921893"/>
-            <a:ext cx="11550592" cy="5721040"/>
-          </a:xfrm>
-          <a:prstGeom prst="rect">
-            <a:avLst/>
-          </a:prstGeom>
-        </p:spPr>
-      </p:pic>
-      <p:sp>
-        <p:nvSpPr>
-          <p:cNvPr id="2" name="Title 1">
-            <a:extLst>
-              <a:ext uri="{FF2B5EF4-FFF2-40B4-BE49-F238E27FC236}">
-                <a16:creationId xmlns:a16="http://schemas.microsoft.com/office/drawing/2014/main" id="{6390E3F7-5CF7-0641-C92A-780A10592985}"/>
-              </a:ext>
-            </a:extLst>
-          </p:cNvPr>
-          <p:cNvSpPr>
-            <a:spLocks noGrp="1"/>
-          </p:cNvSpPr>
-          <p:nvPr>
-            <p:ph type="title"/>
-          </p:nvPr>
-        </p:nvSpPr>
-        <p:spPr>
-          <a:xfrm>
-            <a:off x="2438474" y="225279"/>
-            <a:ext cx="7351272" cy="679904"/>
-          </a:xfrm>
-        </p:spPr>
-        <p:txBody>
-          <a:bodyPr>
-            <a:normAutofit fontScale="90000"/>
-          </a:bodyPr>
-          <a:lstStyle/>
-          <a:p>
-            <a:r>
-              <a:rPr lang="en-US" dirty="0"/>
-              <a:t>Associate/line management page</a:t>
-            </a:r>
-          </a:p>
-        </p:txBody>
-      </p:sp>
-      <p:sp>
-        <p:nvSpPr>
-          <p:cNvPr id="11" name="TextBox 10">
-            <a:extLst>
-              <a:ext uri="{FF2B5EF4-FFF2-40B4-BE49-F238E27FC236}">
-                <a16:creationId xmlns:a16="http://schemas.microsoft.com/office/drawing/2014/main" id="{FF7A9728-3103-237E-0EC1-A6518507D228}"/>
-              </a:ext>
-            </a:extLst>
-          </p:cNvPr>
-          <p:cNvSpPr txBox="1"/>
-          <p:nvPr/>
-        </p:nvSpPr>
-        <p:spPr>
-          <a:xfrm>
-            <a:off x="11835237" y="1084083"/>
-            <a:ext cx="369332" cy="5007525"/>
-          </a:xfrm>
-          <a:prstGeom prst="rect">
-            <a:avLst/>
-          </a:prstGeom>
-          <a:noFill/>
-        </p:spPr>
-        <p:txBody>
-          <a:bodyPr vert="eaVert" wrap="none" rtlCol="0">
-            <a:spAutoFit/>
-          </a:bodyPr>
-          <a:lstStyle/>
-          <a:p>
-            <a:r>
-              <a:rPr lang="en-US" sz="1200" dirty="0">
-                <a:solidFill>
-                  <a:schemeClr val="accent5">
-                    <a:lumMod val="60000"/>
-                    <a:lumOff val="40000"/>
-                  </a:schemeClr>
-                </a:solidFill>
-              </a:rPr>
-              <a:t>The outer scrollbar controls the page, the inner scrollbar controls the table</a:t>
-            </a:r>
-          </a:p>
-        </p:txBody>
-      </p:sp>
-      <p:sp>
-        <p:nvSpPr>
-          <p:cNvPr id="12" name="TextBox 11">
-            <a:extLst>
-              <a:ext uri="{FF2B5EF4-FFF2-40B4-BE49-F238E27FC236}">
-                <a16:creationId xmlns:a16="http://schemas.microsoft.com/office/drawing/2014/main" id="{1B8ADE77-ECD6-65CD-3324-7F1F2E56A187}"/>
-              </a:ext>
-            </a:extLst>
-          </p:cNvPr>
-          <p:cNvSpPr txBox="1"/>
-          <p:nvPr/>
-        </p:nvSpPr>
-        <p:spPr>
-          <a:xfrm>
-            <a:off x="7405227" y="1389432"/>
-            <a:ext cx="2112154" cy="461665"/>
-          </a:xfrm>
-          <a:prstGeom prst="rect">
-            <a:avLst/>
-          </a:prstGeom>
-          <a:noFill/>
-        </p:spPr>
-        <p:txBody>
-          <a:bodyPr wrap="square" rtlCol="0">
-            <a:spAutoFit/>
-          </a:bodyPr>
-          <a:lstStyle/>
-          <a:p>
-            <a:r>
-              <a:rPr lang="en-US" sz="1200" dirty="0">
-                <a:solidFill>
-                  <a:schemeClr val="accent5">
-                    <a:lumMod val="60000"/>
-                    <a:lumOff val="40000"/>
-                  </a:schemeClr>
-                </a:solidFill>
-              </a:rPr>
-              <a:t>Opens a form to add a new associate to the database</a:t>
-            </a:r>
-          </a:p>
-        </p:txBody>
-      </p:sp>
-      <p:cxnSp>
-        <p:nvCxnSpPr>
-          <p:cNvPr id="16" name="Connector: Elbow 15">
-            <a:extLst>
-              <a:ext uri="{FF2B5EF4-FFF2-40B4-BE49-F238E27FC236}">
-                <a16:creationId xmlns:a16="http://schemas.microsoft.com/office/drawing/2014/main" id="{4F7C1CF2-6E7C-2A7B-90E5-19D9D2028133}"/>
-              </a:ext>
-            </a:extLst>
-          </p:cNvPr>
-          <p:cNvCxnSpPr>
-            <a:stCxn id="12" idx="1"/>
-          </p:cNvCxnSpPr>
-          <p:nvPr/>
-        </p:nvCxnSpPr>
-        <p:spPr>
-          <a:xfrm rot="10800000" flipV="1">
-            <a:off x="6888481" y="1620264"/>
-            <a:ext cx="516747" cy="193295"/>
-          </a:xfrm>
-          <a:prstGeom prst="bentConnector3">
-            <a:avLst>
-              <a:gd name="adj1" fmla="val 99860"/>
-            </a:avLst>
-          </a:prstGeom>
-          <a:ln>
-            <a:tailEnd type="triangle"/>
-          </a:ln>
-        </p:spPr>
-        <p:style>
-          <a:lnRef idx="2">
-            <a:schemeClr val="accent1"/>
-          </a:lnRef>
-          <a:fillRef idx="0">
-            <a:schemeClr val="accent1"/>
-          </a:fillRef>
-          <a:effectRef idx="1">
-            <a:schemeClr val="accent1"/>
-          </a:effectRef>
-          <a:fontRef idx="minor">
-            <a:schemeClr val="tx1"/>
-          </a:fontRef>
-        </p:style>
-      </p:cxnSp>
-      <p:sp>
-        <p:nvSpPr>
-          <p:cNvPr id="19" name="TextBox 18">
-            <a:extLst>
-              <a:ext uri="{FF2B5EF4-FFF2-40B4-BE49-F238E27FC236}">
-                <a16:creationId xmlns:a16="http://schemas.microsoft.com/office/drawing/2014/main" id="{83DB18DC-B1FA-8B04-740C-697C2C5701C5}"/>
-              </a:ext>
-            </a:extLst>
-          </p:cNvPr>
-          <p:cNvSpPr txBox="1"/>
-          <p:nvPr/>
-        </p:nvSpPr>
-        <p:spPr>
-          <a:xfrm>
-            <a:off x="4402946" y="2272469"/>
-            <a:ext cx="3567573" cy="276999"/>
-          </a:xfrm>
-          <a:prstGeom prst="rect">
-            <a:avLst/>
-          </a:prstGeom>
-          <a:noFill/>
-        </p:spPr>
-        <p:txBody>
-          <a:bodyPr wrap="square" rtlCol="0">
-            <a:spAutoFit/>
-          </a:bodyPr>
-          <a:lstStyle/>
-          <a:p>
-            <a:r>
-              <a:rPr lang="en-US" sz="1200" dirty="0">
-                <a:solidFill>
-                  <a:schemeClr val="accent5">
-                    <a:lumMod val="60000"/>
-                    <a:lumOff val="40000"/>
-                  </a:schemeClr>
-                </a:solidFill>
-              </a:rPr>
-              <a:t>Column headers can still be clicked to toggle sorts</a:t>
-            </a:r>
-          </a:p>
-        </p:txBody>
-      </p:sp>
-      <p:sp>
-        <p:nvSpPr>
-          <p:cNvPr id="20" name="TextBox 19">
-            <a:extLst>
-              <a:ext uri="{FF2B5EF4-FFF2-40B4-BE49-F238E27FC236}">
-                <a16:creationId xmlns:a16="http://schemas.microsoft.com/office/drawing/2014/main" id="{3C72975A-6542-D518-3842-185B9C0DD359}"/>
-              </a:ext>
-            </a:extLst>
-          </p:cNvPr>
-          <p:cNvSpPr txBox="1"/>
-          <p:nvPr/>
-        </p:nvSpPr>
-        <p:spPr>
-          <a:xfrm>
-            <a:off x="8771485" y="2885602"/>
-            <a:ext cx="1642822" cy="276999"/>
-          </a:xfrm>
-          <a:prstGeom prst="rect">
-            <a:avLst/>
-          </a:prstGeom>
-          <a:noFill/>
-        </p:spPr>
-        <p:txBody>
-          <a:bodyPr wrap="none" rtlCol="0">
-            <a:spAutoFit/>
-          </a:bodyPr>
-          <a:lstStyle/>
-          <a:p>
-            <a:r>
-              <a:rPr lang="en-US" sz="1200" dirty="0">
-                <a:solidFill>
-                  <a:schemeClr val="accent5">
-                    <a:lumMod val="60000"/>
-                    <a:lumOff val="40000"/>
-                  </a:schemeClr>
-                </a:solidFill>
-              </a:rPr>
-              <a:t>Show authorized lines</a:t>
-            </a:r>
-          </a:p>
-        </p:txBody>
-      </p:sp>
-      <p:cxnSp>
-        <p:nvCxnSpPr>
-          <p:cNvPr id="22" name="Straight Arrow Connector 21">
-            <a:extLst>
-              <a:ext uri="{FF2B5EF4-FFF2-40B4-BE49-F238E27FC236}">
-                <a16:creationId xmlns:a16="http://schemas.microsoft.com/office/drawing/2014/main" id="{3BD0BC8D-DB71-815D-5289-455C1BEECE2E}"/>
-              </a:ext>
-            </a:extLst>
-          </p:cNvPr>
-          <p:cNvCxnSpPr>
-            <a:stCxn id="20" idx="3"/>
-          </p:cNvCxnSpPr>
-          <p:nvPr/>
-        </p:nvCxnSpPr>
-        <p:spPr>
-          <a:xfrm flipV="1">
-            <a:off x="10414307" y="3022600"/>
-            <a:ext cx="139393" cy="1502"/>
-          </a:xfrm>
-          <a:prstGeom prst="straightConnector1">
-            <a:avLst/>
-          </a:prstGeom>
-          <a:ln>
-            <a:tailEnd type="triangle"/>
-          </a:ln>
-        </p:spPr>
-        <p:style>
-          <a:lnRef idx="2">
-            <a:schemeClr val="accent1"/>
-          </a:lnRef>
-          <a:fillRef idx="0">
-            <a:schemeClr val="accent1"/>
-          </a:fillRef>
-          <a:effectRef idx="1">
-            <a:schemeClr val="accent1"/>
-          </a:effectRef>
-          <a:fontRef idx="minor">
-            <a:schemeClr val="tx1"/>
-          </a:fontRef>
-        </p:style>
-      </p:cxnSp>
-      <p:sp>
-        <p:nvSpPr>
-          <p:cNvPr id="23" name="TextBox 22">
-            <a:extLst>
-              <a:ext uri="{FF2B5EF4-FFF2-40B4-BE49-F238E27FC236}">
-                <a16:creationId xmlns:a16="http://schemas.microsoft.com/office/drawing/2014/main" id="{4B718289-575D-5AB9-637C-843162FB7DB0}"/>
-              </a:ext>
-            </a:extLst>
-          </p:cNvPr>
-          <p:cNvSpPr txBox="1"/>
-          <p:nvPr/>
-        </p:nvSpPr>
-        <p:spPr>
-          <a:xfrm>
-            <a:off x="8748632" y="3299599"/>
-            <a:ext cx="1426615" cy="461665"/>
-          </a:xfrm>
-          <a:prstGeom prst="rect">
-            <a:avLst/>
-          </a:prstGeom>
-          <a:noFill/>
-        </p:spPr>
-        <p:txBody>
-          <a:bodyPr wrap="square" rtlCol="0">
-            <a:spAutoFit/>
-          </a:bodyPr>
-          <a:lstStyle/>
-          <a:p>
-            <a:r>
-              <a:rPr lang="en-US" sz="1200" dirty="0">
-                <a:solidFill>
-                  <a:schemeClr val="accent5">
-                    <a:lumMod val="60000"/>
-                    <a:lumOff val="40000"/>
-                  </a:schemeClr>
-                </a:solidFill>
-              </a:rPr>
-              <a:t>Remove associate from database</a:t>
-            </a:r>
-          </a:p>
-        </p:txBody>
-      </p:sp>
-      <p:cxnSp>
-        <p:nvCxnSpPr>
-          <p:cNvPr id="25" name="Connector: Elbow 24">
-            <a:extLst>
-              <a:ext uri="{FF2B5EF4-FFF2-40B4-BE49-F238E27FC236}">
-                <a16:creationId xmlns:a16="http://schemas.microsoft.com/office/drawing/2014/main" id="{42F98A8D-3C62-763E-1DE5-067FC9D045CD}"/>
-              </a:ext>
-            </a:extLst>
-          </p:cNvPr>
-          <p:cNvCxnSpPr>
-            <a:cxnSpLocks/>
-            <a:stCxn id="23" idx="3"/>
-          </p:cNvCxnSpPr>
-          <p:nvPr/>
-        </p:nvCxnSpPr>
-        <p:spPr>
-          <a:xfrm>
-            <a:off x="10175247" y="3530432"/>
-            <a:ext cx="707066" cy="93831"/>
-          </a:xfrm>
-          <a:prstGeom prst="bentConnector3">
-            <a:avLst>
-              <a:gd name="adj1" fmla="val 99843"/>
-            </a:avLst>
-          </a:prstGeom>
-          <a:ln>
-            <a:tailEnd type="triangle"/>
-          </a:ln>
-        </p:spPr>
-        <p:style>
-          <a:lnRef idx="2">
-            <a:schemeClr val="accent1"/>
-          </a:lnRef>
-          <a:fillRef idx="0">
-            <a:schemeClr val="accent1"/>
-          </a:fillRef>
-          <a:effectRef idx="1">
-            <a:schemeClr val="accent1"/>
-          </a:effectRef>
-          <a:fontRef idx="minor">
-            <a:schemeClr val="tx1"/>
-          </a:fontRef>
-        </p:style>
-      </p:cxnSp>
-      <p:sp>
-        <p:nvSpPr>
-          <p:cNvPr id="31" name="TextBox 30">
-            <a:extLst>
-              <a:ext uri="{FF2B5EF4-FFF2-40B4-BE49-F238E27FC236}">
-                <a16:creationId xmlns:a16="http://schemas.microsoft.com/office/drawing/2014/main" id="{0B905B4F-99C0-8A47-32C4-55375D11463D}"/>
-              </a:ext>
-            </a:extLst>
-          </p:cNvPr>
-          <p:cNvSpPr txBox="1"/>
-          <p:nvPr/>
-        </p:nvSpPr>
-        <p:spPr>
-          <a:xfrm>
-            <a:off x="3646899" y="1497153"/>
-            <a:ext cx="1407758" cy="246221"/>
-          </a:xfrm>
-          <a:prstGeom prst="rect">
-            <a:avLst/>
-          </a:prstGeom>
-          <a:noFill/>
-        </p:spPr>
-        <p:txBody>
-          <a:bodyPr wrap="none" rtlCol="0">
-            <a:spAutoFit/>
-          </a:bodyPr>
-          <a:lstStyle/>
-          <a:p>
-            <a:r>
-              <a:rPr lang="en-US" sz="1000" dirty="0">
-                <a:solidFill>
-                  <a:schemeClr val="accent5">
-                    <a:lumMod val="60000"/>
-                    <a:lumOff val="40000"/>
-                  </a:schemeClr>
-                </a:solidFill>
-              </a:rPr>
-              <a:t>but not badge number</a:t>
-            </a:r>
-          </a:p>
-        </p:txBody>
-      </p:sp>
-    </p:spTree>
-    <p:extLst>
-      <p:ext uri="{BB962C8B-B14F-4D97-AF65-F5344CB8AC3E}">
-        <p14:creationId xmlns:p14="http://schemas.microsoft.com/office/powerpoint/2010/main" val="56508089"/>
       </p:ext>
     </p:extLst>
   </p:cSld>
@@ -10392,4 +11621,319 @@
     </a:ext>
   </a:extLst>
 </a:theme>
+</file>
+
+<file path=ppt/theme/theme3.xml><?xml version="1.0" encoding="utf-8"?>
+<a:theme xmlns:a="http://schemas.openxmlformats.org/drawingml/2006/main" name="Office Theme">
+  <a:themeElements>
+    <a:clrScheme name="Office">
+      <a:dk1>
+        <a:sysClr val="windowText" lastClr="000000"/>
+      </a:dk1>
+      <a:lt1>
+        <a:sysClr val="window" lastClr="FFFFFF"/>
+      </a:lt1>
+      <a:dk2>
+        <a:srgbClr val="0E2841"/>
+      </a:dk2>
+      <a:lt2>
+        <a:srgbClr val="E8E8E8"/>
+      </a:lt2>
+      <a:accent1>
+        <a:srgbClr val="156082"/>
+      </a:accent1>
+      <a:accent2>
+        <a:srgbClr val="E97132"/>
+      </a:accent2>
+      <a:accent3>
+        <a:srgbClr val="196B24"/>
+      </a:accent3>
+      <a:accent4>
+        <a:srgbClr val="0F9ED5"/>
+      </a:accent4>
+      <a:accent5>
+        <a:srgbClr val="A02B93"/>
+      </a:accent5>
+      <a:accent6>
+        <a:srgbClr val="4EA72E"/>
+      </a:accent6>
+      <a:hlink>
+        <a:srgbClr val="467886"/>
+      </a:hlink>
+      <a:folHlink>
+        <a:srgbClr val="96607D"/>
+      </a:folHlink>
+    </a:clrScheme>
+    <a:fontScheme name="Office">
+      <a:majorFont>
+        <a:latin typeface="Aptos Display" panose="02110004020202020204"/>
+        <a:ea typeface=""/>
+        <a:cs typeface=""/>
+        <a:font script="Jpan" typeface="游ゴシック Light"/>
+        <a:font script="Hang" typeface="맑은 고딕"/>
+        <a:font script="Hans" typeface="等线 Light"/>
+        <a:font script="Hant" typeface="新細明體"/>
+        <a:font script="Arab" typeface="Times New Roman"/>
+        <a:font script="Hebr" typeface="Times New Roman"/>
+        <a:font script="Thai" typeface="Angsana New"/>
+        <a:font script="Ethi" typeface="Nyala"/>
+        <a:font script="Beng" typeface="Vrinda"/>
+        <a:font script="Gujr" typeface="Shruti"/>
+        <a:font script="Khmr" typeface="MoolBoran"/>
+        <a:font script="Knda" typeface="Tunga"/>
+        <a:font script="Guru" typeface="Raavi"/>
+        <a:font script="Cans" typeface="Euphemia"/>
+        <a:font script="Cher" typeface="Plantagenet Cherokee"/>
+        <a:font script="Yiii" typeface="Microsoft Yi Baiti"/>
+        <a:font script="Tibt" typeface="Microsoft Himalaya"/>
+        <a:font script="Thaa" typeface="MV Boli"/>
+        <a:font script="Deva" typeface="Mangal"/>
+        <a:font script="Telu" typeface="Gautami"/>
+        <a:font script="Taml" typeface="Latha"/>
+        <a:font script="Syrc" typeface="Estrangelo Edessa"/>
+        <a:font script="Orya" typeface="Kalinga"/>
+        <a:font script="Mlym" typeface="Kartika"/>
+        <a:font script="Laoo" typeface="DokChampa"/>
+        <a:font script="Sinh" typeface="Iskoola Pota"/>
+        <a:font script="Mong" typeface="Mongolian Baiti"/>
+        <a:font script="Viet" typeface="Times New Roman"/>
+        <a:font script="Uigh" typeface="Microsoft Uighur"/>
+        <a:font script="Geor" typeface="Sylfaen"/>
+        <a:font script="Armn" typeface="Arial"/>
+        <a:font script="Bugi" typeface="Leelawadee UI"/>
+        <a:font script="Bopo" typeface="Microsoft JhengHei"/>
+        <a:font script="Java" typeface="Javanese Text"/>
+        <a:font script="Lisu" typeface="Segoe UI"/>
+        <a:font script="Mymr" typeface="Myanmar Text"/>
+        <a:font script="Nkoo" typeface="Ebrima"/>
+        <a:font script="Olck" typeface="Nirmala UI"/>
+        <a:font script="Osma" typeface="Ebrima"/>
+        <a:font script="Phag" typeface="Phagspa"/>
+        <a:font script="Syrn" typeface="Estrangelo Edessa"/>
+        <a:font script="Syrj" typeface="Estrangelo Edessa"/>
+        <a:font script="Syre" typeface="Estrangelo Edessa"/>
+        <a:font script="Sora" typeface="Nirmala UI"/>
+        <a:font script="Tale" typeface="Microsoft Tai Le"/>
+        <a:font script="Talu" typeface="Microsoft New Tai Lue"/>
+        <a:font script="Tfng" typeface="Ebrima"/>
+      </a:majorFont>
+      <a:minorFont>
+        <a:latin typeface="Aptos" panose="02110004020202020204"/>
+        <a:ea typeface=""/>
+        <a:cs typeface=""/>
+        <a:font script="Jpan" typeface="游ゴシック"/>
+        <a:font script="Hang" typeface="맑은 고딕"/>
+        <a:font script="Hans" typeface="等线"/>
+        <a:font script="Hant" typeface="新細明體"/>
+        <a:font script="Arab" typeface="Arial"/>
+        <a:font script="Hebr" typeface="Arial"/>
+        <a:font script="Thai" typeface="Cordia New"/>
+        <a:font script="Ethi" typeface="Nyala"/>
+        <a:font script="Beng" typeface="Vrinda"/>
+        <a:font script="Gujr" typeface="Shruti"/>
+        <a:font script="Khmr" typeface="DaunPenh"/>
+        <a:font script="Knda" typeface="Tunga"/>
+        <a:font script="Guru" typeface="Raavi"/>
+        <a:font script="Cans" typeface="Euphemia"/>
+        <a:font script="Cher" typeface="Plantagenet Cherokee"/>
+        <a:font script="Yiii" typeface="Microsoft Yi Baiti"/>
+        <a:font script="Tibt" typeface="Microsoft Himalaya"/>
+        <a:font script="Thaa" typeface="MV Boli"/>
+        <a:font script="Deva" typeface="Mangal"/>
+        <a:font script="Telu" typeface="Gautami"/>
+        <a:font script="Taml" typeface="Latha"/>
+        <a:font script="Syrc" typeface="Estrangelo Edessa"/>
+        <a:font script="Orya" typeface="Kalinga"/>
+        <a:font script="Mlym" typeface="Kartika"/>
+        <a:font script="Laoo" typeface="DokChampa"/>
+        <a:font script="Sinh" typeface="Iskoola Pota"/>
+        <a:font script="Mong" typeface="Mongolian Baiti"/>
+        <a:font script="Viet" typeface="Arial"/>
+        <a:font script="Uigh" typeface="Microsoft Uighur"/>
+        <a:font script="Geor" typeface="Sylfaen"/>
+        <a:font script="Armn" typeface="Arial"/>
+        <a:font script="Bugi" typeface="Leelawadee UI"/>
+        <a:font script="Bopo" typeface="Microsoft JhengHei"/>
+        <a:font script="Java" typeface="Javanese Text"/>
+        <a:font script="Lisu" typeface="Segoe UI"/>
+        <a:font script="Mymr" typeface="Myanmar Text"/>
+        <a:font script="Nkoo" typeface="Ebrima"/>
+        <a:font script="Olck" typeface="Nirmala UI"/>
+        <a:font script="Osma" typeface="Ebrima"/>
+        <a:font script="Phag" typeface="Phagspa"/>
+        <a:font script="Syrn" typeface="Estrangelo Edessa"/>
+        <a:font script="Syrj" typeface="Estrangelo Edessa"/>
+        <a:font script="Syre" typeface="Estrangelo Edessa"/>
+        <a:font script="Sora" typeface="Nirmala UI"/>
+        <a:font script="Tale" typeface="Microsoft Tai Le"/>
+        <a:font script="Talu" typeface="Microsoft New Tai Lue"/>
+        <a:font script="Tfng" typeface="Ebrima"/>
+      </a:minorFont>
+    </a:fontScheme>
+    <a:fmtScheme name="Office">
+      <a:fillStyleLst>
+        <a:solidFill>
+          <a:schemeClr val="phClr"/>
+        </a:solidFill>
+        <a:gradFill rotWithShape="1">
+          <a:gsLst>
+            <a:gs pos="0">
+              <a:schemeClr val="phClr">
+                <a:lumMod val="110000"/>
+                <a:satMod val="105000"/>
+                <a:tint val="67000"/>
+              </a:schemeClr>
+            </a:gs>
+            <a:gs pos="50000">
+              <a:schemeClr val="phClr">
+                <a:lumMod val="105000"/>
+                <a:satMod val="103000"/>
+                <a:tint val="73000"/>
+              </a:schemeClr>
+            </a:gs>
+            <a:gs pos="100000">
+              <a:schemeClr val="phClr">
+                <a:lumMod val="105000"/>
+                <a:satMod val="109000"/>
+                <a:tint val="81000"/>
+              </a:schemeClr>
+            </a:gs>
+          </a:gsLst>
+          <a:lin ang="5400000" scaled="0"/>
+        </a:gradFill>
+        <a:gradFill rotWithShape="1">
+          <a:gsLst>
+            <a:gs pos="0">
+              <a:schemeClr val="phClr">
+                <a:satMod val="103000"/>
+                <a:lumMod val="102000"/>
+                <a:tint val="94000"/>
+              </a:schemeClr>
+            </a:gs>
+            <a:gs pos="50000">
+              <a:schemeClr val="phClr">
+                <a:satMod val="110000"/>
+                <a:lumMod val="100000"/>
+                <a:shade val="100000"/>
+              </a:schemeClr>
+            </a:gs>
+            <a:gs pos="100000">
+              <a:schemeClr val="phClr">
+                <a:lumMod val="99000"/>
+                <a:satMod val="120000"/>
+                <a:shade val="78000"/>
+              </a:schemeClr>
+            </a:gs>
+          </a:gsLst>
+          <a:lin ang="5400000" scaled="0"/>
+        </a:gradFill>
+      </a:fillStyleLst>
+      <a:lnStyleLst>
+        <a:ln w="12700" cap="flat" cmpd="sng" algn="ctr">
+          <a:solidFill>
+            <a:schemeClr val="phClr"/>
+          </a:solidFill>
+          <a:prstDash val="solid"/>
+          <a:miter lim="800000"/>
+        </a:ln>
+        <a:ln w="19050" cap="flat" cmpd="sng" algn="ctr">
+          <a:solidFill>
+            <a:schemeClr val="phClr"/>
+          </a:solidFill>
+          <a:prstDash val="solid"/>
+          <a:miter lim="800000"/>
+        </a:ln>
+        <a:ln w="25400" cap="flat" cmpd="sng" algn="ctr">
+          <a:solidFill>
+            <a:schemeClr val="phClr"/>
+          </a:solidFill>
+          <a:prstDash val="solid"/>
+          <a:miter lim="800000"/>
+        </a:ln>
+      </a:lnStyleLst>
+      <a:effectStyleLst>
+        <a:effectStyle>
+          <a:effectLst/>
+        </a:effectStyle>
+        <a:effectStyle>
+          <a:effectLst/>
+        </a:effectStyle>
+        <a:effectStyle>
+          <a:effectLst>
+            <a:outerShdw blurRad="57150" dist="19050" dir="5400000" algn="ctr" rotWithShape="0">
+              <a:srgbClr val="000000">
+                <a:alpha val="63000"/>
+              </a:srgbClr>
+            </a:outerShdw>
+          </a:effectLst>
+        </a:effectStyle>
+      </a:effectStyleLst>
+      <a:bgFillStyleLst>
+        <a:solidFill>
+          <a:schemeClr val="phClr"/>
+        </a:solidFill>
+        <a:solidFill>
+          <a:schemeClr val="phClr">
+            <a:tint val="95000"/>
+            <a:satMod val="170000"/>
+          </a:schemeClr>
+        </a:solidFill>
+        <a:gradFill rotWithShape="1">
+          <a:gsLst>
+            <a:gs pos="0">
+              <a:schemeClr val="phClr">
+                <a:tint val="93000"/>
+                <a:satMod val="150000"/>
+                <a:shade val="98000"/>
+                <a:lumMod val="102000"/>
+              </a:schemeClr>
+            </a:gs>
+            <a:gs pos="50000">
+              <a:schemeClr val="phClr">
+                <a:tint val="98000"/>
+                <a:satMod val="130000"/>
+                <a:shade val="90000"/>
+                <a:lumMod val="103000"/>
+              </a:schemeClr>
+            </a:gs>
+            <a:gs pos="100000">
+              <a:schemeClr val="phClr">
+                <a:shade val="63000"/>
+                <a:satMod val="120000"/>
+              </a:schemeClr>
+            </a:gs>
+          </a:gsLst>
+          <a:lin ang="5400000" scaled="0"/>
+        </a:gradFill>
+      </a:bgFillStyleLst>
+    </a:fmtScheme>
+  </a:themeElements>
+  <a:objectDefaults>
+    <a:lnDef>
+      <a:spPr/>
+      <a:bodyPr/>
+      <a:lstStyle/>
+      <a:style>
+        <a:lnRef idx="2">
+          <a:schemeClr val="accent1"/>
+        </a:lnRef>
+        <a:fillRef idx="0">
+          <a:schemeClr val="accent1"/>
+        </a:fillRef>
+        <a:effectRef idx="1">
+          <a:schemeClr val="accent1"/>
+        </a:effectRef>
+        <a:fontRef idx="minor">
+          <a:schemeClr val="tx1"/>
+        </a:fontRef>
+      </a:style>
+    </a:lnDef>
+  </a:objectDefaults>
+  <a:extraClrSchemeLst/>
+  <a:extLst>
+    <a:ext uri="{05A4C25C-085E-4340-85A3-A5531E510DB2}">
+      <thm15:themeFamily xmlns:thm15="http://schemas.microsoft.com/office/thememl/2012/main" name="Office Theme" id="{2E142A2C-CD16-42D6-873A-C26D2A0506FA}" vid="{1BDDFF52-6CD6-40A5-AB3C-68EB2F1E4D0A}"/>
+    </a:ext>
+  </a:extLst>
+</a:theme>
 </file>
--- a/AdminInterface/UserGuide.pptx
+++ b/AdminInterface/UserGuide.pptx
@@ -5,37 +5,40 @@
     <p:sldMasterId id="2147483648" r:id="rId1"/>
   </p:sldMasterIdLst>
   <p:notesMasterIdLst>
-    <p:notesMasterId r:id="rId27"/>
+    <p:notesMasterId r:id="rId30"/>
   </p:notesMasterIdLst>
   <p:handoutMasterIdLst>
-    <p:handoutMasterId r:id="rId28"/>
+    <p:handoutMasterId r:id="rId31"/>
   </p:handoutMasterIdLst>
   <p:sldIdLst>
     <p:sldId id="256" r:id="rId2"/>
-    <p:sldId id="2819" r:id="rId3"/>
-    <p:sldId id="2822" r:id="rId4"/>
-    <p:sldId id="2837" r:id="rId5"/>
-    <p:sldId id="2807" r:id="rId6"/>
-    <p:sldId id="2808" r:id="rId7"/>
-    <p:sldId id="2809" r:id="rId8"/>
-    <p:sldId id="2813" r:id="rId9"/>
-    <p:sldId id="2815" r:id="rId10"/>
-    <p:sldId id="2816" r:id="rId11"/>
-    <p:sldId id="2825" r:id="rId12"/>
-    <p:sldId id="2832" r:id="rId13"/>
-    <p:sldId id="2823" r:id="rId14"/>
-    <p:sldId id="2833" r:id="rId15"/>
-    <p:sldId id="2824" r:id="rId16"/>
-    <p:sldId id="2826" r:id="rId17"/>
-    <p:sldId id="2827" r:id="rId18"/>
-    <p:sldId id="2835" r:id="rId19"/>
-    <p:sldId id="2829" r:id="rId20"/>
-    <p:sldId id="2836" r:id="rId21"/>
-    <p:sldId id="2828" r:id="rId22"/>
-    <p:sldId id="2834" r:id="rId23"/>
-    <p:sldId id="2817" r:id="rId24"/>
-    <p:sldId id="2830" r:id="rId25"/>
-    <p:sldId id="2831" r:id="rId26"/>
+    <p:sldId id="2838" r:id="rId3"/>
+    <p:sldId id="2839" r:id="rId4"/>
+    <p:sldId id="2840" r:id="rId5"/>
+    <p:sldId id="2819" r:id="rId6"/>
+    <p:sldId id="2822" r:id="rId7"/>
+    <p:sldId id="2837" r:id="rId8"/>
+    <p:sldId id="2807" r:id="rId9"/>
+    <p:sldId id="2808" r:id="rId10"/>
+    <p:sldId id="2809" r:id="rId11"/>
+    <p:sldId id="2813" r:id="rId12"/>
+    <p:sldId id="2815" r:id="rId13"/>
+    <p:sldId id="2816" r:id="rId14"/>
+    <p:sldId id="2825" r:id="rId15"/>
+    <p:sldId id="2832" r:id="rId16"/>
+    <p:sldId id="2823" r:id="rId17"/>
+    <p:sldId id="2833" r:id="rId18"/>
+    <p:sldId id="2824" r:id="rId19"/>
+    <p:sldId id="2826" r:id="rId20"/>
+    <p:sldId id="2827" r:id="rId21"/>
+    <p:sldId id="2835" r:id="rId22"/>
+    <p:sldId id="2829" r:id="rId23"/>
+    <p:sldId id="2836" r:id="rId24"/>
+    <p:sldId id="2828" r:id="rId25"/>
+    <p:sldId id="2834" r:id="rId26"/>
+    <p:sldId id="2817" r:id="rId27"/>
+    <p:sldId id="2830" r:id="rId28"/>
+    <p:sldId id="2831" r:id="rId29"/>
   </p:sldIdLst>
   <p:sldSz cx="12192000" cy="6858000"/>
   <p:notesSz cx="6858000" cy="9144000"/>
@@ -142,6 +145,13 @@
             <p14:sldId id="256"/>
           </p14:sldIdLst>
         </p14:section>
+        <p14:section name="Running the program" id="{27FE0756-86A7-41E2-889A-EB8056768D53}">
+          <p14:sldIdLst>
+            <p14:sldId id="2838"/>
+            <p14:sldId id="2839"/>
+            <p14:sldId id="2840"/>
+          </p14:sldIdLst>
+        </p14:section>
         <p14:section name="Summary Section" id="{1092B080-68E4-43C4-A6BB-FC3C4BF79DF6}">
           <p14:sldIdLst>
             <p14:sldId id="2819"/>
@@ -206,6 +216,9 @@
         </p15:guide>
       </p15:sldGuideLst>
     </p:ext>
+    <p:ext uri="{2D200454-40CA-4A62-9FC3-DE9A4176ACB9}">
+      <p15:notesGuideLst xmlns:p15="http://schemas.microsoft.com/office/powerpoint/2012/main"/>
+    </p:ext>
   </p:extLst>
 </p:presentation>
 </file>
@@ -304,7 +317,7 @@
           <a:p>
             <a:fld id="{49713A4B-B321-4E6A-8CBC-68B66D45B9D5}" type="datetimeFigureOut">
               <a:rPr lang="en-US" smtClean="0"/>
-              <a:t>3/31/2026</a:t>
+              <a:t>6/2/2026</a:t>
             </a:fld>
             <a:endParaRPr lang="en-US"/>
           </a:p>
@@ -570,7 +583,7 @@
           <a:p>
             <a:fld id="{FA90DC49-5E56-4663-BD73-6254BEC8D958}" type="datetimeFigureOut">
               <a:rPr lang="en-US" smtClean="0"/>
-              <a:t>3/31/2026</a:t>
+              <a:t>6/2/2026</a:t>
             </a:fld>
             <a:endParaRPr lang="en-US"/>
           </a:p>
@@ -902,7 +915,7 @@
           <a:p>
             <a:fld id="{F91CF8D7-B076-43C3-BFB0-F1A9323A501F}" type="slidenum">
               <a:rPr lang="en-US" smtClean="0"/>
-              <a:t>8</a:t>
+              <a:t>11</a:t>
             </a:fld>
             <a:endParaRPr lang="en-US"/>
           </a:p>
@@ -986,7 +999,7 @@
           <a:p>
             <a:fld id="{F91CF8D7-B076-43C3-BFB0-F1A9323A501F}" type="slidenum">
               <a:rPr lang="en-US" smtClean="0"/>
-              <a:t>16</a:t>
+              <a:t>19</a:t>
             </a:fld>
             <a:endParaRPr lang="en-US"/>
           </a:p>
@@ -1070,7 +1083,7 @@
           <a:p>
             <a:fld id="{F91CF8D7-B076-43C3-BFB0-F1A9323A501F}" type="slidenum">
               <a:rPr lang="en-US" smtClean="0"/>
-              <a:t>18</a:t>
+              <a:t>21</a:t>
             </a:fld>
             <a:endParaRPr lang="en-US"/>
           </a:p>
@@ -1236,7 +1249,7 @@
           <a:p>
             <a:fld id="{059A6F5A-3024-43F4-A20E-288FCAB0A2E6}" type="datetimeFigureOut">
               <a:rPr lang="en-US" smtClean="0"/>
-              <a:t>3/31/2026</a:t>
+              <a:t>6/2/2026</a:t>
             </a:fld>
             <a:endParaRPr lang="en-US"/>
           </a:p>
@@ -1434,7 +1447,7 @@
           <a:p>
             <a:fld id="{059A6F5A-3024-43F4-A20E-288FCAB0A2E6}" type="datetimeFigureOut">
               <a:rPr lang="en-US" smtClean="0"/>
-              <a:t>3/31/2026</a:t>
+              <a:t>6/2/2026</a:t>
             </a:fld>
             <a:endParaRPr lang="en-US"/>
           </a:p>
@@ -1709,7 +1722,7 @@
           <a:p>
             <a:fld id="{059A6F5A-3024-43F4-A20E-288FCAB0A2E6}" type="datetimeFigureOut">
               <a:rPr lang="en-US" smtClean="0"/>
-              <a:t>3/31/2026</a:t>
+              <a:t>6/2/2026</a:t>
             </a:fld>
             <a:endParaRPr lang="en-US"/>
           </a:p>
@@ -1980,7 +1993,7 @@
           <a:p>
             <a:fld id="{059A6F5A-3024-43F4-A20E-288FCAB0A2E6}" type="datetimeFigureOut">
               <a:rPr lang="en-US" smtClean="0"/>
-              <a:t>3/31/2026</a:t>
+              <a:t>6/2/2026</a:t>
             </a:fld>
             <a:endParaRPr lang="en-US"/>
           </a:p>
@@ -2393,7 +2406,7 @@
           <a:p>
             <a:fld id="{059A6F5A-3024-43F4-A20E-288FCAB0A2E6}" type="datetimeFigureOut">
               <a:rPr lang="en-US" smtClean="0"/>
-              <a:t>3/31/2026</a:t>
+              <a:t>6/2/2026</a:t>
             </a:fld>
             <a:endParaRPr lang="en-US"/>
           </a:p>
@@ -2534,7 +2547,7 @@
           <a:p>
             <a:fld id="{059A6F5A-3024-43F4-A20E-288FCAB0A2E6}" type="datetimeFigureOut">
               <a:rPr lang="en-US" smtClean="0"/>
-              <a:t>3/31/2026</a:t>
+              <a:t>6/2/2026</a:t>
             </a:fld>
             <a:endParaRPr lang="en-US"/>
           </a:p>
@@ -3199,7 +3212,7 @@
           <a:p>
             <a:fld id="{059A6F5A-3024-43F4-A20E-288FCAB0A2E6}" type="datetimeFigureOut">
               <a:rPr lang="en-US" smtClean="0"/>
-              <a:t>3/31/2026</a:t>
+              <a:t>6/2/2026</a:t>
             </a:fld>
             <a:endParaRPr lang="en-US"/>
           </a:p>
@@ -3440,7 +3453,7 @@
           <a:p>
             <a:fld id="{059A6F5A-3024-43F4-A20E-288FCAB0A2E6}" type="datetimeFigureOut">
               <a:rPr lang="en-US" smtClean="0"/>
-              <a:t>3/31/2026</a:t>
+              <a:t>6/2/2026</a:t>
             </a:fld>
             <a:endParaRPr lang="en-US"/>
           </a:p>
@@ -4024,6 +4037,973 @@
         <p:cNvPr id="1" name="">
           <a:extLst>
             <a:ext uri="{FF2B5EF4-FFF2-40B4-BE49-F238E27FC236}">
+              <a16:creationId xmlns:a16="http://schemas.microsoft.com/office/drawing/2014/main" id="{71267857-5705-5233-8621-600012F829A6}"/>
+            </a:ext>
+          </a:extLst>
+        </p:cNvPr>
+        <p:cNvGrpSpPr/>
+        <p:nvPr/>
+      </p:nvGrpSpPr>
+      <p:grpSpPr>
+        <a:xfrm>
+          <a:off x="0" y="0"/>
+          <a:ext cx="0" cy="0"/>
+          <a:chOff x="0" y="0"/>
+          <a:chExt cx="0" cy="0"/>
+        </a:xfrm>
+      </p:grpSpPr>
+      <p:pic>
+        <p:nvPicPr>
+          <p:cNvPr id="6" name="Picture 5">
+            <a:extLst>
+              <a:ext uri="{FF2B5EF4-FFF2-40B4-BE49-F238E27FC236}">
+                <a16:creationId xmlns:a16="http://schemas.microsoft.com/office/drawing/2014/main" id="{1762C331-CF49-0F33-1A51-08AD2F741220}"/>
+              </a:ext>
+            </a:extLst>
+          </p:cNvPr>
+          <p:cNvPicPr>
+            <a:picLocks noChangeAspect="1"/>
+          </p:cNvPicPr>
+          <p:nvPr/>
+        </p:nvPicPr>
+        <p:blipFill>
+          <a:blip r:embed="rId2"/>
+          <a:srcRect t="7683" r="339" b="441"/>
+          <a:stretch>
+            <a:fillRect/>
+          </a:stretch>
+        </p:blipFill>
+        <p:spPr>
+          <a:xfrm>
+            <a:off x="278342" y="905060"/>
+            <a:ext cx="11465169" cy="5725095"/>
+          </a:xfrm>
+          <a:prstGeom prst="rect">
+            <a:avLst/>
+          </a:prstGeom>
+        </p:spPr>
+      </p:pic>
+      <p:sp>
+        <p:nvSpPr>
+          <p:cNvPr id="2" name="Title 1">
+            <a:extLst>
+              <a:ext uri="{FF2B5EF4-FFF2-40B4-BE49-F238E27FC236}">
+                <a16:creationId xmlns:a16="http://schemas.microsoft.com/office/drawing/2014/main" id="{83CAF45F-3A8D-00CD-7E8B-3230BFA26EDA}"/>
+              </a:ext>
+            </a:extLst>
+          </p:cNvPr>
+          <p:cNvSpPr>
+            <a:spLocks noGrp="1"/>
+          </p:cNvSpPr>
+          <p:nvPr>
+            <p:ph type="title"/>
+          </p:nvPr>
+        </p:nvSpPr>
+        <p:spPr/>
+        <p:txBody>
+          <a:bodyPr>
+            <a:normAutofit fontScale="90000"/>
+          </a:bodyPr>
+          <a:lstStyle/>
+          <a:p>
+            <a:r>
+              <a:rPr lang="en-US" dirty="0"/>
+              <a:t>Using the table</a:t>
+            </a:r>
+          </a:p>
+        </p:txBody>
+      </p:sp>
+      <p:sp>
+        <p:nvSpPr>
+          <p:cNvPr id="10" name="TextBox 9">
+            <a:extLst>
+              <a:ext uri="{FF2B5EF4-FFF2-40B4-BE49-F238E27FC236}">
+                <a16:creationId xmlns:a16="http://schemas.microsoft.com/office/drawing/2014/main" id="{A1538370-39D1-6D79-381E-31E581284C33}"/>
+              </a:ext>
+            </a:extLst>
+          </p:cNvPr>
+          <p:cNvSpPr txBox="1"/>
+          <p:nvPr/>
+        </p:nvSpPr>
+        <p:spPr>
+          <a:xfrm>
+            <a:off x="757333" y="1700640"/>
+            <a:ext cx="1904682" cy="246221"/>
+          </a:xfrm>
+          <a:prstGeom prst="rect">
+            <a:avLst/>
+          </a:prstGeom>
+          <a:noFill/>
+        </p:spPr>
+        <p:txBody>
+          <a:bodyPr wrap="square" rtlCol="0">
+            <a:spAutoFit/>
+          </a:bodyPr>
+          <a:lstStyle/>
+          <a:p>
+            <a:r>
+              <a:rPr lang="en-US" sz="1000" dirty="0">
+                <a:solidFill>
+                  <a:schemeClr val="accent5">
+                    <a:lumMod val="60000"/>
+                    <a:lumOff val="40000"/>
+                  </a:schemeClr>
+                </a:solidFill>
+              </a:rPr>
+              <a:t>The results you’re seeing now</a:t>
+            </a:r>
+          </a:p>
+        </p:txBody>
+      </p:sp>
+      <p:sp>
+        <p:nvSpPr>
+          <p:cNvPr id="12" name="TextBox 11">
+            <a:extLst>
+              <a:ext uri="{FF2B5EF4-FFF2-40B4-BE49-F238E27FC236}">
+                <a16:creationId xmlns:a16="http://schemas.microsoft.com/office/drawing/2014/main" id="{A82EE8DE-09C4-18FA-EF73-579B5935A4D6}"/>
+              </a:ext>
+            </a:extLst>
+          </p:cNvPr>
+          <p:cNvSpPr txBox="1"/>
+          <p:nvPr/>
+        </p:nvSpPr>
+        <p:spPr>
+          <a:xfrm>
+            <a:off x="2579544" y="1772874"/>
+            <a:ext cx="762442" cy="400110"/>
+          </a:xfrm>
+          <a:prstGeom prst="rect">
+            <a:avLst/>
+          </a:prstGeom>
+          <a:noFill/>
+        </p:spPr>
+        <p:txBody>
+          <a:bodyPr wrap="square" rtlCol="0">
+            <a:spAutoFit/>
+          </a:bodyPr>
+          <a:lstStyle/>
+          <a:p>
+            <a:r>
+              <a:rPr lang="en-US" sz="1000" dirty="0">
+                <a:solidFill>
+                  <a:schemeClr val="accent5">
+                    <a:lumMod val="60000"/>
+                    <a:lumOff val="40000"/>
+                  </a:schemeClr>
+                </a:solidFill>
+              </a:rPr>
+              <a:t>Results per page</a:t>
+            </a:r>
+          </a:p>
+        </p:txBody>
+      </p:sp>
+      <p:sp>
+        <p:nvSpPr>
+          <p:cNvPr id="14" name="TextBox 13">
+            <a:extLst>
+              <a:ext uri="{FF2B5EF4-FFF2-40B4-BE49-F238E27FC236}">
+                <a16:creationId xmlns:a16="http://schemas.microsoft.com/office/drawing/2014/main" id="{9969AFC8-B683-D7F5-6B60-50E3D3FED37A}"/>
+              </a:ext>
+            </a:extLst>
+          </p:cNvPr>
+          <p:cNvSpPr txBox="1"/>
+          <p:nvPr/>
+        </p:nvSpPr>
+        <p:spPr>
+          <a:xfrm>
+            <a:off x="9332247" y="1649764"/>
+            <a:ext cx="1470274" cy="246221"/>
+          </a:xfrm>
+          <a:prstGeom prst="rect">
+            <a:avLst/>
+          </a:prstGeom>
+          <a:noFill/>
+        </p:spPr>
+        <p:txBody>
+          <a:bodyPr wrap="none" rtlCol="0">
+            <a:spAutoFit/>
+          </a:bodyPr>
+          <a:lstStyle/>
+          <a:p>
+            <a:r>
+              <a:rPr lang="en-US" sz="1000" dirty="0">
+                <a:solidFill>
+                  <a:schemeClr val="accent5">
+                    <a:lumMod val="60000"/>
+                    <a:lumOff val="40000"/>
+                  </a:schemeClr>
+                </a:solidFill>
+              </a:rPr>
+              <a:t>Jump to a specific page</a:t>
+            </a:r>
+          </a:p>
+        </p:txBody>
+      </p:sp>
+      <p:sp>
+        <p:nvSpPr>
+          <p:cNvPr id="3" name="TextBox 2">
+            <a:extLst>
+              <a:ext uri="{FF2B5EF4-FFF2-40B4-BE49-F238E27FC236}">
+                <a16:creationId xmlns:a16="http://schemas.microsoft.com/office/drawing/2014/main" id="{9B3E4AE1-B797-5E42-B959-804F7D2205F5}"/>
+              </a:ext>
+            </a:extLst>
+          </p:cNvPr>
+          <p:cNvSpPr txBox="1"/>
+          <p:nvPr/>
+        </p:nvSpPr>
+        <p:spPr>
+          <a:xfrm>
+            <a:off x="3603005" y="1772874"/>
+            <a:ext cx="4815841" cy="400110"/>
+          </a:xfrm>
+          <a:prstGeom prst="rect">
+            <a:avLst/>
+          </a:prstGeom>
+          <a:noFill/>
+        </p:spPr>
+        <p:txBody>
+          <a:bodyPr wrap="square" rtlCol="0">
+            <a:spAutoFit/>
+          </a:bodyPr>
+          <a:lstStyle/>
+          <a:p>
+            <a:r>
+              <a:rPr lang="en-US" sz="1000" dirty="0">
+                <a:solidFill>
+                  <a:schemeClr val="accent5">
+                    <a:lumMod val="60000"/>
+                    <a:lumOff val="40000"/>
+                  </a:schemeClr>
+                </a:solidFill>
+              </a:rPr>
+              <a:t>Click any column header to cycle through sort directions for that attribute. You can only sort by one column at once, and the default sort is by most recent lockout time.</a:t>
+            </a:r>
+          </a:p>
+        </p:txBody>
+      </p:sp>
+      <p:sp>
+        <p:nvSpPr>
+          <p:cNvPr id="4" name="TextBox 3">
+            <a:extLst>
+              <a:ext uri="{FF2B5EF4-FFF2-40B4-BE49-F238E27FC236}">
+                <a16:creationId xmlns:a16="http://schemas.microsoft.com/office/drawing/2014/main" id="{F33FD550-8542-DEDD-FCED-49A50F2F22E6}"/>
+              </a:ext>
+            </a:extLst>
+          </p:cNvPr>
+          <p:cNvSpPr txBox="1"/>
+          <p:nvPr/>
+        </p:nvSpPr>
+        <p:spPr>
+          <a:xfrm>
+            <a:off x="3437508" y="889108"/>
+            <a:ext cx="5316983" cy="400110"/>
+          </a:xfrm>
+          <a:prstGeom prst="rect">
+            <a:avLst/>
+          </a:prstGeom>
+          <a:noFill/>
+        </p:spPr>
+        <p:txBody>
+          <a:bodyPr wrap="square" rtlCol="0">
+            <a:spAutoFit/>
+          </a:bodyPr>
+          <a:lstStyle/>
+          <a:p>
+            <a:r>
+              <a:rPr lang="en-US" sz="1000" dirty="0">
+                <a:solidFill>
+                  <a:schemeClr val="accent5">
+                    <a:lumMod val="60000"/>
+                    <a:lumOff val="40000"/>
+                  </a:schemeClr>
+                </a:solidFill>
+              </a:rPr>
+              <a:t>Sorting assumes you only want to see entries where that value exists. For example, sorting by reset time here would hide all entries except the ones reset by ‘b’ and ‘eh’, then apply the sort</a:t>
+            </a:r>
+          </a:p>
+        </p:txBody>
+      </p:sp>
+      <p:sp>
+        <p:nvSpPr>
+          <p:cNvPr id="8" name="TextBox 7">
+            <a:extLst>
+              <a:ext uri="{FF2B5EF4-FFF2-40B4-BE49-F238E27FC236}">
+                <a16:creationId xmlns:a16="http://schemas.microsoft.com/office/drawing/2014/main" id="{38C0F6C5-CFB1-6CC7-120C-A60C2E6998E2}"/>
+              </a:ext>
+            </a:extLst>
+          </p:cNvPr>
+          <p:cNvSpPr txBox="1"/>
+          <p:nvPr/>
+        </p:nvSpPr>
+        <p:spPr>
+          <a:xfrm>
+            <a:off x="1878678" y="1354356"/>
+            <a:ext cx="2164175" cy="246221"/>
+          </a:xfrm>
+          <a:prstGeom prst="rect">
+            <a:avLst/>
+          </a:prstGeom>
+          <a:noFill/>
+        </p:spPr>
+        <p:txBody>
+          <a:bodyPr wrap="square" rtlCol="0">
+            <a:spAutoFit/>
+          </a:bodyPr>
+          <a:lstStyle/>
+          <a:p>
+            <a:r>
+              <a:rPr lang="en-US" sz="1000" dirty="0">
+                <a:solidFill>
+                  <a:schemeClr val="accent5">
+                    <a:lumMod val="60000"/>
+                    <a:lumOff val="40000"/>
+                  </a:schemeClr>
+                </a:solidFill>
+              </a:rPr>
+              <a:t>To remind you this is a filtered table</a:t>
+            </a:r>
+          </a:p>
+        </p:txBody>
+      </p:sp>
+      <p:sp>
+        <p:nvSpPr>
+          <p:cNvPr id="9" name="TextBox 8">
+            <a:extLst>
+              <a:ext uri="{FF2B5EF4-FFF2-40B4-BE49-F238E27FC236}">
+                <a16:creationId xmlns:a16="http://schemas.microsoft.com/office/drawing/2014/main" id="{957F113F-74A2-D03A-CE83-2E6DEE75383A}"/>
+              </a:ext>
+            </a:extLst>
+          </p:cNvPr>
+          <p:cNvSpPr txBox="1"/>
+          <p:nvPr/>
+        </p:nvSpPr>
+        <p:spPr>
+          <a:xfrm>
+            <a:off x="10003263" y="1058949"/>
+            <a:ext cx="1598515" cy="246221"/>
+          </a:xfrm>
+          <a:prstGeom prst="rect">
+            <a:avLst/>
+          </a:prstGeom>
+          <a:noFill/>
+        </p:spPr>
+        <p:txBody>
+          <a:bodyPr wrap="none" rtlCol="0">
+            <a:spAutoFit/>
+          </a:bodyPr>
+          <a:lstStyle/>
+          <a:p>
+            <a:r>
+              <a:rPr lang="en-US" sz="1000" dirty="0">
+                <a:solidFill>
+                  <a:schemeClr val="accent5">
+                    <a:lumMod val="60000"/>
+                    <a:lumOff val="40000"/>
+                  </a:schemeClr>
+                </a:solidFill>
+              </a:rPr>
+              <a:t>Auto-collapses on search</a:t>
+            </a:r>
+          </a:p>
+        </p:txBody>
+      </p:sp>
+    </p:spTree>
+    <p:extLst>
+      <p:ext uri="{BB962C8B-B14F-4D97-AF65-F5344CB8AC3E}">
+        <p14:creationId xmlns:p14="http://schemas.microsoft.com/office/powerpoint/2010/main" val="1246570814"/>
+      </p:ext>
+    </p:extLst>
+  </p:cSld>
+  <p:clrMapOvr>
+    <a:masterClrMapping/>
+  </p:clrMapOvr>
+</p:sld>
+</file>
+
+<file path=ppt/slides/slide11.xml><?xml version="1.0" encoding="utf-8"?>
+<p:sld xmlns:a="http://schemas.openxmlformats.org/drawingml/2006/main" xmlns:r="http://schemas.openxmlformats.org/officeDocument/2006/relationships" xmlns:p="http://schemas.openxmlformats.org/presentationml/2006/main">
+  <p:cSld>
+    <p:spTree>
+      <p:nvGrpSpPr>
+        <p:cNvPr id="1" name="">
+          <a:extLst>
+            <a:ext uri="{FF2B5EF4-FFF2-40B4-BE49-F238E27FC236}">
+              <a16:creationId xmlns:a16="http://schemas.microsoft.com/office/drawing/2014/main" id="{779C5437-B032-46BE-8C6E-92FB7ED12D30}"/>
+            </a:ext>
+          </a:extLst>
+        </p:cNvPr>
+        <p:cNvGrpSpPr/>
+        <p:nvPr/>
+      </p:nvGrpSpPr>
+      <p:grpSpPr>
+        <a:xfrm>
+          <a:off x="0" y="0"/>
+          <a:ext cx="0" cy="0"/>
+          <a:chOff x="0" y="0"/>
+          <a:chExt cx="0" cy="0"/>
+        </a:xfrm>
+      </p:grpSpPr>
+      <p:pic>
+        <p:nvPicPr>
+          <p:cNvPr id="7" name="Picture 6">
+            <a:extLst>
+              <a:ext uri="{FF2B5EF4-FFF2-40B4-BE49-F238E27FC236}">
+                <a16:creationId xmlns:a16="http://schemas.microsoft.com/office/drawing/2014/main" id="{812BAB45-23A4-77DF-00DA-276D6A70109C}"/>
+              </a:ext>
+            </a:extLst>
+          </p:cNvPr>
+          <p:cNvPicPr>
+            <a:picLocks noChangeAspect="1"/>
+          </p:cNvPicPr>
+          <p:nvPr/>
+        </p:nvPicPr>
+        <p:blipFill>
+          <a:blip r:embed="rId3"/>
+          <a:srcRect t="7851" r="275" b="481"/>
+          <a:stretch>
+            <a:fillRect/>
+          </a:stretch>
+        </p:blipFill>
+        <p:spPr>
+          <a:xfrm>
+            <a:off x="304801" y="902009"/>
+            <a:ext cx="11505421" cy="5728604"/>
+          </a:xfrm>
+          <a:prstGeom prst="rect">
+            <a:avLst/>
+          </a:prstGeom>
+        </p:spPr>
+      </p:pic>
+      <p:sp>
+        <p:nvSpPr>
+          <p:cNvPr id="2" name="Title 1">
+            <a:extLst>
+              <a:ext uri="{FF2B5EF4-FFF2-40B4-BE49-F238E27FC236}">
+                <a16:creationId xmlns:a16="http://schemas.microsoft.com/office/drawing/2014/main" id="{15448448-01BA-59FB-D8F3-BAA926C195D1}"/>
+              </a:ext>
+            </a:extLst>
+          </p:cNvPr>
+          <p:cNvSpPr>
+            <a:spLocks noGrp="1"/>
+          </p:cNvSpPr>
+          <p:nvPr>
+            <p:ph type="title"/>
+          </p:nvPr>
+        </p:nvSpPr>
+        <p:spPr/>
+        <p:txBody>
+          <a:bodyPr>
+            <a:normAutofit fontScale="90000"/>
+          </a:bodyPr>
+          <a:lstStyle/>
+          <a:p>
+            <a:r>
+              <a:rPr lang="en-US" dirty="0"/>
+              <a:t>Historical: the ‘expand’ button</a:t>
+            </a:r>
+          </a:p>
+        </p:txBody>
+      </p:sp>
+      <p:sp>
+        <p:nvSpPr>
+          <p:cNvPr id="5" name="TextBox 4">
+            <a:extLst>
+              <a:ext uri="{FF2B5EF4-FFF2-40B4-BE49-F238E27FC236}">
+                <a16:creationId xmlns:a16="http://schemas.microsoft.com/office/drawing/2014/main" id="{4A281846-F328-178E-9A2C-71311D73239A}"/>
+              </a:ext>
+            </a:extLst>
+          </p:cNvPr>
+          <p:cNvSpPr txBox="1"/>
+          <p:nvPr/>
+        </p:nvSpPr>
+        <p:spPr>
+          <a:xfrm>
+            <a:off x="4152900" y="902009"/>
+            <a:ext cx="3886200" cy="400110"/>
+          </a:xfrm>
+          <a:prstGeom prst="rect">
+            <a:avLst/>
+          </a:prstGeom>
+          <a:noFill/>
+        </p:spPr>
+        <p:txBody>
+          <a:bodyPr wrap="square" rtlCol="0">
+            <a:spAutoFit/>
+          </a:bodyPr>
+          <a:lstStyle/>
+          <a:p>
+            <a:r>
+              <a:rPr lang="en-US" sz="1000" dirty="0">
+                <a:solidFill>
+                  <a:schemeClr val="accent5">
+                    <a:lumMod val="60000"/>
+                    <a:lumOff val="40000"/>
+                  </a:schemeClr>
+                </a:solidFill>
+              </a:rPr>
+              <a:t>Clicking the three lines next to an entry will highlight the row in blue and open a split screen of all attempted resets for that lockout.</a:t>
+            </a:r>
+          </a:p>
+        </p:txBody>
+      </p:sp>
+      <p:sp>
+        <p:nvSpPr>
+          <p:cNvPr id="6" name="TextBox 5">
+            <a:extLst>
+              <a:ext uri="{FF2B5EF4-FFF2-40B4-BE49-F238E27FC236}">
+                <a16:creationId xmlns:a16="http://schemas.microsoft.com/office/drawing/2014/main" id="{E1D613EC-5703-4E8E-A21C-ADCC9671805D}"/>
+              </a:ext>
+            </a:extLst>
+          </p:cNvPr>
+          <p:cNvSpPr txBox="1"/>
+          <p:nvPr/>
+        </p:nvSpPr>
+        <p:spPr>
+          <a:xfrm>
+            <a:off x="8150368" y="902009"/>
+            <a:ext cx="3659854" cy="400110"/>
+          </a:xfrm>
+          <a:prstGeom prst="rect">
+            <a:avLst/>
+          </a:prstGeom>
+          <a:noFill/>
+        </p:spPr>
+        <p:txBody>
+          <a:bodyPr wrap="square" rtlCol="0">
+            <a:spAutoFit/>
+          </a:bodyPr>
+          <a:lstStyle/>
+          <a:p>
+            <a:r>
+              <a:rPr lang="en-US" sz="1000" dirty="0">
+                <a:solidFill>
+                  <a:schemeClr val="accent5">
+                    <a:lumMod val="60000"/>
+                    <a:lumOff val="40000"/>
+                  </a:schemeClr>
+                </a:solidFill>
+              </a:rPr>
+              <a:t>If the lockout has a paired reset, it’s highlighted in green and at the top (default sort is by auth state)</a:t>
+            </a:r>
+          </a:p>
+        </p:txBody>
+      </p:sp>
+      <p:sp>
+        <p:nvSpPr>
+          <p:cNvPr id="11" name="TextBox 10">
+            <a:extLst>
+              <a:ext uri="{FF2B5EF4-FFF2-40B4-BE49-F238E27FC236}">
+                <a16:creationId xmlns:a16="http://schemas.microsoft.com/office/drawing/2014/main" id="{88518FBE-206F-5E50-C6FF-0E23CCC9773E}"/>
+              </a:ext>
+            </a:extLst>
+          </p:cNvPr>
+          <p:cNvSpPr txBox="1"/>
+          <p:nvPr/>
+        </p:nvSpPr>
+        <p:spPr>
+          <a:xfrm>
+            <a:off x="8699254" y="1874520"/>
+            <a:ext cx="2562082" cy="400110"/>
+          </a:xfrm>
+          <a:prstGeom prst="rect">
+            <a:avLst/>
+          </a:prstGeom>
+          <a:noFill/>
+        </p:spPr>
+        <p:txBody>
+          <a:bodyPr wrap="square" rtlCol="0">
+            <a:spAutoFit/>
+          </a:bodyPr>
+          <a:lstStyle/>
+          <a:p>
+            <a:r>
+              <a:rPr lang="en-US" sz="1000" dirty="0">
+                <a:solidFill>
+                  <a:schemeClr val="accent5">
+                    <a:lumMod val="60000"/>
+                    <a:lumOff val="40000"/>
+                  </a:schemeClr>
+                </a:solidFill>
+              </a:rPr>
+              <a:t>Can filter denied requests by insufficient auth level or no privileges on target line</a:t>
+            </a:r>
+          </a:p>
+        </p:txBody>
+      </p:sp>
+      <p:sp>
+        <p:nvSpPr>
+          <p:cNvPr id="8" name="TextBox 7">
+            <a:extLst>
+              <a:ext uri="{FF2B5EF4-FFF2-40B4-BE49-F238E27FC236}">
+                <a16:creationId xmlns:a16="http://schemas.microsoft.com/office/drawing/2014/main" id="{2C9BF23D-E7AC-970F-3F0A-6009722FFA02}"/>
+              </a:ext>
+            </a:extLst>
+          </p:cNvPr>
+          <p:cNvSpPr txBox="1"/>
+          <p:nvPr/>
+        </p:nvSpPr>
+        <p:spPr>
+          <a:xfrm>
+            <a:off x="9012698" y="3338474"/>
+            <a:ext cx="2562082" cy="461665"/>
+          </a:xfrm>
+          <a:prstGeom prst="rect">
+            <a:avLst/>
+          </a:prstGeom>
+          <a:solidFill>
+            <a:schemeClr val="bg1">
+              <a:lumMod val="95000"/>
+            </a:schemeClr>
+          </a:solidFill>
+        </p:spPr>
+        <p:txBody>
+          <a:bodyPr wrap="square" rtlCol="0">
+            <a:spAutoFit/>
+          </a:bodyPr>
+          <a:lstStyle/>
+          <a:p>
+            <a:r>
+              <a:rPr lang="en-US" sz="1200" dirty="0">
+                <a:solidFill>
+                  <a:schemeClr val="accent5">
+                    <a:lumMod val="60000"/>
+                    <a:lumOff val="40000"/>
+                  </a:schemeClr>
+                </a:solidFill>
+              </a:rPr>
+              <a:t>If a lockout has been released, the successful reset is always at the top</a:t>
+            </a:r>
+          </a:p>
+        </p:txBody>
+      </p:sp>
+    </p:spTree>
+    <p:extLst>
+      <p:ext uri="{BB962C8B-B14F-4D97-AF65-F5344CB8AC3E}">
+        <p14:creationId xmlns:p14="http://schemas.microsoft.com/office/powerpoint/2010/main" val="1331215772"/>
+      </p:ext>
+    </p:extLst>
+  </p:cSld>
+  <p:clrMapOvr>
+    <a:masterClrMapping/>
+  </p:clrMapOvr>
+</p:sld>
+</file>
+
+<file path=ppt/slides/slide12.xml><?xml version="1.0" encoding="utf-8"?>
+<p:sld xmlns:a="http://schemas.openxmlformats.org/drawingml/2006/main" xmlns:r="http://schemas.openxmlformats.org/officeDocument/2006/relationships" xmlns:p="http://schemas.openxmlformats.org/presentationml/2006/main">
+  <p:cSld>
+    <p:spTree>
+      <p:nvGrpSpPr>
+        <p:cNvPr id="1" name="">
+          <a:extLst>
+            <a:ext uri="{FF2B5EF4-FFF2-40B4-BE49-F238E27FC236}">
+              <a16:creationId xmlns:a16="http://schemas.microsoft.com/office/drawing/2014/main" id="{B43B7B5B-ED35-205A-CA2F-B72AA425EEC7}"/>
+            </a:ext>
+          </a:extLst>
+        </p:cNvPr>
+        <p:cNvGrpSpPr/>
+        <p:nvPr/>
+      </p:nvGrpSpPr>
+      <p:grpSpPr>
+        <a:xfrm>
+          <a:off x="0" y="0"/>
+          <a:ext cx="0" cy="0"/>
+          <a:chOff x="0" y="0"/>
+          <a:chExt cx="0" cy="0"/>
+        </a:xfrm>
+      </p:grpSpPr>
+      <p:pic>
+        <p:nvPicPr>
+          <p:cNvPr id="8" name="Picture 7">
+            <a:extLst>
+              <a:ext uri="{FF2B5EF4-FFF2-40B4-BE49-F238E27FC236}">
+                <a16:creationId xmlns:a16="http://schemas.microsoft.com/office/drawing/2014/main" id="{C1BEEB97-51B2-9C03-FD94-E1B2E2EA2B34}"/>
+              </a:ext>
+            </a:extLst>
+          </p:cNvPr>
+          <p:cNvPicPr>
+            <a:picLocks noChangeAspect="1"/>
+          </p:cNvPicPr>
+          <p:nvPr/>
+        </p:nvPicPr>
+        <p:blipFill>
+          <a:blip r:embed="rId2"/>
+          <a:srcRect r="-94"/>
+          <a:stretch>
+            <a:fillRect/>
+          </a:stretch>
+        </p:blipFill>
+        <p:spPr>
+          <a:xfrm>
+            <a:off x="301658" y="902703"/>
+            <a:ext cx="11651530" cy="5774755"/>
+          </a:xfrm>
+          <a:prstGeom prst="rect">
+            <a:avLst/>
+          </a:prstGeom>
+        </p:spPr>
+      </p:pic>
+      <p:sp>
+        <p:nvSpPr>
+          <p:cNvPr id="2" name="Title 1">
+            <a:extLst>
+              <a:ext uri="{FF2B5EF4-FFF2-40B4-BE49-F238E27FC236}">
+                <a16:creationId xmlns:a16="http://schemas.microsoft.com/office/drawing/2014/main" id="{F6ADF4E2-82E1-891C-B98B-A8588815B969}"/>
+              </a:ext>
+            </a:extLst>
+          </p:cNvPr>
+          <p:cNvSpPr>
+            <a:spLocks noGrp="1"/>
+          </p:cNvSpPr>
+          <p:nvPr>
+            <p:ph type="title"/>
+          </p:nvPr>
+        </p:nvSpPr>
+        <p:spPr/>
+        <p:txBody>
+          <a:bodyPr>
+            <a:normAutofit fontScale="90000"/>
+          </a:bodyPr>
+          <a:lstStyle/>
+          <a:p>
+            <a:r>
+              <a:rPr lang="en-US" dirty="0"/>
+              <a:t>Line Status page</a:t>
+            </a:r>
+          </a:p>
+        </p:txBody>
+      </p:sp>
+      <p:sp>
+        <p:nvSpPr>
+          <p:cNvPr id="10" name="TextBox 9">
+            <a:extLst>
+              <a:ext uri="{FF2B5EF4-FFF2-40B4-BE49-F238E27FC236}">
+                <a16:creationId xmlns:a16="http://schemas.microsoft.com/office/drawing/2014/main" id="{E8CDE3DF-F0EF-2C72-E316-48ADB6202F60}"/>
+              </a:ext>
+            </a:extLst>
+          </p:cNvPr>
+          <p:cNvSpPr txBox="1"/>
+          <p:nvPr/>
+        </p:nvSpPr>
+        <p:spPr>
+          <a:xfrm>
+            <a:off x="4438650" y="2759073"/>
+            <a:ext cx="4495654" cy="276999"/>
+          </a:xfrm>
+          <a:prstGeom prst="rect">
+            <a:avLst/>
+          </a:prstGeom>
+          <a:noFill/>
+        </p:spPr>
+        <p:txBody>
+          <a:bodyPr wrap="none" rtlCol="0">
+            <a:spAutoFit/>
+          </a:bodyPr>
+          <a:lstStyle/>
+          <a:p>
+            <a:r>
+              <a:rPr lang="en-US" sz="1200" dirty="0">
+                <a:solidFill>
+                  <a:schemeClr val="accent5">
+                    <a:lumMod val="60000"/>
+                    <a:lumOff val="40000"/>
+                  </a:schemeClr>
+                </a:solidFill>
+              </a:rPr>
+              <a:t>Table and filters are functionally equivalent to the historical table </a:t>
+            </a:r>
+          </a:p>
+        </p:txBody>
+      </p:sp>
+      <p:sp>
+        <p:nvSpPr>
+          <p:cNvPr id="14" name="TextBox 13">
+            <a:extLst>
+              <a:ext uri="{FF2B5EF4-FFF2-40B4-BE49-F238E27FC236}">
+                <a16:creationId xmlns:a16="http://schemas.microsoft.com/office/drawing/2014/main" id="{123C6E55-5D31-4BA6-C183-56B79A5CC270}"/>
+              </a:ext>
+            </a:extLst>
+          </p:cNvPr>
+          <p:cNvSpPr txBox="1"/>
+          <p:nvPr/>
+        </p:nvSpPr>
+        <p:spPr>
+          <a:xfrm>
+            <a:off x="1750850" y="1598203"/>
+            <a:ext cx="1911421" cy="276999"/>
+          </a:xfrm>
+          <a:prstGeom prst="rect">
+            <a:avLst/>
+          </a:prstGeom>
+          <a:noFill/>
+        </p:spPr>
+        <p:txBody>
+          <a:bodyPr wrap="none" rtlCol="0">
+            <a:spAutoFit/>
+          </a:bodyPr>
+          <a:lstStyle/>
+          <a:p>
+            <a:r>
+              <a:rPr lang="en-US" sz="1200" dirty="0">
+                <a:solidFill>
+                  <a:schemeClr val="accent5">
+                    <a:lumMod val="60000"/>
+                    <a:lumOff val="40000"/>
+                  </a:schemeClr>
+                </a:solidFill>
+              </a:rPr>
+              <a:t>Requires complete CMMS</a:t>
+            </a:r>
+          </a:p>
+        </p:txBody>
+      </p:sp>
+      <p:sp>
+        <p:nvSpPr>
+          <p:cNvPr id="15" name="TextBox 14">
+            <a:extLst>
+              <a:ext uri="{FF2B5EF4-FFF2-40B4-BE49-F238E27FC236}">
+                <a16:creationId xmlns:a16="http://schemas.microsoft.com/office/drawing/2014/main" id="{A9BD5AC6-B04C-9301-218E-C7B63270D604}"/>
+              </a:ext>
+            </a:extLst>
+          </p:cNvPr>
+          <p:cNvSpPr txBox="1"/>
+          <p:nvPr/>
+        </p:nvSpPr>
+        <p:spPr>
+          <a:xfrm>
+            <a:off x="4930220" y="1624245"/>
+            <a:ext cx="2736134" cy="276999"/>
+          </a:xfrm>
+          <a:prstGeom prst="rect">
+            <a:avLst/>
+          </a:prstGeom>
+          <a:noFill/>
+        </p:spPr>
+        <p:txBody>
+          <a:bodyPr wrap="none" rtlCol="0">
+            <a:spAutoFit/>
+          </a:bodyPr>
+          <a:lstStyle/>
+          <a:p>
+            <a:r>
+              <a:rPr lang="en-US" sz="1200" dirty="0">
+                <a:solidFill>
+                  <a:schemeClr val="accent5">
+                    <a:lumMod val="60000"/>
+                    <a:lumOff val="40000"/>
+                  </a:schemeClr>
+                </a:solidFill>
+              </a:rPr>
+              <a:t>Select locked vs active from dropdown</a:t>
+            </a:r>
+          </a:p>
+        </p:txBody>
+      </p:sp>
+      <p:sp>
+        <p:nvSpPr>
+          <p:cNvPr id="16" name="TextBox 15">
+            <a:extLst>
+              <a:ext uri="{FF2B5EF4-FFF2-40B4-BE49-F238E27FC236}">
+                <a16:creationId xmlns:a16="http://schemas.microsoft.com/office/drawing/2014/main" id="{B743F743-8FBF-7A03-9170-95BD8F36AB42}"/>
+              </a:ext>
+            </a:extLst>
+          </p:cNvPr>
+          <p:cNvSpPr txBox="1"/>
+          <p:nvPr/>
+        </p:nvSpPr>
+        <p:spPr>
+          <a:xfrm>
+            <a:off x="8843703" y="1628653"/>
+            <a:ext cx="1921295" cy="276999"/>
+          </a:xfrm>
+          <a:prstGeom prst="rect">
+            <a:avLst/>
+          </a:prstGeom>
+          <a:noFill/>
+        </p:spPr>
+        <p:txBody>
+          <a:bodyPr wrap="none" rtlCol="0">
+            <a:spAutoFit/>
+          </a:bodyPr>
+          <a:lstStyle/>
+          <a:p>
+            <a:r>
+              <a:rPr lang="en-US" sz="1200" dirty="0">
+                <a:solidFill>
+                  <a:schemeClr val="accent5">
+                    <a:lumMod val="60000"/>
+                    <a:lumOff val="40000"/>
+                  </a:schemeClr>
+                </a:solidFill>
+              </a:rPr>
+              <a:t>Can take partial line name</a:t>
+            </a:r>
+          </a:p>
+        </p:txBody>
+      </p:sp>
+      <p:sp>
+        <p:nvSpPr>
+          <p:cNvPr id="5" name="TextBox 4">
+            <a:extLst>
+              <a:ext uri="{FF2B5EF4-FFF2-40B4-BE49-F238E27FC236}">
+                <a16:creationId xmlns:a16="http://schemas.microsoft.com/office/drawing/2014/main" id="{E82C2DB5-44E6-1177-B693-792AD893CB62}"/>
+              </a:ext>
+            </a:extLst>
+          </p:cNvPr>
+          <p:cNvSpPr txBox="1"/>
+          <p:nvPr/>
+        </p:nvSpPr>
+        <p:spPr>
+          <a:xfrm>
+            <a:off x="7139069" y="3375760"/>
+            <a:ext cx="2665281" cy="276999"/>
+          </a:xfrm>
+          <a:prstGeom prst="rect">
+            <a:avLst/>
+          </a:prstGeom>
+          <a:noFill/>
+        </p:spPr>
+        <p:txBody>
+          <a:bodyPr wrap="none" rtlCol="0">
+            <a:spAutoFit/>
+          </a:bodyPr>
+          <a:lstStyle/>
+          <a:p>
+            <a:r>
+              <a:rPr lang="en-US" sz="1200" dirty="0">
+                <a:solidFill>
+                  <a:schemeClr val="accent5">
+                    <a:lumMod val="60000"/>
+                    <a:lumOff val="40000"/>
+                  </a:schemeClr>
+                </a:solidFill>
+              </a:rPr>
+              <a:t>Default sort is by locked out vs active </a:t>
+            </a:r>
+          </a:p>
+        </p:txBody>
+      </p:sp>
+    </p:spTree>
+    <p:extLst>
+      <p:ext uri="{BB962C8B-B14F-4D97-AF65-F5344CB8AC3E}">
+        <p14:creationId xmlns:p14="http://schemas.microsoft.com/office/powerpoint/2010/main" val="3505136651"/>
+      </p:ext>
+    </p:extLst>
+  </p:cSld>
+  <p:clrMapOvr>
+    <a:masterClrMapping/>
+  </p:clrMapOvr>
+</p:sld>
+</file>
+
+<file path=ppt/slides/slide13.xml><?xml version="1.0" encoding="utf-8"?>
+<p:sld xmlns:a="http://schemas.openxmlformats.org/drawingml/2006/main" xmlns:r="http://schemas.openxmlformats.org/officeDocument/2006/relationships" xmlns:p="http://schemas.openxmlformats.org/presentationml/2006/main">
+  <p:cSld>
+    <p:spTree>
+      <p:nvGrpSpPr>
+        <p:cNvPr id="1" name="">
+          <a:extLst>
+            <a:ext uri="{FF2B5EF4-FFF2-40B4-BE49-F238E27FC236}">
               <a16:creationId xmlns:a16="http://schemas.microsoft.com/office/drawing/2014/main" id="{890B73AD-B8EA-D737-3E9F-D93B02C78AB9}"/>
             </a:ext>
           </a:extLst>
@@ -4456,7 +5436,7 @@
 </p:sld>
 </file>
 
-<file path=ppt/slides/slide11.xml><?xml version="1.0" encoding="utf-8"?>
+<file path=ppt/slides/slide14.xml><?xml version="1.0" encoding="utf-8"?>
 <p:sld xmlns:a="http://schemas.openxmlformats.org/drawingml/2006/main" xmlns:r="http://schemas.openxmlformats.org/officeDocument/2006/relationships" xmlns:p="http://schemas.openxmlformats.org/presentationml/2006/main">
   <p:cSld>
     <p:spTree>
@@ -4747,609 +5727,6 @@
     <p:extLst>
       <p:ext uri="{BB962C8B-B14F-4D97-AF65-F5344CB8AC3E}">
         <p14:creationId xmlns:p14="http://schemas.microsoft.com/office/powerpoint/2010/main" val="3541067779"/>
-      </p:ext>
-    </p:extLst>
-  </p:cSld>
-  <p:clrMapOvr>
-    <a:masterClrMapping/>
-  </p:clrMapOvr>
-</p:sld>
-</file>
-
-<file path=ppt/slides/slide12.xml><?xml version="1.0" encoding="utf-8"?>
-<p:sld xmlns:a="http://schemas.openxmlformats.org/drawingml/2006/main" xmlns:r="http://schemas.openxmlformats.org/officeDocument/2006/relationships" xmlns:p="http://schemas.openxmlformats.org/presentationml/2006/main">
-  <p:cSld>
-    <p:spTree>
-      <p:nvGrpSpPr>
-        <p:cNvPr id="1" name=""/>
-        <p:cNvGrpSpPr/>
-        <p:nvPr/>
-      </p:nvGrpSpPr>
-      <p:grpSpPr>
-        <a:xfrm>
-          <a:off x="0" y="0"/>
-          <a:ext cx="0" cy="0"/>
-          <a:chOff x="0" y="0"/>
-          <a:chExt cx="0" cy="0"/>
-        </a:xfrm>
-      </p:grpSpPr>
-      <p:pic>
-        <p:nvPicPr>
-          <p:cNvPr id="4" name="Picture 3">
-            <a:extLst>
-              <a:ext uri="{FF2B5EF4-FFF2-40B4-BE49-F238E27FC236}">
-                <a16:creationId xmlns:a16="http://schemas.microsoft.com/office/drawing/2014/main" id="{7ADC421D-5E02-6EA1-2A70-828E2AFDCDD1}"/>
-              </a:ext>
-            </a:extLst>
-          </p:cNvPr>
-          <p:cNvPicPr>
-            <a:picLocks noChangeAspect="1"/>
-          </p:cNvPicPr>
-          <p:nvPr/>
-        </p:nvPicPr>
-        <p:blipFill>
-          <a:blip r:embed="rId2"/>
-          <a:srcRect l="-1" t="8750" r="261" b="673"/>
-          <a:stretch>
-            <a:fillRect/>
-          </a:stretch>
-        </p:blipFill>
-        <p:spPr>
-          <a:xfrm>
-            <a:off x="297873" y="905060"/>
-            <a:ext cx="11702659" cy="5756608"/>
-          </a:xfrm>
-          <a:prstGeom prst="rect">
-            <a:avLst/>
-          </a:prstGeom>
-        </p:spPr>
-      </p:pic>
-      <p:sp>
-        <p:nvSpPr>
-          <p:cNvPr id="2" name="Title 1">
-            <a:extLst>
-              <a:ext uri="{FF2B5EF4-FFF2-40B4-BE49-F238E27FC236}">
-                <a16:creationId xmlns:a16="http://schemas.microsoft.com/office/drawing/2014/main" id="{3D902F91-27AD-A88E-E82C-E7AEE3658EF3}"/>
-              </a:ext>
-            </a:extLst>
-          </p:cNvPr>
-          <p:cNvSpPr>
-            <a:spLocks noGrp="1"/>
-          </p:cNvSpPr>
-          <p:nvPr>
-            <p:ph type="title"/>
-          </p:nvPr>
-        </p:nvSpPr>
-        <p:spPr/>
-        <p:txBody>
-          <a:bodyPr>
-            <a:normAutofit fontScale="90000"/>
-          </a:bodyPr>
-          <a:lstStyle/>
-          <a:p>
-            <a:r>
-              <a:rPr lang="en-US" dirty="0"/>
-              <a:t>Successful associate addition</a:t>
-            </a:r>
-          </a:p>
-        </p:txBody>
-      </p:sp>
-      <p:sp>
-        <p:nvSpPr>
-          <p:cNvPr id="6" name="TextBox 5">
-            <a:extLst>
-              <a:ext uri="{FF2B5EF4-FFF2-40B4-BE49-F238E27FC236}">
-                <a16:creationId xmlns:a16="http://schemas.microsoft.com/office/drawing/2014/main" id="{E126F708-8B49-6C0A-10B1-D81B06091C5C}"/>
-              </a:ext>
-            </a:extLst>
-          </p:cNvPr>
-          <p:cNvSpPr txBox="1"/>
-          <p:nvPr/>
-        </p:nvSpPr>
-        <p:spPr>
-          <a:xfrm>
-            <a:off x="8493550" y="905060"/>
-            <a:ext cx="3176833" cy="461665"/>
-          </a:xfrm>
-          <a:prstGeom prst="rect">
-            <a:avLst/>
-          </a:prstGeom>
-          <a:noFill/>
-        </p:spPr>
-        <p:txBody>
-          <a:bodyPr wrap="square" rtlCol="0">
-            <a:spAutoFit/>
-          </a:bodyPr>
-          <a:lstStyle/>
-          <a:p>
-            <a:r>
-              <a:rPr lang="en-US" sz="1200" dirty="0">
-                <a:solidFill>
-                  <a:schemeClr val="accent5">
-                    <a:lumMod val="60000"/>
-                    <a:lumOff val="40000"/>
-                  </a:schemeClr>
-                </a:solidFill>
-              </a:rPr>
-              <a:t>Fun fact: the message that briefly appears on success is called a toast</a:t>
-            </a:r>
-          </a:p>
-        </p:txBody>
-      </p:sp>
-      <p:sp>
-        <p:nvSpPr>
-          <p:cNvPr id="7" name="TextBox 6">
-            <a:extLst>
-              <a:ext uri="{FF2B5EF4-FFF2-40B4-BE49-F238E27FC236}">
-                <a16:creationId xmlns:a16="http://schemas.microsoft.com/office/drawing/2014/main" id="{97137BB4-B7D6-B553-5130-9D37B0202013}"/>
-              </a:ext>
-            </a:extLst>
-          </p:cNvPr>
-          <p:cNvSpPr txBox="1"/>
-          <p:nvPr/>
-        </p:nvSpPr>
-        <p:spPr>
-          <a:xfrm>
-            <a:off x="6014301" y="5882325"/>
-            <a:ext cx="5524009" cy="461665"/>
-          </a:xfrm>
-          <a:prstGeom prst="rect">
-            <a:avLst/>
-          </a:prstGeom>
-          <a:solidFill>
-            <a:schemeClr val="bg1">
-              <a:lumMod val="95000"/>
-            </a:schemeClr>
-          </a:solidFill>
-        </p:spPr>
-        <p:txBody>
-          <a:bodyPr wrap="square" rtlCol="0">
-            <a:spAutoFit/>
-          </a:bodyPr>
-          <a:lstStyle/>
-          <a:p>
-            <a:r>
-              <a:rPr lang="en-US" sz="1200" dirty="0">
-                <a:solidFill>
-                  <a:schemeClr val="accent5">
-                    <a:lumMod val="60000"/>
-                    <a:lumOff val="40000"/>
-                  </a:schemeClr>
-                </a:solidFill>
-              </a:rPr>
-              <a:t>As a rule of thumb, if the app doesn’t yell at you and the form closes, it worked. But in case you’re not convinced, you’ll see a little message telling you it worked.</a:t>
-            </a:r>
-          </a:p>
-        </p:txBody>
-      </p:sp>
-    </p:spTree>
-    <p:extLst>
-      <p:ext uri="{BB962C8B-B14F-4D97-AF65-F5344CB8AC3E}">
-        <p14:creationId xmlns:p14="http://schemas.microsoft.com/office/powerpoint/2010/main" val="3514542878"/>
-      </p:ext>
-    </p:extLst>
-  </p:cSld>
-  <p:clrMapOvr>
-    <a:masterClrMapping/>
-  </p:clrMapOvr>
-</p:sld>
-</file>
-
-<file path=ppt/slides/slide13.xml><?xml version="1.0" encoding="utf-8"?>
-<p:sld xmlns:a="http://schemas.openxmlformats.org/drawingml/2006/main" xmlns:r="http://schemas.openxmlformats.org/officeDocument/2006/relationships" xmlns:p="http://schemas.openxmlformats.org/presentationml/2006/main">
-  <p:cSld>
-    <p:spTree>
-      <p:nvGrpSpPr>
-        <p:cNvPr id="1" name=""/>
-        <p:cNvGrpSpPr/>
-        <p:nvPr/>
-      </p:nvGrpSpPr>
-      <p:grpSpPr>
-        <a:xfrm>
-          <a:off x="0" y="0"/>
-          <a:ext cx="0" cy="0"/>
-          <a:chOff x="0" y="0"/>
-          <a:chExt cx="0" cy="0"/>
-        </a:xfrm>
-      </p:grpSpPr>
-      <p:pic>
-        <p:nvPicPr>
-          <p:cNvPr id="5" name="Picture 4">
-            <a:extLst>
-              <a:ext uri="{FF2B5EF4-FFF2-40B4-BE49-F238E27FC236}">
-                <a16:creationId xmlns:a16="http://schemas.microsoft.com/office/drawing/2014/main" id="{336AB0DF-C780-29C1-C23B-5B00178AB574}"/>
-              </a:ext>
-            </a:extLst>
-          </p:cNvPr>
-          <p:cNvPicPr>
-            <a:picLocks noChangeAspect="1"/>
-          </p:cNvPicPr>
-          <p:nvPr/>
-        </p:nvPicPr>
-        <p:blipFill>
-          <a:blip r:embed="rId2"/>
-          <a:srcRect t="7885" r="365" b="889"/>
-          <a:stretch>
-            <a:fillRect/>
-          </a:stretch>
-        </p:blipFill>
-        <p:spPr>
-          <a:xfrm>
-            <a:off x="237554" y="982503"/>
-            <a:ext cx="11749373" cy="5827088"/>
-          </a:xfrm>
-          <a:prstGeom prst="rect">
-            <a:avLst/>
-          </a:prstGeom>
-        </p:spPr>
-      </p:pic>
-      <p:sp>
-        <p:nvSpPr>
-          <p:cNvPr id="2" name="Title 1">
-            <a:extLst>
-              <a:ext uri="{FF2B5EF4-FFF2-40B4-BE49-F238E27FC236}">
-                <a16:creationId xmlns:a16="http://schemas.microsoft.com/office/drawing/2014/main" id="{A63A7C61-1230-B8AB-E571-77D57ECCDCB4}"/>
-              </a:ext>
-            </a:extLst>
-          </p:cNvPr>
-          <p:cNvSpPr>
-            <a:spLocks noGrp="1"/>
-          </p:cNvSpPr>
-          <p:nvPr>
-            <p:ph type="title"/>
-          </p:nvPr>
-        </p:nvSpPr>
-        <p:spPr/>
-        <p:txBody>
-          <a:bodyPr>
-            <a:normAutofit fontScale="90000"/>
-          </a:bodyPr>
-          <a:lstStyle/>
-          <a:p>
-            <a:r>
-              <a:rPr lang="en-US" dirty="0"/>
-              <a:t>Associate removal</a:t>
-            </a:r>
-          </a:p>
-        </p:txBody>
-      </p:sp>
-      <p:sp>
-        <p:nvSpPr>
-          <p:cNvPr id="6" name="TextBox 5">
-            <a:extLst>
-              <a:ext uri="{FF2B5EF4-FFF2-40B4-BE49-F238E27FC236}">
-                <a16:creationId xmlns:a16="http://schemas.microsoft.com/office/drawing/2014/main" id="{5B355B17-5827-137C-FC0C-D6D3C1F492CE}"/>
-              </a:ext>
-            </a:extLst>
-          </p:cNvPr>
-          <p:cNvSpPr txBox="1"/>
-          <p:nvPr/>
-        </p:nvSpPr>
-        <p:spPr>
-          <a:xfrm>
-            <a:off x="6280150" y="1937176"/>
-            <a:ext cx="1476430" cy="276999"/>
-          </a:xfrm>
-          <a:prstGeom prst="rect">
-            <a:avLst/>
-          </a:prstGeom>
-          <a:noFill/>
-        </p:spPr>
-        <p:txBody>
-          <a:bodyPr wrap="none" rtlCol="0">
-            <a:spAutoFit/>
-          </a:bodyPr>
-          <a:lstStyle/>
-          <a:p>
-            <a:r>
-              <a:rPr lang="en-US" sz="1200" dirty="0">
-                <a:solidFill>
-                  <a:schemeClr val="accent5">
-                    <a:lumMod val="60000"/>
-                    <a:lumOff val="40000"/>
-                  </a:schemeClr>
-                </a:solidFill>
-              </a:rPr>
-              <a:t>Removes associate</a:t>
-            </a:r>
-          </a:p>
-        </p:txBody>
-      </p:sp>
-      <p:cxnSp>
-        <p:nvCxnSpPr>
-          <p:cNvPr id="8" name="Straight Arrow Connector 7">
-            <a:extLst>
-              <a:ext uri="{FF2B5EF4-FFF2-40B4-BE49-F238E27FC236}">
-                <a16:creationId xmlns:a16="http://schemas.microsoft.com/office/drawing/2014/main" id="{FD0DF0E5-2CA6-9590-DC9A-466484D34516}"/>
-              </a:ext>
-            </a:extLst>
-          </p:cNvPr>
-          <p:cNvCxnSpPr/>
-          <p:nvPr/>
-        </p:nvCxnSpPr>
-        <p:spPr>
-          <a:xfrm>
-            <a:off x="7032527" y="2198034"/>
-            <a:ext cx="212725" cy="174625"/>
-          </a:xfrm>
-          <a:prstGeom prst="straightConnector1">
-            <a:avLst/>
-          </a:prstGeom>
-          <a:ln>
-            <a:tailEnd type="triangle"/>
-          </a:ln>
-        </p:spPr>
-        <p:style>
-          <a:lnRef idx="2">
-            <a:schemeClr val="accent1"/>
-          </a:lnRef>
-          <a:fillRef idx="0">
-            <a:schemeClr val="accent1"/>
-          </a:fillRef>
-          <a:effectRef idx="1">
-            <a:schemeClr val="accent1"/>
-          </a:effectRef>
-          <a:fontRef idx="minor">
-            <a:schemeClr val="tx1"/>
-          </a:fontRef>
-        </p:style>
-      </p:cxnSp>
-      <p:sp>
-        <p:nvSpPr>
-          <p:cNvPr id="10" name="TextBox 9">
-            <a:extLst>
-              <a:ext uri="{FF2B5EF4-FFF2-40B4-BE49-F238E27FC236}">
-                <a16:creationId xmlns:a16="http://schemas.microsoft.com/office/drawing/2014/main" id="{105ABAF5-9FF0-6FD9-0180-124F59775D74}"/>
-              </a:ext>
-            </a:extLst>
-          </p:cNvPr>
-          <p:cNvSpPr txBox="1"/>
-          <p:nvPr/>
-        </p:nvSpPr>
-        <p:spPr>
-          <a:xfrm>
-            <a:off x="6540157" y="1209675"/>
-            <a:ext cx="956416" cy="276999"/>
-          </a:xfrm>
-          <a:prstGeom prst="rect">
-            <a:avLst/>
-          </a:prstGeom>
-          <a:noFill/>
-        </p:spPr>
-        <p:txBody>
-          <a:bodyPr wrap="none" rtlCol="0">
-            <a:spAutoFit/>
-          </a:bodyPr>
-          <a:lstStyle/>
-          <a:p>
-            <a:r>
-              <a:rPr lang="en-US" sz="1200" dirty="0">
-                <a:solidFill>
-                  <a:schemeClr val="accent5">
-                    <a:lumMod val="60000"/>
-                    <a:lumOff val="40000"/>
-                  </a:schemeClr>
-                </a:solidFill>
-              </a:rPr>
-              <a:t>Also cancel</a:t>
-            </a:r>
-          </a:p>
-        </p:txBody>
-      </p:sp>
-      <p:sp>
-        <p:nvSpPr>
-          <p:cNvPr id="11" name="TextBox 10">
-            <a:extLst>
-              <a:ext uri="{FF2B5EF4-FFF2-40B4-BE49-F238E27FC236}">
-                <a16:creationId xmlns:a16="http://schemas.microsoft.com/office/drawing/2014/main" id="{6FB2B785-C61A-7AE6-6A29-978411FFDC4D}"/>
-              </a:ext>
-            </a:extLst>
-          </p:cNvPr>
-          <p:cNvSpPr txBox="1"/>
-          <p:nvPr/>
-        </p:nvSpPr>
-        <p:spPr>
-          <a:xfrm>
-            <a:off x="5042311" y="2285346"/>
-            <a:ext cx="1237839" cy="276999"/>
-          </a:xfrm>
-          <a:prstGeom prst="rect">
-            <a:avLst/>
-          </a:prstGeom>
-          <a:noFill/>
-        </p:spPr>
-        <p:txBody>
-          <a:bodyPr wrap="none" rtlCol="0">
-            <a:spAutoFit/>
-          </a:bodyPr>
-          <a:lstStyle/>
-          <a:p>
-            <a:r>
-              <a:rPr lang="en-US" sz="1200" dirty="0">
-                <a:solidFill>
-                  <a:schemeClr val="accent5">
-                    <a:lumMod val="60000"/>
-                    <a:lumOff val="40000"/>
-                  </a:schemeClr>
-                </a:solidFill>
-              </a:rPr>
-              <a:t>Cancel deletion</a:t>
-            </a:r>
-          </a:p>
-        </p:txBody>
-      </p:sp>
-      <p:sp>
-        <p:nvSpPr>
-          <p:cNvPr id="12" name="TextBox 11">
-            <a:extLst>
-              <a:ext uri="{FF2B5EF4-FFF2-40B4-BE49-F238E27FC236}">
-                <a16:creationId xmlns:a16="http://schemas.microsoft.com/office/drawing/2014/main" id="{AA6EF203-5F9A-E697-28BD-A26ED62CEAE8}"/>
-              </a:ext>
-            </a:extLst>
-          </p:cNvPr>
-          <p:cNvSpPr txBox="1"/>
-          <p:nvPr/>
-        </p:nvSpPr>
-        <p:spPr>
-          <a:xfrm>
-            <a:off x="4697217" y="4616451"/>
-            <a:ext cx="3685880" cy="646331"/>
-          </a:xfrm>
-          <a:prstGeom prst="rect">
-            <a:avLst/>
-          </a:prstGeom>
-          <a:noFill/>
-        </p:spPr>
-        <p:txBody>
-          <a:bodyPr wrap="square" rtlCol="0">
-            <a:spAutoFit/>
-          </a:bodyPr>
-          <a:lstStyle/>
-          <a:p>
-            <a:r>
-              <a:rPr lang="en-US" dirty="0"/>
-              <a:t>This is what you see when you press the trash can for an associate</a:t>
-            </a:r>
-          </a:p>
-        </p:txBody>
-      </p:sp>
-    </p:spTree>
-    <p:extLst>
-      <p:ext uri="{BB962C8B-B14F-4D97-AF65-F5344CB8AC3E}">
-        <p14:creationId xmlns:p14="http://schemas.microsoft.com/office/powerpoint/2010/main" val="1577836970"/>
-      </p:ext>
-    </p:extLst>
-  </p:cSld>
-  <p:clrMapOvr>
-    <a:masterClrMapping/>
-  </p:clrMapOvr>
-</p:sld>
-</file>
-
-<file path=ppt/slides/slide14.xml><?xml version="1.0" encoding="utf-8"?>
-<p:sld xmlns:a="http://schemas.openxmlformats.org/drawingml/2006/main" xmlns:r="http://schemas.openxmlformats.org/officeDocument/2006/relationships" xmlns:p="http://schemas.openxmlformats.org/presentationml/2006/main">
-  <p:cSld>
-    <p:spTree>
-      <p:nvGrpSpPr>
-        <p:cNvPr id="1" name=""/>
-        <p:cNvGrpSpPr/>
-        <p:nvPr/>
-      </p:nvGrpSpPr>
-      <p:grpSpPr>
-        <a:xfrm>
-          <a:off x="0" y="0"/>
-          <a:ext cx="0" cy="0"/>
-          <a:chOff x="0" y="0"/>
-          <a:chExt cx="0" cy="0"/>
-        </a:xfrm>
-      </p:grpSpPr>
-      <p:pic>
-        <p:nvPicPr>
-          <p:cNvPr id="8" name="Picture 7">
-            <a:extLst>
-              <a:ext uri="{FF2B5EF4-FFF2-40B4-BE49-F238E27FC236}">
-                <a16:creationId xmlns:a16="http://schemas.microsoft.com/office/drawing/2014/main" id="{F7CD359B-1B88-745F-0902-F9C31D5C8588}"/>
-              </a:ext>
-            </a:extLst>
-          </p:cNvPr>
-          <p:cNvPicPr>
-            <a:picLocks noChangeAspect="1"/>
-          </p:cNvPicPr>
-          <p:nvPr/>
-        </p:nvPicPr>
-        <p:blipFill>
-          <a:blip r:embed="rId2"/>
-          <a:srcRect t="8114" r="287" b="769"/>
-          <a:stretch>
-            <a:fillRect/>
-          </a:stretch>
-        </p:blipFill>
-        <p:spPr>
-          <a:xfrm>
-            <a:off x="312656" y="999328"/>
-            <a:ext cx="11586802" cy="5734999"/>
-          </a:xfrm>
-          <a:prstGeom prst="rect">
-            <a:avLst/>
-          </a:prstGeom>
-        </p:spPr>
-      </p:pic>
-      <p:sp>
-        <p:nvSpPr>
-          <p:cNvPr id="2" name="Title 1">
-            <a:extLst>
-              <a:ext uri="{FF2B5EF4-FFF2-40B4-BE49-F238E27FC236}">
-                <a16:creationId xmlns:a16="http://schemas.microsoft.com/office/drawing/2014/main" id="{F031888A-8945-68C8-0520-9448F8A394EB}"/>
-              </a:ext>
-            </a:extLst>
-          </p:cNvPr>
-          <p:cNvSpPr>
-            <a:spLocks noGrp="1"/>
-          </p:cNvSpPr>
-          <p:nvPr>
-            <p:ph type="title"/>
-          </p:nvPr>
-        </p:nvSpPr>
-        <p:spPr/>
-        <p:txBody>
-          <a:bodyPr>
-            <a:normAutofit fontScale="90000"/>
-          </a:bodyPr>
-          <a:lstStyle/>
-          <a:p>
-            <a:r>
-              <a:rPr lang="en-US" dirty="0"/>
-              <a:t>Successful associate removal</a:t>
-            </a:r>
-          </a:p>
-        </p:txBody>
-      </p:sp>
-      <p:sp>
-        <p:nvSpPr>
-          <p:cNvPr id="6" name="TextBox 5">
-            <a:extLst>
-              <a:ext uri="{FF2B5EF4-FFF2-40B4-BE49-F238E27FC236}">
-                <a16:creationId xmlns:a16="http://schemas.microsoft.com/office/drawing/2014/main" id="{6E11AE5D-04A7-B0B9-FE4F-E94713C10232}"/>
-              </a:ext>
-            </a:extLst>
-          </p:cNvPr>
-          <p:cNvSpPr txBox="1"/>
-          <p:nvPr/>
-        </p:nvSpPr>
-        <p:spPr>
-          <a:xfrm>
-            <a:off x="8776356" y="5858672"/>
-            <a:ext cx="1781665" cy="646331"/>
-          </a:xfrm>
-          <a:prstGeom prst="rect">
-            <a:avLst/>
-          </a:prstGeom>
-          <a:noFill/>
-        </p:spPr>
-        <p:txBody>
-          <a:bodyPr wrap="square" rtlCol="0">
-            <a:spAutoFit/>
-          </a:bodyPr>
-          <a:lstStyle/>
-          <a:p>
-            <a:r>
-              <a:rPr lang="en-US" sz="1200" dirty="0">
-                <a:solidFill>
-                  <a:schemeClr val="accent5">
-                    <a:lumMod val="60000"/>
-                    <a:lumOff val="40000"/>
-                  </a:schemeClr>
-                </a:solidFill>
-              </a:rPr>
-              <a:t>You can be sure the deletion worked if you see this toast</a:t>
-            </a:r>
-          </a:p>
-        </p:txBody>
-      </p:sp>
-    </p:spTree>
-    <p:extLst>
-      <p:ext uri="{BB962C8B-B14F-4D97-AF65-F5344CB8AC3E}">
-        <p14:creationId xmlns:p14="http://schemas.microsoft.com/office/powerpoint/2010/main" val="233815460"/>
       </p:ext>
     </p:extLst>
   </p:cSld>
@@ -5381,7 +5758,7 @@
           <p:cNvPr id="4" name="Picture 3">
             <a:extLst>
               <a:ext uri="{FF2B5EF4-FFF2-40B4-BE49-F238E27FC236}">
-                <a16:creationId xmlns:a16="http://schemas.microsoft.com/office/drawing/2014/main" id="{FD3B316D-1466-4724-6FCA-B7B5E88A01CD}"/>
+                <a16:creationId xmlns:a16="http://schemas.microsoft.com/office/drawing/2014/main" id="{7ADC421D-5E02-6EA1-2A70-828E2AFDCDD1}"/>
               </a:ext>
             </a:extLst>
           </p:cNvPr>
@@ -5392,14 +5769,15 @@
         </p:nvPicPr>
         <p:blipFill>
           <a:blip r:embed="rId2"/>
+          <a:srcRect l="-1" t="8750" r="261" b="673"/>
           <a:stretch>
             <a:fillRect/>
           </a:stretch>
         </p:blipFill>
         <p:spPr>
           <a:xfrm>
-            <a:off x="291790" y="905061"/>
-            <a:ext cx="11608420" cy="5728278"/>
+            <a:off x="297873" y="905060"/>
+            <a:ext cx="11702659" cy="5756608"/>
           </a:xfrm>
           <a:prstGeom prst="rect">
             <a:avLst/>
@@ -5411,7 +5789,7 @@
           <p:cNvPr id="2" name="Title 1">
             <a:extLst>
               <a:ext uri="{FF2B5EF4-FFF2-40B4-BE49-F238E27FC236}">
-                <a16:creationId xmlns:a16="http://schemas.microsoft.com/office/drawing/2014/main" id="{3AA51164-EDB6-8F53-E615-921A11EA9D98}"/>
+                <a16:creationId xmlns:a16="http://schemas.microsoft.com/office/drawing/2014/main" id="{3D902F91-27AD-A88E-E82C-E7AEE3658EF3}"/>
               </a:ext>
             </a:extLst>
           </p:cNvPr>
@@ -5431,7 +5809,7 @@
           <a:p>
             <a:r>
               <a:rPr lang="en-US" dirty="0"/>
-              <a:t>Empty search</a:t>
+              <a:t>Successful associate addition</a:t>
             </a:r>
           </a:p>
         </p:txBody>
@@ -5441,7 +5819,7 @@
           <p:cNvPr id="6" name="TextBox 5">
             <a:extLst>
               <a:ext uri="{FF2B5EF4-FFF2-40B4-BE49-F238E27FC236}">
-                <a16:creationId xmlns:a16="http://schemas.microsoft.com/office/drawing/2014/main" id="{65A6567E-7C20-8A36-8CDF-2CC60C1D1648}"/>
+                <a16:creationId xmlns:a16="http://schemas.microsoft.com/office/drawing/2014/main" id="{E126F708-8B49-6C0A-10B1-D81B06091C5C}"/>
               </a:ext>
             </a:extLst>
           </p:cNvPr>
@@ -5450,8 +5828,8 @@
         </p:nvSpPr>
         <p:spPr>
           <a:xfrm>
-            <a:off x="2584579" y="3059668"/>
-            <a:ext cx="7766052" cy="646331"/>
+            <a:off x="8493550" y="905060"/>
+            <a:ext cx="3176833" cy="461665"/>
           </a:xfrm>
           <a:prstGeom prst="rect">
             <a:avLst/>
@@ -5465,16 +5843,61 @@
           <a:lstStyle/>
           <a:p>
             <a:r>
-              <a:rPr lang="en-US" dirty="0"/>
-              <a:t>If you made it here, try a different search, or hit the X button in the search bar to clear it and show the full table. The back button will </a:t>
-            </a:r>
-            <a:r>
-              <a:rPr lang="en-US" b="1" dirty="0"/>
-              <a:t>not</a:t>
-            </a:r>
-            <a:r>
-              <a:rPr lang="en-US" dirty="0"/>
-              <a:t> do the same thing.</a:t>
+              <a:rPr lang="en-US" sz="1200" dirty="0">
+                <a:solidFill>
+                  <a:schemeClr val="accent5">
+                    <a:lumMod val="60000"/>
+                    <a:lumOff val="40000"/>
+                  </a:schemeClr>
+                </a:solidFill>
+              </a:rPr>
+              <a:t>Fun fact: the message that briefly appears on success is called a toast</a:t>
+            </a:r>
+          </a:p>
+        </p:txBody>
+      </p:sp>
+      <p:sp>
+        <p:nvSpPr>
+          <p:cNvPr id="7" name="TextBox 6">
+            <a:extLst>
+              <a:ext uri="{FF2B5EF4-FFF2-40B4-BE49-F238E27FC236}">
+                <a16:creationId xmlns:a16="http://schemas.microsoft.com/office/drawing/2014/main" id="{97137BB4-B7D6-B553-5130-9D37B0202013}"/>
+              </a:ext>
+            </a:extLst>
+          </p:cNvPr>
+          <p:cNvSpPr txBox="1"/>
+          <p:nvPr/>
+        </p:nvSpPr>
+        <p:spPr>
+          <a:xfrm>
+            <a:off x="6014301" y="5882325"/>
+            <a:ext cx="5524009" cy="461665"/>
+          </a:xfrm>
+          <a:prstGeom prst="rect">
+            <a:avLst/>
+          </a:prstGeom>
+          <a:solidFill>
+            <a:schemeClr val="bg1">
+              <a:lumMod val="95000"/>
+            </a:schemeClr>
+          </a:solidFill>
+        </p:spPr>
+        <p:txBody>
+          <a:bodyPr wrap="square" rtlCol="0">
+            <a:spAutoFit/>
+          </a:bodyPr>
+          <a:lstStyle/>
+          <a:p>
+            <a:r>
+              <a:rPr lang="en-US" sz="1200" dirty="0">
+                <a:solidFill>
+                  <a:schemeClr val="accent5">
+                    <a:lumMod val="60000"/>
+                    <a:lumOff val="40000"/>
+                  </a:schemeClr>
+                </a:solidFill>
+              </a:rPr>
+              <a:t>As a rule of thumb, if the app doesn’t yell at you and the form closes, it worked. But in case you’re not convinced, you’ll see a little message telling you it worked.</a:t>
             </a:r>
           </a:p>
         </p:txBody>
@@ -5482,7 +5905,7 @@
     </p:spTree>
     <p:extLst>
       <p:ext uri="{BB962C8B-B14F-4D97-AF65-F5344CB8AC3E}">
-        <p14:creationId xmlns:p14="http://schemas.microsoft.com/office/powerpoint/2010/main" val="4137292513"/>
+        <p14:creationId xmlns:p14="http://schemas.microsoft.com/office/powerpoint/2010/main" val="3514542878"/>
       </p:ext>
     </p:extLst>
   </p:cSld>
@@ -5511,10 +5934,10 @@
       </p:grpSpPr>
       <p:pic>
         <p:nvPicPr>
-          <p:cNvPr id="4" name="Picture 3">
-            <a:extLst>
-              <a:ext uri="{FF2B5EF4-FFF2-40B4-BE49-F238E27FC236}">
-                <a16:creationId xmlns:a16="http://schemas.microsoft.com/office/drawing/2014/main" id="{96770BA6-AF8D-A4C3-A867-09D86A448E52}"/>
+          <p:cNvPr id="5" name="Picture 4">
+            <a:extLst>
+              <a:ext uri="{FF2B5EF4-FFF2-40B4-BE49-F238E27FC236}">
+                <a16:creationId xmlns:a16="http://schemas.microsoft.com/office/drawing/2014/main" id="{336AB0DF-C780-29C1-C23B-5B00178AB574}"/>
               </a:ext>
             </a:extLst>
           </p:cNvPr>
@@ -5524,15 +5947,16 @@
           <p:nvPr/>
         </p:nvPicPr>
         <p:blipFill>
-          <a:blip r:embed="rId3"/>
+          <a:blip r:embed="rId2"/>
+          <a:srcRect t="7885" r="365" b="889"/>
           <a:stretch>
             <a:fillRect/>
           </a:stretch>
         </p:blipFill>
         <p:spPr>
           <a:xfrm>
-            <a:off x="323851" y="905060"/>
-            <a:ext cx="11555411" cy="5750495"/>
+            <a:off x="237554" y="982503"/>
+            <a:ext cx="11749373" cy="5827088"/>
           </a:xfrm>
           <a:prstGeom prst="rect">
             <a:avLst/>
@@ -5544,7 +5968,7 @@
           <p:cNvPr id="2" name="Title 1">
             <a:extLst>
               <a:ext uri="{FF2B5EF4-FFF2-40B4-BE49-F238E27FC236}">
-                <a16:creationId xmlns:a16="http://schemas.microsoft.com/office/drawing/2014/main" id="{2539BB20-DEF8-1F66-7EA7-0F3F67627279}"/>
+                <a16:creationId xmlns:a16="http://schemas.microsoft.com/office/drawing/2014/main" id="{A63A7C61-1230-B8AB-E571-77D57ECCDCB4}"/>
               </a:ext>
             </a:extLst>
           </p:cNvPr>
@@ -5564,7 +5988,7 @@
           <a:p>
             <a:r>
               <a:rPr lang="en-US" dirty="0"/>
-              <a:t>Line management</a:t>
+              <a:t>Associate removal</a:t>
             </a:r>
           </a:p>
         </p:txBody>
@@ -5574,7 +5998,7 @@
           <p:cNvPr id="6" name="TextBox 5">
             <a:extLst>
               <a:ext uri="{FF2B5EF4-FFF2-40B4-BE49-F238E27FC236}">
-                <a16:creationId xmlns:a16="http://schemas.microsoft.com/office/drawing/2014/main" id="{DACDD0D9-E40D-3C98-1F95-3AD21540207D}"/>
+                <a16:creationId xmlns:a16="http://schemas.microsoft.com/office/drawing/2014/main" id="{5B355B17-5827-137C-FC0C-D6D3C1F492CE}"/>
               </a:ext>
             </a:extLst>
           </p:cNvPr>
@@ -5583,8 +6007,8 @@
         </p:nvSpPr>
         <p:spPr>
           <a:xfrm>
-            <a:off x="4123976" y="982386"/>
-            <a:ext cx="3028950" cy="646331"/>
+            <a:off x="6280150" y="1937176"/>
+            <a:ext cx="1476430" cy="276999"/>
           </a:xfrm>
           <a:prstGeom prst="rect">
             <a:avLst/>
@@ -5592,7 +6016,7 @@
           <a:noFill/>
         </p:spPr>
         <p:txBody>
-          <a:bodyPr wrap="square" rtlCol="0">
+          <a:bodyPr wrap="none" rtlCol="0">
             <a:spAutoFit/>
           </a:bodyPr>
           <a:lstStyle/>
@@ -5606,160 +6030,30 @@
                   </a:schemeClr>
                 </a:solidFill>
               </a:rPr>
-              <a:t>Pressing the three lines next to an associate opens a split screen view showing their authorized lines on the right </a:t>
-            </a:r>
-          </a:p>
-        </p:txBody>
-      </p:sp>
-      <p:sp>
-        <p:nvSpPr>
-          <p:cNvPr id="7" name="TextBox 6">
-            <a:extLst>
-              <a:ext uri="{FF2B5EF4-FFF2-40B4-BE49-F238E27FC236}">
-                <a16:creationId xmlns:a16="http://schemas.microsoft.com/office/drawing/2014/main" id="{1F583A37-9B56-E192-8578-0BAFB6FB86A3}"/>
-              </a:ext>
-            </a:extLst>
-          </p:cNvPr>
-          <p:cNvSpPr txBox="1"/>
-          <p:nvPr/>
-        </p:nvSpPr>
-        <p:spPr>
-          <a:xfrm>
-            <a:off x="3314351" y="2736850"/>
-            <a:ext cx="1619250" cy="646331"/>
-          </a:xfrm>
-          <a:prstGeom prst="rect">
-            <a:avLst/>
-          </a:prstGeom>
-          <a:noFill/>
-        </p:spPr>
-        <p:txBody>
-          <a:bodyPr wrap="square" rtlCol="0">
-            <a:spAutoFit/>
-          </a:bodyPr>
-          <a:lstStyle/>
-          <a:p>
-            <a:r>
-              <a:rPr lang="en-US" sz="1200" dirty="0">
-                <a:solidFill>
-                  <a:schemeClr val="accent5">
-                    <a:lumMod val="60000"/>
-                    <a:lumOff val="40000"/>
-                  </a:schemeClr>
-                </a:solidFill>
-              </a:rPr>
-              <a:t>Pressing the expand button highlights the target associate’s row</a:t>
-            </a:r>
-          </a:p>
-        </p:txBody>
-      </p:sp>
-      <p:sp>
-        <p:nvSpPr>
-          <p:cNvPr id="8" name="TextBox 7">
-            <a:extLst>
-              <a:ext uri="{FF2B5EF4-FFF2-40B4-BE49-F238E27FC236}">
-                <a16:creationId xmlns:a16="http://schemas.microsoft.com/office/drawing/2014/main" id="{FDE01C86-68FA-E765-74F0-9D9772AE07EC}"/>
-              </a:ext>
-            </a:extLst>
-          </p:cNvPr>
-          <p:cNvSpPr txBox="1"/>
-          <p:nvPr/>
-        </p:nvSpPr>
-        <p:spPr>
-          <a:xfrm>
-            <a:off x="10383836" y="1628717"/>
-            <a:ext cx="1495426" cy="461665"/>
-          </a:xfrm>
-          <a:prstGeom prst="rect">
-            <a:avLst/>
-          </a:prstGeom>
-          <a:noFill/>
-        </p:spPr>
-        <p:txBody>
-          <a:bodyPr wrap="square" rtlCol="0">
-            <a:spAutoFit/>
-          </a:bodyPr>
-          <a:lstStyle/>
-          <a:p>
-            <a:r>
-              <a:rPr lang="en-US" sz="1200" dirty="0">
-                <a:solidFill>
-                  <a:schemeClr val="accent5">
-                    <a:lumMod val="60000"/>
-                    <a:lumOff val="40000"/>
-                  </a:schemeClr>
-                </a:solidFill>
-              </a:rPr>
-              <a:t>Open the form to authorize a new line</a:t>
-            </a:r>
-          </a:p>
-        </p:txBody>
-      </p:sp>
-      <p:sp>
-        <p:nvSpPr>
-          <p:cNvPr id="9" name="TextBox 8">
-            <a:extLst>
-              <a:ext uri="{FF2B5EF4-FFF2-40B4-BE49-F238E27FC236}">
-                <a16:creationId xmlns:a16="http://schemas.microsoft.com/office/drawing/2014/main" id="{D6954DFD-320B-C6A2-BEC0-E28CC16156E6}"/>
-              </a:ext>
-            </a:extLst>
-          </p:cNvPr>
-          <p:cNvSpPr txBox="1"/>
-          <p:nvPr/>
-        </p:nvSpPr>
-        <p:spPr>
-          <a:xfrm>
-            <a:off x="8239917" y="5306609"/>
-            <a:ext cx="1495426" cy="646331"/>
-          </a:xfrm>
-          <a:prstGeom prst="rect">
-            <a:avLst/>
-          </a:prstGeom>
-          <a:noFill/>
-        </p:spPr>
-        <p:txBody>
-          <a:bodyPr wrap="square" rtlCol="0">
-            <a:spAutoFit/>
-          </a:bodyPr>
-          <a:lstStyle/>
-          <a:p>
-            <a:r>
-              <a:rPr lang="en-US" sz="1200" dirty="0">
-                <a:solidFill>
-                  <a:schemeClr val="accent5">
-                    <a:lumMod val="60000"/>
-                    <a:lumOff val="40000"/>
-                  </a:schemeClr>
-                </a:solidFill>
-              </a:rPr>
-              <a:t>Open the form to modify privileges for an existing line</a:t>
+              <a:t>Removes associate</a:t>
             </a:r>
           </a:p>
         </p:txBody>
       </p:sp>
       <p:cxnSp>
         <p:nvCxnSpPr>
-          <p:cNvPr id="11" name="Connector: Elbow 10">
-            <a:extLst>
-              <a:ext uri="{FF2B5EF4-FFF2-40B4-BE49-F238E27FC236}">
-                <a16:creationId xmlns:a16="http://schemas.microsoft.com/office/drawing/2014/main" id="{E72AC951-3A33-DC32-6B0A-76EC88CD9964}"/>
-              </a:ext>
-            </a:extLst>
-          </p:cNvPr>
-          <p:cNvCxnSpPr>
-            <a:cxnSpLocks/>
-          </p:cNvCxnSpPr>
+          <p:cNvPr id="8" name="Straight Arrow Connector 7">
+            <a:extLst>
+              <a:ext uri="{FF2B5EF4-FFF2-40B4-BE49-F238E27FC236}">
+                <a16:creationId xmlns:a16="http://schemas.microsoft.com/office/drawing/2014/main" id="{FD0DF0E5-2CA6-9590-DC9A-466484D34516}"/>
+              </a:ext>
+            </a:extLst>
+          </p:cNvPr>
+          <p:cNvCxnSpPr/>
           <p:nvPr/>
         </p:nvCxnSpPr>
         <p:spPr>
-          <a:xfrm flipV="1">
-            <a:off x="8987632" y="4398164"/>
-            <a:ext cx="2045195" cy="908445"/>
-          </a:xfrm>
-          <a:prstGeom prst="bentConnector3">
-            <a:avLst>
-              <a:gd name="adj1" fmla="val 82368"/>
-            </a:avLst>
+          <a:xfrm>
+            <a:off x="7032527" y="2198034"/>
+            <a:ext cx="212725" cy="174625"/>
+          </a:xfrm>
+          <a:prstGeom prst="straightConnector1">
+            <a:avLst/>
           </a:prstGeom>
           <a:ln>
             <a:tailEnd type="triangle"/>
@@ -5782,10 +6076,10 @@
       </p:cxnSp>
       <p:sp>
         <p:nvSpPr>
-          <p:cNvPr id="13" name="TextBox 12">
-            <a:extLst>
-              <a:ext uri="{FF2B5EF4-FFF2-40B4-BE49-F238E27FC236}">
-                <a16:creationId xmlns:a16="http://schemas.microsoft.com/office/drawing/2014/main" id="{AC92C180-92BD-A8EF-2AA6-E0325B7A7277}"/>
+          <p:cNvPr id="10" name="TextBox 9">
+            <a:extLst>
+              <a:ext uri="{FF2B5EF4-FFF2-40B4-BE49-F238E27FC236}">
+                <a16:creationId xmlns:a16="http://schemas.microsoft.com/office/drawing/2014/main" id="{105ABAF5-9FF0-6FD9-0180-124F59775D74}"/>
               </a:ext>
             </a:extLst>
           </p:cNvPr>
@@ -5794,8 +6088,8 @@
         </p:nvSpPr>
         <p:spPr>
           <a:xfrm>
-            <a:off x="10126662" y="5338671"/>
-            <a:ext cx="1752600" cy="461665"/>
+            <a:off x="6540157" y="1209675"/>
+            <a:ext cx="956416" cy="276999"/>
           </a:xfrm>
           <a:prstGeom prst="rect">
             <a:avLst/>
@@ -5803,7 +6097,7 @@
           <a:noFill/>
         </p:spPr>
         <p:txBody>
-          <a:bodyPr wrap="square" rtlCol="0">
+          <a:bodyPr wrap="none" rtlCol="0">
             <a:spAutoFit/>
           </a:bodyPr>
           <a:lstStyle/>
@@ -5817,58 +6111,17 @@
                   </a:schemeClr>
                 </a:solidFill>
               </a:rPr>
-              <a:t>Revoke privileges for this line (delete dialog)</a:t>
-            </a:r>
-          </a:p>
-        </p:txBody>
-      </p:sp>
-      <p:cxnSp>
-        <p:nvCxnSpPr>
-          <p:cNvPr id="19" name="Connector: Elbow 18">
-            <a:extLst>
-              <a:ext uri="{FF2B5EF4-FFF2-40B4-BE49-F238E27FC236}">
-                <a16:creationId xmlns:a16="http://schemas.microsoft.com/office/drawing/2014/main" id="{BA0ADF18-B87F-96DD-A9D0-3C444AC5F973}"/>
-              </a:ext>
-            </a:extLst>
-          </p:cNvPr>
-          <p:cNvCxnSpPr/>
-          <p:nvPr/>
-        </p:nvCxnSpPr>
-        <p:spPr>
-          <a:xfrm flipV="1">
-            <a:off x="11002962" y="5168203"/>
-            <a:ext cx="363536" cy="170468"/>
-          </a:xfrm>
-          <a:prstGeom prst="bentConnector3">
-            <a:avLst>
-              <a:gd name="adj1" fmla="val 100437"/>
-            </a:avLst>
-          </a:prstGeom>
-          <a:ln>
-            <a:tailEnd type="triangle"/>
-          </a:ln>
-        </p:spPr>
-        <p:style>
-          <a:lnRef idx="2">
-            <a:schemeClr val="accent1"/>
-          </a:lnRef>
-          <a:fillRef idx="0">
-            <a:schemeClr val="accent1"/>
-          </a:fillRef>
-          <a:effectRef idx="1">
-            <a:schemeClr val="accent1"/>
-          </a:effectRef>
-          <a:fontRef idx="minor">
-            <a:schemeClr val="tx1"/>
-          </a:fontRef>
-        </p:style>
-      </p:cxnSp>
-      <p:sp>
-        <p:nvSpPr>
-          <p:cNvPr id="27" name="TextBox 26">
-            <a:extLst>
-              <a:ext uri="{FF2B5EF4-FFF2-40B4-BE49-F238E27FC236}">
-                <a16:creationId xmlns:a16="http://schemas.microsoft.com/office/drawing/2014/main" id="{24F8C942-5A14-2A3C-0A8B-F71081DFB6B3}"/>
+              <a:t>Also cancel</a:t>
+            </a:r>
+          </a:p>
+        </p:txBody>
+      </p:sp>
+      <p:sp>
+        <p:nvSpPr>
+          <p:cNvPr id="11" name="TextBox 10">
+            <a:extLst>
+              <a:ext uri="{FF2B5EF4-FFF2-40B4-BE49-F238E27FC236}">
+                <a16:creationId xmlns:a16="http://schemas.microsoft.com/office/drawing/2014/main" id="{6FB2B785-C61A-7AE6-6A29-978411FFDC4D}"/>
               </a:ext>
             </a:extLst>
           </p:cNvPr>
@@ -5877,8 +6130,8 @@
         </p:nvSpPr>
         <p:spPr>
           <a:xfrm>
-            <a:off x="10953050" y="612373"/>
-            <a:ext cx="915099" cy="461665"/>
+            <a:off x="5042311" y="2285346"/>
+            <a:ext cx="1237839" cy="276999"/>
           </a:xfrm>
           <a:prstGeom prst="rect">
             <a:avLst/>
@@ -5886,7 +6139,7 @@
           <a:noFill/>
         </p:spPr>
         <p:txBody>
-          <a:bodyPr wrap="square" rtlCol="0">
+          <a:bodyPr wrap="none" rtlCol="0">
             <a:spAutoFit/>
           </a:bodyPr>
           <a:lstStyle/>
@@ -5900,17 +6153,17 @@
                   </a:schemeClr>
                 </a:solidFill>
               </a:rPr>
-              <a:t>Close split screen</a:t>
-            </a:r>
-          </a:p>
-        </p:txBody>
-      </p:sp>
-      <p:sp>
-        <p:nvSpPr>
-          <p:cNvPr id="28" name="TextBox 27">
-            <a:extLst>
-              <a:ext uri="{FF2B5EF4-FFF2-40B4-BE49-F238E27FC236}">
-                <a16:creationId xmlns:a16="http://schemas.microsoft.com/office/drawing/2014/main" id="{8DDB8DE0-DBB3-42D3-BFEA-6E60665D3161}"/>
+              <a:t>Cancel deletion</a:t>
+            </a:r>
+          </a:p>
+        </p:txBody>
+      </p:sp>
+      <p:sp>
+        <p:nvSpPr>
+          <p:cNvPr id="12" name="TextBox 11">
+            <a:extLst>
+              <a:ext uri="{FF2B5EF4-FFF2-40B4-BE49-F238E27FC236}">
+                <a16:creationId xmlns:a16="http://schemas.microsoft.com/office/drawing/2014/main" id="{AA6EF203-5F9A-E697-28BD-A26ED62CEAE8}"/>
               </a:ext>
             </a:extLst>
           </p:cNvPr>
@@ -5919,8 +6172,8 @@
         </p:nvSpPr>
         <p:spPr>
           <a:xfrm>
-            <a:off x="5356063" y="2736850"/>
-            <a:ext cx="917574" cy="461665"/>
+            <a:off x="4697217" y="4616451"/>
+            <a:ext cx="3685880" cy="646331"/>
           </a:xfrm>
           <a:prstGeom prst="rect">
             <a:avLst/>
@@ -5934,15 +6187,8 @@
           <a:lstStyle/>
           <a:p>
             <a:r>
-              <a:rPr lang="en-US" sz="1200" dirty="0">
-                <a:solidFill>
-                  <a:schemeClr val="accent5">
-                    <a:lumMod val="60000"/>
-                    <a:lumOff val="40000"/>
-                  </a:schemeClr>
-                </a:solidFill>
-              </a:rPr>
-              <a:t>Close split screen</a:t>
+              <a:rPr lang="en-US" dirty="0"/>
+              <a:t>This is what you see when you press the trash can for an associate</a:t>
             </a:r>
           </a:p>
         </p:txBody>
@@ -5950,7 +6196,7 @@
     </p:spTree>
     <p:extLst>
       <p:ext uri="{BB962C8B-B14F-4D97-AF65-F5344CB8AC3E}">
-        <p14:creationId xmlns:p14="http://schemas.microsoft.com/office/powerpoint/2010/main" val="1936401760"/>
+        <p14:creationId xmlns:p14="http://schemas.microsoft.com/office/powerpoint/2010/main" val="1577836970"/>
       </p:ext>
     </p:extLst>
   </p:cSld>
@@ -5965,13 +6211,7 @@
   <p:cSld>
     <p:spTree>
       <p:nvGrpSpPr>
-        <p:cNvPr id="1" name="">
-          <a:extLst>
-            <a:ext uri="{FF2B5EF4-FFF2-40B4-BE49-F238E27FC236}">
-              <a16:creationId xmlns:a16="http://schemas.microsoft.com/office/drawing/2014/main" id="{16301328-71D7-24A8-7930-8F1F4E040512}"/>
-            </a:ext>
-          </a:extLst>
-        </p:cNvPr>
+        <p:cNvPr id="1" name=""/>
         <p:cNvGrpSpPr/>
         <p:nvPr/>
       </p:nvGrpSpPr>
@@ -5985,10 +6225,10 @@
       </p:grpSpPr>
       <p:pic>
         <p:nvPicPr>
-          <p:cNvPr id="5" name="Picture 4">
-            <a:extLst>
-              <a:ext uri="{FF2B5EF4-FFF2-40B4-BE49-F238E27FC236}">
-                <a16:creationId xmlns:a16="http://schemas.microsoft.com/office/drawing/2014/main" id="{833364D5-57FC-3F16-6E4D-CA2F64FA6C4E}"/>
+          <p:cNvPr id="8" name="Picture 7">
+            <a:extLst>
+              <a:ext uri="{FF2B5EF4-FFF2-40B4-BE49-F238E27FC236}">
+                <a16:creationId xmlns:a16="http://schemas.microsoft.com/office/drawing/2014/main" id="{F7CD359B-1B88-745F-0902-F9C31D5C8588}"/>
               </a:ext>
             </a:extLst>
           </p:cNvPr>
@@ -5999,14 +6239,15 @@
         </p:nvPicPr>
         <p:blipFill>
           <a:blip r:embed="rId2"/>
+          <a:srcRect t="8114" r="287" b="769"/>
           <a:stretch>
             <a:fillRect/>
           </a:stretch>
         </p:blipFill>
         <p:spPr>
           <a:xfrm>
-            <a:off x="301658" y="1016996"/>
-            <a:ext cx="11564460" cy="5755027"/>
+            <a:off x="312656" y="999328"/>
+            <a:ext cx="11586802" cy="5734999"/>
           </a:xfrm>
           <a:prstGeom prst="rect">
             <a:avLst/>
@@ -6018,7 +6259,7 @@
           <p:cNvPr id="2" name="Title 1">
             <a:extLst>
               <a:ext uri="{FF2B5EF4-FFF2-40B4-BE49-F238E27FC236}">
-                <a16:creationId xmlns:a16="http://schemas.microsoft.com/office/drawing/2014/main" id="{FFEC0ADC-2F0C-B55A-2B8D-1E1E01ECA83E}"/>
+                <a16:creationId xmlns:a16="http://schemas.microsoft.com/office/drawing/2014/main" id="{F031888A-8945-68C8-0520-9448F8A394EB}"/>
               </a:ext>
             </a:extLst>
           </p:cNvPr>
@@ -6038,17 +6279,17 @@
           <a:p>
             <a:r>
               <a:rPr lang="en-US" dirty="0"/>
-              <a:t>Line addition</a:t>
-            </a:r>
-          </a:p>
-        </p:txBody>
-      </p:sp>
-      <p:sp>
-        <p:nvSpPr>
-          <p:cNvPr id="9" name="TextBox 8">
-            <a:extLst>
-              <a:ext uri="{FF2B5EF4-FFF2-40B4-BE49-F238E27FC236}">
-                <a16:creationId xmlns:a16="http://schemas.microsoft.com/office/drawing/2014/main" id="{02E0FDB0-462F-2450-73E4-BB746D489B05}"/>
+              <a:t>Successful associate removal</a:t>
+            </a:r>
+          </a:p>
+        </p:txBody>
+      </p:sp>
+      <p:sp>
+        <p:nvSpPr>
+          <p:cNvPr id="6" name="TextBox 5">
+            <a:extLst>
+              <a:ext uri="{FF2B5EF4-FFF2-40B4-BE49-F238E27FC236}">
+                <a16:creationId xmlns:a16="http://schemas.microsoft.com/office/drawing/2014/main" id="{6E11AE5D-04A7-B0B9-FE4F-E94713C10232}"/>
               </a:ext>
             </a:extLst>
           </p:cNvPr>
@@ -6057,8 +6298,8 @@
         </p:nvSpPr>
         <p:spPr>
           <a:xfrm>
-            <a:off x="9591869" y="1761373"/>
-            <a:ext cx="2052637" cy="461665"/>
+            <a:off x="8776356" y="5858672"/>
+            <a:ext cx="1781665" cy="646331"/>
           </a:xfrm>
           <a:prstGeom prst="rect">
             <a:avLst/>
@@ -6080,104 +6321,7 @@
                   </a:schemeClr>
                 </a:solidFill>
               </a:rPr>
-              <a:t>The highest lockout level releasable by this associate</a:t>
-            </a:r>
-          </a:p>
-        </p:txBody>
-      </p:sp>
-      <p:sp>
-        <p:nvSpPr>
-          <p:cNvPr id="10" name="TextBox 9">
-            <a:extLst>
-              <a:ext uri="{FF2B5EF4-FFF2-40B4-BE49-F238E27FC236}">
-                <a16:creationId xmlns:a16="http://schemas.microsoft.com/office/drawing/2014/main" id="{A4A9C4C7-0202-03CF-F5E3-E80750D3B0F2}"/>
-              </a:ext>
-            </a:extLst>
-          </p:cNvPr>
-          <p:cNvSpPr txBox="1"/>
-          <p:nvPr/>
-        </p:nvSpPr>
-        <p:spPr>
-          <a:xfrm>
-            <a:off x="7434050" y="2855323"/>
-            <a:ext cx="2052637" cy="646331"/>
-          </a:xfrm>
-          <a:prstGeom prst="rect">
-            <a:avLst/>
-          </a:prstGeom>
-          <a:noFill/>
-        </p:spPr>
-        <p:txBody>
-          <a:bodyPr wrap="square" rtlCol="0">
-            <a:spAutoFit/>
-          </a:bodyPr>
-          <a:lstStyle/>
-          <a:p>
-            <a:r>
-              <a:rPr lang="en-US" sz="1200" dirty="0">
-                <a:solidFill>
-                  <a:schemeClr val="accent5">
-                    <a:lumMod val="60000"/>
-                    <a:lumOff val="40000"/>
-                  </a:schemeClr>
-                </a:solidFill>
-              </a:rPr>
-              <a:t>There’s a dropdown that provides only</a:t>
-            </a:r>
-          </a:p>
-          <a:p>
-            <a:r>
-              <a:rPr lang="en-US" sz="1200" dirty="0">
-                <a:solidFill>
-                  <a:schemeClr val="accent5">
-                    <a:lumMod val="60000"/>
-                    <a:lumOff val="40000"/>
-                  </a:schemeClr>
-                </a:solidFill>
-              </a:rPr>
-              <a:t>valid lines</a:t>
-            </a:r>
-          </a:p>
-        </p:txBody>
-      </p:sp>
-      <p:sp>
-        <p:nvSpPr>
-          <p:cNvPr id="11" name="TextBox 10">
-            <a:extLst>
-              <a:ext uri="{FF2B5EF4-FFF2-40B4-BE49-F238E27FC236}">
-                <a16:creationId xmlns:a16="http://schemas.microsoft.com/office/drawing/2014/main" id="{5DC0083A-65E9-8991-2C58-1B7AA200B279}"/>
-              </a:ext>
-            </a:extLst>
-          </p:cNvPr>
-          <p:cNvSpPr txBox="1"/>
-          <p:nvPr/>
-        </p:nvSpPr>
-        <p:spPr>
-          <a:xfrm>
-            <a:off x="10237364" y="2624490"/>
-            <a:ext cx="1033462" cy="461665"/>
-          </a:xfrm>
-          <a:prstGeom prst="rect">
-            <a:avLst/>
-          </a:prstGeom>
-          <a:noFill/>
-        </p:spPr>
-        <p:txBody>
-          <a:bodyPr wrap="square" rtlCol="0">
-            <a:spAutoFit/>
-          </a:bodyPr>
-          <a:lstStyle/>
-          <a:p>
-            <a:r>
-              <a:rPr lang="en-US" sz="1200" dirty="0">
-                <a:solidFill>
-                  <a:schemeClr val="accent5">
-                    <a:lumMod val="60000"/>
-                    <a:lumOff val="40000"/>
-                  </a:schemeClr>
-                </a:solidFill>
-              </a:rPr>
-              <a:t>Clamped to valid values</a:t>
+              <a:t>You can be sure the deletion worked if you see this toast</a:t>
             </a:r>
           </a:p>
         </p:txBody>
@@ -6185,7 +6329,7 @@
     </p:spTree>
     <p:extLst>
       <p:ext uri="{BB962C8B-B14F-4D97-AF65-F5344CB8AC3E}">
-        <p14:creationId xmlns:p14="http://schemas.microsoft.com/office/powerpoint/2010/main" val="2208816415"/>
+        <p14:creationId xmlns:p14="http://schemas.microsoft.com/office/powerpoint/2010/main" val="233815460"/>
       </p:ext>
     </p:extLst>
   </p:cSld>
@@ -6212,6 +6356,1023 @@
           <a:chExt cx="0" cy="0"/>
         </a:xfrm>
       </p:grpSpPr>
+      <p:pic>
+        <p:nvPicPr>
+          <p:cNvPr id="4" name="Picture 3">
+            <a:extLst>
+              <a:ext uri="{FF2B5EF4-FFF2-40B4-BE49-F238E27FC236}">
+                <a16:creationId xmlns:a16="http://schemas.microsoft.com/office/drawing/2014/main" id="{FD3B316D-1466-4724-6FCA-B7B5E88A01CD}"/>
+              </a:ext>
+            </a:extLst>
+          </p:cNvPr>
+          <p:cNvPicPr>
+            <a:picLocks noChangeAspect="1"/>
+          </p:cNvPicPr>
+          <p:nvPr/>
+        </p:nvPicPr>
+        <p:blipFill>
+          <a:blip r:embed="rId2"/>
+          <a:stretch>
+            <a:fillRect/>
+          </a:stretch>
+        </p:blipFill>
+        <p:spPr>
+          <a:xfrm>
+            <a:off x="291790" y="905061"/>
+            <a:ext cx="11608420" cy="5728278"/>
+          </a:xfrm>
+          <a:prstGeom prst="rect">
+            <a:avLst/>
+          </a:prstGeom>
+        </p:spPr>
+      </p:pic>
+      <p:sp>
+        <p:nvSpPr>
+          <p:cNvPr id="2" name="Title 1">
+            <a:extLst>
+              <a:ext uri="{FF2B5EF4-FFF2-40B4-BE49-F238E27FC236}">
+                <a16:creationId xmlns:a16="http://schemas.microsoft.com/office/drawing/2014/main" id="{3AA51164-EDB6-8F53-E615-921A11EA9D98}"/>
+              </a:ext>
+            </a:extLst>
+          </p:cNvPr>
+          <p:cNvSpPr>
+            <a:spLocks noGrp="1"/>
+          </p:cNvSpPr>
+          <p:nvPr>
+            <p:ph type="title"/>
+          </p:nvPr>
+        </p:nvSpPr>
+        <p:spPr/>
+        <p:txBody>
+          <a:bodyPr>
+            <a:normAutofit fontScale="90000"/>
+          </a:bodyPr>
+          <a:lstStyle/>
+          <a:p>
+            <a:r>
+              <a:rPr lang="en-US" dirty="0"/>
+              <a:t>Empty search</a:t>
+            </a:r>
+          </a:p>
+        </p:txBody>
+      </p:sp>
+      <p:sp>
+        <p:nvSpPr>
+          <p:cNvPr id="6" name="TextBox 5">
+            <a:extLst>
+              <a:ext uri="{FF2B5EF4-FFF2-40B4-BE49-F238E27FC236}">
+                <a16:creationId xmlns:a16="http://schemas.microsoft.com/office/drawing/2014/main" id="{65A6567E-7C20-8A36-8CDF-2CC60C1D1648}"/>
+              </a:ext>
+            </a:extLst>
+          </p:cNvPr>
+          <p:cNvSpPr txBox="1"/>
+          <p:nvPr/>
+        </p:nvSpPr>
+        <p:spPr>
+          <a:xfrm>
+            <a:off x="2584579" y="3059668"/>
+            <a:ext cx="7766052" cy="646331"/>
+          </a:xfrm>
+          <a:prstGeom prst="rect">
+            <a:avLst/>
+          </a:prstGeom>
+          <a:noFill/>
+        </p:spPr>
+        <p:txBody>
+          <a:bodyPr wrap="square" rtlCol="0">
+            <a:spAutoFit/>
+          </a:bodyPr>
+          <a:lstStyle/>
+          <a:p>
+            <a:r>
+              <a:rPr lang="en-US" dirty="0"/>
+              <a:t>If you made it here, try a different search, or hit the X button in the search bar to clear it and show the full table. The back button will </a:t>
+            </a:r>
+            <a:r>
+              <a:rPr lang="en-US" b="1" dirty="0"/>
+              <a:t>not</a:t>
+            </a:r>
+            <a:r>
+              <a:rPr lang="en-US" dirty="0"/>
+              <a:t> do the same thing.</a:t>
+            </a:r>
+          </a:p>
+        </p:txBody>
+      </p:sp>
+    </p:spTree>
+    <p:extLst>
+      <p:ext uri="{BB962C8B-B14F-4D97-AF65-F5344CB8AC3E}">
+        <p14:creationId xmlns:p14="http://schemas.microsoft.com/office/powerpoint/2010/main" val="4137292513"/>
+      </p:ext>
+    </p:extLst>
+  </p:cSld>
+  <p:clrMapOvr>
+    <a:masterClrMapping/>
+  </p:clrMapOvr>
+</p:sld>
+</file>
+
+<file path=ppt/slides/slide19.xml><?xml version="1.0" encoding="utf-8"?>
+<p:sld xmlns:a="http://schemas.openxmlformats.org/drawingml/2006/main" xmlns:r="http://schemas.openxmlformats.org/officeDocument/2006/relationships" xmlns:p="http://schemas.openxmlformats.org/presentationml/2006/main">
+  <p:cSld>
+    <p:spTree>
+      <p:nvGrpSpPr>
+        <p:cNvPr id="1" name=""/>
+        <p:cNvGrpSpPr/>
+        <p:nvPr/>
+      </p:nvGrpSpPr>
+      <p:grpSpPr>
+        <a:xfrm>
+          <a:off x="0" y="0"/>
+          <a:ext cx="0" cy="0"/>
+          <a:chOff x="0" y="0"/>
+          <a:chExt cx="0" cy="0"/>
+        </a:xfrm>
+      </p:grpSpPr>
+      <p:pic>
+        <p:nvPicPr>
+          <p:cNvPr id="4" name="Picture 3">
+            <a:extLst>
+              <a:ext uri="{FF2B5EF4-FFF2-40B4-BE49-F238E27FC236}">
+                <a16:creationId xmlns:a16="http://schemas.microsoft.com/office/drawing/2014/main" id="{96770BA6-AF8D-A4C3-A867-09D86A448E52}"/>
+              </a:ext>
+            </a:extLst>
+          </p:cNvPr>
+          <p:cNvPicPr>
+            <a:picLocks noChangeAspect="1"/>
+          </p:cNvPicPr>
+          <p:nvPr/>
+        </p:nvPicPr>
+        <p:blipFill>
+          <a:blip r:embed="rId3"/>
+          <a:stretch>
+            <a:fillRect/>
+          </a:stretch>
+        </p:blipFill>
+        <p:spPr>
+          <a:xfrm>
+            <a:off x="323851" y="905060"/>
+            <a:ext cx="11555411" cy="5750495"/>
+          </a:xfrm>
+          <a:prstGeom prst="rect">
+            <a:avLst/>
+          </a:prstGeom>
+        </p:spPr>
+      </p:pic>
+      <p:sp>
+        <p:nvSpPr>
+          <p:cNvPr id="2" name="Title 1">
+            <a:extLst>
+              <a:ext uri="{FF2B5EF4-FFF2-40B4-BE49-F238E27FC236}">
+                <a16:creationId xmlns:a16="http://schemas.microsoft.com/office/drawing/2014/main" id="{2539BB20-DEF8-1F66-7EA7-0F3F67627279}"/>
+              </a:ext>
+            </a:extLst>
+          </p:cNvPr>
+          <p:cNvSpPr>
+            <a:spLocks noGrp="1"/>
+          </p:cNvSpPr>
+          <p:nvPr>
+            <p:ph type="title"/>
+          </p:nvPr>
+        </p:nvSpPr>
+        <p:spPr/>
+        <p:txBody>
+          <a:bodyPr>
+            <a:normAutofit fontScale="90000"/>
+          </a:bodyPr>
+          <a:lstStyle/>
+          <a:p>
+            <a:r>
+              <a:rPr lang="en-US" dirty="0"/>
+              <a:t>Line management</a:t>
+            </a:r>
+          </a:p>
+        </p:txBody>
+      </p:sp>
+      <p:sp>
+        <p:nvSpPr>
+          <p:cNvPr id="6" name="TextBox 5">
+            <a:extLst>
+              <a:ext uri="{FF2B5EF4-FFF2-40B4-BE49-F238E27FC236}">
+                <a16:creationId xmlns:a16="http://schemas.microsoft.com/office/drawing/2014/main" id="{DACDD0D9-E40D-3C98-1F95-3AD21540207D}"/>
+              </a:ext>
+            </a:extLst>
+          </p:cNvPr>
+          <p:cNvSpPr txBox="1"/>
+          <p:nvPr/>
+        </p:nvSpPr>
+        <p:spPr>
+          <a:xfrm>
+            <a:off x="4123976" y="982386"/>
+            <a:ext cx="3028950" cy="646331"/>
+          </a:xfrm>
+          <a:prstGeom prst="rect">
+            <a:avLst/>
+          </a:prstGeom>
+          <a:noFill/>
+        </p:spPr>
+        <p:txBody>
+          <a:bodyPr wrap="square" rtlCol="0">
+            <a:spAutoFit/>
+          </a:bodyPr>
+          <a:lstStyle/>
+          <a:p>
+            <a:r>
+              <a:rPr lang="en-US" sz="1200" dirty="0">
+                <a:solidFill>
+                  <a:schemeClr val="accent5">
+                    <a:lumMod val="60000"/>
+                    <a:lumOff val="40000"/>
+                  </a:schemeClr>
+                </a:solidFill>
+              </a:rPr>
+              <a:t>Pressing the three lines next to an associate opens a split screen view showing their authorized lines on the right </a:t>
+            </a:r>
+          </a:p>
+        </p:txBody>
+      </p:sp>
+      <p:sp>
+        <p:nvSpPr>
+          <p:cNvPr id="7" name="TextBox 6">
+            <a:extLst>
+              <a:ext uri="{FF2B5EF4-FFF2-40B4-BE49-F238E27FC236}">
+                <a16:creationId xmlns:a16="http://schemas.microsoft.com/office/drawing/2014/main" id="{1F583A37-9B56-E192-8578-0BAFB6FB86A3}"/>
+              </a:ext>
+            </a:extLst>
+          </p:cNvPr>
+          <p:cNvSpPr txBox="1"/>
+          <p:nvPr/>
+        </p:nvSpPr>
+        <p:spPr>
+          <a:xfrm>
+            <a:off x="3314351" y="2736850"/>
+            <a:ext cx="1619250" cy="646331"/>
+          </a:xfrm>
+          <a:prstGeom prst="rect">
+            <a:avLst/>
+          </a:prstGeom>
+          <a:noFill/>
+        </p:spPr>
+        <p:txBody>
+          <a:bodyPr wrap="square" rtlCol="0">
+            <a:spAutoFit/>
+          </a:bodyPr>
+          <a:lstStyle/>
+          <a:p>
+            <a:r>
+              <a:rPr lang="en-US" sz="1200" dirty="0">
+                <a:solidFill>
+                  <a:schemeClr val="accent5">
+                    <a:lumMod val="60000"/>
+                    <a:lumOff val="40000"/>
+                  </a:schemeClr>
+                </a:solidFill>
+              </a:rPr>
+              <a:t>Pressing the expand button highlights the target associate’s row</a:t>
+            </a:r>
+          </a:p>
+        </p:txBody>
+      </p:sp>
+      <p:sp>
+        <p:nvSpPr>
+          <p:cNvPr id="8" name="TextBox 7">
+            <a:extLst>
+              <a:ext uri="{FF2B5EF4-FFF2-40B4-BE49-F238E27FC236}">
+                <a16:creationId xmlns:a16="http://schemas.microsoft.com/office/drawing/2014/main" id="{FDE01C86-68FA-E765-74F0-9D9772AE07EC}"/>
+              </a:ext>
+            </a:extLst>
+          </p:cNvPr>
+          <p:cNvSpPr txBox="1"/>
+          <p:nvPr/>
+        </p:nvSpPr>
+        <p:spPr>
+          <a:xfrm>
+            <a:off x="10383836" y="1628717"/>
+            <a:ext cx="1495426" cy="461665"/>
+          </a:xfrm>
+          <a:prstGeom prst="rect">
+            <a:avLst/>
+          </a:prstGeom>
+          <a:noFill/>
+        </p:spPr>
+        <p:txBody>
+          <a:bodyPr wrap="square" rtlCol="0">
+            <a:spAutoFit/>
+          </a:bodyPr>
+          <a:lstStyle/>
+          <a:p>
+            <a:r>
+              <a:rPr lang="en-US" sz="1200" dirty="0">
+                <a:solidFill>
+                  <a:schemeClr val="accent5">
+                    <a:lumMod val="60000"/>
+                    <a:lumOff val="40000"/>
+                  </a:schemeClr>
+                </a:solidFill>
+              </a:rPr>
+              <a:t>Open the form to authorize a new line</a:t>
+            </a:r>
+          </a:p>
+        </p:txBody>
+      </p:sp>
+      <p:sp>
+        <p:nvSpPr>
+          <p:cNvPr id="9" name="TextBox 8">
+            <a:extLst>
+              <a:ext uri="{FF2B5EF4-FFF2-40B4-BE49-F238E27FC236}">
+                <a16:creationId xmlns:a16="http://schemas.microsoft.com/office/drawing/2014/main" id="{D6954DFD-320B-C6A2-BEC0-E28CC16156E6}"/>
+              </a:ext>
+            </a:extLst>
+          </p:cNvPr>
+          <p:cNvSpPr txBox="1"/>
+          <p:nvPr/>
+        </p:nvSpPr>
+        <p:spPr>
+          <a:xfrm>
+            <a:off x="8239917" y="5306609"/>
+            <a:ext cx="1495426" cy="646331"/>
+          </a:xfrm>
+          <a:prstGeom prst="rect">
+            <a:avLst/>
+          </a:prstGeom>
+          <a:noFill/>
+        </p:spPr>
+        <p:txBody>
+          <a:bodyPr wrap="square" rtlCol="0">
+            <a:spAutoFit/>
+          </a:bodyPr>
+          <a:lstStyle/>
+          <a:p>
+            <a:r>
+              <a:rPr lang="en-US" sz="1200" dirty="0">
+                <a:solidFill>
+                  <a:schemeClr val="accent5">
+                    <a:lumMod val="60000"/>
+                    <a:lumOff val="40000"/>
+                  </a:schemeClr>
+                </a:solidFill>
+              </a:rPr>
+              <a:t>Open the form to modify privileges for an existing line</a:t>
+            </a:r>
+          </a:p>
+        </p:txBody>
+      </p:sp>
+      <p:cxnSp>
+        <p:nvCxnSpPr>
+          <p:cNvPr id="11" name="Connector: Elbow 10">
+            <a:extLst>
+              <a:ext uri="{FF2B5EF4-FFF2-40B4-BE49-F238E27FC236}">
+                <a16:creationId xmlns:a16="http://schemas.microsoft.com/office/drawing/2014/main" id="{E72AC951-3A33-DC32-6B0A-76EC88CD9964}"/>
+              </a:ext>
+            </a:extLst>
+          </p:cNvPr>
+          <p:cNvCxnSpPr>
+            <a:cxnSpLocks/>
+          </p:cNvCxnSpPr>
+          <p:nvPr/>
+        </p:nvCxnSpPr>
+        <p:spPr>
+          <a:xfrm flipV="1">
+            <a:off x="8987632" y="4398164"/>
+            <a:ext cx="2045195" cy="908445"/>
+          </a:xfrm>
+          <a:prstGeom prst="bentConnector3">
+            <a:avLst>
+              <a:gd name="adj1" fmla="val 82368"/>
+            </a:avLst>
+          </a:prstGeom>
+          <a:ln>
+            <a:tailEnd type="triangle"/>
+          </a:ln>
+        </p:spPr>
+        <p:style>
+          <a:lnRef idx="2">
+            <a:schemeClr val="accent1"/>
+          </a:lnRef>
+          <a:fillRef idx="0">
+            <a:schemeClr val="accent1"/>
+          </a:fillRef>
+          <a:effectRef idx="1">
+            <a:schemeClr val="accent1"/>
+          </a:effectRef>
+          <a:fontRef idx="minor">
+            <a:schemeClr val="tx1"/>
+          </a:fontRef>
+        </p:style>
+      </p:cxnSp>
+      <p:sp>
+        <p:nvSpPr>
+          <p:cNvPr id="13" name="TextBox 12">
+            <a:extLst>
+              <a:ext uri="{FF2B5EF4-FFF2-40B4-BE49-F238E27FC236}">
+                <a16:creationId xmlns:a16="http://schemas.microsoft.com/office/drawing/2014/main" id="{AC92C180-92BD-A8EF-2AA6-E0325B7A7277}"/>
+              </a:ext>
+            </a:extLst>
+          </p:cNvPr>
+          <p:cNvSpPr txBox="1"/>
+          <p:nvPr/>
+        </p:nvSpPr>
+        <p:spPr>
+          <a:xfrm>
+            <a:off x="10126662" y="5338671"/>
+            <a:ext cx="1752600" cy="461665"/>
+          </a:xfrm>
+          <a:prstGeom prst="rect">
+            <a:avLst/>
+          </a:prstGeom>
+          <a:noFill/>
+        </p:spPr>
+        <p:txBody>
+          <a:bodyPr wrap="square" rtlCol="0">
+            <a:spAutoFit/>
+          </a:bodyPr>
+          <a:lstStyle/>
+          <a:p>
+            <a:r>
+              <a:rPr lang="en-US" sz="1200" dirty="0">
+                <a:solidFill>
+                  <a:schemeClr val="accent5">
+                    <a:lumMod val="60000"/>
+                    <a:lumOff val="40000"/>
+                  </a:schemeClr>
+                </a:solidFill>
+              </a:rPr>
+              <a:t>Revoke privileges for this line (delete dialog)</a:t>
+            </a:r>
+          </a:p>
+        </p:txBody>
+      </p:sp>
+      <p:cxnSp>
+        <p:nvCxnSpPr>
+          <p:cNvPr id="19" name="Connector: Elbow 18">
+            <a:extLst>
+              <a:ext uri="{FF2B5EF4-FFF2-40B4-BE49-F238E27FC236}">
+                <a16:creationId xmlns:a16="http://schemas.microsoft.com/office/drawing/2014/main" id="{BA0ADF18-B87F-96DD-A9D0-3C444AC5F973}"/>
+              </a:ext>
+            </a:extLst>
+          </p:cNvPr>
+          <p:cNvCxnSpPr/>
+          <p:nvPr/>
+        </p:nvCxnSpPr>
+        <p:spPr>
+          <a:xfrm flipV="1">
+            <a:off x="11002962" y="5168203"/>
+            <a:ext cx="363536" cy="170468"/>
+          </a:xfrm>
+          <a:prstGeom prst="bentConnector3">
+            <a:avLst>
+              <a:gd name="adj1" fmla="val 100437"/>
+            </a:avLst>
+          </a:prstGeom>
+          <a:ln>
+            <a:tailEnd type="triangle"/>
+          </a:ln>
+        </p:spPr>
+        <p:style>
+          <a:lnRef idx="2">
+            <a:schemeClr val="accent1"/>
+          </a:lnRef>
+          <a:fillRef idx="0">
+            <a:schemeClr val="accent1"/>
+          </a:fillRef>
+          <a:effectRef idx="1">
+            <a:schemeClr val="accent1"/>
+          </a:effectRef>
+          <a:fontRef idx="minor">
+            <a:schemeClr val="tx1"/>
+          </a:fontRef>
+        </p:style>
+      </p:cxnSp>
+      <p:sp>
+        <p:nvSpPr>
+          <p:cNvPr id="27" name="TextBox 26">
+            <a:extLst>
+              <a:ext uri="{FF2B5EF4-FFF2-40B4-BE49-F238E27FC236}">
+                <a16:creationId xmlns:a16="http://schemas.microsoft.com/office/drawing/2014/main" id="{24F8C942-5A14-2A3C-0A8B-F71081DFB6B3}"/>
+              </a:ext>
+            </a:extLst>
+          </p:cNvPr>
+          <p:cNvSpPr txBox="1"/>
+          <p:nvPr/>
+        </p:nvSpPr>
+        <p:spPr>
+          <a:xfrm>
+            <a:off x="10953050" y="612373"/>
+            <a:ext cx="915099" cy="461665"/>
+          </a:xfrm>
+          <a:prstGeom prst="rect">
+            <a:avLst/>
+          </a:prstGeom>
+          <a:noFill/>
+        </p:spPr>
+        <p:txBody>
+          <a:bodyPr wrap="square" rtlCol="0">
+            <a:spAutoFit/>
+          </a:bodyPr>
+          <a:lstStyle/>
+          <a:p>
+            <a:r>
+              <a:rPr lang="en-US" sz="1200" dirty="0">
+                <a:solidFill>
+                  <a:schemeClr val="accent5">
+                    <a:lumMod val="60000"/>
+                    <a:lumOff val="40000"/>
+                  </a:schemeClr>
+                </a:solidFill>
+              </a:rPr>
+              <a:t>Close split screen</a:t>
+            </a:r>
+          </a:p>
+        </p:txBody>
+      </p:sp>
+      <p:sp>
+        <p:nvSpPr>
+          <p:cNvPr id="28" name="TextBox 27">
+            <a:extLst>
+              <a:ext uri="{FF2B5EF4-FFF2-40B4-BE49-F238E27FC236}">
+                <a16:creationId xmlns:a16="http://schemas.microsoft.com/office/drawing/2014/main" id="{8DDB8DE0-DBB3-42D3-BFEA-6E60665D3161}"/>
+              </a:ext>
+            </a:extLst>
+          </p:cNvPr>
+          <p:cNvSpPr txBox="1"/>
+          <p:nvPr/>
+        </p:nvSpPr>
+        <p:spPr>
+          <a:xfrm>
+            <a:off x="5356063" y="2736850"/>
+            <a:ext cx="917574" cy="461665"/>
+          </a:xfrm>
+          <a:prstGeom prst="rect">
+            <a:avLst/>
+          </a:prstGeom>
+          <a:noFill/>
+        </p:spPr>
+        <p:txBody>
+          <a:bodyPr wrap="square" rtlCol="0">
+            <a:spAutoFit/>
+          </a:bodyPr>
+          <a:lstStyle/>
+          <a:p>
+            <a:r>
+              <a:rPr lang="en-US" sz="1200" dirty="0">
+                <a:solidFill>
+                  <a:schemeClr val="accent5">
+                    <a:lumMod val="60000"/>
+                    <a:lumOff val="40000"/>
+                  </a:schemeClr>
+                </a:solidFill>
+              </a:rPr>
+              <a:t>Close split screen</a:t>
+            </a:r>
+          </a:p>
+        </p:txBody>
+      </p:sp>
+    </p:spTree>
+    <p:extLst>
+      <p:ext uri="{BB962C8B-B14F-4D97-AF65-F5344CB8AC3E}">
+        <p14:creationId xmlns:p14="http://schemas.microsoft.com/office/powerpoint/2010/main" val="1936401760"/>
+      </p:ext>
+    </p:extLst>
+  </p:cSld>
+  <p:clrMapOvr>
+    <a:masterClrMapping/>
+  </p:clrMapOvr>
+</p:sld>
+</file>
+
+<file path=ppt/slides/slide2.xml><?xml version="1.0" encoding="utf-8"?>
+<p:sld xmlns:a="http://schemas.openxmlformats.org/drawingml/2006/main" xmlns:r="http://schemas.openxmlformats.org/officeDocument/2006/relationships" xmlns:p="http://schemas.openxmlformats.org/presentationml/2006/main">
+  <p:cSld>
+    <p:spTree>
+      <p:nvGrpSpPr>
+        <p:cNvPr id="1" name=""/>
+        <p:cNvGrpSpPr/>
+        <p:nvPr/>
+      </p:nvGrpSpPr>
+      <p:grpSpPr>
+        <a:xfrm>
+          <a:off x="0" y="0"/>
+          <a:ext cx="0" cy="0"/>
+          <a:chOff x="0" y="0"/>
+          <a:chExt cx="0" cy="0"/>
+        </a:xfrm>
+      </p:grpSpPr>
+      <p:sp>
+        <p:nvSpPr>
+          <p:cNvPr id="2" name="Title 1">
+            <a:extLst>
+              <a:ext uri="{FF2B5EF4-FFF2-40B4-BE49-F238E27FC236}">
+                <a16:creationId xmlns:a16="http://schemas.microsoft.com/office/drawing/2014/main" id="{A8D326CB-CE0B-A4EE-C69B-438FC23EBE55}"/>
+              </a:ext>
+            </a:extLst>
+          </p:cNvPr>
+          <p:cNvSpPr>
+            <a:spLocks noGrp="1"/>
+          </p:cNvSpPr>
+          <p:nvPr>
+            <p:ph type="title"/>
+          </p:nvPr>
+        </p:nvSpPr>
+        <p:spPr/>
+        <p:txBody>
+          <a:bodyPr>
+            <a:normAutofit fontScale="90000"/>
+          </a:bodyPr>
+          <a:lstStyle/>
+          <a:p>
+            <a:r>
+              <a:rPr lang="en-US" dirty="0"/>
+              <a:t>Running the program</a:t>
+            </a:r>
+          </a:p>
+        </p:txBody>
+      </p:sp>
+      <p:sp>
+        <p:nvSpPr>
+          <p:cNvPr id="10" name="TextBox 9">
+            <a:extLst>
+              <a:ext uri="{FF2B5EF4-FFF2-40B4-BE49-F238E27FC236}">
+                <a16:creationId xmlns:a16="http://schemas.microsoft.com/office/drawing/2014/main" id="{50062DE6-33DA-C0B4-7869-F8B5714E85B1}"/>
+              </a:ext>
+            </a:extLst>
+          </p:cNvPr>
+          <p:cNvSpPr txBox="1"/>
+          <p:nvPr/>
+        </p:nvSpPr>
+        <p:spPr>
+          <a:xfrm>
+            <a:off x="1" y="3429000"/>
+            <a:ext cx="12192000" cy="1477328"/>
+          </a:xfrm>
+          <a:prstGeom prst="rect">
+            <a:avLst/>
+          </a:prstGeom>
+          <a:noFill/>
+        </p:spPr>
+        <p:txBody>
+          <a:bodyPr wrap="square" rtlCol="0">
+            <a:spAutoFit/>
+          </a:bodyPr>
+          <a:lstStyle/>
+          <a:p>
+            <a:r>
+              <a:rPr lang="en-US" dirty="0"/>
+              <a:t>The folder with the program resides at the path P:/PE III/Personal/Eric/Projects/+</a:t>
+            </a:r>
+            <a:r>
+              <a:rPr lang="en-US" dirty="0" err="1"/>
+              <a:t>AuthorizedResetExecutable</a:t>
+            </a:r>
+            <a:r>
+              <a:rPr lang="en-US" dirty="0"/>
+              <a:t> as of 2026-06-02. It should look something like this. Files without a ‘+’ are for the program and should not be touched.</a:t>
+            </a:r>
+          </a:p>
+          <a:p>
+            <a:endParaRPr lang="en-US" dirty="0"/>
+          </a:p>
+          <a:p>
+            <a:r>
+              <a:rPr lang="en-US" dirty="0"/>
+              <a:t>Before you run the .exe, make sure to run +loadDbEnv.bat (or just </a:t>
+            </a:r>
+            <a:r>
+              <a:rPr lang="en-US" dirty="0" err="1"/>
+              <a:t>loadDbEnv</a:t>
+            </a:r>
+            <a:r>
+              <a:rPr lang="en-US" dirty="0"/>
+              <a:t> if you hide file extensions) first, otherwise you’ll just see the following:</a:t>
+            </a:r>
+          </a:p>
+        </p:txBody>
+      </p:sp>
+      <p:pic>
+        <p:nvPicPr>
+          <p:cNvPr id="5" name="Picture 4">
+            <a:extLst>
+              <a:ext uri="{FF2B5EF4-FFF2-40B4-BE49-F238E27FC236}">
+                <a16:creationId xmlns:a16="http://schemas.microsoft.com/office/drawing/2014/main" id="{10DC6391-A43A-E51C-7371-3967925FBA63}"/>
+              </a:ext>
+            </a:extLst>
+          </p:cNvPr>
+          <p:cNvPicPr>
+            <a:picLocks noChangeAspect="1"/>
+          </p:cNvPicPr>
+          <p:nvPr/>
+        </p:nvPicPr>
+        <p:blipFill>
+          <a:blip r:embed="rId2"/>
+          <a:stretch>
+            <a:fillRect/>
+          </a:stretch>
+        </p:blipFill>
+        <p:spPr>
+          <a:xfrm>
+            <a:off x="3285451" y="1007576"/>
+            <a:ext cx="5605546" cy="2318907"/>
+          </a:xfrm>
+          <a:prstGeom prst="rect">
+            <a:avLst/>
+          </a:prstGeom>
+        </p:spPr>
+      </p:pic>
+      <p:pic>
+        <p:nvPicPr>
+          <p:cNvPr id="7" name="Picture 6">
+            <a:extLst>
+              <a:ext uri="{FF2B5EF4-FFF2-40B4-BE49-F238E27FC236}">
+                <a16:creationId xmlns:a16="http://schemas.microsoft.com/office/drawing/2014/main" id="{E87E38F8-41F7-6DCF-D0D7-AB809CF08FF1}"/>
+              </a:ext>
+            </a:extLst>
+          </p:cNvPr>
+          <p:cNvPicPr>
+            <a:picLocks noChangeAspect="1"/>
+          </p:cNvPicPr>
+          <p:nvPr/>
+        </p:nvPicPr>
+        <p:blipFill>
+          <a:blip r:embed="rId3"/>
+          <a:srcRect l="57806" t="17400" r="7122" b="35851"/>
+          <a:stretch>
+            <a:fillRect/>
+          </a:stretch>
+        </p:blipFill>
+        <p:spPr>
+          <a:xfrm>
+            <a:off x="3492779" y="4681537"/>
+            <a:ext cx="5805487" cy="2176463"/>
+          </a:xfrm>
+          <a:prstGeom prst="rect">
+            <a:avLst/>
+          </a:prstGeom>
+        </p:spPr>
+      </p:pic>
+    </p:spTree>
+    <p:extLst>
+      <p:ext uri="{BB962C8B-B14F-4D97-AF65-F5344CB8AC3E}">
+        <p14:creationId xmlns:p14="http://schemas.microsoft.com/office/powerpoint/2010/main" val="3401477014"/>
+      </p:ext>
+    </p:extLst>
+  </p:cSld>
+  <p:clrMapOvr>
+    <a:masterClrMapping/>
+  </p:clrMapOvr>
+</p:sld>
+</file>
+
+<file path=ppt/slides/slide20.xml><?xml version="1.0" encoding="utf-8"?>
+<p:sld xmlns:a="http://schemas.openxmlformats.org/drawingml/2006/main" xmlns:r="http://schemas.openxmlformats.org/officeDocument/2006/relationships" xmlns:p="http://schemas.openxmlformats.org/presentationml/2006/main">
+  <p:cSld>
+    <p:spTree>
+      <p:nvGrpSpPr>
+        <p:cNvPr id="1" name="">
+          <a:extLst>
+            <a:ext uri="{FF2B5EF4-FFF2-40B4-BE49-F238E27FC236}">
+              <a16:creationId xmlns:a16="http://schemas.microsoft.com/office/drawing/2014/main" id="{16301328-71D7-24A8-7930-8F1F4E040512}"/>
+            </a:ext>
+          </a:extLst>
+        </p:cNvPr>
+        <p:cNvGrpSpPr/>
+        <p:nvPr/>
+      </p:nvGrpSpPr>
+      <p:grpSpPr>
+        <a:xfrm>
+          <a:off x="0" y="0"/>
+          <a:ext cx="0" cy="0"/>
+          <a:chOff x="0" y="0"/>
+          <a:chExt cx="0" cy="0"/>
+        </a:xfrm>
+      </p:grpSpPr>
+      <p:pic>
+        <p:nvPicPr>
+          <p:cNvPr id="5" name="Picture 4">
+            <a:extLst>
+              <a:ext uri="{FF2B5EF4-FFF2-40B4-BE49-F238E27FC236}">
+                <a16:creationId xmlns:a16="http://schemas.microsoft.com/office/drawing/2014/main" id="{833364D5-57FC-3F16-6E4D-CA2F64FA6C4E}"/>
+              </a:ext>
+            </a:extLst>
+          </p:cNvPr>
+          <p:cNvPicPr>
+            <a:picLocks noChangeAspect="1"/>
+          </p:cNvPicPr>
+          <p:nvPr/>
+        </p:nvPicPr>
+        <p:blipFill>
+          <a:blip r:embed="rId2"/>
+          <a:stretch>
+            <a:fillRect/>
+          </a:stretch>
+        </p:blipFill>
+        <p:spPr>
+          <a:xfrm>
+            <a:off x="301658" y="1016996"/>
+            <a:ext cx="11564460" cy="5755027"/>
+          </a:xfrm>
+          <a:prstGeom prst="rect">
+            <a:avLst/>
+          </a:prstGeom>
+        </p:spPr>
+      </p:pic>
+      <p:sp>
+        <p:nvSpPr>
+          <p:cNvPr id="2" name="Title 1">
+            <a:extLst>
+              <a:ext uri="{FF2B5EF4-FFF2-40B4-BE49-F238E27FC236}">
+                <a16:creationId xmlns:a16="http://schemas.microsoft.com/office/drawing/2014/main" id="{FFEC0ADC-2F0C-B55A-2B8D-1E1E01ECA83E}"/>
+              </a:ext>
+            </a:extLst>
+          </p:cNvPr>
+          <p:cNvSpPr>
+            <a:spLocks noGrp="1"/>
+          </p:cNvSpPr>
+          <p:nvPr>
+            <p:ph type="title"/>
+          </p:nvPr>
+        </p:nvSpPr>
+        <p:spPr/>
+        <p:txBody>
+          <a:bodyPr>
+            <a:normAutofit fontScale="90000"/>
+          </a:bodyPr>
+          <a:lstStyle/>
+          <a:p>
+            <a:r>
+              <a:rPr lang="en-US" dirty="0"/>
+              <a:t>Line addition</a:t>
+            </a:r>
+          </a:p>
+        </p:txBody>
+      </p:sp>
+      <p:sp>
+        <p:nvSpPr>
+          <p:cNvPr id="9" name="TextBox 8">
+            <a:extLst>
+              <a:ext uri="{FF2B5EF4-FFF2-40B4-BE49-F238E27FC236}">
+                <a16:creationId xmlns:a16="http://schemas.microsoft.com/office/drawing/2014/main" id="{02E0FDB0-462F-2450-73E4-BB746D489B05}"/>
+              </a:ext>
+            </a:extLst>
+          </p:cNvPr>
+          <p:cNvSpPr txBox="1"/>
+          <p:nvPr/>
+        </p:nvSpPr>
+        <p:spPr>
+          <a:xfrm>
+            <a:off x="9591869" y="1761373"/>
+            <a:ext cx="2052637" cy="461665"/>
+          </a:xfrm>
+          <a:prstGeom prst="rect">
+            <a:avLst/>
+          </a:prstGeom>
+          <a:noFill/>
+        </p:spPr>
+        <p:txBody>
+          <a:bodyPr wrap="square" rtlCol="0">
+            <a:spAutoFit/>
+          </a:bodyPr>
+          <a:lstStyle/>
+          <a:p>
+            <a:r>
+              <a:rPr lang="en-US" sz="1200" dirty="0">
+                <a:solidFill>
+                  <a:schemeClr val="accent5">
+                    <a:lumMod val="60000"/>
+                    <a:lumOff val="40000"/>
+                  </a:schemeClr>
+                </a:solidFill>
+              </a:rPr>
+              <a:t>The highest lockout level releasable by this associate</a:t>
+            </a:r>
+          </a:p>
+        </p:txBody>
+      </p:sp>
+      <p:sp>
+        <p:nvSpPr>
+          <p:cNvPr id="10" name="TextBox 9">
+            <a:extLst>
+              <a:ext uri="{FF2B5EF4-FFF2-40B4-BE49-F238E27FC236}">
+                <a16:creationId xmlns:a16="http://schemas.microsoft.com/office/drawing/2014/main" id="{A4A9C4C7-0202-03CF-F5E3-E80750D3B0F2}"/>
+              </a:ext>
+            </a:extLst>
+          </p:cNvPr>
+          <p:cNvSpPr txBox="1"/>
+          <p:nvPr/>
+        </p:nvSpPr>
+        <p:spPr>
+          <a:xfrm>
+            <a:off x="7434050" y="2855323"/>
+            <a:ext cx="2052637" cy="646331"/>
+          </a:xfrm>
+          <a:prstGeom prst="rect">
+            <a:avLst/>
+          </a:prstGeom>
+          <a:noFill/>
+        </p:spPr>
+        <p:txBody>
+          <a:bodyPr wrap="square" rtlCol="0">
+            <a:spAutoFit/>
+          </a:bodyPr>
+          <a:lstStyle/>
+          <a:p>
+            <a:r>
+              <a:rPr lang="en-US" sz="1200" dirty="0">
+                <a:solidFill>
+                  <a:schemeClr val="accent5">
+                    <a:lumMod val="60000"/>
+                    <a:lumOff val="40000"/>
+                  </a:schemeClr>
+                </a:solidFill>
+              </a:rPr>
+              <a:t>There’s a dropdown that provides only</a:t>
+            </a:r>
+          </a:p>
+          <a:p>
+            <a:r>
+              <a:rPr lang="en-US" sz="1200" dirty="0">
+                <a:solidFill>
+                  <a:schemeClr val="accent5">
+                    <a:lumMod val="60000"/>
+                    <a:lumOff val="40000"/>
+                  </a:schemeClr>
+                </a:solidFill>
+              </a:rPr>
+              <a:t>valid lines</a:t>
+            </a:r>
+          </a:p>
+        </p:txBody>
+      </p:sp>
+      <p:sp>
+        <p:nvSpPr>
+          <p:cNvPr id="11" name="TextBox 10">
+            <a:extLst>
+              <a:ext uri="{FF2B5EF4-FFF2-40B4-BE49-F238E27FC236}">
+                <a16:creationId xmlns:a16="http://schemas.microsoft.com/office/drawing/2014/main" id="{5DC0083A-65E9-8991-2C58-1B7AA200B279}"/>
+              </a:ext>
+            </a:extLst>
+          </p:cNvPr>
+          <p:cNvSpPr txBox="1"/>
+          <p:nvPr/>
+        </p:nvSpPr>
+        <p:spPr>
+          <a:xfrm>
+            <a:off x="10237364" y="2624490"/>
+            <a:ext cx="1033462" cy="461665"/>
+          </a:xfrm>
+          <a:prstGeom prst="rect">
+            <a:avLst/>
+          </a:prstGeom>
+          <a:noFill/>
+        </p:spPr>
+        <p:txBody>
+          <a:bodyPr wrap="square" rtlCol="0">
+            <a:spAutoFit/>
+          </a:bodyPr>
+          <a:lstStyle/>
+          <a:p>
+            <a:r>
+              <a:rPr lang="en-US" sz="1200" dirty="0">
+                <a:solidFill>
+                  <a:schemeClr val="accent5">
+                    <a:lumMod val="60000"/>
+                    <a:lumOff val="40000"/>
+                  </a:schemeClr>
+                </a:solidFill>
+              </a:rPr>
+              <a:t>Clamped to valid values</a:t>
+            </a:r>
+          </a:p>
+        </p:txBody>
+      </p:sp>
+    </p:spTree>
+    <p:extLst>
+      <p:ext uri="{BB962C8B-B14F-4D97-AF65-F5344CB8AC3E}">
+        <p14:creationId xmlns:p14="http://schemas.microsoft.com/office/powerpoint/2010/main" val="2208816415"/>
+      </p:ext>
+    </p:extLst>
+  </p:cSld>
+  <p:clrMapOvr>
+    <a:masterClrMapping/>
+  </p:clrMapOvr>
+</p:sld>
+</file>
+
+<file path=ppt/slides/slide21.xml><?xml version="1.0" encoding="utf-8"?>
+<p:sld xmlns:a="http://schemas.openxmlformats.org/drawingml/2006/main" xmlns:r="http://schemas.openxmlformats.org/officeDocument/2006/relationships" xmlns:p="http://schemas.openxmlformats.org/presentationml/2006/main">
+  <p:cSld>
+    <p:spTree>
+      <p:nvGrpSpPr>
+        <p:cNvPr id="1" name=""/>
+        <p:cNvGrpSpPr/>
+        <p:nvPr/>
+      </p:nvGrpSpPr>
+      <p:grpSpPr>
+        <a:xfrm>
+          <a:off x="0" y="0"/>
+          <a:ext cx="0" cy="0"/>
+          <a:chOff x="0" y="0"/>
+          <a:chExt cx="0" cy="0"/>
+        </a:xfrm>
+      </p:grpSpPr>
       <p:sp>
         <p:nvSpPr>
           <p:cNvPr id="2" name="Title 1">
@@ -6330,7 +7491,7 @@
 </p:sld>
 </file>
 
-<file path=ppt/slides/slide19.xml><?xml version="1.0" encoding="utf-8"?>
+<file path=ppt/slides/slide22.xml><?xml version="1.0" encoding="utf-8"?>
 <p:sld xmlns:a="http://schemas.openxmlformats.org/drawingml/2006/main" xmlns:r="http://schemas.openxmlformats.org/officeDocument/2006/relationships" xmlns:p="http://schemas.openxmlformats.org/presentationml/2006/main">
   <p:cSld>
     <p:spTree>
@@ -6510,7 +7671,1616 @@
 </p:sld>
 </file>
 
-<file path=ppt/slides/slide2.xml><?xml version="1.0" encoding="utf-8"?>
+<file path=ppt/slides/slide23.xml><?xml version="1.0" encoding="utf-8"?>
+<p:sld xmlns:a="http://schemas.openxmlformats.org/drawingml/2006/main" xmlns:r="http://schemas.openxmlformats.org/officeDocument/2006/relationships" xmlns:p="http://schemas.openxmlformats.org/presentationml/2006/main">
+  <p:cSld>
+    <p:spTree>
+      <p:nvGrpSpPr>
+        <p:cNvPr id="1" name=""/>
+        <p:cNvGrpSpPr/>
+        <p:nvPr/>
+      </p:nvGrpSpPr>
+      <p:grpSpPr>
+        <a:xfrm>
+          <a:off x="0" y="0"/>
+          <a:ext cx="0" cy="0"/>
+          <a:chOff x="0" y="0"/>
+          <a:chExt cx="0" cy="0"/>
+        </a:xfrm>
+      </p:grpSpPr>
+      <p:sp>
+        <p:nvSpPr>
+          <p:cNvPr id="2" name="Title 1">
+            <a:extLst>
+              <a:ext uri="{FF2B5EF4-FFF2-40B4-BE49-F238E27FC236}">
+                <a16:creationId xmlns:a16="http://schemas.microsoft.com/office/drawing/2014/main" id="{53CABD7A-A739-D1BC-CE4D-49BD26998456}"/>
+              </a:ext>
+            </a:extLst>
+          </p:cNvPr>
+          <p:cNvSpPr>
+            <a:spLocks noGrp="1"/>
+          </p:cNvSpPr>
+          <p:nvPr>
+            <p:ph type="title"/>
+          </p:nvPr>
+        </p:nvSpPr>
+        <p:spPr/>
+        <p:txBody>
+          <a:bodyPr>
+            <a:normAutofit fontScale="90000"/>
+          </a:bodyPr>
+          <a:lstStyle/>
+          <a:p>
+            <a:r>
+              <a:rPr lang="en-US" dirty="0"/>
+              <a:t>Successful line update</a:t>
+            </a:r>
+          </a:p>
+        </p:txBody>
+      </p:sp>
+      <p:pic>
+        <p:nvPicPr>
+          <p:cNvPr id="5" name="Content Placeholder 4">
+            <a:extLst>
+              <a:ext uri="{FF2B5EF4-FFF2-40B4-BE49-F238E27FC236}">
+                <a16:creationId xmlns:a16="http://schemas.microsoft.com/office/drawing/2014/main" id="{7370A13E-7DC2-FD68-68C5-16F158D76ECA}"/>
+              </a:ext>
+            </a:extLst>
+          </p:cNvPr>
+          <p:cNvPicPr>
+            <a:picLocks noGrp="1" noChangeAspect="1"/>
+          </p:cNvPicPr>
+          <p:nvPr>
+            <p:ph idx="1"/>
+          </p:nvPr>
+        </p:nvPicPr>
+        <p:blipFill>
+          <a:blip r:embed="rId2"/>
+          <a:stretch>
+            <a:fillRect/>
+          </a:stretch>
+        </p:blipFill>
+        <p:spPr>
+          <a:xfrm>
+            <a:off x="313251" y="940411"/>
+            <a:ext cx="11564522" cy="5776213"/>
+          </a:xfrm>
+          <a:prstGeom prst="rect">
+            <a:avLst/>
+          </a:prstGeom>
+        </p:spPr>
+      </p:pic>
+      <p:sp>
+        <p:nvSpPr>
+          <p:cNvPr id="6" name="TextBox 5">
+            <a:extLst>
+              <a:ext uri="{FF2B5EF4-FFF2-40B4-BE49-F238E27FC236}">
+                <a16:creationId xmlns:a16="http://schemas.microsoft.com/office/drawing/2014/main" id="{BB9860F3-6546-A5FA-942C-EC2D01BD01C0}"/>
+              </a:ext>
+            </a:extLst>
+          </p:cNvPr>
+          <p:cNvSpPr txBox="1"/>
+          <p:nvPr/>
+        </p:nvSpPr>
+        <p:spPr>
+          <a:xfrm>
+            <a:off x="8536068" y="5792934"/>
+            <a:ext cx="2728964" cy="646331"/>
+          </a:xfrm>
+          <a:prstGeom prst="rect">
+            <a:avLst/>
+          </a:prstGeom>
+          <a:noFill/>
+        </p:spPr>
+        <p:txBody>
+          <a:bodyPr wrap="square" rtlCol="0">
+            <a:spAutoFit/>
+          </a:bodyPr>
+          <a:lstStyle/>
+          <a:p>
+            <a:r>
+              <a:rPr lang="en-US" sz="1200" dirty="0">
+                <a:solidFill>
+                  <a:schemeClr val="accent5">
+                    <a:lumMod val="60000"/>
+                    <a:lumOff val="40000"/>
+                  </a:schemeClr>
+                </a:solidFill>
+              </a:rPr>
+              <a:t>This toast lets you know the auth level change was successful, even if the line is off screen</a:t>
+            </a:r>
+          </a:p>
+        </p:txBody>
+      </p:sp>
+    </p:spTree>
+    <p:extLst>
+      <p:ext uri="{BB962C8B-B14F-4D97-AF65-F5344CB8AC3E}">
+        <p14:creationId xmlns:p14="http://schemas.microsoft.com/office/powerpoint/2010/main" val="402155355"/>
+      </p:ext>
+    </p:extLst>
+  </p:cSld>
+  <p:clrMapOvr>
+    <a:masterClrMapping/>
+  </p:clrMapOvr>
+</p:sld>
+</file>
+
+<file path=ppt/slides/slide24.xml><?xml version="1.0" encoding="utf-8"?>
+<p:sld xmlns:a="http://schemas.openxmlformats.org/drawingml/2006/main" xmlns:r="http://schemas.openxmlformats.org/officeDocument/2006/relationships" xmlns:p="http://schemas.openxmlformats.org/presentationml/2006/main">
+  <p:cSld>
+    <p:spTree>
+      <p:nvGrpSpPr>
+        <p:cNvPr id="1" name="">
+          <a:extLst>
+            <a:ext uri="{FF2B5EF4-FFF2-40B4-BE49-F238E27FC236}">
+              <a16:creationId xmlns:a16="http://schemas.microsoft.com/office/drawing/2014/main" id="{7955D05A-C958-EADA-99D9-E49968776270}"/>
+            </a:ext>
+          </a:extLst>
+        </p:cNvPr>
+        <p:cNvGrpSpPr/>
+        <p:nvPr/>
+      </p:nvGrpSpPr>
+      <p:grpSpPr>
+        <a:xfrm>
+          <a:off x="0" y="0"/>
+          <a:ext cx="0" cy="0"/>
+          <a:chOff x="0" y="0"/>
+          <a:chExt cx="0" cy="0"/>
+        </a:xfrm>
+      </p:grpSpPr>
+      <p:pic>
+        <p:nvPicPr>
+          <p:cNvPr id="5" name="Picture 4">
+            <a:extLst>
+              <a:ext uri="{FF2B5EF4-FFF2-40B4-BE49-F238E27FC236}">
+                <a16:creationId xmlns:a16="http://schemas.microsoft.com/office/drawing/2014/main" id="{7A14427B-AF35-A3E6-4305-2618619E7148}"/>
+              </a:ext>
+            </a:extLst>
+          </p:cNvPr>
+          <p:cNvPicPr>
+            <a:picLocks noChangeAspect="1"/>
+          </p:cNvPicPr>
+          <p:nvPr/>
+        </p:nvPicPr>
+        <p:blipFill>
+          <a:blip r:embed="rId2"/>
+          <a:stretch>
+            <a:fillRect/>
+          </a:stretch>
+        </p:blipFill>
+        <p:spPr>
+          <a:xfrm>
+            <a:off x="311085" y="905060"/>
+            <a:ext cx="11603721" cy="5738237"/>
+          </a:xfrm>
+          <a:prstGeom prst="rect">
+            <a:avLst/>
+          </a:prstGeom>
+        </p:spPr>
+      </p:pic>
+      <p:sp>
+        <p:nvSpPr>
+          <p:cNvPr id="2" name="Title 1">
+            <a:extLst>
+              <a:ext uri="{FF2B5EF4-FFF2-40B4-BE49-F238E27FC236}">
+                <a16:creationId xmlns:a16="http://schemas.microsoft.com/office/drawing/2014/main" id="{EA7C9B24-FA12-59EB-6D2D-8FFE5FCD2495}"/>
+              </a:ext>
+            </a:extLst>
+          </p:cNvPr>
+          <p:cNvSpPr>
+            <a:spLocks noGrp="1"/>
+          </p:cNvSpPr>
+          <p:nvPr>
+            <p:ph type="title"/>
+          </p:nvPr>
+        </p:nvSpPr>
+        <p:spPr/>
+        <p:txBody>
+          <a:bodyPr>
+            <a:normAutofit fontScale="90000"/>
+          </a:bodyPr>
+          <a:lstStyle/>
+          <a:p>
+            <a:r>
+              <a:rPr lang="en-US" dirty="0"/>
+              <a:t>Line removal</a:t>
+            </a:r>
+          </a:p>
+        </p:txBody>
+      </p:sp>
+      <p:sp>
+        <p:nvSpPr>
+          <p:cNvPr id="6" name="TextBox 5">
+            <a:extLst>
+              <a:ext uri="{FF2B5EF4-FFF2-40B4-BE49-F238E27FC236}">
+                <a16:creationId xmlns:a16="http://schemas.microsoft.com/office/drawing/2014/main" id="{F0E759CB-89D7-2B1F-569E-5DD58979ECDC}"/>
+              </a:ext>
+            </a:extLst>
+          </p:cNvPr>
+          <p:cNvSpPr txBox="1"/>
+          <p:nvPr/>
+        </p:nvSpPr>
+        <p:spPr>
+          <a:xfrm>
+            <a:off x="6280150" y="1643391"/>
+            <a:ext cx="1323997" cy="461665"/>
+          </a:xfrm>
+          <a:prstGeom prst="rect">
+            <a:avLst/>
+          </a:prstGeom>
+          <a:noFill/>
+        </p:spPr>
+        <p:txBody>
+          <a:bodyPr wrap="square" rtlCol="0">
+            <a:spAutoFit/>
+          </a:bodyPr>
+          <a:lstStyle/>
+          <a:p>
+            <a:r>
+              <a:rPr lang="en-US" sz="1200" dirty="0">
+                <a:solidFill>
+                  <a:schemeClr val="accent5">
+                    <a:lumMod val="60000"/>
+                    <a:lumOff val="40000"/>
+                  </a:schemeClr>
+                </a:solidFill>
+              </a:rPr>
+              <a:t>Removes line from associate</a:t>
+            </a:r>
+          </a:p>
+        </p:txBody>
+      </p:sp>
+      <p:cxnSp>
+        <p:nvCxnSpPr>
+          <p:cNvPr id="8" name="Straight Arrow Connector 7">
+            <a:extLst>
+              <a:ext uri="{FF2B5EF4-FFF2-40B4-BE49-F238E27FC236}">
+                <a16:creationId xmlns:a16="http://schemas.microsoft.com/office/drawing/2014/main" id="{86F9D3DF-A617-F3A2-2757-72D1A80208B8}"/>
+              </a:ext>
+            </a:extLst>
+          </p:cNvPr>
+          <p:cNvCxnSpPr/>
+          <p:nvPr/>
+        </p:nvCxnSpPr>
+        <p:spPr>
+          <a:xfrm>
+            <a:off x="7023100" y="2066925"/>
+            <a:ext cx="212725" cy="174625"/>
+          </a:xfrm>
+          <a:prstGeom prst="straightConnector1">
+            <a:avLst/>
+          </a:prstGeom>
+          <a:ln>
+            <a:tailEnd type="triangle"/>
+          </a:ln>
+        </p:spPr>
+        <p:style>
+          <a:lnRef idx="2">
+            <a:schemeClr val="accent1"/>
+          </a:lnRef>
+          <a:fillRef idx="0">
+            <a:schemeClr val="accent1"/>
+          </a:fillRef>
+          <a:effectRef idx="1">
+            <a:schemeClr val="accent1"/>
+          </a:effectRef>
+          <a:fontRef idx="minor">
+            <a:schemeClr val="tx1"/>
+          </a:fontRef>
+        </p:style>
+      </p:cxnSp>
+      <p:sp>
+        <p:nvSpPr>
+          <p:cNvPr id="10" name="TextBox 9">
+            <a:extLst>
+              <a:ext uri="{FF2B5EF4-FFF2-40B4-BE49-F238E27FC236}">
+                <a16:creationId xmlns:a16="http://schemas.microsoft.com/office/drawing/2014/main" id="{70F1E900-9919-AA6F-A9B4-33B8155E5256}"/>
+              </a:ext>
+            </a:extLst>
+          </p:cNvPr>
+          <p:cNvSpPr txBox="1"/>
+          <p:nvPr/>
+        </p:nvSpPr>
+        <p:spPr>
+          <a:xfrm>
+            <a:off x="6540157" y="1209675"/>
+            <a:ext cx="956416" cy="276999"/>
+          </a:xfrm>
+          <a:prstGeom prst="rect">
+            <a:avLst/>
+          </a:prstGeom>
+          <a:noFill/>
+        </p:spPr>
+        <p:txBody>
+          <a:bodyPr wrap="none" rtlCol="0">
+            <a:spAutoFit/>
+          </a:bodyPr>
+          <a:lstStyle/>
+          <a:p>
+            <a:r>
+              <a:rPr lang="en-US" sz="1200" dirty="0">
+                <a:solidFill>
+                  <a:schemeClr val="accent5">
+                    <a:lumMod val="60000"/>
+                    <a:lumOff val="40000"/>
+                  </a:schemeClr>
+                </a:solidFill>
+              </a:rPr>
+              <a:t>Also cancel</a:t>
+            </a:r>
+          </a:p>
+        </p:txBody>
+      </p:sp>
+      <p:sp>
+        <p:nvSpPr>
+          <p:cNvPr id="11" name="TextBox 10">
+            <a:extLst>
+              <a:ext uri="{FF2B5EF4-FFF2-40B4-BE49-F238E27FC236}">
+                <a16:creationId xmlns:a16="http://schemas.microsoft.com/office/drawing/2014/main" id="{0E09CC09-8774-BE0B-2FA7-EFE29EE8C089}"/>
+              </a:ext>
+            </a:extLst>
+          </p:cNvPr>
+          <p:cNvSpPr txBox="1"/>
+          <p:nvPr/>
+        </p:nvSpPr>
+        <p:spPr>
+          <a:xfrm>
+            <a:off x="5095715" y="2214175"/>
+            <a:ext cx="1237839" cy="276999"/>
+          </a:xfrm>
+          <a:prstGeom prst="rect">
+            <a:avLst/>
+          </a:prstGeom>
+          <a:noFill/>
+        </p:spPr>
+        <p:txBody>
+          <a:bodyPr wrap="none" rtlCol="0">
+            <a:spAutoFit/>
+          </a:bodyPr>
+          <a:lstStyle/>
+          <a:p>
+            <a:r>
+              <a:rPr lang="en-US" sz="1200" dirty="0">
+                <a:solidFill>
+                  <a:schemeClr val="accent5">
+                    <a:lumMod val="60000"/>
+                    <a:lumOff val="40000"/>
+                  </a:schemeClr>
+                </a:solidFill>
+              </a:rPr>
+              <a:t>Cancel deletion</a:t>
+            </a:r>
+          </a:p>
+        </p:txBody>
+      </p:sp>
+      <p:sp>
+        <p:nvSpPr>
+          <p:cNvPr id="12" name="TextBox 11">
+            <a:extLst>
+              <a:ext uri="{FF2B5EF4-FFF2-40B4-BE49-F238E27FC236}">
+                <a16:creationId xmlns:a16="http://schemas.microsoft.com/office/drawing/2014/main" id="{CE6DEEEB-BB97-10BA-01B7-CC03331EF4B7}"/>
+              </a:ext>
+            </a:extLst>
+          </p:cNvPr>
+          <p:cNvSpPr txBox="1"/>
+          <p:nvPr/>
+        </p:nvSpPr>
+        <p:spPr>
+          <a:xfrm>
+            <a:off x="7101656" y="5648325"/>
+            <a:ext cx="4779259" cy="584775"/>
+          </a:xfrm>
+          <a:prstGeom prst="rect">
+            <a:avLst/>
+          </a:prstGeom>
+          <a:noFill/>
+        </p:spPr>
+        <p:txBody>
+          <a:bodyPr wrap="square" rtlCol="0">
+            <a:spAutoFit/>
+          </a:bodyPr>
+          <a:lstStyle/>
+          <a:p>
+            <a:r>
+              <a:rPr lang="en-US" sz="1600" dirty="0"/>
+              <a:t>This is what you see when you press the trash can for an associate’s line</a:t>
+            </a:r>
+          </a:p>
+        </p:txBody>
+      </p:sp>
+    </p:spTree>
+    <p:extLst>
+      <p:ext uri="{BB962C8B-B14F-4D97-AF65-F5344CB8AC3E}">
+        <p14:creationId xmlns:p14="http://schemas.microsoft.com/office/powerpoint/2010/main" val="513862380"/>
+      </p:ext>
+    </p:extLst>
+  </p:cSld>
+  <p:clrMapOvr>
+    <a:masterClrMapping/>
+  </p:clrMapOvr>
+</p:sld>
+</file>
+
+<file path=ppt/slides/slide25.xml><?xml version="1.0" encoding="utf-8"?>
+<p:sld xmlns:a="http://schemas.openxmlformats.org/drawingml/2006/main" xmlns:r="http://schemas.openxmlformats.org/officeDocument/2006/relationships" xmlns:p="http://schemas.openxmlformats.org/presentationml/2006/main">
+  <p:cSld>
+    <p:spTree>
+      <p:nvGrpSpPr>
+        <p:cNvPr id="1" name=""/>
+        <p:cNvGrpSpPr/>
+        <p:nvPr/>
+      </p:nvGrpSpPr>
+      <p:grpSpPr>
+        <a:xfrm>
+          <a:off x="0" y="0"/>
+          <a:ext cx="0" cy="0"/>
+          <a:chOff x="0" y="0"/>
+          <a:chExt cx="0" cy="0"/>
+        </a:xfrm>
+      </p:grpSpPr>
+      <p:sp>
+        <p:nvSpPr>
+          <p:cNvPr id="2" name="Title 1">
+            <a:extLst>
+              <a:ext uri="{FF2B5EF4-FFF2-40B4-BE49-F238E27FC236}">
+                <a16:creationId xmlns:a16="http://schemas.microsoft.com/office/drawing/2014/main" id="{30A0EF82-9048-D9C8-FD62-CFD3615CE3D0}"/>
+              </a:ext>
+            </a:extLst>
+          </p:cNvPr>
+          <p:cNvSpPr>
+            <a:spLocks noGrp="1"/>
+          </p:cNvSpPr>
+          <p:nvPr>
+            <p:ph type="title"/>
+          </p:nvPr>
+        </p:nvSpPr>
+        <p:spPr/>
+        <p:txBody>
+          <a:bodyPr>
+            <a:normAutofit fontScale="90000"/>
+          </a:bodyPr>
+          <a:lstStyle/>
+          <a:p>
+            <a:r>
+              <a:rPr lang="en-US" dirty="0"/>
+              <a:t>Successful line removal</a:t>
+            </a:r>
+          </a:p>
+        </p:txBody>
+      </p:sp>
+      <p:pic>
+        <p:nvPicPr>
+          <p:cNvPr id="5" name="Content Placeholder 4">
+            <a:extLst>
+              <a:ext uri="{FF2B5EF4-FFF2-40B4-BE49-F238E27FC236}">
+                <a16:creationId xmlns:a16="http://schemas.microsoft.com/office/drawing/2014/main" id="{27C5272A-7070-1B32-6C90-14A129A29419}"/>
+              </a:ext>
+            </a:extLst>
+          </p:cNvPr>
+          <p:cNvPicPr>
+            <a:picLocks noGrp="1" noChangeAspect="1"/>
+          </p:cNvPicPr>
+          <p:nvPr>
+            <p:ph idx="1"/>
+          </p:nvPr>
+        </p:nvPicPr>
+        <p:blipFill>
+          <a:blip r:embed="rId2"/>
+          <a:stretch>
+            <a:fillRect/>
+          </a:stretch>
+        </p:blipFill>
+        <p:spPr>
+          <a:xfrm>
+            <a:off x="287038" y="905060"/>
+            <a:ext cx="11600161" cy="5772794"/>
+          </a:xfrm>
+          <a:prstGeom prst="rect">
+            <a:avLst/>
+          </a:prstGeom>
+        </p:spPr>
+      </p:pic>
+      <p:sp>
+        <p:nvSpPr>
+          <p:cNvPr id="6" name="TextBox 5">
+            <a:extLst>
+              <a:ext uri="{FF2B5EF4-FFF2-40B4-BE49-F238E27FC236}">
+                <a16:creationId xmlns:a16="http://schemas.microsoft.com/office/drawing/2014/main" id="{9B358EE2-CCFC-730B-F954-2694FB08DA87}"/>
+              </a:ext>
+            </a:extLst>
+          </p:cNvPr>
+          <p:cNvSpPr txBox="1"/>
+          <p:nvPr/>
+        </p:nvSpPr>
+        <p:spPr>
+          <a:xfrm>
+            <a:off x="8999457" y="5758421"/>
+            <a:ext cx="2007909" cy="646331"/>
+          </a:xfrm>
+          <a:prstGeom prst="rect">
+            <a:avLst/>
+          </a:prstGeom>
+          <a:noFill/>
+        </p:spPr>
+        <p:txBody>
+          <a:bodyPr wrap="square" rtlCol="0">
+            <a:spAutoFit/>
+          </a:bodyPr>
+          <a:lstStyle/>
+          <a:p>
+            <a:r>
+              <a:rPr lang="en-US" sz="1200" dirty="0">
+                <a:solidFill>
+                  <a:schemeClr val="accent5">
+                    <a:lumMod val="60000"/>
+                    <a:lumOff val="40000"/>
+                  </a:schemeClr>
+                </a:solidFill>
+              </a:rPr>
+              <a:t>You can be sure the deletion worked if you see this toast</a:t>
+            </a:r>
+          </a:p>
+        </p:txBody>
+      </p:sp>
+      <p:sp>
+        <p:nvSpPr>
+          <p:cNvPr id="8" name="TextBox 7">
+            <a:extLst>
+              <a:ext uri="{FF2B5EF4-FFF2-40B4-BE49-F238E27FC236}">
+                <a16:creationId xmlns:a16="http://schemas.microsoft.com/office/drawing/2014/main" id="{20C4C6A3-B71C-3D12-DBC4-2C0A581608C5}"/>
+              </a:ext>
+            </a:extLst>
+          </p:cNvPr>
+          <p:cNvSpPr txBox="1"/>
+          <p:nvPr/>
+        </p:nvSpPr>
+        <p:spPr>
+          <a:xfrm>
+            <a:off x="3820212" y="1076252"/>
+            <a:ext cx="3589256" cy="461665"/>
+          </a:xfrm>
+          <a:prstGeom prst="rect">
+            <a:avLst/>
+          </a:prstGeom>
+          <a:noFill/>
+        </p:spPr>
+        <p:txBody>
+          <a:bodyPr wrap="square">
+            <a:spAutoFit/>
+          </a:bodyPr>
+          <a:lstStyle/>
+          <a:p>
+            <a:r>
+              <a:rPr lang="en-US" sz="1200" dirty="0">
+                <a:solidFill>
+                  <a:schemeClr val="accent5">
+                    <a:lumMod val="60000"/>
+                    <a:lumOff val="40000"/>
+                  </a:schemeClr>
+                </a:solidFill>
+              </a:rPr>
+              <a:t>Notably, this only revokes this associate’s reset privileges for this line. It does not delete the line.</a:t>
+            </a:r>
+          </a:p>
+        </p:txBody>
+      </p:sp>
+    </p:spTree>
+    <p:extLst>
+      <p:ext uri="{BB962C8B-B14F-4D97-AF65-F5344CB8AC3E}">
+        <p14:creationId xmlns:p14="http://schemas.microsoft.com/office/powerpoint/2010/main" val="1088793323"/>
+      </p:ext>
+    </p:extLst>
+  </p:cSld>
+  <p:clrMapOvr>
+    <a:masterClrMapping/>
+  </p:clrMapOvr>
+</p:sld>
+</file>
+
+<file path=ppt/slides/slide26.xml><?xml version="1.0" encoding="utf-8"?>
+<p:sld xmlns:a="http://schemas.openxmlformats.org/drawingml/2006/main" xmlns:r="http://schemas.openxmlformats.org/officeDocument/2006/relationships" xmlns:p="http://schemas.openxmlformats.org/presentationml/2006/main">
+  <p:cSld>
+    <p:spTree>
+      <p:nvGrpSpPr>
+        <p:cNvPr id="1" name="">
+          <a:extLst>
+            <a:ext uri="{FF2B5EF4-FFF2-40B4-BE49-F238E27FC236}">
+              <a16:creationId xmlns:a16="http://schemas.microsoft.com/office/drawing/2014/main" id="{6E4E0CD0-C9DB-7EA0-FDC1-3183B397AD6D}"/>
+            </a:ext>
+          </a:extLst>
+        </p:cNvPr>
+        <p:cNvGrpSpPr/>
+        <p:nvPr/>
+      </p:nvGrpSpPr>
+      <p:grpSpPr>
+        <a:xfrm>
+          <a:off x="0" y="0"/>
+          <a:ext cx="0" cy="0"/>
+          <a:chOff x="0" y="0"/>
+          <a:chExt cx="0" cy="0"/>
+        </a:xfrm>
+      </p:grpSpPr>
+      <p:pic>
+        <p:nvPicPr>
+          <p:cNvPr id="4" name="Picture 3">
+            <a:extLst>
+              <a:ext uri="{FF2B5EF4-FFF2-40B4-BE49-F238E27FC236}">
+                <a16:creationId xmlns:a16="http://schemas.microsoft.com/office/drawing/2014/main" id="{E8D9E11E-3231-F932-675B-E27C640CBA77}"/>
+              </a:ext>
+            </a:extLst>
+          </p:cNvPr>
+          <p:cNvPicPr>
+            <a:picLocks noChangeAspect="1"/>
+          </p:cNvPicPr>
+          <p:nvPr/>
+        </p:nvPicPr>
+        <p:blipFill>
+          <a:blip r:embed="rId2"/>
+          <a:stretch>
+            <a:fillRect/>
+          </a:stretch>
+        </p:blipFill>
+        <p:spPr>
+          <a:xfrm>
+            <a:off x="304800" y="905060"/>
+            <a:ext cx="11553825" cy="5761830"/>
+          </a:xfrm>
+          <a:prstGeom prst="rect">
+            <a:avLst/>
+          </a:prstGeom>
+        </p:spPr>
+      </p:pic>
+      <p:sp>
+        <p:nvSpPr>
+          <p:cNvPr id="2" name="Title 1">
+            <a:extLst>
+              <a:ext uri="{FF2B5EF4-FFF2-40B4-BE49-F238E27FC236}">
+                <a16:creationId xmlns:a16="http://schemas.microsoft.com/office/drawing/2014/main" id="{E3575280-0382-B9E5-13A6-B12057E94063}"/>
+              </a:ext>
+            </a:extLst>
+          </p:cNvPr>
+          <p:cNvSpPr>
+            <a:spLocks noGrp="1"/>
+          </p:cNvSpPr>
+          <p:nvPr>
+            <p:ph type="title"/>
+          </p:nvPr>
+        </p:nvSpPr>
+        <p:spPr/>
+        <p:txBody>
+          <a:bodyPr>
+            <a:normAutofit fontScale="90000"/>
+          </a:bodyPr>
+          <a:lstStyle/>
+          <a:p>
+            <a:r>
+              <a:rPr lang="en-US" dirty="0"/>
+              <a:t>Update CMMS mappings page</a:t>
+            </a:r>
+          </a:p>
+        </p:txBody>
+      </p:sp>
+      <p:sp>
+        <p:nvSpPr>
+          <p:cNvPr id="10" name="TextBox 9">
+            <a:extLst>
+              <a:ext uri="{FF2B5EF4-FFF2-40B4-BE49-F238E27FC236}">
+                <a16:creationId xmlns:a16="http://schemas.microsoft.com/office/drawing/2014/main" id="{40F9E787-298F-4E8C-0E11-EE0F768E08C6}"/>
+              </a:ext>
+            </a:extLst>
+          </p:cNvPr>
+          <p:cNvSpPr txBox="1"/>
+          <p:nvPr/>
+        </p:nvSpPr>
+        <p:spPr>
+          <a:xfrm>
+            <a:off x="4933950" y="2295525"/>
+            <a:ext cx="3701270" cy="276999"/>
+          </a:xfrm>
+          <a:prstGeom prst="rect">
+            <a:avLst/>
+          </a:prstGeom>
+          <a:noFill/>
+        </p:spPr>
+        <p:txBody>
+          <a:bodyPr wrap="none" rtlCol="0">
+            <a:spAutoFit/>
+          </a:bodyPr>
+          <a:lstStyle/>
+          <a:p>
+            <a:r>
+              <a:rPr lang="en-US" sz="1200" dirty="0">
+                <a:solidFill>
+                  <a:schemeClr val="accent5">
+                    <a:lumMod val="60000"/>
+                    <a:lumOff val="40000"/>
+                  </a:schemeClr>
+                </a:solidFill>
+              </a:rPr>
+              <a:t>Click button or drag/drop to this area to upload a CSV</a:t>
+            </a:r>
+          </a:p>
+        </p:txBody>
+      </p:sp>
+    </p:spTree>
+    <p:extLst>
+      <p:ext uri="{BB962C8B-B14F-4D97-AF65-F5344CB8AC3E}">
+        <p14:creationId xmlns:p14="http://schemas.microsoft.com/office/powerpoint/2010/main" val="3239207398"/>
+      </p:ext>
+    </p:extLst>
+  </p:cSld>
+  <p:clrMapOvr>
+    <a:masterClrMapping/>
+  </p:clrMapOvr>
+</p:sld>
+</file>
+
+<file path=ppt/slides/slide27.xml><?xml version="1.0" encoding="utf-8"?>
+<p:sld xmlns:a="http://schemas.openxmlformats.org/drawingml/2006/main" xmlns:r="http://schemas.openxmlformats.org/officeDocument/2006/relationships" xmlns:p="http://schemas.openxmlformats.org/presentationml/2006/main">
+  <p:cSld>
+    <p:spTree>
+      <p:nvGrpSpPr>
+        <p:cNvPr id="1" name=""/>
+        <p:cNvGrpSpPr/>
+        <p:nvPr/>
+      </p:nvGrpSpPr>
+      <p:grpSpPr>
+        <a:xfrm>
+          <a:off x="0" y="0"/>
+          <a:ext cx="0" cy="0"/>
+          <a:chOff x="0" y="0"/>
+          <a:chExt cx="0" cy="0"/>
+        </a:xfrm>
+      </p:grpSpPr>
+      <p:pic>
+        <p:nvPicPr>
+          <p:cNvPr id="4" name="Picture 3">
+            <a:extLst>
+              <a:ext uri="{FF2B5EF4-FFF2-40B4-BE49-F238E27FC236}">
+                <a16:creationId xmlns:a16="http://schemas.microsoft.com/office/drawing/2014/main" id="{7AFB2AB3-A02C-6870-7615-E5A691B69E81}"/>
+              </a:ext>
+            </a:extLst>
+          </p:cNvPr>
+          <p:cNvPicPr>
+            <a:picLocks noChangeAspect="1"/>
+          </p:cNvPicPr>
+          <p:nvPr/>
+        </p:nvPicPr>
+        <p:blipFill>
+          <a:blip r:embed="rId2"/>
+          <a:stretch>
+            <a:fillRect/>
+          </a:stretch>
+        </p:blipFill>
+        <p:spPr>
+          <a:xfrm>
+            <a:off x="314325" y="905060"/>
+            <a:ext cx="11560324" cy="5765071"/>
+          </a:xfrm>
+          <a:prstGeom prst="rect">
+            <a:avLst/>
+          </a:prstGeom>
+        </p:spPr>
+      </p:pic>
+      <p:sp>
+        <p:nvSpPr>
+          <p:cNvPr id="2" name="Title 1">
+            <a:extLst>
+              <a:ext uri="{FF2B5EF4-FFF2-40B4-BE49-F238E27FC236}">
+                <a16:creationId xmlns:a16="http://schemas.microsoft.com/office/drawing/2014/main" id="{EF1A11BC-959E-17EE-3924-576C94C09A55}"/>
+              </a:ext>
+            </a:extLst>
+          </p:cNvPr>
+          <p:cNvSpPr>
+            <a:spLocks noGrp="1"/>
+          </p:cNvSpPr>
+          <p:nvPr>
+            <p:ph type="title"/>
+          </p:nvPr>
+        </p:nvSpPr>
+        <p:spPr/>
+        <p:txBody>
+          <a:bodyPr>
+            <a:normAutofit fontScale="90000"/>
+          </a:bodyPr>
+          <a:lstStyle/>
+          <a:p>
+            <a:r>
+              <a:rPr lang="en-US" dirty="0"/>
+              <a:t>CSV upload confirmation</a:t>
+            </a:r>
+          </a:p>
+        </p:txBody>
+      </p:sp>
+      <p:sp>
+        <p:nvSpPr>
+          <p:cNvPr id="6" name="TextBox 5">
+            <a:extLst>
+              <a:ext uri="{FF2B5EF4-FFF2-40B4-BE49-F238E27FC236}">
+                <a16:creationId xmlns:a16="http://schemas.microsoft.com/office/drawing/2014/main" id="{2721500B-280D-67E6-1422-DE1D9A7E1E32}"/>
+              </a:ext>
+            </a:extLst>
+          </p:cNvPr>
+          <p:cNvSpPr txBox="1"/>
+          <p:nvPr/>
+        </p:nvSpPr>
+        <p:spPr>
+          <a:xfrm>
+            <a:off x="4332304" y="3359391"/>
+            <a:ext cx="3665299" cy="276999"/>
+          </a:xfrm>
+          <a:prstGeom prst="rect">
+            <a:avLst/>
+          </a:prstGeom>
+          <a:noFill/>
+        </p:spPr>
+        <p:txBody>
+          <a:bodyPr wrap="none" rtlCol="0">
+            <a:spAutoFit/>
+          </a:bodyPr>
+          <a:lstStyle/>
+          <a:p>
+            <a:r>
+              <a:rPr lang="en-US" sz="1200" dirty="0">
+                <a:solidFill>
+                  <a:schemeClr val="accent5">
+                    <a:lumMod val="60000"/>
+                    <a:lumOff val="40000"/>
+                  </a:schemeClr>
+                </a:solidFill>
+              </a:rPr>
+              <a:t>Either file upload method gives you this confirmation</a:t>
+            </a:r>
+          </a:p>
+        </p:txBody>
+      </p:sp>
+    </p:spTree>
+    <p:extLst>
+      <p:ext uri="{BB962C8B-B14F-4D97-AF65-F5344CB8AC3E}">
+        <p14:creationId xmlns:p14="http://schemas.microsoft.com/office/powerpoint/2010/main" val="3116791411"/>
+      </p:ext>
+    </p:extLst>
+  </p:cSld>
+  <p:clrMapOvr>
+    <a:masterClrMapping/>
+  </p:clrMapOvr>
+</p:sld>
+</file>
+
+<file path=ppt/slides/slide28.xml><?xml version="1.0" encoding="utf-8"?>
+<p:sld xmlns:a="http://schemas.openxmlformats.org/drawingml/2006/main" xmlns:r="http://schemas.openxmlformats.org/officeDocument/2006/relationships" xmlns:p="http://schemas.openxmlformats.org/presentationml/2006/main">
+  <p:cSld>
+    <p:spTree>
+      <p:nvGrpSpPr>
+        <p:cNvPr id="1" name=""/>
+        <p:cNvGrpSpPr/>
+        <p:nvPr/>
+      </p:nvGrpSpPr>
+      <p:grpSpPr>
+        <a:xfrm>
+          <a:off x="0" y="0"/>
+          <a:ext cx="0" cy="0"/>
+          <a:chOff x="0" y="0"/>
+          <a:chExt cx="0" cy="0"/>
+        </a:xfrm>
+      </p:grpSpPr>
+      <p:pic>
+        <p:nvPicPr>
+          <p:cNvPr id="5" name="Picture 4">
+            <a:extLst>
+              <a:ext uri="{FF2B5EF4-FFF2-40B4-BE49-F238E27FC236}">
+                <a16:creationId xmlns:a16="http://schemas.microsoft.com/office/drawing/2014/main" id="{C2C073DC-6385-E030-6CDD-68CBC9F6519A}"/>
+              </a:ext>
+            </a:extLst>
+          </p:cNvPr>
+          <p:cNvPicPr>
+            <a:picLocks noChangeAspect="1"/>
+          </p:cNvPicPr>
+          <p:nvPr/>
+        </p:nvPicPr>
+        <p:blipFill>
+          <a:blip r:embed="rId2"/>
+          <a:srcRect t="7788" r="430" b="553"/>
+          <a:stretch>
+            <a:fillRect/>
+          </a:stretch>
+        </p:blipFill>
+        <p:spPr>
+          <a:xfrm>
+            <a:off x="308083" y="905060"/>
+            <a:ext cx="11487113" cy="5727784"/>
+          </a:xfrm>
+          <a:prstGeom prst="rect">
+            <a:avLst/>
+          </a:prstGeom>
+        </p:spPr>
+      </p:pic>
+      <p:sp>
+        <p:nvSpPr>
+          <p:cNvPr id="2" name="Title 1">
+            <a:extLst>
+              <a:ext uri="{FF2B5EF4-FFF2-40B4-BE49-F238E27FC236}">
+                <a16:creationId xmlns:a16="http://schemas.microsoft.com/office/drawing/2014/main" id="{45D93199-8250-6C00-D549-B9B41252C91A}"/>
+              </a:ext>
+            </a:extLst>
+          </p:cNvPr>
+          <p:cNvSpPr>
+            <a:spLocks noGrp="1"/>
+          </p:cNvSpPr>
+          <p:nvPr>
+            <p:ph type="title"/>
+          </p:nvPr>
+        </p:nvSpPr>
+        <p:spPr/>
+        <p:txBody>
+          <a:bodyPr>
+            <a:normAutofit fontScale="90000"/>
+          </a:bodyPr>
+          <a:lstStyle/>
+          <a:p>
+            <a:r>
+              <a:rPr lang="en-US" dirty="0"/>
+              <a:t>CSV upload progress updates</a:t>
+            </a:r>
+          </a:p>
+        </p:txBody>
+      </p:sp>
+      <p:sp>
+        <p:nvSpPr>
+          <p:cNvPr id="8" name="TextBox 7">
+            <a:extLst>
+              <a:ext uri="{FF2B5EF4-FFF2-40B4-BE49-F238E27FC236}">
+                <a16:creationId xmlns:a16="http://schemas.microsoft.com/office/drawing/2014/main" id="{09B2CCE3-29F4-360F-B114-BC1AB268E8F3}"/>
+              </a:ext>
+            </a:extLst>
+          </p:cNvPr>
+          <p:cNvSpPr txBox="1"/>
+          <p:nvPr/>
+        </p:nvSpPr>
+        <p:spPr>
+          <a:xfrm>
+            <a:off x="6812503" y="2211804"/>
+            <a:ext cx="3536289" cy="276999"/>
+          </a:xfrm>
+          <a:prstGeom prst="rect">
+            <a:avLst/>
+          </a:prstGeom>
+          <a:noFill/>
+        </p:spPr>
+        <p:txBody>
+          <a:bodyPr wrap="none" rtlCol="0">
+            <a:spAutoFit/>
+          </a:bodyPr>
+          <a:lstStyle/>
+          <a:p>
+            <a:r>
+              <a:rPr lang="en-US" sz="1200" dirty="0">
+                <a:solidFill>
+                  <a:schemeClr val="accent5">
+                    <a:lumMod val="60000"/>
+                    <a:lumOff val="40000"/>
+                  </a:schemeClr>
+                </a:solidFill>
+              </a:rPr>
+              <a:t>After a successful upload, you’ll see this message.</a:t>
+            </a:r>
+          </a:p>
+        </p:txBody>
+      </p:sp>
+      <p:sp>
+        <p:nvSpPr>
+          <p:cNvPr id="9" name="TextBox 8">
+            <a:extLst>
+              <a:ext uri="{FF2B5EF4-FFF2-40B4-BE49-F238E27FC236}">
+                <a16:creationId xmlns:a16="http://schemas.microsoft.com/office/drawing/2014/main" id="{9D603A14-5931-1B17-8F2D-E22B46433E73}"/>
+              </a:ext>
+            </a:extLst>
+          </p:cNvPr>
+          <p:cNvSpPr txBox="1"/>
+          <p:nvPr/>
+        </p:nvSpPr>
+        <p:spPr>
+          <a:xfrm>
+            <a:off x="838200" y="4369197"/>
+            <a:ext cx="10869891" cy="646331"/>
+          </a:xfrm>
+          <a:prstGeom prst="rect">
+            <a:avLst/>
+          </a:prstGeom>
+          <a:noFill/>
+        </p:spPr>
+        <p:txBody>
+          <a:bodyPr wrap="square" rtlCol="0">
+            <a:spAutoFit/>
+          </a:bodyPr>
+          <a:lstStyle/>
+          <a:p>
+            <a:r>
+              <a:rPr lang="en-US" dirty="0"/>
+              <a:t>If you upload a non-CSV or a CSV where the columns aren’t what the reader expects, you haven’t affected the database, but the little gray update box will be…troubled. Just refresh &amp; try another file and all will be well.</a:t>
+            </a:r>
+          </a:p>
+        </p:txBody>
+      </p:sp>
+      <p:sp>
+        <p:nvSpPr>
+          <p:cNvPr id="10" name="TextBox 9">
+            <a:extLst>
+              <a:ext uri="{FF2B5EF4-FFF2-40B4-BE49-F238E27FC236}">
+                <a16:creationId xmlns:a16="http://schemas.microsoft.com/office/drawing/2014/main" id="{65F1E29E-7630-6390-7AE4-67F2597D73DF}"/>
+              </a:ext>
+            </a:extLst>
+          </p:cNvPr>
+          <p:cNvSpPr txBox="1"/>
+          <p:nvPr/>
+        </p:nvSpPr>
+        <p:spPr>
+          <a:xfrm>
+            <a:off x="7456601" y="1467402"/>
+            <a:ext cx="3401238" cy="461665"/>
+          </a:xfrm>
+          <a:prstGeom prst="rect">
+            <a:avLst/>
+          </a:prstGeom>
+          <a:noFill/>
+        </p:spPr>
+        <p:txBody>
+          <a:bodyPr wrap="square" rtlCol="0">
+            <a:spAutoFit/>
+          </a:bodyPr>
+          <a:lstStyle/>
+          <a:p>
+            <a:r>
+              <a:rPr lang="en-US" sz="1200" dirty="0">
+                <a:solidFill>
+                  <a:schemeClr val="accent5">
+                    <a:lumMod val="60000"/>
+                    <a:lumOff val="40000"/>
+                  </a:schemeClr>
+                </a:solidFill>
+              </a:rPr>
+              <a:t>As long as the CSV you upload is in the Maximo format, you shouldn’t have any problems</a:t>
+            </a:r>
+          </a:p>
+        </p:txBody>
+      </p:sp>
+    </p:spTree>
+    <p:extLst>
+      <p:ext uri="{BB962C8B-B14F-4D97-AF65-F5344CB8AC3E}">
+        <p14:creationId xmlns:p14="http://schemas.microsoft.com/office/powerpoint/2010/main" val="4058351882"/>
+      </p:ext>
+    </p:extLst>
+  </p:cSld>
+  <p:clrMapOvr>
+    <a:masterClrMapping/>
+  </p:clrMapOvr>
+</p:sld>
+</file>
+
+<file path=ppt/slides/slide3.xml><?xml version="1.0" encoding="utf-8"?>
+<p:sld xmlns:a="http://schemas.openxmlformats.org/drawingml/2006/main" xmlns:r="http://schemas.openxmlformats.org/officeDocument/2006/relationships" xmlns:p="http://schemas.openxmlformats.org/presentationml/2006/main">
+  <p:cSld>
+    <p:spTree>
+      <p:nvGrpSpPr>
+        <p:cNvPr id="1" name=""/>
+        <p:cNvGrpSpPr/>
+        <p:nvPr/>
+      </p:nvGrpSpPr>
+      <p:grpSpPr>
+        <a:xfrm>
+          <a:off x="0" y="0"/>
+          <a:ext cx="0" cy="0"/>
+          <a:chOff x="0" y="0"/>
+          <a:chExt cx="0" cy="0"/>
+        </a:xfrm>
+      </p:grpSpPr>
+      <p:pic>
+        <p:nvPicPr>
+          <p:cNvPr id="11" name="Picture 10">
+            <a:extLst>
+              <a:ext uri="{FF2B5EF4-FFF2-40B4-BE49-F238E27FC236}">
+                <a16:creationId xmlns:a16="http://schemas.microsoft.com/office/drawing/2014/main" id="{A2182D66-9260-0EE5-5DB5-2DAA50EA2CC4}"/>
+              </a:ext>
+            </a:extLst>
+          </p:cNvPr>
+          <p:cNvPicPr>
+            <a:picLocks noChangeAspect="1"/>
+          </p:cNvPicPr>
+          <p:nvPr/>
+        </p:nvPicPr>
+        <p:blipFill>
+          <a:blip r:embed="rId2"/>
+          <a:stretch>
+            <a:fillRect/>
+          </a:stretch>
+        </p:blipFill>
+        <p:spPr>
+          <a:xfrm>
+            <a:off x="0" y="905060"/>
+            <a:ext cx="5868219" cy="2391109"/>
+          </a:xfrm>
+          <a:prstGeom prst="rect">
+            <a:avLst/>
+          </a:prstGeom>
+        </p:spPr>
+      </p:pic>
+      <p:sp>
+        <p:nvSpPr>
+          <p:cNvPr id="2" name="Title 1">
+            <a:extLst>
+              <a:ext uri="{FF2B5EF4-FFF2-40B4-BE49-F238E27FC236}">
+                <a16:creationId xmlns:a16="http://schemas.microsoft.com/office/drawing/2014/main" id="{BC5F36A7-85E7-EC80-9460-38139C857C2B}"/>
+              </a:ext>
+            </a:extLst>
+          </p:cNvPr>
+          <p:cNvSpPr>
+            <a:spLocks noGrp="1"/>
+          </p:cNvSpPr>
+          <p:nvPr>
+            <p:ph type="title"/>
+          </p:nvPr>
+        </p:nvSpPr>
+        <p:spPr/>
+        <p:txBody>
+          <a:bodyPr>
+            <a:normAutofit fontScale="90000"/>
+          </a:bodyPr>
+          <a:lstStyle/>
+          <a:p>
+            <a:r>
+              <a:rPr lang="en-US" dirty="0"/>
+              <a:t>The .bat file</a:t>
+            </a:r>
+          </a:p>
+        </p:txBody>
+      </p:sp>
+      <p:sp>
+        <p:nvSpPr>
+          <p:cNvPr id="6" name="TextBox 5">
+            <a:extLst>
+              <a:ext uri="{FF2B5EF4-FFF2-40B4-BE49-F238E27FC236}">
+                <a16:creationId xmlns:a16="http://schemas.microsoft.com/office/drawing/2014/main" id="{6B512495-CAE5-E0B6-6BAA-2BDB1FB55AC5}"/>
+              </a:ext>
+            </a:extLst>
+          </p:cNvPr>
+          <p:cNvSpPr txBox="1"/>
+          <p:nvPr/>
+        </p:nvSpPr>
+        <p:spPr>
+          <a:xfrm>
+            <a:off x="7450523" y="3822113"/>
+            <a:ext cx="4518032" cy="338554"/>
+          </a:xfrm>
+          <a:prstGeom prst="rect">
+            <a:avLst/>
+          </a:prstGeom>
+          <a:noFill/>
+        </p:spPr>
+        <p:txBody>
+          <a:bodyPr wrap="none" rtlCol="0">
+            <a:spAutoFit/>
+          </a:bodyPr>
+          <a:lstStyle/>
+          <a:p>
+            <a:r>
+              <a:rPr lang="en-US" sz="1600" dirty="0"/>
+              <a:t>What you’ll see if you run straight from the P drive</a:t>
+            </a:r>
+          </a:p>
+        </p:txBody>
+      </p:sp>
+      <p:sp>
+        <p:nvSpPr>
+          <p:cNvPr id="7" name="TextBox 6">
+            <a:extLst>
+              <a:ext uri="{FF2B5EF4-FFF2-40B4-BE49-F238E27FC236}">
+                <a16:creationId xmlns:a16="http://schemas.microsoft.com/office/drawing/2014/main" id="{4C47D0C0-C544-5D9B-756C-AAE53A2F64DE}"/>
+              </a:ext>
+            </a:extLst>
+          </p:cNvPr>
+          <p:cNvSpPr txBox="1"/>
+          <p:nvPr/>
+        </p:nvSpPr>
+        <p:spPr>
+          <a:xfrm>
+            <a:off x="0" y="3331491"/>
+            <a:ext cx="6589699" cy="3185937"/>
+          </a:xfrm>
+          <a:prstGeom prst="rect">
+            <a:avLst/>
+          </a:prstGeom>
+          <a:noFill/>
+        </p:spPr>
+        <p:txBody>
+          <a:bodyPr wrap="square" rtlCol="0">
+            <a:spAutoFit/>
+          </a:bodyPr>
+          <a:lstStyle/>
+          <a:p>
+            <a:pPr>
+              <a:lnSpc>
+                <a:spcPct val="125000"/>
+              </a:lnSpc>
+            </a:pPr>
+            <a:r>
+              <a:rPr lang="en-US" dirty="0"/>
+              <a:t>The .bat file loads a few environment variables to so the database credentials can be stored outside the app. Because it automatically executes commands and doesn’t live on your computer’s hard drive, it’s flagged as malicious even if you’ve run it before. By default, double clicking this will execute its contents straight from the terminal. If you want to see what it’s doing, you’re welcome to open it in a text editor by right-clicking, then selecting edit (although you will still need to confirm the security dialog). Doing so will not execute the commands.</a:t>
+            </a:r>
+          </a:p>
+        </p:txBody>
+      </p:sp>
+      <p:sp>
+        <p:nvSpPr>
+          <p:cNvPr id="8" name="TextBox 7">
+            <a:extLst>
+              <a:ext uri="{FF2B5EF4-FFF2-40B4-BE49-F238E27FC236}">
+                <a16:creationId xmlns:a16="http://schemas.microsoft.com/office/drawing/2014/main" id="{C1FE9DDF-8C98-B755-3D3B-7F09D75EF00F}"/>
+              </a:ext>
+            </a:extLst>
+          </p:cNvPr>
+          <p:cNvSpPr txBox="1"/>
+          <p:nvPr/>
+        </p:nvSpPr>
+        <p:spPr>
+          <a:xfrm flipH="1">
+            <a:off x="6732574" y="5147539"/>
+            <a:ext cx="5535625" cy="923330"/>
+          </a:xfrm>
+          <a:prstGeom prst="rect">
+            <a:avLst/>
+          </a:prstGeom>
+          <a:noFill/>
+        </p:spPr>
+        <p:txBody>
+          <a:bodyPr wrap="square" rtlCol="0">
+            <a:spAutoFit/>
+          </a:bodyPr>
+          <a:lstStyle/>
+          <a:p>
+            <a:r>
+              <a:rPr lang="en-US" dirty="0"/>
+              <a:t>When you run the .bat file, you’ll see a terminal window pop up briefly, then disappear. That means the file has run and you’re ready to run the actual program.</a:t>
+            </a:r>
+          </a:p>
+        </p:txBody>
+      </p:sp>
+      <p:pic>
+        <p:nvPicPr>
+          <p:cNvPr id="9" name="Picture 8">
+            <a:extLst>
+              <a:ext uri="{FF2B5EF4-FFF2-40B4-BE49-F238E27FC236}">
+                <a16:creationId xmlns:a16="http://schemas.microsoft.com/office/drawing/2014/main" id="{5787D947-32EB-B814-2EFF-99D6727998D2}"/>
+              </a:ext>
+            </a:extLst>
+          </p:cNvPr>
+          <p:cNvPicPr>
+            <a:picLocks noChangeAspect="1"/>
+          </p:cNvPicPr>
+          <p:nvPr/>
+        </p:nvPicPr>
+        <p:blipFill>
+          <a:blip r:embed="rId3"/>
+          <a:stretch>
+            <a:fillRect/>
+          </a:stretch>
+        </p:blipFill>
+        <p:spPr>
+          <a:xfrm>
+            <a:off x="7414657" y="929874"/>
+            <a:ext cx="4410691" cy="2857899"/>
+          </a:xfrm>
+          <a:prstGeom prst="rect">
+            <a:avLst/>
+          </a:prstGeom>
+        </p:spPr>
+      </p:pic>
+    </p:spTree>
+    <p:extLst>
+      <p:ext uri="{BB962C8B-B14F-4D97-AF65-F5344CB8AC3E}">
+        <p14:creationId xmlns:p14="http://schemas.microsoft.com/office/powerpoint/2010/main" val="1393151498"/>
+      </p:ext>
+    </p:extLst>
+  </p:cSld>
+  <p:clrMapOvr>
+    <a:masterClrMapping/>
+  </p:clrMapOvr>
+</p:sld>
+</file>
+
+<file path=ppt/slides/slide4.xml><?xml version="1.0" encoding="utf-8"?>
+<p:sld xmlns:a="http://schemas.openxmlformats.org/drawingml/2006/main" xmlns:r="http://schemas.openxmlformats.org/officeDocument/2006/relationships" xmlns:p="http://schemas.openxmlformats.org/presentationml/2006/main">
+  <p:cSld>
+    <p:spTree>
+      <p:nvGrpSpPr>
+        <p:cNvPr id="1" name=""/>
+        <p:cNvGrpSpPr/>
+        <p:nvPr/>
+      </p:nvGrpSpPr>
+      <p:grpSpPr>
+        <a:xfrm>
+          <a:off x="0" y="0"/>
+          <a:ext cx="0" cy="0"/>
+          <a:chOff x="0" y="0"/>
+          <a:chExt cx="0" cy="0"/>
+        </a:xfrm>
+      </p:grpSpPr>
+      <p:sp>
+        <p:nvSpPr>
+          <p:cNvPr id="2" name="Title 1">
+            <a:extLst>
+              <a:ext uri="{FF2B5EF4-FFF2-40B4-BE49-F238E27FC236}">
+                <a16:creationId xmlns:a16="http://schemas.microsoft.com/office/drawing/2014/main" id="{7F194811-67A3-ACA0-CEE1-A9EA167456BB}"/>
+              </a:ext>
+            </a:extLst>
+          </p:cNvPr>
+          <p:cNvSpPr>
+            <a:spLocks noGrp="1"/>
+          </p:cNvSpPr>
+          <p:nvPr>
+            <p:ph type="title"/>
+          </p:nvPr>
+        </p:nvSpPr>
+        <p:spPr/>
+        <p:txBody>
+          <a:bodyPr>
+            <a:normAutofit fontScale="90000"/>
+          </a:bodyPr>
+          <a:lstStyle/>
+          <a:p>
+            <a:r>
+              <a:rPr lang="en-US" dirty="0"/>
+              <a:t>The .exe file</a:t>
+            </a:r>
+          </a:p>
+        </p:txBody>
+      </p:sp>
+      <p:sp>
+        <p:nvSpPr>
+          <p:cNvPr id="5" name="TextBox 4">
+            <a:extLst>
+              <a:ext uri="{FF2B5EF4-FFF2-40B4-BE49-F238E27FC236}">
+                <a16:creationId xmlns:a16="http://schemas.microsoft.com/office/drawing/2014/main" id="{D84C3A8A-7E55-2610-6A46-C98FD66F9CBA}"/>
+              </a:ext>
+            </a:extLst>
+          </p:cNvPr>
+          <p:cNvSpPr txBox="1"/>
+          <p:nvPr/>
+        </p:nvSpPr>
+        <p:spPr>
+          <a:xfrm>
+            <a:off x="137629" y="3213045"/>
+            <a:ext cx="5295900" cy="1200329"/>
+          </a:xfrm>
+          <a:prstGeom prst="rect">
+            <a:avLst/>
+          </a:prstGeom>
+          <a:noFill/>
+        </p:spPr>
+        <p:txBody>
+          <a:bodyPr wrap="square" rtlCol="0">
+            <a:spAutoFit/>
+          </a:bodyPr>
+          <a:lstStyle/>
+          <a:p>
+            <a:r>
+              <a:rPr lang="en-US" dirty="0"/>
+              <a:t>Once you’ve run the .bat file, you’re ready to go. Double clicking the .exe file will show the security dialog (because it’s an executable), but after you confirm, it should show something like this:</a:t>
+            </a:r>
+          </a:p>
+        </p:txBody>
+      </p:sp>
+      <p:sp>
+        <p:nvSpPr>
+          <p:cNvPr id="12" name="TextBox 11">
+            <a:extLst>
+              <a:ext uri="{FF2B5EF4-FFF2-40B4-BE49-F238E27FC236}">
+                <a16:creationId xmlns:a16="http://schemas.microsoft.com/office/drawing/2014/main" id="{C73AB218-A196-D44E-C072-E4881A9B0545}"/>
+              </a:ext>
+            </a:extLst>
+          </p:cNvPr>
+          <p:cNvSpPr txBox="1"/>
+          <p:nvPr/>
+        </p:nvSpPr>
+        <p:spPr>
+          <a:xfrm>
+            <a:off x="5750351" y="2117385"/>
+            <a:ext cx="6441649" cy="1477328"/>
+          </a:xfrm>
+          <a:prstGeom prst="rect">
+            <a:avLst/>
+          </a:prstGeom>
+          <a:noFill/>
+        </p:spPr>
+        <p:txBody>
+          <a:bodyPr wrap="square" rtlCol="0">
+            <a:spAutoFit/>
+          </a:bodyPr>
+          <a:lstStyle/>
+          <a:p>
+            <a:r>
+              <a:rPr lang="en-US" dirty="0"/>
+              <a:t>This app is hosted locally, so there’s not a website to go to (in the traditional sense). Open any browser and type in the address from the second line of the terminal output. I’m 99% sure it’s stable at localhost:5000, but it will always match whatever you see in the terminal created by the .exe.</a:t>
+            </a:r>
+          </a:p>
+        </p:txBody>
+      </p:sp>
+      <p:sp>
+        <p:nvSpPr>
+          <p:cNvPr id="13" name="TextBox 12">
+            <a:extLst>
+              <a:ext uri="{FF2B5EF4-FFF2-40B4-BE49-F238E27FC236}">
+                <a16:creationId xmlns:a16="http://schemas.microsoft.com/office/drawing/2014/main" id="{E684CA83-4723-2D99-5B80-6CBDAC320240}"/>
+              </a:ext>
+            </a:extLst>
+          </p:cNvPr>
+          <p:cNvSpPr txBox="1"/>
+          <p:nvPr/>
+        </p:nvSpPr>
+        <p:spPr>
+          <a:xfrm>
+            <a:off x="5571157" y="5103674"/>
+            <a:ext cx="6620842" cy="1754326"/>
+          </a:xfrm>
+          <a:prstGeom prst="rect">
+            <a:avLst/>
+          </a:prstGeom>
+          <a:noFill/>
+        </p:spPr>
+        <p:txBody>
+          <a:bodyPr wrap="square" rtlCol="0">
+            <a:spAutoFit/>
+          </a:bodyPr>
+          <a:lstStyle/>
+          <a:p>
+            <a:r>
+              <a:rPr lang="en-US" dirty="0"/>
+              <a:t>Side note: the app’s lifespan is tied to the terminal, not the browser. Thus, it doesn’t care when you close the tab, go to a different site, or even close the browser entirely.  The only way to end it is to go back to the terminal and either close it or press </a:t>
+            </a:r>
+            <a:r>
+              <a:rPr lang="en-US" dirty="0" err="1"/>
+              <a:t>Ctrl+C</a:t>
+            </a:r>
+            <a:r>
+              <a:rPr lang="en-US" dirty="0"/>
+              <a:t> as it indicates. Once the app closes, all tabs currently viewing it will try to reconnect a couple times before giving up.</a:t>
+            </a:r>
+          </a:p>
+        </p:txBody>
+      </p:sp>
+      <p:pic>
+        <p:nvPicPr>
+          <p:cNvPr id="4" name="Picture 3">
+            <a:extLst>
+              <a:ext uri="{FF2B5EF4-FFF2-40B4-BE49-F238E27FC236}">
+                <a16:creationId xmlns:a16="http://schemas.microsoft.com/office/drawing/2014/main" id="{0C07EA30-174B-00CE-D1C4-44B394DB23FB}"/>
+              </a:ext>
+            </a:extLst>
+          </p:cNvPr>
+          <p:cNvPicPr>
+            <a:picLocks noChangeAspect="1"/>
+          </p:cNvPicPr>
+          <p:nvPr/>
+        </p:nvPicPr>
+        <p:blipFill>
+          <a:blip r:embed="rId2"/>
+          <a:stretch>
+            <a:fillRect/>
+          </a:stretch>
+        </p:blipFill>
+        <p:spPr>
+          <a:xfrm>
+            <a:off x="227781" y="1138390"/>
+            <a:ext cx="4534293" cy="1957990"/>
+          </a:xfrm>
+          <a:prstGeom prst="rect">
+            <a:avLst/>
+          </a:prstGeom>
+        </p:spPr>
+      </p:pic>
+      <p:pic>
+        <p:nvPicPr>
+          <p:cNvPr id="8" name="Picture 7">
+            <a:extLst>
+              <a:ext uri="{FF2B5EF4-FFF2-40B4-BE49-F238E27FC236}">
+                <a16:creationId xmlns:a16="http://schemas.microsoft.com/office/drawing/2014/main" id="{B190AF28-8898-CCDA-699B-F340F463E23D}"/>
+              </a:ext>
+            </a:extLst>
+          </p:cNvPr>
+          <p:cNvPicPr>
+            <a:picLocks noChangeAspect="1"/>
+          </p:cNvPicPr>
+          <p:nvPr/>
+        </p:nvPicPr>
+        <p:blipFill>
+          <a:blip r:embed="rId3"/>
+          <a:stretch>
+            <a:fillRect/>
+          </a:stretch>
+        </p:blipFill>
+        <p:spPr>
+          <a:xfrm>
+            <a:off x="227781" y="4391433"/>
+            <a:ext cx="5024487" cy="2466567"/>
+          </a:xfrm>
+          <a:prstGeom prst="rect">
+            <a:avLst/>
+          </a:prstGeom>
+        </p:spPr>
+      </p:pic>
+      <p:pic>
+        <p:nvPicPr>
+          <p:cNvPr id="6" name="Picture 5">
+            <a:extLst>
+              <a:ext uri="{FF2B5EF4-FFF2-40B4-BE49-F238E27FC236}">
+                <a16:creationId xmlns:a16="http://schemas.microsoft.com/office/drawing/2014/main" id="{C534E9EA-5509-4663-312A-981A641D6ABD}"/>
+              </a:ext>
+            </a:extLst>
+          </p:cNvPr>
+          <p:cNvPicPr>
+            <a:picLocks noChangeAspect="1"/>
+          </p:cNvPicPr>
+          <p:nvPr/>
+        </p:nvPicPr>
+        <p:blipFill>
+          <a:blip r:embed="rId4"/>
+          <a:stretch>
+            <a:fillRect/>
+          </a:stretch>
+        </p:blipFill>
+        <p:spPr>
+          <a:xfrm>
+            <a:off x="6928680" y="905060"/>
+            <a:ext cx="3905795" cy="1143160"/>
+          </a:xfrm>
+          <a:prstGeom prst="rect">
+            <a:avLst/>
+          </a:prstGeom>
+        </p:spPr>
+      </p:pic>
+      <p:pic>
+        <p:nvPicPr>
+          <p:cNvPr id="9" name="Picture 8">
+            <a:extLst>
+              <a:ext uri="{FF2B5EF4-FFF2-40B4-BE49-F238E27FC236}">
+                <a16:creationId xmlns:a16="http://schemas.microsoft.com/office/drawing/2014/main" id="{2D035876-4AF3-0FB6-B9A0-FCF35212DF94}"/>
+              </a:ext>
+            </a:extLst>
+          </p:cNvPr>
+          <p:cNvPicPr>
+            <a:picLocks noChangeAspect="1"/>
+          </p:cNvPicPr>
+          <p:nvPr/>
+        </p:nvPicPr>
+        <p:blipFill>
+          <a:blip r:embed="rId5"/>
+          <a:stretch>
+            <a:fillRect/>
+          </a:stretch>
+        </p:blipFill>
+        <p:spPr>
+          <a:xfrm>
+            <a:off x="5990274" y="3550541"/>
+            <a:ext cx="5446409" cy="1597306"/>
+          </a:xfrm>
+          <a:prstGeom prst="rect">
+            <a:avLst/>
+          </a:prstGeom>
+        </p:spPr>
+      </p:pic>
+    </p:spTree>
+    <p:extLst>
+      <p:ext uri="{BB962C8B-B14F-4D97-AF65-F5344CB8AC3E}">
+        <p14:creationId xmlns:p14="http://schemas.microsoft.com/office/powerpoint/2010/main" val="1392230391"/>
+      </p:ext>
+    </p:extLst>
+  </p:cSld>
+  <p:clrMapOvr>
+    <a:masterClrMapping/>
+  </p:clrMapOvr>
+</p:sld>
+</file>
+
+<file path=ppt/slides/slide5.xml><?xml version="1.0" encoding="utf-8"?>
 <p:sld xmlns:a="http://schemas.openxmlformats.org/drawingml/2006/main" xmlns:r="http://schemas.openxmlformats.org/officeDocument/2006/relationships" xmlns:p="http://schemas.openxmlformats.org/presentationml/2006/main">
   <p:cSld>
     <p:spTree>
@@ -7016,1093 +9786,7 @@
 </p:sld>
 </file>
 
-<file path=ppt/slides/slide20.xml><?xml version="1.0" encoding="utf-8"?>
-<p:sld xmlns:a="http://schemas.openxmlformats.org/drawingml/2006/main" xmlns:r="http://schemas.openxmlformats.org/officeDocument/2006/relationships" xmlns:p="http://schemas.openxmlformats.org/presentationml/2006/main">
-  <p:cSld>
-    <p:spTree>
-      <p:nvGrpSpPr>
-        <p:cNvPr id="1" name=""/>
-        <p:cNvGrpSpPr/>
-        <p:nvPr/>
-      </p:nvGrpSpPr>
-      <p:grpSpPr>
-        <a:xfrm>
-          <a:off x="0" y="0"/>
-          <a:ext cx="0" cy="0"/>
-          <a:chOff x="0" y="0"/>
-          <a:chExt cx="0" cy="0"/>
-        </a:xfrm>
-      </p:grpSpPr>
-      <p:sp>
-        <p:nvSpPr>
-          <p:cNvPr id="2" name="Title 1">
-            <a:extLst>
-              <a:ext uri="{FF2B5EF4-FFF2-40B4-BE49-F238E27FC236}">
-                <a16:creationId xmlns:a16="http://schemas.microsoft.com/office/drawing/2014/main" id="{53CABD7A-A739-D1BC-CE4D-49BD26998456}"/>
-              </a:ext>
-            </a:extLst>
-          </p:cNvPr>
-          <p:cNvSpPr>
-            <a:spLocks noGrp="1"/>
-          </p:cNvSpPr>
-          <p:nvPr>
-            <p:ph type="title"/>
-          </p:nvPr>
-        </p:nvSpPr>
-        <p:spPr/>
-        <p:txBody>
-          <a:bodyPr>
-            <a:normAutofit fontScale="90000"/>
-          </a:bodyPr>
-          <a:lstStyle/>
-          <a:p>
-            <a:r>
-              <a:rPr lang="en-US" dirty="0"/>
-              <a:t>Successful line update</a:t>
-            </a:r>
-          </a:p>
-        </p:txBody>
-      </p:sp>
-      <p:pic>
-        <p:nvPicPr>
-          <p:cNvPr id="5" name="Content Placeholder 4">
-            <a:extLst>
-              <a:ext uri="{FF2B5EF4-FFF2-40B4-BE49-F238E27FC236}">
-                <a16:creationId xmlns:a16="http://schemas.microsoft.com/office/drawing/2014/main" id="{7370A13E-7DC2-FD68-68C5-16F158D76ECA}"/>
-              </a:ext>
-            </a:extLst>
-          </p:cNvPr>
-          <p:cNvPicPr>
-            <a:picLocks noGrp="1" noChangeAspect="1"/>
-          </p:cNvPicPr>
-          <p:nvPr>
-            <p:ph idx="1"/>
-          </p:nvPr>
-        </p:nvPicPr>
-        <p:blipFill>
-          <a:blip r:embed="rId2"/>
-          <a:stretch>
-            <a:fillRect/>
-          </a:stretch>
-        </p:blipFill>
-        <p:spPr>
-          <a:xfrm>
-            <a:off x="313251" y="940411"/>
-            <a:ext cx="11564522" cy="5776213"/>
-          </a:xfrm>
-          <a:prstGeom prst="rect">
-            <a:avLst/>
-          </a:prstGeom>
-        </p:spPr>
-      </p:pic>
-      <p:sp>
-        <p:nvSpPr>
-          <p:cNvPr id="6" name="TextBox 5">
-            <a:extLst>
-              <a:ext uri="{FF2B5EF4-FFF2-40B4-BE49-F238E27FC236}">
-                <a16:creationId xmlns:a16="http://schemas.microsoft.com/office/drawing/2014/main" id="{BB9860F3-6546-A5FA-942C-EC2D01BD01C0}"/>
-              </a:ext>
-            </a:extLst>
-          </p:cNvPr>
-          <p:cNvSpPr txBox="1"/>
-          <p:nvPr/>
-        </p:nvSpPr>
-        <p:spPr>
-          <a:xfrm>
-            <a:off x="8536068" y="5792934"/>
-            <a:ext cx="2728964" cy="646331"/>
-          </a:xfrm>
-          <a:prstGeom prst="rect">
-            <a:avLst/>
-          </a:prstGeom>
-          <a:noFill/>
-        </p:spPr>
-        <p:txBody>
-          <a:bodyPr wrap="square" rtlCol="0">
-            <a:spAutoFit/>
-          </a:bodyPr>
-          <a:lstStyle/>
-          <a:p>
-            <a:r>
-              <a:rPr lang="en-US" sz="1200" dirty="0">
-                <a:solidFill>
-                  <a:schemeClr val="accent5">
-                    <a:lumMod val="60000"/>
-                    <a:lumOff val="40000"/>
-                  </a:schemeClr>
-                </a:solidFill>
-              </a:rPr>
-              <a:t>This toast lets you know the auth level change was successful, even if the line is off screen</a:t>
-            </a:r>
-          </a:p>
-        </p:txBody>
-      </p:sp>
-    </p:spTree>
-    <p:extLst>
-      <p:ext uri="{BB962C8B-B14F-4D97-AF65-F5344CB8AC3E}">
-        <p14:creationId xmlns:p14="http://schemas.microsoft.com/office/powerpoint/2010/main" val="402155355"/>
-      </p:ext>
-    </p:extLst>
-  </p:cSld>
-  <p:clrMapOvr>
-    <a:masterClrMapping/>
-  </p:clrMapOvr>
-</p:sld>
-</file>
-
-<file path=ppt/slides/slide21.xml><?xml version="1.0" encoding="utf-8"?>
-<p:sld xmlns:a="http://schemas.openxmlformats.org/drawingml/2006/main" xmlns:r="http://schemas.openxmlformats.org/officeDocument/2006/relationships" xmlns:p="http://schemas.openxmlformats.org/presentationml/2006/main">
-  <p:cSld>
-    <p:spTree>
-      <p:nvGrpSpPr>
-        <p:cNvPr id="1" name="">
-          <a:extLst>
-            <a:ext uri="{FF2B5EF4-FFF2-40B4-BE49-F238E27FC236}">
-              <a16:creationId xmlns:a16="http://schemas.microsoft.com/office/drawing/2014/main" id="{7955D05A-C958-EADA-99D9-E49968776270}"/>
-            </a:ext>
-          </a:extLst>
-        </p:cNvPr>
-        <p:cNvGrpSpPr/>
-        <p:nvPr/>
-      </p:nvGrpSpPr>
-      <p:grpSpPr>
-        <a:xfrm>
-          <a:off x="0" y="0"/>
-          <a:ext cx="0" cy="0"/>
-          <a:chOff x="0" y="0"/>
-          <a:chExt cx="0" cy="0"/>
-        </a:xfrm>
-      </p:grpSpPr>
-      <p:pic>
-        <p:nvPicPr>
-          <p:cNvPr id="5" name="Picture 4">
-            <a:extLst>
-              <a:ext uri="{FF2B5EF4-FFF2-40B4-BE49-F238E27FC236}">
-                <a16:creationId xmlns:a16="http://schemas.microsoft.com/office/drawing/2014/main" id="{7A14427B-AF35-A3E6-4305-2618619E7148}"/>
-              </a:ext>
-            </a:extLst>
-          </p:cNvPr>
-          <p:cNvPicPr>
-            <a:picLocks noChangeAspect="1"/>
-          </p:cNvPicPr>
-          <p:nvPr/>
-        </p:nvPicPr>
-        <p:blipFill>
-          <a:blip r:embed="rId2"/>
-          <a:stretch>
-            <a:fillRect/>
-          </a:stretch>
-        </p:blipFill>
-        <p:spPr>
-          <a:xfrm>
-            <a:off x="311085" y="905060"/>
-            <a:ext cx="11603721" cy="5738237"/>
-          </a:xfrm>
-          <a:prstGeom prst="rect">
-            <a:avLst/>
-          </a:prstGeom>
-        </p:spPr>
-      </p:pic>
-      <p:sp>
-        <p:nvSpPr>
-          <p:cNvPr id="2" name="Title 1">
-            <a:extLst>
-              <a:ext uri="{FF2B5EF4-FFF2-40B4-BE49-F238E27FC236}">
-                <a16:creationId xmlns:a16="http://schemas.microsoft.com/office/drawing/2014/main" id="{EA7C9B24-FA12-59EB-6D2D-8FFE5FCD2495}"/>
-              </a:ext>
-            </a:extLst>
-          </p:cNvPr>
-          <p:cNvSpPr>
-            <a:spLocks noGrp="1"/>
-          </p:cNvSpPr>
-          <p:nvPr>
-            <p:ph type="title"/>
-          </p:nvPr>
-        </p:nvSpPr>
-        <p:spPr/>
-        <p:txBody>
-          <a:bodyPr>
-            <a:normAutofit fontScale="90000"/>
-          </a:bodyPr>
-          <a:lstStyle/>
-          <a:p>
-            <a:r>
-              <a:rPr lang="en-US" dirty="0"/>
-              <a:t>Line removal</a:t>
-            </a:r>
-          </a:p>
-        </p:txBody>
-      </p:sp>
-      <p:sp>
-        <p:nvSpPr>
-          <p:cNvPr id="6" name="TextBox 5">
-            <a:extLst>
-              <a:ext uri="{FF2B5EF4-FFF2-40B4-BE49-F238E27FC236}">
-                <a16:creationId xmlns:a16="http://schemas.microsoft.com/office/drawing/2014/main" id="{F0E759CB-89D7-2B1F-569E-5DD58979ECDC}"/>
-              </a:ext>
-            </a:extLst>
-          </p:cNvPr>
-          <p:cNvSpPr txBox="1"/>
-          <p:nvPr/>
-        </p:nvSpPr>
-        <p:spPr>
-          <a:xfrm>
-            <a:off x="6280150" y="1643391"/>
-            <a:ext cx="1323997" cy="461665"/>
-          </a:xfrm>
-          <a:prstGeom prst="rect">
-            <a:avLst/>
-          </a:prstGeom>
-          <a:noFill/>
-        </p:spPr>
-        <p:txBody>
-          <a:bodyPr wrap="square" rtlCol="0">
-            <a:spAutoFit/>
-          </a:bodyPr>
-          <a:lstStyle/>
-          <a:p>
-            <a:r>
-              <a:rPr lang="en-US" sz="1200" dirty="0">
-                <a:solidFill>
-                  <a:schemeClr val="accent5">
-                    <a:lumMod val="60000"/>
-                    <a:lumOff val="40000"/>
-                  </a:schemeClr>
-                </a:solidFill>
-              </a:rPr>
-              <a:t>Removes line from associate</a:t>
-            </a:r>
-          </a:p>
-        </p:txBody>
-      </p:sp>
-      <p:cxnSp>
-        <p:nvCxnSpPr>
-          <p:cNvPr id="8" name="Straight Arrow Connector 7">
-            <a:extLst>
-              <a:ext uri="{FF2B5EF4-FFF2-40B4-BE49-F238E27FC236}">
-                <a16:creationId xmlns:a16="http://schemas.microsoft.com/office/drawing/2014/main" id="{86F9D3DF-A617-F3A2-2757-72D1A80208B8}"/>
-              </a:ext>
-            </a:extLst>
-          </p:cNvPr>
-          <p:cNvCxnSpPr/>
-          <p:nvPr/>
-        </p:nvCxnSpPr>
-        <p:spPr>
-          <a:xfrm>
-            <a:off x="7023100" y="2066925"/>
-            <a:ext cx="212725" cy="174625"/>
-          </a:xfrm>
-          <a:prstGeom prst="straightConnector1">
-            <a:avLst/>
-          </a:prstGeom>
-          <a:ln>
-            <a:tailEnd type="triangle"/>
-          </a:ln>
-        </p:spPr>
-        <p:style>
-          <a:lnRef idx="2">
-            <a:schemeClr val="accent1"/>
-          </a:lnRef>
-          <a:fillRef idx="0">
-            <a:schemeClr val="accent1"/>
-          </a:fillRef>
-          <a:effectRef idx="1">
-            <a:schemeClr val="accent1"/>
-          </a:effectRef>
-          <a:fontRef idx="minor">
-            <a:schemeClr val="tx1"/>
-          </a:fontRef>
-        </p:style>
-      </p:cxnSp>
-      <p:sp>
-        <p:nvSpPr>
-          <p:cNvPr id="10" name="TextBox 9">
-            <a:extLst>
-              <a:ext uri="{FF2B5EF4-FFF2-40B4-BE49-F238E27FC236}">
-                <a16:creationId xmlns:a16="http://schemas.microsoft.com/office/drawing/2014/main" id="{70F1E900-9919-AA6F-A9B4-33B8155E5256}"/>
-              </a:ext>
-            </a:extLst>
-          </p:cNvPr>
-          <p:cNvSpPr txBox="1"/>
-          <p:nvPr/>
-        </p:nvSpPr>
-        <p:spPr>
-          <a:xfrm>
-            <a:off x="6540157" y="1209675"/>
-            <a:ext cx="956416" cy="276999"/>
-          </a:xfrm>
-          <a:prstGeom prst="rect">
-            <a:avLst/>
-          </a:prstGeom>
-          <a:noFill/>
-        </p:spPr>
-        <p:txBody>
-          <a:bodyPr wrap="none" rtlCol="0">
-            <a:spAutoFit/>
-          </a:bodyPr>
-          <a:lstStyle/>
-          <a:p>
-            <a:r>
-              <a:rPr lang="en-US" sz="1200" dirty="0">
-                <a:solidFill>
-                  <a:schemeClr val="accent5">
-                    <a:lumMod val="60000"/>
-                    <a:lumOff val="40000"/>
-                  </a:schemeClr>
-                </a:solidFill>
-              </a:rPr>
-              <a:t>Also cancel</a:t>
-            </a:r>
-          </a:p>
-        </p:txBody>
-      </p:sp>
-      <p:sp>
-        <p:nvSpPr>
-          <p:cNvPr id="11" name="TextBox 10">
-            <a:extLst>
-              <a:ext uri="{FF2B5EF4-FFF2-40B4-BE49-F238E27FC236}">
-                <a16:creationId xmlns:a16="http://schemas.microsoft.com/office/drawing/2014/main" id="{0E09CC09-8774-BE0B-2FA7-EFE29EE8C089}"/>
-              </a:ext>
-            </a:extLst>
-          </p:cNvPr>
-          <p:cNvSpPr txBox="1"/>
-          <p:nvPr/>
-        </p:nvSpPr>
-        <p:spPr>
-          <a:xfrm>
-            <a:off x="5095715" y="2214175"/>
-            <a:ext cx="1237839" cy="276999"/>
-          </a:xfrm>
-          <a:prstGeom prst="rect">
-            <a:avLst/>
-          </a:prstGeom>
-          <a:noFill/>
-        </p:spPr>
-        <p:txBody>
-          <a:bodyPr wrap="none" rtlCol="0">
-            <a:spAutoFit/>
-          </a:bodyPr>
-          <a:lstStyle/>
-          <a:p>
-            <a:r>
-              <a:rPr lang="en-US" sz="1200" dirty="0">
-                <a:solidFill>
-                  <a:schemeClr val="accent5">
-                    <a:lumMod val="60000"/>
-                    <a:lumOff val="40000"/>
-                  </a:schemeClr>
-                </a:solidFill>
-              </a:rPr>
-              <a:t>Cancel deletion</a:t>
-            </a:r>
-          </a:p>
-        </p:txBody>
-      </p:sp>
-      <p:sp>
-        <p:nvSpPr>
-          <p:cNvPr id="12" name="TextBox 11">
-            <a:extLst>
-              <a:ext uri="{FF2B5EF4-FFF2-40B4-BE49-F238E27FC236}">
-                <a16:creationId xmlns:a16="http://schemas.microsoft.com/office/drawing/2014/main" id="{CE6DEEEB-BB97-10BA-01B7-CC03331EF4B7}"/>
-              </a:ext>
-            </a:extLst>
-          </p:cNvPr>
-          <p:cNvSpPr txBox="1"/>
-          <p:nvPr/>
-        </p:nvSpPr>
-        <p:spPr>
-          <a:xfrm>
-            <a:off x="7101656" y="5648325"/>
-            <a:ext cx="4779259" cy="584775"/>
-          </a:xfrm>
-          <a:prstGeom prst="rect">
-            <a:avLst/>
-          </a:prstGeom>
-          <a:noFill/>
-        </p:spPr>
-        <p:txBody>
-          <a:bodyPr wrap="square" rtlCol="0">
-            <a:spAutoFit/>
-          </a:bodyPr>
-          <a:lstStyle/>
-          <a:p>
-            <a:r>
-              <a:rPr lang="en-US" sz="1600" dirty="0"/>
-              <a:t>This is what you see when you press the trash can for an associate’s line</a:t>
-            </a:r>
-          </a:p>
-        </p:txBody>
-      </p:sp>
-    </p:spTree>
-    <p:extLst>
-      <p:ext uri="{BB962C8B-B14F-4D97-AF65-F5344CB8AC3E}">
-        <p14:creationId xmlns:p14="http://schemas.microsoft.com/office/powerpoint/2010/main" val="513862380"/>
-      </p:ext>
-    </p:extLst>
-  </p:cSld>
-  <p:clrMapOvr>
-    <a:masterClrMapping/>
-  </p:clrMapOvr>
-</p:sld>
-</file>
-
-<file path=ppt/slides/slide22.xml><?xml version="1.0" encoding="utf-8"?>
-<p:sld xmlns:a="http://schemas.openxmlformats.org/drawingml/2006/main" xmlns:r="http://schemas.openxmlformats.org/officeDocument/2006/relationships" xmlns:p="http://schemas.openxmlformats.org/presentationml/2006/main">
-  <p:cSld>
-    <p:spTree>
-      <p:nvGrpSpPr>
-        <p:cNvPr id="1" name=""/>
-        <p:cNvGrpSpPr/>
-        <p:nvPr/>
-      </p:nvGrpSpPr>
-      <p:grpSpPr>
-        <a:xfrm>
-          <a:off x="0" y="0"/>
-          <a:ext cx="0" cy="0"/>
-          <a:chOff x="0" y="0"/>
-          <a:chExt cx="0" cy="0"/>
-        </a:xfrm>
-      </p:grpSpPr>
-      <p:sp>
-        <p:nvSpPr>
-          <p:cNvPr id="2" name="Title 1">
-            <a:extLst>
-              <a:ext uri="{FF2B5EF4-FFF2-40B4-BE49-F238E27FC236}">
-                <a16:creationId xmlns:a16="http://schemas.microsoft.com/office/drawing/2014/main" id="{30A0EF82-9048-D9C8-FD62-CFD3615CE3D0}"/>
-              </a:ext>
-            </a:extLst>
-          </p:cNvPr>
-          <p:cNvSpPr>
-            <a:spLocks noGrp="1"/>
-          </p:cNvSpPr>
-          <p:nvPr>
-            <p:ph type="title"/>
-          </p:nvPr>
-        </p:nvSpPr>
-        <p:spPr/>
-        <p:txBody>
-          <a:bodyPr>
-            <a:normAutofit fontScale="90000"/>
-          </a:bodyPr>
-          <a:lstStyle/>
-          <a:p>
-            <a:r>
-              <a:rPr lang="en-US" dirty="0"/>
-              <a:t>Successful line removal</a:t>
-            </a:r>
-          </a:p>
-        </p:txBody>
-      </p:sp>
-      <p:pic>
-        <p:nvPicPr>
-          <p:cNvPr id="5" name="Content Placeholder 4">
-            <a:extLst>
-              <a:ext uri="{FF2B5EF4-FFF2-40B4-BE49-F238E27FC236}">
-                <a16:creationId xmlns:a16="http://schemas.microsoft.com/office/drawing/2014/main" id="{27C5272A-7070-1B32-6C90-14A129A29419}"/>
-              </a:ext>
-            </a:extLst>
-          </p:cNvPr>
-          <p:cNvPicPr>
-            <a:picLocks noGrp="1" noChangeAspect="1"/>
-          </p:cNvPicPr>
-          <p:nvPr>
-            <p:ph idx="1"/>
-          </p:nvPr>
-        </p:nvPicPr>
-        <p:blipFill>
-          <a:blip r:embed="rId2"/>
-          <a:stretch>
-            <a:fillRect/>
-          </a:stretch>
-        </p:blipFill>
-        <p:spPr>
-          <a:xfrm>
-            <a:off x="287038" y="905060"/>
-            <a:ext cx="11600161" cy="5772794"/>
-          </a:xfrm>
-          <a:prstGeom prst="rect">
-            <a:avLst/>
-          </a:prstGeom>
-        </p:spPr>
-      </p:pic>
-      <p:sp>
-        <p:nvSpPr>
-          <p:cNvPr id="6" name="TextBox 5">
-            <a:extLst>
-              <a:ext uri="{FF2B5EF4-FFF2-40B4-BE49-F238E27FC236}">
-                <a16:creationId xmlns:a16="http://schemas.microsoft.com/office/drawing/2014/main" id="{9B358EE2-CCFC-730B-F954-2694FB08DA87}"/>
-              </a:ext>
-            </a:extLst>
-          </p:cNvPr>
-          <p:cNvSpPr txBox="1"/>
-          <p:nvPr/>
-        </p:nvSpPr>
-        <p:spPr>
-          <a:xfrm>
-            <a:off x="8999457" y="5758421"/>
-            <a:ext cx="2007909" cy="646331"/>
-          </a:xfrm>
-          <a:prstGeom prst="rect">
-            <a:avLst/>
-          </a:prstGeom>
-          <a:noFill/>
-        </p:spPr>
-        <p:txBody>
-          <a:bodyPr wrap="square" rtlCol="0">
-            <a:spAutoFit/>
-          </a:bodyPr>
-          <a:lstStyle/>
-          <a:p>
-            <a:r>
-              <a:rPr lang="en-US" sz="1200" dirty="0">
-                <a:solidFill>
-                  <a:schemeClr val="accent5">
-                    <a:lumMod val="60000"/>
-                    <a:lumOff val="40000"/>
-                  </a:schemeClr>
-                </a:solidFill>
-              </a:rPr>
-              <a:t>You can be sure the deletion worked if you see this toast</a:t>
-            </a:r>
-          </a:p>
-        </p:txBody>
-      </p:sp>
-      <p:sp>
-        <p:nvSpPr>
-          <p:cNvPr id="8" name="TextBox 7">
-            <a:extLst>
-              <a:ext uri="{FF2B5EF4-FFF2-40B4-BE49-F238E27FC236}">
-                <a16:creationId xmlns:a16="http://schemas.microsoft.com/office/drawing/2014/main" id="{20C4C6A3-B71C-3D12-DBC4-2C0A581608C5}"/>
-              </a:ext>
-            </a:extLst>
-          </p:cNvPr>
-          <p:cNvSpPr txBox="1"/>
-          <p:nvPr/>
-        </p:nvSpPr>
-        <p:spPr>
-          <a:xfrm>
-            <a:off x="3820212" y="1076252"/>
-            <a:ext cx="3589256" cy="461665"/>
-          </a:xfrm>
-          <a:prstGeom prst="rect">
-            <a:avLst/>
-          </a:prstGeom>
-          <a:noFill/>
-        </p:spPr>
-        <p:txBody>
-          <a:bodyPr wrap="square">
-            <a:spAutoFit/>
-          </a:bodyPr>
-          <a:lstStyle/>
-          <a:p>
-            <a:r>
-              <a:rPr lang="en-US" sz="1200" dirty="0">
-                <a:solidFill>
-                  <a:schemeClr val="accent5">
-                    <a:lumMod val="60000"/>
-                    <a:lumOff val="40000"/>
-                  </a:schemeClr>
-                </a:solidFill>
-              </a:rPr>
-              <a:t>Notably, this only revokes this associate’s reset privileges for this line. It does not delete the line.</a:t>
-            </a:r>
-          </a:p>
-        </p:txBody>
-      </p:sp>
-    </p:spTree>
-    <p:extLst>
-      <p:ext uri="{BB962C8B-B14F-4D97-AF65-F5344CB8AC3E}">
-        <p14:creationId xmlns:p14="http://schemas.microsoft.com/office/powerpoint/2010/main" val="1088793323"/>
-      </p:ext>
-    </p:extLst>
-  </p:cSld>
-  <p:clrMapOvr>
-    <a:masterClrMapping/>
-  </p:clrMapOvr>
-</p:sld>
-</file>
-
-<file path=ppt/slides/slide23.xml><?xml version="1.0" encoding="utf-8"?>
-<p:sld xmlns:a="http://schemas.openxmlformats.org/drawingml/2006/main" xmlns:r="http://schemas.openxmlformats.org/officeDocument/2006/relationships" xmlns:p="http://schemas.openxmlformats.org/presentationml/2006/main">
-  <p:cSld>
-    <p:spTree>
-      <p:nvGrpSpPr>
-        <p:cNvPr id="1" name="">
-          <a:extLst>
-            <a:ext uri="{FF2B5EF4-FFF2-40B4-BE49-F238E27FC236}">
-              <a16:creationId xmlns:a16="http://schemas.microsoft.com/office/drawing/2014/main" id="{6E4E0CD0-C9DB-7EA0-FDC1-3183B397AD6D}"/>
-            </a:ext>
-          </a:extLst>
-        </p:cNvPr>
-        <p:cNvGrpSpPr/>
-        <p:nvPr/>
-      </p:nvGrpSpPr>
-      <p:grpSpPr>
-        <a:xfrm>
-          <a:off x="0" y="0"/>
-          <a:ext cx="0" cy="0"/>
-          <a:chOff x="0" y="0"/>
-          <a:chExt cx="0" cy="0"/>
-        </a:xfrm>
-      </p:grpSpPr>
-      <p:pic>
-        <p:nvPicPr>
-          <p:cNvPr id="4" name="Picture 3">
-            <a:extLst>
-              <a:ext uri="{FF2B5EF4-FFF2-40B4-BE49-F238E27FC236}">
-                <a16:creationId xmlns:a16="http://schemas.microsoft.com/office/drawing/2014/main" id="{E8D9E11E-3231-F932-675B-E27C640CBA77}"/>
-              </a:ext>
-            </a:extLst>
-          </p:cNvPr>
-          <p:cNvPicPr>
-            <a:picLocks noChangeAspect="1"/>
-          </p:cNvPicPr>
-          <p:nvPr/>
-        </p:nvPicPr>
-        <p:blipFill>
-          <a:blip r:embed="rId2"/>
-          <a:stretch>
-            <a:fillRect/>
-          </a:stretch>
-        </p:blipFill>
-        <p:spPr>
-          <a:xfrm>
-            <a:off x="304800" y="905060"/>
-            <a:ext cx="11553825" cy="5761830"/>
-          </a:xfrm>
-          <a:prstGeom prst="rect">
-            <a:avLst/>
-          </a:prstGeom>
-        </p:spPr>
-      </p:pic>
-      <p:sp>
-        <p:nvSpPr>
-          <p:cNvPr id="2" name="Title 1">
-            <a:extLst>
-              <a:ext uri="{FF2B5EF4-FFF2-40B4-BE49-F238E27FC236}">
-                <a16:creationId xmlns:a16="http://schemas.microsoft.com/office/drawing/2014/main" id="{E3575280-0382-B9E5-13A6-B12057E94063}"/>
-              </a:ext>
-            </a:extLst>
-          </p:cNvPr>
-          <p:cNvSpPr>
-            <a:spLocks noGrp="1"/>
-          </p:cNvSpPr>
-          <p:nvPr>
-            <p:ph type="title"/>
-          </p:nvPr>
-        </p:nvSpPr>
-        <p:spPr/>
-        <p:txBody>
-          <a:bodyPr>
-            <a:normAutofit fontScale="90000"/>
-          </a:bodyPr>
-          <a:lstStyle/>
-          <a:p>
-            <a:r>
-              <a:rPr lang="en-US" dirty="0"/>
-              <a:t>Update CMMS mappings page</a:t>
-            </a:r>
-          </a:p>
-        </p:txBody>
-      </p:sp>
-      <p:sp>
-        <p:nvSpPr>
-          <p:cNvPr id="10" name="TextBox 9">
-            <a:extLst>
-              <a:ext uri="{FF2B5EF4-FFF2-40B4-BE49-F238E27FC236}">
-                <a16:creationId xmlns:a16="http://schemas.microsoft.com/office/drawing/2014/main" id="{40F9E787-298F-4E8C-0E11-EE0F768E08C6}"/>
-              </a:ext>
-            </a:extLst>
-          </p:cNvPr>
-          <p:cNvSpPr txBox="1"/>
-          <p:nvPr/>
-        </p:nvSpPr>
-        <p:spPr>
-          <a:xfrm>
-            <a:off x="4933950" y="2295525"/>
-            <a:ext cx="3701270" cy="276999"/>
-          </a:xfrm>
-          <a:prstGeom prst="rect">
-            <a:avLst/>
-          </a:prstGeom>
-          <a:noFill/>
-        </p:spPr>
-        <p:txBody>
-          <a:bodyPr wrap="none" rtlCol="0">
-            <a:spAutoFit/>
-          </a:bodyPr>
-          <a:lstStyle/>
-          <a:p>
-            <a:r>
-              <a:rPr lang="en-US" sz="1200" dirty="0">
-                <a:solidFill>
-                  <a:schemeClr val="accent5">
-                    <a:lumMod val="60000"/>
-                    <a:lumOff val="40000"/>
-                  </a:schemeClr>
-                </a:solidFill>
-              </a:rPr>
-              <a:t>Click button or drag/drop to this area to upload a CSV</a:t>
-            </a:r>
-          </a:p>
-        </p:txBody>
-      </p:sp>
-    </p:spTree>
-    <p:extLst>
-      <p:ext uri="{BB962C8B-B14F-4D97-AF65-F5344CB8AC3E}">
-        <p14:creationId xmlns:p14="http://schemas.microsoft.com/office/powerpoint/2010/main" val="3239207398"/>
-      </p:ext>
-    </p:extLst>
-  </p:cSld>
-  <p:clrMapOvr>
-    <a:masterClrMapping/>
-  </p:clrMapOvr>
-</p:sld>
-</file>
-
-<file path=ppt/slides/slide24.xml><?xml version="1.0" encoding="utf-8"?>
-<p:sld xmlns:a="http://schemas.openxmlformats.org/drawingml/2006/main" xmlns:r="http://schemas.openxmlformats.org/officeDocument/2006/relationships" xmlns:p="http://schemas.openxmlformats.org/presentationml/2006/main">
-  <p:cSld>
-    <p:spTree>
-      <p:nvGrpSpPr>
-        <p:cNvPr id="1" name=""/>
-        <p:cNvGrpSpPr/>
-        <p:nvPr/>
-      </p:nvGrpSpPr>
-      <p:grpSpPr>
-        <a:xfrm>
-          <a:off x="0" y="0"/>
-          <a:ext cx="0" cy="0"/>
-          <a:chOff x="0" y="0"/>
-          <a:chExt cx="0" cy="0"/>
-        </a:xfrm>
-      </p:grpSpPr>
-      <p:pic>
-        <p:nvPicPr>
-          <p:cNvPr id="4" name="Picture 3">
-            <a:extLst>
-              <a:ext uri="{FF2B5EF4-FFF2-40B4-BE49-F238E27FC236}">
-                <a16:creationId xmlns:a16="http://schemas.microsoft.com/office/drawing/2014/main" id="{7AFB2AB3-A02C-6870-7615-E5A691B69E81}"/>
-              </a:ext>
-            </a:extLst>
-          </p:cNvPr>
-          <p:cNvPicPr>
-            <a:picLocks noChangeAspect="1"/>
-          </p:cNvPicPr>
-          <p:nvPr/>
-        </p:nvPicPr>
-        <p:blipFill>
-          <a:blip r:embed="rId2"/>
-          <a:stretch>
-            <a:fillRect/>
-          </a:stretch>
-        </p:blipFill>
-        <p:spPr>
-          <a:xfrm>
-            <a:off x="314325" y="905060"/>
-            <a:ext cx="11560324" cy="5765071"/>
-          </a:xfrm>
-          <a:prstGeom prst="rect">
-            <a:avLst/>
-          </a:prstGeom>
-        </p:spPr>
-      </p:pic>
-      <p:sp>
-        <p:nvSpPr>
-          <p:cNvPr id="2" name="Title 1">
-            <a:extLst>
-              <a:ext uri="{FF2B5EF4-FFF2-40B4-BE49-F238E27FC236}">
-                <a16:creationId xmlns:a16="http://schemas.microsoft.com/office/drawing/2014/main" id="{EF1A11BC-959E-17EE-3924-576C94C09A55}"/>
-              </a:ext>
-            </a:extLst>
-          </p:cNvPr>
-          <p:cNvSpPr>
-            <a:spLocks noGrp="1"/>
-          </p:cNvSpPr>
-          <p:nvPr>
-            <p:ph type="title"/>
-          </p:nvPr>
-        </p:nvSpPr>
-        <p:spPr/>
-        <p:txBody>
-          <a:bodyPr>
-            <a:normAutofit fontScale="90000"/>
-          </a:bodyPr>
-          <a:lstStyle/>
-          <a:p>
-            <a:r>
-              <a:rPr lang="en-US" dirty="0"/>
-              <a:t>CSV upload confirmation</a:t>
-            </a:r>
-          </a:p>
-        </p:txBody>
-      </p:sp>
-      <p:sp>
-        <p:nvSpPr>
-          <p:cNvPr id="6" name="TextBox 5">
-            <a:extLst>
-              <a:ext uri="{FF2B5EF4-FFF2-40B4-BE49-F238E27FC236}">
-                <a16:creationId xmlns:a16="http://schemas.microsoft.com/office/drawing/2014/main" id="{2721500B-280D-67E6-1422-DE1D9A7E1E32}"/>
-              </a:ext>
-            </a:extLst>
-          </p:cNvPr>
-          <p:cNvSpPr txBox="1"/>
-          <p:nvPr/>
-        </p:nvSpPr>
-        <p:spPr>
-          <a:xfrm>
-            <a:off x="4332304" y="3359391"/>
-            <a:ext cx="3665299" cy="276999"/>
-          </a:xfrm>
-          <a:prstGeom prst="rect">
-            <a:avLst/>
-          </a:prstGeom>
-          <a:noFill/>
-        </p:spPr>
-        <p:txBody>
-          <a:bodyPr wrap="none" rtlCol="0">
-            <a:spAutoFit/>
-          </a:bodyPr>
-          <a:lstStyle/>
-          <a:p>
-            <a:r>
-              <a:rPr lang="en-US" sz="1200" dirty="0">
-                <a:solidFill>
-                  <a:schemeClr val="accent5">
-                    <a:lumMod val="60000"/>
-                    <a:lumOff val="40000"/>
-                  </a:schemeClr>
-                </a:solidFill>
-              </a:rPr>
-              <a:t>Either file upload method gives you this confirmation</a:t>
-            </a:r>
-          </a:p>
-        </p:txBody>
-      </p:sp>
-    </p:spTree>
-    <p:extLst>
-      <p:ext uri="{BB962C8B-B14F-4D97-AF65-F5344CB8AC3E}">
-        <p14:creationId xmlns:p14="http://schemas.microsoft.com/office/powerpoint/2010/main" val="3116791411"/>
-      </p:ext>
-    </p:extLst>
-  </p:cSld>
-  <p:clrMapOvr>
-    <a:masterClrMapping/>
-  </p:clrMapOvr>
-</p:sld>
-</file>
-
-<file path=ppt/slides/slide25.xml><?xml version="1.0" encoding="utf-8"?>
-<p:sld xmlns:a="http://schemas.openxmlformats.org/drawingml/2006/main" xmlns:r="http://schemas.openxmlformats.org/officeDocument/2006/relationships" xmlns:p="http://schemas.openxmlformats.org/presentationml/2006/main">
-  <p:cSld>
-    <p:spTree>
-      <p:nvGrpSpPr>
-        <p:cNvPr id="1" name=""/>
-        <p:cNvGrpSpPr/>
-        <p:nvPr/>
-      </p:nvGrpSpPr>
-      <p:grpSpPr>
-        <a:xfrm>
-          <a:off x="0" y="0"/>
-          <a:ext cx="0" cy="0"/>
-          <a:chOff x="0" y="0"/>
-          <a:chExt cx="0" cy="0"/>
-        </a:xfrm>
-      </p:grpSpPr>
-      <p:pic>
-        <p:nvPicPr>
-          <p:cNvPr id="5" name="Picture 4">
-            <a:extLst>
-              <a:ext uri="{FF2B5EF4-FFF2-40B4-BE49-F238E27FC236}">
-                <a16:creationId xmlns:a16="http://schemas.microsoft.com/office/drawing/2014/main" id="{C2C073DC-6385-E030-6CDD-68CBC9F6519A}"/>
-              </a:ext>
-            </a:extLst>
-          </p:cNvPr>
-          <p:cNvPicPr>
-            <a:picLocks noChangeAspect="1"/>
-          </p:cNvPicPr>
-          <p:nvPr/>
-        </p:nvPicPr>
-        <p:blipFill>
-          <a:blip r:embed="rId2"/>
-          <a:srcRect t="7788" r="430" b="553"/>
-          <a:stretch>
-            <a:fillRect/>
-          </a:stretch>
-        </p:blipFill>
-        <p:spPr>
-          <a:xfrm>
-            <a:off x="308083" y="905060"/>
-            <a:ext cx="11487113" cy="5727784"/>
-          </a:xfrm>
-          <a:prstGeom prst="rect">
-            <a:avLst/>
-          </a:prstGeom>
-        </p:spPr>
-      </p:pic>
-      <p:sp>
-        <p:nvSpPr>
-          <p:cNvPr id="2" name="Title 1">
-            <a:extLst>
-              <a:ext uri="{FF2B5EF4-FFF2-40B4-BE49-F238E27FC236}">
-                <a16:creationId xmlns:a16="http://schemas.microsoft.com/office/drawing/2014/main" id="{45D93199-8250-6C00-D549-B9B41252C91A}"/>
-              </a:ext>
-            </a:extLst>
-          </p:cNvPr>
-          <p:cNvSpPr>
-            <a:spLocks noGrp="1"/>
-          </p:cNvSpPr>
-          <p:nvPr>
-            <p:ph type="title"/>
-          </p:nvPr>
-        </p:nvSpPr>
-        <p:spPr/>
-        <p:txBody>
-          <a:bodyPr>
-            <a:normAutofit fontScale="90000"/>
-          </a:bodyPr>
-          <a:lstStyle/>
-          <a:p>
-            <a:r>
-              <a:rPr lang="en-US" dirty="0"/>
-              <a:t>CSV upload progress updates</a:t>
-            </a:r>
-          </a:p>
-        </p:txBody>
-      </p:sp>
-      <p:sp>
-        <p:nvSpPr>
-          <p:cNvPr id="8" name="TextBox 7">
-            <a:extLst>
-              <a:ext uri="{FF2B5EF4-FFF2-40B4-BE49-F238E27FC236}">
-                <a16:creationId xmlns:a16="http://schemas.microsoft.com/office/drawing/2014/main" id="{09B2CCE3-29F4-360F-B114-BC1AB268E8F3}"/>
-              </a:ext>
-            </a:extLst>
-          </p:cNvPr>
-          <p:cNvSpPr txBox="1"/>
-          <p:nvPr/>
-        </p:nvSpPr>
-        <p:spPr>
-          <a:xfrm>
-            <a:off x="6812503" y="2211804"/>
-            <a:ext cx="3536289" cy="276999"/>
-          </a:xfrm>
-          <a:prstGeom prst="rect">
-            <a:avLst/>
-          </a:prstGeom>
-          <a:noFill/>
-        </p:spPr>
-        <p:txBody>
-          <a:bodyPr wrap="none" rtlCol="0">
-            <a:spAutoFit/>
-          </a:bodyPr>
-          <a:lstStyle/>
-          <a:p>
-            <a:r>
-              <a:rPr lang="en-US" sz="1200" dirty="0">
-                <a:solidFill>
-                  <a:schemeClr val="accent5">
-                    <a:lumMod val="60000"/>
-                    <a:lumOff val="40000"/>
-                  </a:schemeClr>
-                </a:solidFill>
-              </a:rPr>
-              <a:t>After a successful upload, you’ll see this message.</a:t>
-            </a:r>
-          </a:p>
-        </p:txBody>
-      </p:sp>
-      <p:sp>
-        <p:nvSpPr>
-          <p:cNvPr id="9" name="TextBox 8">
-            <a:extLst>
-              <a:ext uri="{FF2B5EF4-FFF2-40B4-BE49-F238E27FC236}">
-                <a16:creationId xmlns:a16="http://schemas.microsoft.com/office/drawing/2014/main" id="{9D603A14-5931-1B17-8F2D-E22B46433E73}"/>
-              </a:ext>
-            </a:extLst>
-          </p:cNvPr>
-          <p:cNvSpPr txBox="1"/>
-          <p:nvPr/>
-        </p:nvSpPr>
-        <p:spPr>
-          <a:xfrm>
-            <a:off x="838200" y="4369197"/>
-            <a:ext cx="10869891" cy="646331"/>
-          </a:xfrm>
-          <a:prstGeom prst="rect">
-            <a:avLst/>
-          </a:prstGeom>
-          <a:noFill/>
-        </p:spPr>
-        <p:txBody>
-          <a:bodyPr wrap="square" rtlCol="0">
-            <a:spAutoFit/>
-          </a:bodyPr>
-          <a:lstStyle/>
-          <a:p>
-            <a:r>
-              <a:rPr lang="en-US" dirty="0"/>
-              <a:t>If you upload a non-CSV or a CSV where the columns aren’t what the reader expects, you haven’t affected the database, but the little gray update box will be…troubled. Just refresh &amp; try another file and all will be well.</a:t>
-            </a:r>
-          </a:p>
-        </p:txBody>
-      </p:sp>
-      <p:sp>
-        <p:nvSpPr>
-          <p:cNvPr id="10" name="TextBox 9">
-            <a:extLst>
-              <a:ext uri="{FF2B5EF4-FFF2-40B4-BE49-F238E27FC236}">
-                <a16:creationId xmlns:a16="http://schemas.microsoft.com/office/drawing/2014/main" id="{65F1E29E-7630-6390-7AE4-67F2597D73DF}"/>
-              </a:ext>
-            </a:extLst>
-          </p:cNvPr>
-          <p:cNvSpPr txBox="1"/>
-          <p:nvPr/>
-        </p:nvSpPr>
-        <p:spPr>
-          <a:xfrm>
-            <a:off x="7456601" y="1467402"/>
-            <a:ext cx="3401238" cy="461665"/>
-          </a:xfrm>
-          <a:prstGeom prst="rect">
-            <a:avLst/>
-          </a:prstGeom>
-          <a:noFill/>
-        </p:spPr>
-        <p:txBody>
-          <a:bodyPr wrap="square" rtlCol="0">
-            <a:spAutoFit/>
-          </a:bodyPr>
-          <a:lstStyle/>
-          <a:p>
-            <a:r>
-              <a:rPr lang="en-US" sz="1200" dirty="0">
-                <a:solidFill>
-                  <a:schemeClr val="accent5">
-                    <a:lumMod val="60000"/>
-                    <a:lumOff val="40000"/>
-                  </a:schemeClr>
-                </a:solidFill>
-              </a:rPr>
-              <a:t>As long as the CSV you upload is in the Maximo format, you shouldn’t have any problems</a:t>
-            </a:r>
-          </a:p>
-        </p:txBody>
-      </p:sp>
-    </p:spTree>
-    <p:extLst>
-      <p:ext uri="{BB962C8B-B14F-4D97-AF65-F5344CB8AC3E}">
-        <p14:creationId xmlns:p14="http://schemas.microsoft.com/office/powerpoint/2010/main" val="4058351882"/>
-      </p:ext>
-    </p:extLst>
-  </p:cSld>
-  <p:clrMapOvr>
-    <a:masterClrMapping/>
-  </p:clrMapOvr>
-</p:sld>
-</file>
-
-<file path=ppt/slides/slide3.xml><?xml version="1.0" encoding="utf-8"?>
+<file path=ppt/slides/slide6.xml><?xml version="1.0" encoding="utf-8"?>
 <p:sld xmlns:a="http://schemas.openxmlformats.org/drawingml/2006/main" xmlns:r="http://schemas.openxmlformats.org/officeDocument/2006/relationships" xmlns:p="http://schemas.openxmlformats.org/presentationml/2006/main">
   <p:cSld>
     <p:spTree>
@@ -8610,7 +10294,7 @@
 </p:sld>
 </file>
 
-<file path=ppt/slides/slide4.xml><?xml version="1.0" encoding="utf-8"?>
+<file path=ppt/slides/slide7.xml><?xml version="1.0" encoding="utf-8"?>
 <p:sld xmlns:a="http://schemas.openxmlformats.org/drawingml/2006/main" xmlns:r="http://schemas.openxmlformats.org/officeDocument/2006/relationships" xmlns:p="http://schemas.openxmlformats.org/presentationml/2006/main">
   <p:cSld>
     <p:spTree>
@@ -8839,7 +10523,7 @@
 </p:sld>
 </file>
 
-<file path=ppt/slides/slide5.xml><?xml version="1.0" encoding="utf-8"?>
+<file path=ppt/slides/slide8.xml><?xml version="1.0" encoding="utf-8"?>
 <p:sld xmlns:a="http://schemas.openxmlformats.org/drawingml/2006/main" xmlns:r="http://schemas.openxmlformats.org/officeDocument/2006/relationships" xmlns:p="http://schemas.openxmlformats.org/presentationml/2006/main">
   <p:cSld>
     <p:spTree>
@@ -9638,7 +11322,7 @@
 </p:sld>
 </file>
 
-<file path=ppt/slides/slide6.xml><?xml version="1.0" encoding="utf-8"?>
+<file path=ppt/slides/slide9.xml><?xml version="1.0" encoding="utf-8"?>
 <p:sld xmlns:a="http://schemas.openxmlformats.org/drawingml/2006/main" xmlns:r="http://schemas.openxmlformats.org/officeDocument/2006/relationships" xmlns:p="http://schemas.openxmlformats.org/presentationml/2006/main">
   <p:cSld>
     <p:spTree>
@@ -10017,973 +11701,6 @@
     <p:extLst>
       <p:ext uri="{BB962C8B-B14F-4D97-AF65-F5344CB8AC3E}">
         <p14:creationId xmlns:p14="http://schemas.microsoft.com/office/powerpoint/2010/main" val="1703292645"/>
-      </p:ext>
-    </p:extLst>
-  </p:cSld>
-  <p:clrMapOvr>
-    <a:masterClrMapping/>
-  </p:clrMapOvr>
-</p:sld>
-</file>
-
-<file path=ppt/slides/slide7.xml><?xml version="1.0" encoding="utf-8"?>
-<p:sld xmlns:a="http://schemas.openxmlformats.org/drawingml/2006/main" xmlns:r="http://schemas.openxmlformats.org/officeDocument/2006/relationships" xmlns:p="http://schemas.openxmlformats.org/presentationml/2006/main">
-  <p:cSld>
-    <p:spTree>
-      <p:nvGrpSpPr>
-        <p:cNvPr id="1" name="">
-          <a:extLst>
-            <a:ext uri="{FF2B5EF4-FFF2-40B4-BE49-F238E27FC236}">
-              <a16:creationId xmlns:a16="http://schemas.microsoft.com/office/drawing/2014/main" id="{71267857-5705-5233-8621-600012F829A6}"/>
-            </a:ext>
-          </a:extLst>
-        </p:cNvPr>
-        <p:cNvGrpSpPr/>
-        <p:nvPr/>
-      </p:nvGrpSpPr>
-      <p:grpSpPr>
-        <a:xfrm>
-          <a:off x="0" y="0"/>
-          <a:ext cx="0" cy="0"/>
-          <a:chOff x="0" y="0"/>
-          <a:chExt cx="0" cy="0"/>
-        </a:xfrm>
-      </p:grpSpPr>
-      <p:pic>
-        <p:nvPicPr>
-          <p:cNvPr id="6" name="Picture 5">
-            <a:extLst>
-              <a:ext uri="{FF2B5EF4-FFF2-40B4-BE49-F238E27FC236}">
-                <a16:creationId xmlns:a16="http://schemas.microsoft.com/office/drawing/2014/main" id="{1762C331-CF49-0F33-1A51-08AD2F741220}"/>
-              </a:ext>
-            </a:extLst>
-          </p:cNvPr>
-          <p:cNvPicPr>
-            <a:picLocks noChangeAspect="1"/>
-          </p:cNvPicPr>
-          <p:nvPr/>
-        </p:nvPicPr>
-        <p:blipFill>
-          <a:blip r:embed="rId2"/>
-          <a:srcRect t="7683" r="339" b="441"/>
-          <a:stretch>
-            <a:fillRect/>
-          </a:stretch>
-        </p:blipFill>
-        <p:spPr>
-          <a:xfrm>
-            <a:off x="278342" y="905060"/>
-            <a:ext cx="11465169" cy="5725095"/>
-          </a:xfrm>
-          <a:prstGeom prst="rect">
-            <a:avLst/>
-          </a:prstGeom>
-        </p:spPr>
-      </p:pic>
-      <p:sp>
-        <p:nvSpPr>
-          <p:cNvPr id="2" name="Title 1">
-            <a:extLst>
-              <a:ext uri="{FF2B5EF4-FFF2-40B4-BE49-F238E27FC236}">
-                <a16:creationId xmlns:a16="http://schemas.microsoft.com/office/drawing/2014/main" id="{83CAF45F-3A8D-00CD-7E8B-3230BFA26EDA}"/>
-              </a:ext>
-            </a:extLst>
-          </p:cNvPr>
-          <p:cNvSpPr>
-            <a:spLocks noGrp="1"/>
-          </p:cNvSpPr>
-          <p:nvPr>
-            <p:ph type="title"/>
-          </p:nvPr>
-        </p:nvSpPr>
-        <p:spPr/>
-        <p:txBody>
-          <a:bodyPr>
-            <a:normAutofit fontScale="90000"/>
-          </a:bodyPr>
-          <a:lstStyle/>
-          <a:p>
-            <a:r>
-              <a:rPr lang="en-US" dirty="0"/>
-              <a:t>Using the table</a:t>
-            </a:r>
-          </a:p>
-        </p:txBody>
-      </p:sp>
-      <p:sp>
-        <p:nvSpPr>
-          <p:cNvPr id="10" name="TextBox 9">
-            <a:extLst>
-              <a:ext uri="{FF2B5EF4-FFF2-40B4-BE49-F238E27FC236}">
-                <a16:creationId xmlns:a16="http://schemas.microsoft.com/office/drawing/2014/main" id="{A1538370-39D1-6D79-381E-31E581284C33}"/>
-              </a:ext>
-            </a:extLst>
-          </p:cNvPr>
-          <p:cNvSpPr txBox="1"/>
-          <p:nvPr/>
-        </p:nvSpPr>
-        <p:spPr>
-          <a:xfrm>
-            <a:off x="757333" y="1700640"/>
-            <a:ext cx="1904682" cy="246221"/>
-          </a:xfrm>
-          <a:prstGeom prst="rect">
-            <a:avLst/>
-          </a:prstGeom>
-          <a:noFill/>
-        </p:spPr>
-        <p:txBody>
-          <a:bodyPr wrap="square" rtlCol="0">
-            <a:spAutoFit/>
-          </a:bodyPr>
-          <a:lstStyle/>
-          <a:p>
-            <a:r>
-              <a:rPr lang="en-US" sz="1000" dirty="0">
-                <a:solidFill>
-                  <a:schemeClr val="accent5">
-                    <a:lumMod val="60000"/>
-                    <a:lumOff val="40000"/>
-                  </a:schemeClr>
-                </a:solidFill>
-              </a:rPr>
-              <a:t>The results you’re seeing now</a:t>
-            </a:r>
-          </a:p>
-        </p:txBody>
-      </p:sp>
-      <p:sp>
-        <p:nvSpPr>
-          <p:cNvPr id="12" name="TextBox 11">
-            <a:extLst>
-              <a:ext uri="{FF2B5EF4-FFF2-40B4-BE49-F238E27FC236}">
-                <a16:creationId xmlns:a16="http://schemas.microsoft.com/office/drawing/2014/main" id="{A82EE8DE-09C4-18FA-EF73-579B5935A4D6}"/>
-              </a:ext>
-            </a:extLst>
-          </p:cNvPr>
-          <p:cNvSpPr txBox="1"/>
-          <p:nvPr/>
-        </p:nvSpPr>
-        <p:spPr>
-          <a:xfrm>
-            <a:off x="2579544" y="1772874"/>
-            <a:ext cx="762442" cy="400110"/>
-          </a:xfrm>
-          <a:prstGeom prst="rect">
-            <a:avLst/>
-          </a:prstGeom>
-          <a:noFill/>
-        </p:spPr>
-        <p:txBody>
-          <a:bodyPr wrap="square" rtlCol="0">
-            <a:spAutoFit/>
-          </a:bodyPr>
-          <a:lstStyle/>
-          <a:p>
-            <a:r>
-              <a:rPr lang="en-US" sz="1000" dirty="0">
-                <a:solidFill>
-                  <a:schemeClr val="accent5">
-                    <a:lumMod val="60000"/>
-                    <a:lumOff val="40000"/>
-                  </a:schemeClr>
-                </a:solidFill>
-              </a:rPr>
-              <a:t>Results per page</a:t>
-            </a:r>
-          </a:p>
-        </p:txBody>
-      </p:sp>
-      <p:sp>
-        <p:nvSpPr>
-          <p:cNvPr id="14" name="TextBox 13">
-            <a:extLst>
-              <a:ext uri="{FF2B5EF4-FFF2-40B4-BE49-F238E27FC236}">
-                <a16:creationId xmlns:a16="http://schemas.microsoft.com/office/drawing/2014/main" id="{9969AFC8-B683-D7F5-6B60-50E3D3FED37A}"/>
-              </a:ext>
-            </a:extLst>
-          </p:cNvPr>
-          <p:cNvSpPr txBox="1"/>
-          <p:nvPr/>
-        </p:nvSpPr>
-        <p:spPr>
-          <a:xfrm>
-            <a:off x="9332247" y="1649764"/>
-            <a:ext cx="1470274" cy="246221"/>
-          </a:xfrm>
-          <a:prstGeom prst="rect">
-            <a:avLst/>
-          </a:prstGeom>
-          <a:noFill/>
-        </p:spPr>
-        <p:txBody>
-          <a:bodyPr wrap="none" rtlCol="0">
-            <a:spAutoFit/>
-          </a:bodyPr>
-          <a:lstStyle/>
-          <a:p>
-            <a:r>
-              <a:rPr lang="en-US" sz="1000" dirty="0">
-                <a:solidFill>
-                  <a:schemeClr val="accent5">
-                    <a:lumMod val="60000"/>
-                    <a:lumOff val="40000"/>
-                  </a:schemeClr>
-                </a:solidFill>
-              </a:rPr>
-              <a:t>Jump to a specific page</a:t>
-            </a:r>
-          </a:p>
-        </p:txBody>
-      </p:sp>
-      <p:sp>
-        <p:nvSpPr>
-          <p:cNvPr id="3" name="TextBox 2">
-            <a:extLst>
-              <a:ext uri="{FF2B5EF4-FFF2-40B4-BE49-F238E27FC236}">
-                <a16:creationId xmlns:a16="http://schemas.microsoft.com/office/drawing/2014/main" id="{9B3E4AE1-B797-5E42-B959-804F7D2205F5}"/>
-              </a:ext>
-            </a:extLst>
-          </p:cNvPr>
-          <p:cNvSpPr txBox="1"/>
-          <p:nvPr/>
-        </p:nvSpPr>
-        <p:spPr>
-          <a:xfrm>
-            <a:off x="3603005" y="1772874"/>
-            <a:ext cx="4815841" cy="400110"/>
-          </a:xfrm>
-          <a:prstGeom prst="rect">
-            <a:avLst/>
-          </a:prstGeom>
-          <a:noFill/>
-        </p:spPr>
-        <p:txBody>
-          <a:bodyPr wrap="square" rtlCol="0">
-            <a:spAutoFit/>
-          </a:bodyPr>
-          <a:lstStyle/>
-          <a:p>
-            <a:r>
-              <a:rPr lang="en-US" sz="1000" dirty="0">
-                <a:solidFill>
-                  <a:schemeClr val="accent5">
-                    <a:lumMod val="60000"/>
-                    <a:lumOff val="40000"/>
-                  </a:schemeClr>
-                </a:solidFill>
-              </a:rPr>
-              <a:t>Click any column header to cycle through sort directions for that attribute. You can only sort by one column at once, and the default sort is by most recent lockout time.</a:t>
-            </a:r>
-          </a:p>
-        </p:txBody>
-      </p:sp>
-      <p:sp>
-        <p:nvSpPr>
-          <p:cNvPr id="4" name="TextBox 3">
-            <a:extLst>
-              <a:ext uri="{FF2B5EF4-FFF2-40B4-BE49-F238E27FC236}">
-                <a16:creationId xmlns:a16="http://schemas.microsoft.com/office/drawing/2014/main" id="{F33FD550-8542-DEDD-FCED-49A50F2F22E6}"/>
-              </a:ext>
-            </a:extLst>
-          </p:cNvPr>
-          <p:cNvSpPr txBox="1"/>
-          <p:nvPr/>
-        </p:nvSpPr>
-        <p:spPr>
-          <a:xfrm>
-            <a:off x="3437508" y="889108"/>
-            <a:ext cx="5316983" cy="400110"/>
-          </a:xfrm>
-          <a:prstGeom prst="rect">
-            <a:avLst/>
-          </a:prstGeom>
-          <a:noFill/>
-        </p:spPr>
-        <p:txBody>
-          <a:bodyPr wrap="square" rtlCol="0">
-            <a:spAutoFit/>
-          </a:bodyPr>
-          <a:lstStyle/>
-          <a:p>
-            <a:r>
-              <a:rPr lang="en-US" sz="1000" dirty="0">
-                <a:solidFill>
-                  <a:schemeClr val="accent5">
-                    <a:lumMod val="60000"/>
-                    <a:lumOff val="40000"/>
-                  </a:schemeClr>
-                </a:solidFill>
-              </a:rPr>
-              <a:t>Sorting assumes you only want to see entries where that value exists. For example, sorting by reset time here would hide all entries except the ones reset by ‘b’ and ‘eh’, then apply the sort</a:t>
-            </a:r>
-          </a:p>
-        </p:txBody>
-      </p:sp>
-      <p:sp>
-        <p:nvSpPr>
-          <p:cNvPr id="8" name="TextBox 7">
-            <a:extLst>
-              <a:ext uri="{FF2B5EF4-FFF2-40B4-BE49-F238E27FC236}">
-                <a16:creationId xmlns:a16="http://schemas.microsoft.com/office/drawing/2014/main" id="{38C0F6C5-CFB1-6CC7-120C-A60C2E6998E2}"/>
-              </a:ext>
-            </a:extLst>
-          </p:cNvPr>
-          <p:cNvSpPr txBox="1"/>
-          <p:nvPr/>
-        </p:nvSpPr>
-        <p:spPr>
-          <a:xfrm>
-            <a:off x="1878678" y="1354356"/>
-            <a:ext cx="2164175" cy="246221"/>
-          </a:xfrm>
-          <a:prstGeom prst="rect">
-            <a:avLst/>
-          </a:prstGeom>
-          <a:noFill/>
-        </p:spPr>
-        <p:txBody>
-          <a:bodyPr wrap="square" rtlCol="0">
-            <a:spAutoFit/>
-          </a:bodyPr>
-          <a:lstStyle/>
-          <a:p>
-            <a:r>
-              <a:rPr lang="en-US" sz="1000" dirty="0">
-                <a:solidFill>
-                  <a:schemeClr val="accent5">
-                    <a:lumMod val="60000"/>
-                    <a:lumOff val="40000"/>
-                  </a:schemeClr>
-                </a:solidFill>
-              </a:rPr>
-              <a:t>To remind you this is a filtered table</a:t>
-            </a:r>
-          </a:p>
-        </p:txBody>
-      </p:sp>
-      <p:sp>
-        <p:nvSpPr>
-          <p:cNvPr id="9" name="TextBox 8">
-            <a:extLst>
-              <a:ext uri="{FF2B5EF4-FFF2-40B4-BE49-F238E27FC236}">
-                <a16:creationId xmlns:a16="http://schemas.microsoft.com/office/drawing/2014/main" id="{957F113F-74A2-D03A-CE83-2E6DEE75383A}"/>
-              </a:ext>
-            </a:extLst>
-          </p:cNvPr>
-          <p:cNvSpPr txBox="1"/>
-          <p:nvPr/>
-        </p:nvSpPr>
-        <p:spPr>
-          <a:xfrm>
-            <a:off x="10003263" y="1058949"/>
-            <a:ext cx="1598515" cy="246221"/>
-          </a:xfrm>
-          <a:prstGeom prst="rect">
-            <a:avLst/>
-          </a:prstGeom>
-          <a:noFill/>
-        </p:spPr>
-        <p:txBody>
-          <a:bodyPr wrap="none" rtlCol="0">
-            <a:spAutoFit/>
-          </a:bodyPr>
-          <a:lstStyle/>
-          <a:p>
-            <a:r>
-              <a:rPr lang="en-US" sz="1000" dirty="0">
-                <a:solidFill>
-                  <a:schemeClr val="accent5">
-                    <a:lumMod val="60000"/>
-                    <a:lumOff val="40000"/>
-                  </a:schemeClr>
-                </a:solidFill>
-              </a:rPr>
-              <a:t>Auto-collapses on search</a:t>
-            </a:r>
-          </a:p>
-        </p:txBody>
-      </p:sp>
-    </p:spTree>
-    <p:extLst>
-      <p:ext uri="{BB962C8B-B14F-4D97-AF65-F5344CB8AC3E}">
-        <p14:creationId xmlns:p14="http://schemas.microsoft.com/office/powerpoint/2010/main" val="1246570814"/>
-      </p:ext>
-    </p:extLst>
-  </p:cSld>
-  <p:clrMapOvr>
-    <a:masterClrMapping/>
-  </p:clrMapOvr>
-</p:sld>
-</file>
-
-<file path=ppt/slides/slide8.xml><?xml version="1.0" encoding="utf-8"?>
-<p:sld xmlns:a="http://schemas.openxmlformats.org/drawingml/2006/main" xmlns:r="http://schemas.openxmlformats.org/officeDocument/2006/relationships" xmlns:p="http://schemas.openxmlformats.org/presentationml/2006/main">
-  <p:cSld>
-    <p:spTree>
-      <p:nvGrpSpPr>
-        <p:cNvPr id="1" name="">
-          <a:extLst>
-            <a:ext uri="{FF2B5EF4-FFF2-40B4-BE49-F238E27FC236}">
-              <a16:creationId xmlns:a16="http://schemas.microsoft.com/office/drawing/2014/main" id="{779C5437-B032-46BE-8C6E-92FB7ED12D30}"/>
-            </a:ext>
-          </a:extLst>
-        </p:cNvPr>
-        <p:cNvGrpSpPr/>
-        <p:nvPr/>
-      </p:nvGrpSpPr>
-      <p:grpSpPr>
-        <a:xfrm>
-          <a:off x="0" y="0"/>
-          <a:ext cx="0" cy="0"/>
-          <a:chOff x="0" y="0"/>
-          <a:chExt cx="0" cy="0"/>
-        </a:xfrm>
-      </p:grpSpPr>
-      <p:pic>
-        <p:nvPicPr>
-          <p:cNvPr id="7" name="Picture 6">
-            <a:extLst>
-              <a:ext uri="{FF2B5EF4-FFF2-40B4-BE49-F238E27FC236}">
-                <a16:creationId xmlns:a16="http://schemas.microsoft.com/office/drawing/2014/main" id="{812BAB45-23A4-77DF-00DA-276D6A70109C}"/>
-              </a:ext>
-            </a:extLst>
-          </p:cNvPr>
-          <p:cNvPicPr>
-            <a:picLocks noChangeAspect="1"/>
-          </p:cNvPicPr>
-          <p:nvPr/>
-        </p:nvPicPr>
-        <p:blipFill>
-          <a:blip r:embed="rId3"/>
-          <a:srcRect t="7851" r="275" b="481"/>
-          <a:stretch>
-            <a:fillRect/>
-          </a:stretch>
-        </p:blipFill>
-        <p:spPr>
-          <a:xfrm>
-            <a:off x="304801" y="902009"/>
-            <a:ext cx="11505421" cy="5728604"/>
-          </a:xfrm>
-          <a:prstGeom prst="rect">
-            <a:avLst/>
-          </a:prstGeom>
-        </p:spPr>
-      </p:pic>
-      <p:sp>
-        <p:nvSpPr>
-          <p:cNvPr id="2" name="Title 1">
-            <a:extLst>
-              <a:ext uri="{FF2B5EF4-FFF2-40B4-BE49-F238E27FC236}">
-                <a16:creationId xmlns:a16="http://schemas.microsoft.com/office/drawing/2014/main" id="{15448448-01BA-59FB-D8F3-BAA926C195D1}"/>
-              </a:ext>
-            </a:extLst>
-          </p:cNvPr>
-          <p:cNvSpPr>
-            <a:spLocks noGrp="1"/>
-          </p:cNvSpPr>
-          <p:nvPr>
-            <p:ph type="title"/>
-          </p:nvPr>
-        </p:nvSpPr>
-        <p:spPr/>
-        <p:txBody>
-          <a:bodyPr>
-            <a:normAutofit fontScale="90000"/>
-          </a:bodyPr>
-          <a:lstStyle/>
-          <a:p>
-            <a:r>
-              <a:rPr lang="en-US" dirty="0"/>
-              <a:t>Historical: the ‘expand’ button</a:t>
-            </a:r>
-          </a:p>
-        </p:txBody>
-      </p:sp>
-      <p:sp>
-        <p:nvSpPr>
-          <p:cNvPr id="5" name="TextBox 4">
-            <a:extLst>
-              <a:ext uri="{FF2B5EF4-FFF2-40B4-BE49-F238E27FC236}">
-                <a16:creationId xmlns:a16="http://schemas.microsoft.com/office/drawing/2014/main" id="{4A281846-F328-178E-9A2C-71311D73239A}"/>
-              </a:ext>
-            </a:extLst>
-          </p:cNvPr>
-          <p:cNvSpPr txBox="1"/>
-          <p:nvPr/>
-        </p:nvSpPr>
-        <p:spPr>
-          <a:xfrm>
-            <a:off x="4152900" y="902009"/>
-            <a:ext cx="3886200" cy="400110"/>
-          </a:xfrm>
-          <a:prstGeom prst="rect">
-            <a:avLst/>
-          </a:prstGeom>
-          <a:noFill/>
-        </p:spPr>
-        <p:txBody>
-          <a:bodyPr wrap="square" rtlCol="0">
-            <a:spAutoFit/>
-          </a:bodyPr>
-          <a:lstStyle/>
-          <a:p>
-            <a:r>
-              <a:rPr lang="en-US" sz="1000" dirty="0">
-                <a:solidFill>
-                  <a:schemeClr val="accent5">
-                    <a:lumMod val="60000"/>
-                    <a:lumOff val="40000"/>
-                  </a:schemeClr>
-                </a:solidFill>
-              </a:rPr>
-              <a:t>Clicking the three lines next to an entry will highlight the row in blue and open a split screen of all attempted resets for that lockout.</a:t>
-            </a:r>
-          </a:p>
-        </p:txBody>
-      </p:sp>
-      <p:sp>
-        <p:nvSpPr>
-          <p:cNvPr id="6" name="TextBox 5">
-            <a:extLst>
-              <a:ext uri="{FF2B5EF4-FFF2-40B4-BE49-F238E27FC236}">
-                <a16:creationId xmlns:a16="http://schemas.microsoft.com/office/drawing/2014/main" id="{E1D613EC-5703-4E8E-A21C-ADCC9671805D}"/>
-              </a:ext>
-            </a:extLst>
-          </p:cNvPr>
-          <p:cNvSpPr txBox="1"/>
-          <p:nvPr/>
-        </p:nvSpPr>
-        <p:spPr>
-          <a:xfrm>
-            <a:off x="8150368" y="902009"/>
-            <a:ext cx="3659854" cy="400110"/>
-          </a:xfrm>
-          <a:prstGeom prst="rect">
-            <a:avLst/>
-          </a:prstGeom>
-          <a:noFill/>
-        </p:spPr>
-        <p:txBody>
-          <a:bodyPr wrap="square" rtlCol="0">
-            <a:spAutoFit/>
-          </a:bodyPr>
-          <a:lstStyle/>
-          <a:p>
-            <a:r>
-              <a:rPr lang="en-US" sz="1000" dirty="0">
-                <a:solidFill>
-                  <a:schemeClr val="accent5">
-                    <a:lumMod val="60000"/>
-                    <a:lumOff val="40000"/>
-                  </a:schemeClr>
-                </a:solidFill>
-              </a:rPr>
-              <a:t>If the lockout has a paired reset, it’s highlighted in green and at the top (default sort is by auth state)</a:t>
-            </a:r>
-          </a:p>
-        </p:txBody>
-      </p:sp>
-      <p:sp>
-        <p:nvSpPr>
-          <p:cNvPr id="11" name="TextBox 10">
-            <a:extLst>
-              <a:ext uri="{FF2B5EF4-FFF2-40B4-BE49-F238E27FC236}">
-                <a16:creationId xmlns:a16="http://schemas.microsoft.com/office/drawing/2014/main" id="{88518FBE-206F-5E50-C6FF-0E23CCC9773E}"/>
-              </a:ext>
-            </a:extLst>
-          </p:cNvPr>
-          <p:cNvSpPr txBox="1"/>
-          <p:nvPr/>
-        </p:nvSpPr>
-        <p:spPr>
-          <a:xfrm>
-            <a:off x="8699254" y="1874520"/>
-            <a:ext cx="2562082" cy="400110"/>
-          </a:xfrm>
-          <a:prstGeom prst="rect">
-            <a:avLst/>
-          </a:prstGeom>
-          <a:noFill/>
-        </p:spPr>
-        <p:txBody>
-          <a:bodyPr wrap="square" rtlCol="0">
-            <a:spAutoFit/>
-          </a:bodyPr>
-          <a:lstStyle/>
-          <a:p>
-            <a:r>
-              <a:rPr lang="en-US" sz="1000" dirty="0">
-                <a:solidFill>
-                  <a:schemeClr val="accent5">
-                    <a:lumMod val="60000"/>
-                    <a:lumOff val="40000"/>
-                  </a:schemeClr>
-                </a:solidFill>
-              </a:rPr>
-              <a:t>Can filter denied requests by insufficient auth level or no privileges on target line</a:t>
-            </a:r>
-          </a:p>
-        </p:txBody>
-      </p:sp>
-      <p:sp>
-        <p:nvSpPr>
-          <p:cNvPr id="8" name="TextBox 7">
-            <a:extLst>
-              <a:ext uri="{FF2B5EF4-FFF2-40B4-BE49-F238E27FC236}">
-                <a16:creationId xmlns:a16="http://schemas.microsoft.com/office/drawing/2014/main" id="{2C9BF23D-E7AC-970F-3F0A-6009722FFA02}"/>
-              </a:ext>
-            </a:extLst>
-          </p:cNvPr>
-          <p:cNvSpPr txBox="1"/>
-          <p:nvPr/>
-        </p:nvSpPr>
-        <p:spPr>
-          <a:xfrm>
-            <a:off x="9012698" y="3338474"/>
-            <a:ext cx="2562082" cy="461665"/>
-          </a:xfrm>
-          <a:prstGeom prst="rect">
-            <a:avLst/>
-          </a:prstGeom>
-          <a:solidFill>
-            <a:schemeClr val="bg1">
-              <a:lumMod val="95000"/>
-            </a:schemeClr>
-          </a:solidFill>
-        </p:spPr>
-        <p:txBody>
-          <a:bodyPr wrap="square" rtlCol="0">
-            <a:spAutoFit/>
-          </a:bodyPr>
-          <a:lstStyle/>
-          <a:p>
-            <a:r>
-              <a:rPr lang="en-US" sz="1200" dirty="0">
-                <a:solidFill>
-                  <a:schemeClr val="accent5">
-                    <a:lumMod val="60000"/>
-                    <a:lumOff val="40000"/>
-                  </a:schemeClr>
-                </a:solidFill>
-              </a:rPr>
-              <a:t>If a lockout has been released, the successful reset is always at the top</a:t>
-            </a:r>
-          </a:p>
-        </p:txBody>
-      </p:sp>
-    </p:spTree>
-    <p:extLst>
-      <p:ext uri="{BB962C8B-B14F-4D97-AF65-F5344CB8AC3E}">
-        <p14:creationId xmlns:p14="http://schemas.microsoft.com/office/powerpoint/2010/main" val="1331215772"/>
-      </p:ext>
-    </p:extLst>
-  </p:cSld>
-  <p:clrMapOvr>
-    <a:masterClrMapping/>
-  </p:clrMapOvr>
-</p:sld>
-</file>
-
-<file path=ppt/slides/slide9.xml><?xml version="1.0" encoding="utf-8"?>
-<p:sld xmlns:a="http://schemas.openxmlformats.org/drawingml/2006/main" xmlns:r="http://schemas.openxmlformats.org/officeDocument/2006/relationships" xmlns:p="http://schemas.openxmlformats.org/presentationml/2006/main">
-  <p:cSld>
-    <p:spTree>
-      <p:nvGrpSpPr>
-        <p:cNvPr id="1" name="">
-          <a:extLst>
-            <a:ext uri="{FF2B5EF4-FFF2-40B4-BE49-F238E27FC236}">
-              <a16:creationId xmlns:a16="http://schemas.microsoft.com/office/drawing/2014/main" id="{B43B7B5B-ED35-205A-CA2F-B72AA425EEC7}"/>
-            </a:ext>
-          </a:extLst>
-        </p:cNvPr>
-        <p:cNvGrpSpPr/>
-        <p:nvPr/>
-      </p:nvGrpSpPr>
-      <p:grpSpPr>
-        <a:xfrm>
-          <a:off x="0" y="0"/>
-          <a:ext cx="0" cy="0"/>
-          <a:chOff x="0" y="0"/>
-          <a:chExt cx="0" cy="0"/>
-        </a:xfrm>
-      </p:grpSpPr>
-      <p:pic>
-        <p:nvPicPr>
-          <p:cNvPr id="8" name="Picture 7">
-            <a:extLst>
-              <a:ext uri="{FF2B5EF4-FFF2-40B4-BE49-F238E27FC236}">
-                <a16:creationId xmlns:a16="http://schemas.microsoft.com/office/drawing/2014/main" id="{C1BEEB97-51B2-9C03-FD94-E1B2E2EA2B34}"/>
-              </a:ext>
-            </a:extLst>
-          </p:cNvPr>
-          <p:cNvPicPr>
-            <a:picLocks noChangeAspect="1"/>
-          </p:cNvPicPr>
-          <p:nvPr/>
-        </p:nvPicPr>
-        <p:blipFill>
-          <a:blip r:embed="rId2"/>
-          <a:srcRect r="-94"/>
-          <a:stretch>
-            <a:fillRect/>
-          </a:stretch>
-        </p:blipFill>
-        <p:spPr>
-          <a:xfrm>
-            <a:off x="301658" y="902703"/>
-            <a:ext cx="11651530" cy="5774755"/>
-          </a:xfrm>
-          <a:prstGeom prst="rect">
-            <a:avLst/>
-          </a:prstGeom>
-        </p:spPr>
-      </p:pic>
-      <p:sp>
-        <p:nvSpPr>
-          <p:cNvPr id="2" name="Title 1">
-            <a:extLst>
-              <a:ext uri="{FF2B5EF4-FFF2-40B4-BE49-F238E27FC236}">
-                <a16:creationId xmlns:a16="http://schemas.microsoft.com/office/drawing/2014/main" id="{F6ADF4E2-82E1-891C-B98B-A8588815B969}"/>
-              </a:ext>
-            </a:extLst>
-          </p:cNvPr>
-          <p:cNvSpPr>
-            <a:spLocks noGrp="1"/>
-          </p:cNvSpPr>
-          <p:nvPr>
-            <p:ph type="title"/>
-          </p:nvPr>
-        </p:nvSpPr>
-        <p:spPr/>
-        <p:txBody>
-          <a:bodyPr>
-            <a:normAutofit fontScale="90000"/>
-          </a:bodyPr>
-          <a:lstStyle/>
-          <a:p>
-            <a:r>
-              <a:rPr lang="en-US" dirty="0"/>
-              <a:t>Line Status page</a:t>
-            </a:r>
-          </a:p>
-        </p:txBody>
-      </p:sp>
-      <p:sp>
-        <p:nvSpPr>
-          <p:cNvPr id="10" name="TextBox 9">
-            <a:extLst>
-              <a:ext uri="{FF2B5EF4-FFF2-40B4-BE49-F238E27FC236}">
-                <a16:creationId xmlns:a16="http://schemas.microsoft.com/office/drawing/2014/main" id="{E8CDE3DF-F0EF-2C72-E316-48ADB6202F60}"/>
-              </a:ext>
-            </a:extLst>
-          </p:cNvPr>
-          <p:cNvSpPr txBox="1"/>
-          <p:nvPr/>
-        </p:nvSpPr>
-        <p:spPr>
-          <a:xfrm>
-            <a:off x="4438650" y="2759073"/>
-            <a:ext cx="4495654" cy="276999"/>
-          </a:xfrm>
-          <a:prstGeom prst="rect">
-            <a:avLst/>
-          </a:prstGeom>
-          <a:noFill/>
-        </p:spPr>
-        <p:txBody>
-          <a:bodyPr wrap="none" rtlCol="0">
-            <a:spAutoFit/>
-          </a:bodyPr>
-          <a:lstStyle/>
-          <a:p>
-            <a:r>
-              <a:rPr lang="en-US" sz="1200" dirty="0">
-                <a:solidFill>
-                  <a:schemeClr val="accent5">
-                    <a:lumMod val="60000"/>
-                    <a:lumOff val="40000"/>
-                  </a:schemeClr>
-                </a:solidFill>
-              </a:rPr>
-              <a:t>Table and filters are functionally equivalent to the historical table </a:t>
-            </a:r>
-          </a:p>
-        </p:txBody>
-      </p:sp>
-      <p:sp>
-        <p:nvSpPr>
-          <p:cNvPr id="14" name="TextBox 13">
-            <a:extLst>
-              <a:ext uri="{FF2B5EF4-FFF2-40B4-BE49-F238E27FC236}">
-                <a16:creationId xmlns:a16="http://schemas.microsoft.com/office/drawing/2014/main" id="{123C6E55-5D31-4BA6-C183-56B79A5CC270}"/>
-              </a:ext>
-            </a:extLst>
-          </p:cNvPr>
-          <p:cNvSpPr txBox="1"/>
-          <p:nvPr/>
-        </p:nvSpPr>
-        <p:spPr>
-          <a:xfrm>
-            <a:off x="1750850" y="1598203"/>
-            <a:ext cx="1911421" cy="276999"/>
-          </a:xfrm>
-          <a:prstGeom prst="rect">
-            <a:avLst/>
-          </a:prstGeom>
-          <a:noFill/>
-        </p:spPr>
-        <p:txBody>
-          <a:bodyPr wrap="none" rtlCol="0">
-            <a:spAutoFit/>
-          </a:bodyPr>
-          <a:lstStyle/>
-          <a:p>
-            <a:r>
-              <a:rPr lang="en-US" sz="1200" dirty="0">
-                <a:solidFill>
-                  <a:schemeClr val="accent5">
-                    <a:lumMod val="60000"/>
-                    <a:lumOff val="40000"/>
-                  </a:schemeClr>
-                </a:solidFill>
-              </a:rPr>
-              <a:t>Requires complete CMMS</a:t>
-            </a:r>
-          </a:p>
-        </p:txBody>
-      </p:sp>
-      <p:sp>
-        <p:nvSpPr>
-          <p:cNvPr id="15" name="TextBox 14">
-            <a:extLst>
-              <a:ext uri="{FF2B5EF4-FFF2-40B4-BE49-F238E27FC236}">
-                <a16:creationId xmlns:a16="http://schemas.microsoft.com/office/drawing/2014/main" id="{A9BD5AC6-B04C-9301-218E-C7B63270D604}"/>
-              </a:ext>
-            </a:extLst>
-          </p:cNvPr>
-          <p:cNvSpPr txBox="1"/>
-          <p:nvPr/>
-        </p:nvSpPr>
-        <p:spPr>
-          <a:xfrm>
-            <a:off x="4930220" y="1624245"/>
-            <a:ext cx="2736134" cy="276999"/>
-          </a:xfrm>
-          <a:prstGeom prst="rect">
-            <a:avLst/>
-          </a:prstGeom>
-          <a:noFill/>
-        </p:spPr>
-        <p:txBody>
-          <a:bodyPr wrap="none" rtlCol="0">
-            <a:spAutoFit/>
-          </a:bodyPr>
-          <a:lstStyle/>
-          <a:p>
-            <a:r>
-              <a:rPr lang="en-US" sz="1200" dirty="0">
-                <a:solidFill>
-                  <a:schemeClr val="accent5">
-                    <a:lumMod val="60000"/>
-                    <a:lumOff val="40000"/>
-                  </a:schemeClr>
-                </a:solidFill>
-              </a:rPr>
-              <a:t>Select locked vs active from dropdown</a:t>
-            </a:r>
-          </a:p>
-        </p:txBody>
-      </p:sp>
-      <p:sp>
-        <p:nvSpPr>
-          <p:cNvPr id="16" name="TextBox 15">
-            <a:extLst>
-              <a:ext uri="{FF2B5EF4-FFF2-40B4-BE49-F238E27FC236}">
-                <a16:creationId xmlns:a16="http://schemas.microsoft.com/office/drawing/2014/main" id="{B743F743-8FBF-7A03-9170-95BD8F36AB42}"/>
-              </a:ext>
-            </a:extLst>
-          </p:cNvPr>
-          <p:cNvSpPr txBox="1"/>
-          <p:nvPr/>
-        </p:nvSpPr>
-        <p:spPr>
-          <a:xfrm>
-            <a:off x="8843703" y="1628653"/>
-            <a:ext cx="1921295" cy="276999"/>
-          </a:xfrm>
-          <a:prstGeom prst="rect">
-            <a:avLst/>
-          </a:prstGeom>
-          <a:noFill/>
-        </p:spPr>
-        <p:txBody>
-          <a:bodyPr wrap="none" rtlCol="0">
-            <a:spAutoFit/>
-          </a:bodyPr>
-          <a:lstStyle/>
-          <a:p>
-            <a:r>
-              <a:rPr lang="en-US" sz="1200" dirty="0">
-                <a:solidFill>
-                  <a:schemeClr val="accent5">
-                    <a:lumMod val="60000"/>
-                    <a:lumOff val="40000"/>
-                  </a:schemeClr>
-                </a:solidFill>
-              </a:rPr>
-              <a:t>Can take partial line name</a:t>
-            </a:r>
-          </a:p>
-        </p:txBody>
-      </p:sp>
-      <p:sp>
-        <p:nvSpPr>
-          <p:cNvPr id="5" name="TextBox 4">
-            <a:extLst>
-              <a:ext uri="{FF2B5EF4-FFF2-40B4-BE49-F238E27FC236}">
-                <a16:creationId xmlns:a16="http://schemas.microsoft.com/office/drawing/2014/main" id="{E82C2DB5-44E6-1177-B693-792AD893CB62}"/>
-              </a:ext>
-            </a:extLst>
-          </p:cNvPr>
-          <p:cNvSpPr txBox="1"/>
-          <p:nvPr/>
-        </p:nvSpPr>
-        <p:spPr>
-          <a:xfrm>
-            <a:off x="7139069" y="3375760"/>
-            <a:ext cx="2665281" cy="276999"/>
-          </a:xfrm>
-          <a:prstGeom prst="rect">
-            <a:avLst/>
-          </a:prstGeom>
-          <a:noFill/>
-        </p:spPr>
-        <p:txBody>
-          <a:bodyPr wrap="none" rtlCol="0">
-            <a:spAutoFit/>
-          </a:bodyPr>
-          <a:lstStyle/>
-          <a:p>
-            <a:r>
-              <a:rPr lang="en-US" sz="1200" dirty="0">
-                <a:solidFill>
-                  <a:schemeClr val="accent5">
-                    <a:lumMod val="60000"/>
-                    <a:lumOff val="40000"/>
-                  </a:schemeClr>
-                </a:solidFill>
-              </a:rPr>
-              <a:t>Default sort is by locked out vs active </a:t>
-            </a:r>
-          </a:p>
-        </p:txBody>
-      </p:sp>
-    </p:spTree>
-    <p:extLst>
-      <p:ext uri="{BB962C8B-B14F-4D97-AF65-F5344CB8AC3E}">
-        <p14:creationId xmlns:p14="http://schemas.microsoft.com/office/powerpoint/2010/main" val="3505136651"/>
       </p:ext>
     </p:extLst>
   </p:cSld>
